--- a/SAP_S4HANA_InMemory_Presentation_FA.pptx
+++ b/SAP_S4HANA_InMemory_Presentation_FA.pptx
@@ -35,6 +35,15 @@
     <p:sldId id="283" r:id="rId34"/>
     <p:sldId id="284" r:id="rId35"/>
     <p:sldId id="285" r:id="rId36"/>
+    <p:sldId id="286" r:id="rId37"/>
+    <p:sldId id="287" r:id="rId38"/>
+    <p:sldId id="288" r:id="rId39"/>
+    <p:sldId id="289" r:id="rId40"/>
+    <p:sldId id="290" r:id="rId41"/>
+    <p:sldId id="291" r:id="rId42"/>
+    <p:sldId id="292" r:id="rId43"/>
+    <p:sldId id="293" r:id="rId44"/>
+    <p:sldId id="294" r:id="rId45"/>
   </p:sldIdLst>
   <p:sldSz cx="9144000" cy="6858000" type="screen4x3"/>
   <p:notesSz cx="6858000" cy="9144000"/>
@@ -3127,14 +3136,57 @@
       <p:grpSpPr/>
       <p:sp>
         <p:nvSpPr>
-          <p:cNvPr id="2" name="TextBox 1"/>
+          <p:cNvPr id="2" name="Rectangle 1"/>
+          <p:cNvSpPr/>
+          <p:nvPr/>
+        </p:nvSpPr>
+        <p:spPr>
+          <a:xfrm>
+            <a:off x="0" y="0"/>
+            <a:ext cx="9144000" cy="137160"/>
+          </a:xfrm>
+          <a:prstGeom prst="rect">
+            <a:avLst/>
+          </a:prstGeom>
+          <a:solidFill>
+            <a:srgbClr val="006699"/>
+          </a:solidFill>
+          <a:ln>
+            <a:noFill/>
+          </a:ln>
+        </p:spPr>
+        <p:style>
+          <a:lnRef idx="1">
+            <a:schemeClr val="accent1"/>
+          </a:lnRef>
+          <a:fillRef idx="3">
+            <a:schemeClr val="accent1"/>
+          </a:fillRef>
+          <a:effectRef idx="2">
+            <a:schemeClr val="accent1"/>
+          </a:effectRef>
+          <a:fontRef idx="minor">
+            <a:schemeClr val="lt1"/>
+          </a:fontRef>
+        </p:style>
+        <p:txBody>
+          <a:bodyPr rtlCol="0" anchor="ctr"/>
+          <a:lstStyle/>
+          <a:p>
+            <a:pPr algn="ctr"/>
+          </a:p>
+        </p:txBody>
+      </p:sp>
+      <p:sp>
+        <p:nvSpPr>
+          <p:cNvPr id="3" name="TextBox 2"/>
           <p:cNvSpPr txBox="1"/>
           <p:nvPr/>
         </p:nvSpPr>
         <p:spPr>
           <a:xfrm>
-            <a:off x="457200" y="1828800"/>
-            <a:ext cx="8229600" cy="1645920"/>
+            <a:off x="457200" y="1097280"/>
+            <a:ext cx="8229600" cy="1371600"/>
           </a:xfrm>
           <a:prstGeom prst="rect">
             <a:avLst/>
@@ -3142,17 +3194,17 @@
           <a:noFill/>
         </p:spPr>
         <p:txBody>
-          <a:bodyPr wrap="square">
+          <a:bodyPr wrap="none">
             <a:spAutoFit/>
           </a:bodyPr>
           <a:lstStyle/>
           <a:p>
             <a:pPr algn="ctr" a:rtl="1">
-              <a:defRPr sz="3200" b="1">
+              <a:defRPr sz="3400" b="1">
                 <a:solidFill>
                   <a:srgbClr val="003366"/>
                 </a:solidFill>
-                <a:latin typeface="Noto Naskh Arabic"/>
+                <a:latin typeface="Vazir"/>
               </a:defRPr>
             </a:pPr>
             <a:r>
@@ -3163,14 +3215,14 @@
       </p:sp>
       <p:sp>
         <p:nvSpPr>
-          <p:cNvPr id="3" name="TextBox 2"/>
+          <p:cNvPr id="4" name="TextBox 3"/>
           <p:cNvSpPr txBox="1"/>
           <p:nvPr/>
         </p:nvSpPr>
         <p:spPr>
           <a:xfrm>
-            <a:off x="457200" y="3657600"/>
-            <a:ext cx="8229600" cy="2286000"/>
+            <a:off x="457200" y="2286000"/>
+            <a:ext cx="8229600" cy="914400"/>
           </a:xfrm>
           <a:prstGeom prst="rect">
             <a:avLst/>
@@ -3178,32 +3230,135 @@
           <a:noFill/>
         </p:spPr>
         <p:txBody>
+          <a:bodyPr wrap="none">
+            <a:spAutoFit/>
+          </a:bodyPr>
+          <a:lstStyle/>
+          <a:p>
+            <a:pPr algn="ctr" a:rtl="1">
+              <a:defRPr sz="2000" b="0">
+                <a:solidFill>
+                  <a:srgbClr val="006699"/>
+                </a:solidFill>
+                <a:latin typeface="Vazir"/>
+              </a:defRPr>
+            </a:pPr>
+            <a:r>
+              <a:t>بررسی پژوهشی لایه پایگاه‌داده SAP S/4HANA</a:t>
+            </a:r>
+          </a:p>
+        </p:txBody>
+      </p:sp>
+      <p:sp>
+        <p:nvSpPr>
+          <p:cNvPr id="5" name="TextBox 4"/>
+          <p:cNvSpPr txBox="1"/>
+          <p:nvPr/>
+        </p:nvSpPr>
+        <p:spPr>
+          <a:xfrm>
+            <a:off x="1371600" y="3474720"/>
+            <a:ext cx="6400800" cy="2011680"/>
+          </a:xfrm>
+          <a:prstGeom prst="rect">
+            <a:avLst/>
+          </a:prstGeom>
+          <a:noFill/>
+        </p:spPr>
+        <p:txBody>
           <a:bodyPr wrap="square">
             <a:spAutoFit/>
           </a:bodyPr>
           <a:lstStyle/>
           <a:p>
             <a:pPr algn="ctr" a:rtl="1">
-              <a:defRPr sz="1800">
-                <a:solidFill>
-                  <a:srgbClr val="006699"/>
-                </a:solidFill>
-                <a:latin typeface="Noto Naskh Arabic"/>
-              </a:defRPr>
-            </a:pPr>
-            <a:r>
-              <a:t>بررسی پژوهشی لایه پایگاه‌داده SAP S/4HANA</a:t>
-            </a:r>
-            <a:br/>
-            <a:br/>
-            <a:r>
-              <a:t>درس: پایگاه‌داده پیشرفته (کارشناسی ارشد)</a:t>
-            </a:r>
-            <a:br/>
+              <a:spcAft>
+                <a:spcPts val="600"/>
+              </a:spcAft>
+              <a:defRPr sz="1800" b="1">
+                <a:solidFill>
+                  <a:srgbClr val="003366"/>
+                </a:solidFill>
+                <a:latin typeface="Vazir"/>
+              </a:defRPr>
+            </a:pPr>
+            <a:r>
+              <a:t>ارائه‌دهنده: سید علی زین الدینی</a:t>
+            </a:r>
+          </a:p>
+          <a:p>
+            <a:pPr algn="ctr" a:rtl="1">
+              <a:spcAft>
+                <a:spcPts val="600"/>
+              </a:spcAft>
+              <a:defRPr sz="1800" b="1">
+                <a:solidFill>
+                  <a:srgbClr val="003366"/>
+                </a:solidFill>
+                <a:latin typeface="Vazir"/>
+              </a:defRPr>
+            </a:pPr>
+            <a:r>
+              <a:t>استاد درس: دکتر صادق زاده</a:t>
+            </a:r>
+          </a:p>
+          <a:p>
+            <a:pPr algn="ctr" a:rtl="1">
+              <a:spcAft>
+                <a:spcPts val="600"/>
+              </a:spcAft>
+              <a:defRPr sz="1800" b="1">
+                <a:solidFill>
+                  <a:srgbClr val="003366"/>
+                </a:solidFill>
+                <a:latin typeface="Vazir"/>
+              </a:defRPr>
+            </a:pPr>
+            <a:r>
+              <a:t>نام درس: پایگاه داده پیشرفته</a:t>
+            </a:r>
+          </a:p>
+          <a:p>
+            <a:pPr algn="ctr" a:rtl="1">
+              <a:spcAft>
+                <a:spcPts val="600"/>
+              </a:spcAft>
+              <a:defRPr sz="1400" b="0">
+                <a:solidFill>
+                  <a:srgbClr val="282828"/>
+                </a:solidFill>
+                <a:latin typeface="Vazir"/>
+              </a:defRPr>
+            </a:pPr>
+          </a:p>
+          <a:p>
+            <a:pPr algn="ctr" a:rtl="1">
+              <a:spcAft>
+                <a:spcPts val="600"/>
+              </a:spcAft>
+              <a:defRPr sz="1400" b="0">
+                <a:solidFill>
+                  <a:srgbClr val="282828"/>
+                </a:solidFill>
+                <a:latin typeface="Vazir"/>
+              </a:defRPr>
+            </a:pPr>
             <a:r>
               <a:t>منبع: Raikar, T. (2025) — American Journal of Technology</a:t>
             </a:r>
-            <a:br/>
+          </a:p>
+          <a:p>
+            <a:pPr algn="ctr" a:rtl="1">
+              <a:spcAft>
+                <a:spcPts val="600"/>
+              </a:spcAft>
+              <a:defRPr sz="1400" b="0">
+                <a:solidFill>
+                  <a:srgbClr val="282828"/>
+                </a:solidFill>
+                <a:latin typeface="Vazir"/>
+              </a:defRPr>
+            </a:pPr>
             <a:r>
               <a:t>DOI: 10.58425/ajt.v4i2.449</a:t>
             </a:r>
@@ -3219,6 +3374,206 @@
 </file>
 
 <file path=ppt/slides/slide10.xml><?xml version="1.0" encoding="utf-8"?>
+<p:sld xmlns:a="http://schemas.openxmlformats.org/drawingml/2006/main" xmlns:p="http://schemas.openxmlformats.org/presentationml/2006/main" xmlns:r="http://schemas.openxmlformats.org/officeDocument/2006/relationships">
+  <p:cSld>
+    <p:spTree>
+      <p:nvGrpSpPr>
+        <p:cNvPr id="1" name=""/>
+        <p:cNvGrpSpPr/>
+        <p:nvPr/>
+      </p:nvGrpSpPr>
+      <p:grpSpPr/>
+      <p:sp>
+        <p:nvSpPr>
+          <p:cNvPr id="2" name="TextBox 1"/>
+          <p:cNvSpPr txBox="1"/>
+          <p:nvPr/>
+        </p:nvSpPr>
+        <p:spPr>
+          <a:xfrm>
+            <a:off x="365760" y="228600"/>
+            <a:ext cx="8412480" cy="640080"/>
+          </a:xfrm>
+          <a:prstGeom prst="rect">
+            <a:avLst/>
+          </a:prstGeom>
+          <a:noFill/>
+        </p:spPr>
+        <p:txBody>
+          <a:bodyPr wrap="none">
+            <a:spAutoFit/>
+          </a:bodyPr>
+          <a:lstStyle/>
+          <a:p>
+            <a:pPr algn="r" a:rtl="1">
+              <a:defRPr sz="2400" b="1">
+                <a:solidFill>
+                  <a:srgbClr val="003366"/>
+                </a:solidFill>
+                <a:latin typeface="Vazir"/>
+              </a:defRPr>
+            </a:pPr>
+            <a:r>
+              <a:t>شکاف‌های پژوهشی و نوآوری این مقاله</a:t>
+            </a:r>
+          </a:p>
+        </p:txBody>
+      </p:sp>
+      <p:sp>
+        <p:nvSpPr>
+          <p:cNvPr id="3" name="Rectangle 2"/>
+          <p:cNvSpPr/>
+          <p:nvPr/>
+        </p:nvSpPr>
+        <p:spPr>
+          <a:xfrm>
+            <a:off x="365760" y="868680"/>
+            <a:ext cx="8412480" cy="18288"/>
+          </a:xfrm>
+          <a:prstGeom prst="rect">
+            <a:avLst/>
+          </a:prstGeom>
+          <a:solidFill>
+            <a:srgbClr val="006699"/>
+          </a:solidFill>
+          <a:ln>
+            <a:noFill/>
+          </a:ln>
+        </p:spPr>
+        <p:style>
+          <a:lnRef idx="1">
+            <a:schemeClr val="accent1"/>
+          </a:lnRef>
+          <a:fillRef idx="3">
+            <a:schemeClr val="accent1"/>
+          </a:fillRef>
+          <a:effectRef idx="2">
+            <a:schemeClr val="accent1"/>
+          </a:effectRef>
+          <a:fontRef idx="minor">
+            <a:schemeClr val="lt1"/>
+          </a:fontRef>
+        </p:style>
+        <p:txBody>
+          <a:bodyPr rtlCol="0" anchor="ctr"/>
+          <a:lstStyle/>
+          <a:p>
+            <a:pPr algn="ctr"/>
+          </a:p>
+        </p:txBody>
+      </p:sp>
+      <p:sp>
+        <p:nvSpPr>
+          <p:cNvPr id="4" name="TextBox 3"/>
+          <p:cNvSpPr txBox="1"/>
+          <p:nvPr/>
+        </p:nvSpPr>
+        <p:spPr>
+          <a:xfrm>
+            <a:off x="411480" y="960120"/>
+            <a:ext cx="8321040" cy="5669280"/>
+          </a:xfrm>
+          <a:prstGeom prst="rect">
+            <a:avLst/>
+          </a:prstGeom>
+          <a:noFill/>
+        </p:spPr>
+        <p:txBody>
+          <a:bodyPr wrap="square">
+            <a:spAutoFit/>
+          </a:bodyPr>
+          <a:lstStyle/>
+          <a:p>
+            <a:pPr algn="r" a:rtl="1">
+              <a:spcAft>
+                <a:spcPts val="600"/>
+              </a:spcAft>
+              <a:defRPr sz="1400" b="0">
+                <a:solidFill>
+                  <a:srgbClr val="282828"/>
+                </a:solidFill>
+                <a:latin typeface="Vazir"/>
+              </a:defRPr>
+            </a:pPr>
+            <a:r>
+              <a:t>• ادبیات موجود بیشتر ویژگی‌های HANA را توضیح می‌دهد اما معیارهای runtime واقعی در S/4HANA را کمتر گزارش کرده است.</a:t>
+            </a:r>
+          </a:p>
+          <a:p>
+            <a:pPr algn="r" a:rtl="1">
+              <a:spcAft>
+                <a:spcPts val="600"/>
+              </a:spcAft>
+              <a:defRPr sz="1400" b="0">
+                <a:solidFill>
+                  <a:srgbClr val="282828"/>
+                </a:solidFill>
+                <a:latin typeface="Vazir"/>
+              </a:defRPr>
+            </a:pPr>
+            <a:r>
+              <a:t>• تأثیر indexing و partitioning روی workloadهای مختلف (OLTP، OLAP، mixed) به‌طور کمی بررسی نشده.</a:t>
+            </a:r>
+          </a:p>
+          <a:p>
+            <a:pPr algn="r" a:rtl="1">
+              <a:spcAft>
+                <a:spcPts val="600"/>
+              </a:spcAft>
+              <a:defRPr sz="1400" b="0">
+                <a:solidFill>
+                  <a:srgbClr val="282828"/>
+                </a:solidFill>
+                <a:latin typeface="Vazir"/>
+              </a:defRPr>
+            </a:pPr>
+            <a:r>
+              <a:t>• ابزارهای SAP مانند ST05، PlanViz و DBACOCKPIT در پژوهش‌ها کمتر استفاده شده‌اند.</a:t>
+            </a:r>
+          </a:p>
+          <a:p>
+            <a:pPr algn="r" a:rtl="1">
+              <a:spcAft>
+                <a:spcPts val="600"/>
+              </a:spcAft>
+              <a:defRPr sz="1400" b="0">
+                <a:solidFill>
+                  <a:srgbClr val="282828"/>
+                </a:solidFill>
+                <a:latin typeface="Vazir"/>
+              </a:defRPr>
+            </a:pPr>
+            <a:r>
+              <a:t>• چارچوب یکپارچه‌ای برای تعامل query design، compression، indexing و partitioning وجود ندارد.</a:t>
+            </a:r>
+          </a:p>
+          <a:p>
+            <a:pPr algn="r" a:rtl="1">
+              <a:spcAft>
+                <a:spcPts val="600"/>
+              </a:spcAft>
+              <a:defRPr sz="1400" b="0">
+                <a:solidFill>
+                  <a:srgbClr val="282828"/>
+                </a:solidFill>
+                <a:latin typeface="Vazir"/>
+              </a:defRPr>
+            </a:pPr>
+            <a:r>
+              <a:t>• این مقاله با رویکرد عملی (hands-on) و استفاده از ابزارهای trace، این شکاف‌ها را پر می‌کند و یک framework یکپارچه ارائه می‌دهد.</a:t>
+            </a:r>
+          </a:p>
+        </p:txBody>
+      </p:sp>
+    </p:spTree>
+  </p:cSld>
+  <p:clrMapOvr>
+    <a:masterClrMapping/>
+  </p:clrMapOvr>
+</p:sld>
+</file>
+
+<file path=ppt/slides/slide11.xml><?xml version="1.0" encoding="utf-8"?>
 <p:sld xmlns:a="http://schemas.openxmlformats.org/drawingml/2006/main" xmlns:p="http://schemas.openxmlformats.org/presentationml/2006/main" xmlns:r="http://schemas.openxmlformats.org/officeDocument/2006/relationships">
   <p:cSld>
     <p:bg>
@@ -3263,7 +3618,7 @@
                 <a:solidFill>
                   <a:srgbClr val="FFFFFF"/>
                 </a:solidFill>
-                <a:latin typeface="Noto Naskh Arabic"/>
+                <a:latin typeface="Vazir"/>
               </a:defRPr>
             </a:pPr>
             <a:r>
@@ -3280,7 +3635,7 @@
 </p:sld>
 </file>
 
-<file path=ppt/slides/slide11.xml><?xml version="1.0" encoding="utf-8"?>
+<file path=ppt/slides/slide12.xml><?xml version="1.0" encoding="utf-8"?>
 <p:sld xmlns:a="http://schemas.openxmlformats.org/drawingml/2006/main" xmlns:p="http://schemas.openxmlformats.org/presentationml/2006/main" xmlns:r="http://schemas.openxmlformats.org/officeDocument/2006/relationships">
   <p:cSld>
     <p:spTree>
@@ -3298,8 +3653,8 @@
         </p:nvSpPr>
         <p:spPr>
           <a:xfrm>
-            <a:off x="365760" y="274320"/>
-            <a:ext cx="8412480" cy="731520"/>
+            <a:off x="365760" y="228600"/>
+            <a:ext cx="8412480" cy="640080"/>
           </a:xfrm>
           <a:prstGeom prst="rect">
             <a:avLst/>
@@ -3313,11 +3668,11 @@
           <a:lstStyle/>
           <a:p>
             <a:pPr algn="r" a:rtl="1">
-              <a:defRPr sz="2600" b="1">
+              <a:defRPr sz="2400" b="1">
                 <a:solidFill>
                   <a:srgbClr val="003366"/>
                 </a:solidFill>
-                <a:latin typeface="Noto Naskh Arabic"/>
+                <a:latin typeface="Vazir"/>
               </a:defRPr>
             </a:pPr>
             <a:r>
@@ -3334,7 +3689,7 @@
         </p:nvSpPr>
         <p:spPr>
           <a:xfrm>
-            <a:off x="365760" y="960120"/>
+            <a:off x="365760" y="868680"/>
             <a:ext cx="8412480" cy="18288"/>
           </a:xfrm>
           <a:prstGeom prst="rect">
@@ -3377,8 +3732,8 @@
         </p:nvSpPr>
         <p:spPr>
           <a:xfrm>
-            <a:off x="457200" y="1097280"/>
-            <a:ext cx="8229600" cy="5303520"/>
+            <a:off x="411480" y="960120"/>
+            <a:ext cx="8321040" cy="5669280"/>
           </a:xfrm>
           <a:prstGeom prst="rect">
             <a:avLst/>
@@ -3393,81 +3748,97 @@
           <a:p>
             <a:pPr algn="r" a:rtl="1">
               <a:spcAft>
-                <a:spcPts val="800"/>
+                <a:spcPts val="600"/>
               </a:spcAft>
-              <a:defRPr sz="1700">
+              <a:defRPr sz="1400" b="0">
                 <a:solidFill>
                   <a:srgbClr val="282828"/>
                 </a:solidFill>
-                <a:latin typeface="Noto Naskh Arabic"/>
-              </a:defRPr>
-            </a:pPr>
-            <a:r>
-              <a:t>• مبتنی بر مستندات SAP HANA، راهنمای توسعه S/4HANA و ادبیات HTAP</a:t>
+                <a:latin typeface="Vazir"/>
+              </a:defRPr>
+            </a:pPr>
+            <a:r>
+              <a:t>• مبانی نظری: مستندات SAP HANA، راهنمای توسعه S/4HANA و ادبیات HTAP و in-memory databases.</a:t>
             </a:r>
           </a:p>
           <a:p>
             <a:pPr algn="r" a:rtl="1">
               <a:spcAft>
-                <a:spcPts val="800"/>
+                <a:spcPts val="600"/>
               </a:spcAft>
-              <a:defRPr sz="1700">
+              <a:defRPr sz="1400" b="0">
                 <a:solidFill>
                   <a:srgbClr val="282828"/>
                 </a:solidFill>
-                <a:latin typeface="Noto Naskh Arabic"/>
-              </a:defRPr>
-            </a:pPr>
-            <a:r>
-              <a:t>• آزمایش عملی با SQL، CDS Views و SQL Script روی SAP HANA</a:t>
+                <a:latin typeface="Vazir"/>
+              </a:defRPr>
+            </a:pPr>
+            <a:r>
+              <a:t>• آزمایش عملی: اجرای SQL queries، CDS Views و SQL Script procedures روی SAP HANA با datasetهای کنترل‌شده.</a:t>
             </a:r>
           </a:p>
           <a:p>
             <a:pPr algn="r" a:rtl="1">
               <a:spcAft>
-                <a:spcPts val="800"/>
+                <a:spcPts val="600"/>
               </a:spcAft>
-              <a:defRPr sz="1700">
+              <a:defRPr sz="1400" b="0">
                 <a:solidFill>
                   <a:srgbClr val="282828"/>
                 </a:solidFill>
-                <a:latin typeface="Noto Naskh Arabic"/>
-              </a:defRPr>
-            </a:pPr>
-            <a:r>
-              <a:t>• مقایسه منطق ABAP مبتنی بر حلقه (Loop) با اجرای Set-based در پایگاه‌داده</a:t>
+                <a:latin typeface="Vazir"/>
+              </a:defRPr>
+            </a:pPr>
+            <a:r>
+              <a:t>• مقایسه: منطق ABAP مبتنی بر LOOP AT ... ENDLOOP در برابر اجرای Set-based و push-down در DB.</a:t>
             </a:r>
           </a:p>
           <a:p>
             <a:pPr algn="r" a:rtl="1">
               <a:spcAft>
-                <a:spcPts val="800"/>
+                <a:spcPts val="600"/>
               </a:spcAft>
-              <a:defRPr sz="1700">
+              <a:defRPr sz="1400" b="0">
                 <a:solidFill>
                   <a:srgbClr val="282828"/>
                 </a:solidFill>
-                <a:latin typeface="Noto Naskh Arabic"/>
-              </a:defRPr>
-            </a:pPr>
-            <a:r>
-              <a:t>• ابزارهای تحلیل: ST05، ST12، SAT، DBACOCKPIT، PlanViz</a:t>
+                <a:latin typeface="Vazir"/>
+              </a:defRPr>
+            </a:pPr>
+            <a:r>
+              <a:t>• ابزارهای تحلیل: ST05 (SQL trace)، ST12 (ABAP+DB trace)، SAT (runtime analysis)، DBACOCKPIT (DB monitoring)، PlanViz (execution plan visualization).</a:t>
             </a:r>
           </a:p>
           <a:p>
             <a:pPr algn="r" a:rtl="1">
               <a:spcAft>
-                <a:spcPts val="800"/>
+                <a:spcPts val="600"/>
               </a:spcAft>
-              <a:defRPr sz="1700">
+              <a:defRPr sz="1400" b="0">
                 <a:solidFill>
                   <a:srgbClr val="282828"/>
                 </a:solidFill>
-                <a:latin typeface="Noto Naskh Arabic"/>
-              </a:defRPr>
-            </a:pPr>
-            <a:r>
-              <a:t>• بررسی execution plan، CPU usage، scan volume و رفتار parallel processing</a:t>
+                <a:latin typeface="Vazir"/>
+              </a:defRPr>
+            </a:pPr>
+            <a:r>
+              <a:t>• معیارها: execution plan، CPU usage، scan volume، memory usage، push-down efficiency و parallel processing behavior.</a:t>
+            </a:r>
+          </a:p>
+          <a:p>
+            <a:pPr algn="r" a:rtl="1">
+              <a:spcAft>
+                <a:spcPts val="600"/>
+              </a:spcAft>
+              <a:defRPr sz="1400" b="0">
+                <a:solidFill>
+                  <a:srgbClr val="282828"/>
+                </a:solidFill>
+                <a:latin typeface="Vazir"/>
+              </a:defRPr>
+            </a:pPr>
+            <a:r>
+              <a:t>• هدف: درک اینکه چگونه storage structures، compression، indexing و partitioning روی runtime تأثیر می‌گذارند.</a:t>
             </a:r>
           </a:p>
         </p:txBody>
@@ -3480,7 +3851,7 @@
 </p:sld>
 </file>
 
-<file path=ppt/slides/slide12.xml><?xml version="1.0" encoding="utf-8"?>
+<file path=ppt/slides/slide13.xml><?xml version="1.0" encoding="utf-8"?>
 <p:sld xmlns:a="http://schemas.openxmlformats.org/drawingml/2006/main" xmlns:p="http://schemas.openxmlformats.org/presentationml/2006/main" xmlns:r="http://schemas.openxmlformats.org/officeDocument/2006/relationships">
   <p:cSld>
     <p:bg>
@@ -3525,211 +3896,11 @@
                 <a:solidFill>
                   <a:srgbClr val="FFFFFF"/>
                 </a:solidFill>
-                <a:latin typeface="Noto Naskh Arabic"/>
+                <a:latin typeface="Vazir"/>
               </a:defRPr>
             </a:pPr>
             <a:r>
               <a:t>۴. اصول مدیریت داده درون‌حافظه‌ای</a:t>
-            </a:r>
-          </a:p>
-        </p:txBody>
-      </p:sp>
-    </p:spTree>
-  </p:cSld>
-  <p:clrMapOvr>
-    <a:masterClrMapping/>
-  </p:clrMapOvr>
-</p:sld>
-</file>
-
-<file path=ppt/slides/slide13.xml><?xml version="1.0" encoding="utf-8"?>
-<p:sld xmlns:a="http://schemas.openxmlformats.org/drawingml/2006/main" xmlns:p="http://schemas.openxmlformats.org/presentationml/2006/main" xmlns:r="http://schemas.openxmlformats.org/officeDocument/2006/relationships">
-  <p:cSld>
-    <p:spTree>
-      <p:nvGrpSpPr>
-        <p:cNvPr id="1" name=""/>
-        <p:cNvGrpSpPr/>
-        <p:nvPr/>
-      </p:nvGrpSpPr>
-      <p:grpSpPr/>
-      <p:sp>
-        <p:nvSpPr>
-          <p:cNvPr id="2" name="TextBox 1"/>
-          <p:cNvSpPr txBox="1"/>
-          <p:nvPr/>
-        </p:nvSpPr>
-        <p:spPr>
-          <a:xfrm>
-            <a:off x="365760" y="274320"/>
-            <a:ext cx="8412480" cy="731520"/>
-          </a:xfrm>
-          <a:prstGeom prst="rect">
-            <a:avLst/>
-          </a:prstGeom>
-          <a:noFill/>
-        </p:spPr>
-        <p:txBody>
-          <a:bodyPr wrap="none">
-            <a:spAutoFit/>
-          </a:bodyPr>
-          <a:lstStyle/>
-          <a:p>
-            <a:pPr algn="r" a:rtl="1">
-              <a:defRPr sz="2600" b="1">
-                <a:solidFill>
-                  <a:srgbClr val="003366"/>
-                </a:solidFill>
-                <a:latin typeface="Noto Naskh Arabic"/>
-              </a:defRPr>
-            </a:pPr>
-            <a:r>
-              <a:t>ذخیره‌سازی ستونی (Column Store)</a:t>
-            </a:r>
-          </a:p>
-        </p:txBody>
-      </p:sp>
-      <p:sp>
-        <p:nvSpPr>
-          <p:cNvPr id="3" name="Rectangle 2"/>
-          <p:cNvSpPr/>
-          <p:nvPr/>
-        </p:nvSpPr>
-        <p:spPr>
-          <a:xfrm>
-            <a:off x="365760" y="960120"/>
-            <a:ext cx="8412480" cy="18288"/>
-          </a:xfrm>
-          <a:prstGeom prst="rect">
-            <a:avLst/>
-          </a:prstGeom>
-          <a:solidFill>
-            <a:srgbClr val="006699"/>
-          </a:solidFill>
-          <a:ln>
-            <a:noFill/>
-          </a:ln>
-        </p:spPr>
-        <p:style>
-          <a:lnRef idx="1">
-            <a:schemeClr val="accent1"/>
-          </a:lnRef>
-          <a:fillRef idx="3">
-            <a:schemeClr val="accent1"/>
-          </a:fillRef>
-          <a:effectRef idx="2">
-            <a:schemeClr val="accent1"/>
-          </a:effectRef>
-          <a:fontRef idx="minor">
-            <a:schemeClr val="lt1"/>
-          </a:fontRef>
-        </p:style>
-        <p:txBody>
-          <a:bodyPr rtlCol="0" anchor="ctr"/>
-          <a:lstStyle/>
-          <a:p>
-            <a:pPr algn="ctr"/>
-          </a:p>
-        </p:txBody>
-      </p:sp>
-      <p:sp>
-        <p:nvSpPr>
-          <p:cNvPr id="4" name="TextBox 3"/>
-          <p:cNvSpPr txBox="1"/>
-          <p:nvPr/>
-        </p:nvSpPr>
-        <p:spPr>
-          <a:xfrm>
-            <a:off x="457200" y="1097280"/>
-            <a:ext cx="8229600" cy="5303520"/>
-          </a:xfrm>
-          <a:prstGeom prst="rect">
-            <a:avLst/>
-          </a:prstGeom>
-          <a:noFill/>
-        </p:spPr>
-        <p:txBody>
-          <a:bodyPr wrap="square">
-            <a:spAutoFit/>
-          </a:bodyPr>
-          <a:lstStyle/>
-          <a:p>
-            <a:pPr algn="r" a:rtl="1">
-              <a:spcAft>
-                <a:spcPts val="800"/>
-              </a:spcAft>
-              <a:defRPr sz="1700">
-                <a:solidFill>
-                  <a:srgbClr val="282828"/>
-                </a:solidFill>
-                <a:latin typeface="Noto Naskh Arabic"/>
-              </a:defRPr>
-            </a:pPr>
-            <a:r>
-              <a:t>• برخلاف Row Store، داده‌ها ستون‌به‌ستون ذخیره می‌شوند</a:t>
-            </a:r>
-          </a:p>
-          <a:p>
-            <a:pPr algn="r" a:rtl="1">
-              <a:spcAft>
-                <a:spcPts val="800"/>
-              </a:spcAft>
-              <a:defRPr sz="1700">
-                <a:solidFill>
-                  <a:srgbClr val="282828"/>
-                </a:solidFill>
-                <a:latin typeface="Noto Naskh Arabic"/>
-              </a:defRPr>
-            </a:pPr>
-            <a:r>
-              <a:t>• فقط ستون‌های مورد نیاز کوئری خوانده می‌شوند → کاهش شدید I/O</a:t>
-            </a:r>
-          </a:p>
-          <a:p>
-            <a:pPr algn="r" a:rtl="1">
-              <a:spcAft>
-                <a:spcPts val="800"/>
-              </a:spcAft>
-              <a:defRPr sz="1700">
-                <a:solidFill>
-                  <a:srgbClr val="282828"/>
-                </a:solidFill>
-                <a:latin typeface="Noto Naskh Arabic"/>
-              </a:defRPr>
-            </a:pPr>
-            <a:r>
-              <a:t>• Dictionary Encoding: مقادیر یکتا در جدول lookup نگهداری می‌شوند</a:t>
-            </a:r>
-          </a:p>
-          <a:p>
-            <a:pPr algn="r" a:rtl="1">
-              <a:spcAft>
-                <a:spcPts val="800"/>
-              </a:spcAft>
-              <a:defRPr sz="1700">
-                <a:solidFill>
-                  <a:srgbClr val="282828"/>
-                </a:solidFill>
-                <a:latin typeface="Noto Naskh Arabic"/>
-              </a:defRPr>
-            </a:pPr>
-            <a:r>
-              <a:t>• Vector Encoding: به‌جای مقدار خام، ValueID از dictionary ذخیره می‌شود</a:t>
-            </a:r>
-          </a:p>
-          <a:p>
-            <a:pPr algn="r" a:rtl="1">
-              <a:spcAft>
-                <a:spcPts val="800"/>
-              </a:spcAft>
-              <a:defRPr sz="1700">
-                <a:solidFill>
-                  <a:srgbClr val="282828"/>
-                </a:solidFill>
-                <a:latin typeface="Noto Naskh Arabic"/>
-              </a:defRPr>
-            </a:pPr>
-            <a:r>
-              <a:t>• نتیجه: مصرف RAM کمتر و دسترسی سریع‌تر به داده</a:t>
             </a:r>
           </a:p>
         </p:txBody>
@@ -3760,7 +3931,7 @@
         </p:nvSpPr>
         <p:spPr>
           <a:xfrm>
-            <a:off x="365760" y="274320"/>
+            <a:off x="365760" y="228600"/>
             <a:ext cx="8412480" cy="640080"/>
           </a:xfrm>
           <a:prstGeom prst="rect">
@@ -3775,30 +3946,627 @@
           <a:lstStyle/>
           <a:p>
             <a:pPr algn="r" a:rtl="1">
-              <a:defRPr sz="2200" b="1">
+              <a:defRPr sz="2400" b="1">
                 <a:solidFill>
                   <a:srgbClr val="003366"/>
                 </a:solidFill>
-                <a:latin typeface="Noto Naskh Arabic"/>
+                <a:latin typeface="Vazir"/>
+              </a:defRPr>
+            </a:pPr>
+            <a:r>
+              <a:t>ذخیره‌سازی ستونی (Column Store)</a:t>
+            </a:r>
+          </a:p>
+        </p:txBody>
+      </p:sp>
+      <p:sp>
+        <p:nvSpPr>
+          <p:cNvPr id="3" name="Rectangle 2"/>
+          <p:cNvSpPr/>
+          <p:nvPr/>
+        </p:nvSpPr>
+        <p:spPr>
+          <a:xfrm>
+            <a:off x="365760" y="868680"/>
+            <a:ext cx="8412480" cy="18288"/>
+          </a:xfrm>
+          <a:prstGeom prst="rect">
+            <a:avLst/>
+          </a:prstGeom>
+          <a:solidFill>
+            <a:srgbClr val="006699"/>
+          </a:solidFill>
+          <a:ln>
+            <a:noFill/>
+          </a:ln>
+        </p:spPr>
+        <p:style>
+          <a:lnRef idx="1">
+            <a:schemeClr val="accent1"/>
+          </a:lnRef>
+          <a:fillRef idx="3">
+            <a:schemeClr val="accent1"/>
+          </a:fillRef>
+          <a:effectRef idx="2">
+            <a:schemeClr val="accent1"/>
+          </a:effectRef>
+          <a:fontRef idx="minor">
+            <a:schemeClr val="lt1"/>
+          </a:fontRef>
+        </p:style>
+        <p:txBody>
+          <a:bodyPr rtlCol="0" anchor="ctr"/>
+          <a:lstStyle/>
+          <a:p>
+            <a:pPr algn="ctr"/>
+          </a:p>
+        </p:txBody>
+      </p:sp>
+      <p:sp>
+        <p:nvSpPr>
+          <p:cNvPr id="4" name="TextBox 3"/>
+          <p:cNvSpPr txBox="1"/>
+          <p:nvPr/>
+        </p:nvSpPr>
+        <p:spPr>
+          <a:xfrm>
+            <a:off x="411480" y="960120"/>
+            <a:ext cx="4023360" cy="5486400"/>
+          </a:xfrm>
+          <a:prstGeom prst="rect">
+            <a:avLst/>
+          </a:prstGeom>
+          <a:noFill/>
+        </p:spPr>
+        <p:txBody>
+          <a:bodyPr wrap="square">
+            <a:spAutoFit/>
+          </a:bodyPr>
+          <a:lstStyle/>
+          <a:p>
+            <a:pPr algn="r" a:rtl="1">
+              <a:spcAft>
+                <a:spcPts val="500"/>
+              </a:spcAft>
+              <a:defRPr sz="1200" b="0">
+                <a:solidFill>
+                  <a:srgbClr val="282828"/>
+                </a:solidFill>
+                <a:latin typeface="Vazir"/>
+              </a:defRPr>
+            </a:pPr>
+            <a:r>
+              <a:t>• در Row Store داده‌ها سطر به سطر ذخیره می‌شوند؛ در Column Store هر ستون جداگانه در حافظه قرار می‌گیرد.</a:t>
+            </a:r>
+          </a:p>
+          <a:p>
+            <a:pPr algn="r" a:rtl="1">
+              <a:spcAft>
+                <a:spcPts val="500"/>
+              </a:spcAft>
+              <a:defRPr sz="1200" b="0">
+                <a:solidFill>
+                  <a:srgbClr val="282828"/>
+                </a:solidFill>
+                <a:latin typeface="Vazir"/>
+              </a:defRPr>
+            </a:pPr>
+            <a:r>
+              <a:t>• مزیت اصلی: کوئری فقط ستون‌های مورد نیاز را می‌خواند — کاهش چشمگیر I/O و CPU.</a:t>
+            </a:r>
+          </a:p>
+          <a:p>
+            <a:pPr algn="r" a:rtl="1">
+              <a:spcAft>
+                <a:spcPts val="500"/>
+              </a:spcAft>
+              <a:defRPr sz="1200" b="0">
+                <a:solidFill>
+                  <a:srgbClr val="282828"/>
+                </a:solidFill>
+                <a:latin typeface="Vazir"/>
+              </a:defRPr>
+            </a:pPr>
+            <a:r>
+              <a:t>• Dictionary Encoding: مقادیر یکتا (distinct) در جدول lookup نگهداری می‌شوند؛ مقادیر تکراری ذخیره نمی‌شوند.</a:t>
+            </a:r>
+          </a:p>
+          <a:p>
+            <a:pPr algn="r" a:rtl="1">
+              <a:spcAft>
+                <a:spcPts val="500"/>
+              </a:spcAft>
+              <a:defRPr sz="1200" b="0">
+                <a:solidFill>
+                  <a:srgbClr val="282828"/>
+                </a:solidFill>
+                <a:latin typeface="Vazir"/>
+              </a:defRPr>
+            </a:pPr>
+            <a:r>
+              <a:t>• Vector Encoding: به‌جای مقدار خام، ValueID (اشاره‌گر به dictionary) ذخیره می‌شود.</a:t>
+            </a:r>
+          </a:p>
+          <a:p>
+            <a:pPr algn="r" a:rtl="1">
+              <a:spcAft>
+                <a:spcPts val="500"/>
+              </a:spcAft>
+              <a:defRPr sz="1200" b="0">
+                <a:solidFill>
+                  <a:srgbClr val="282828"/>
+                </a:solidFill>
+                <a:latin typeface="Vazir"/>
+              </a:defRPr>
+            </a:pPr>
+            <a:r>
+              <a:t>• این دو تکنیک هم فشرده‌سازی و هم سرعت lookup را بهبود می‌دهند.</a:t>
+            </a:r>
+          </a:p>
+          <a:p>
+            <a:pPr algn="r" a:rtl="1">
+              <a:spcAft>
+                <a:spcPts val="500"/>
+              </a:spcAft>
+              <a:defRPr sz="1200" b="0">
+                <a:solidFill>
+                  <a:srgbClr val="282828"/>
+                </a:solidFill>
+                <a:latin typeface="Vazir"/>
+              </a:defRPr>
+            </a:pPr>
+            <a:r>
+              <a:t>• برای کوئری‌های SELECT SUM، GROUP BY و فیلتر روی ستون‌های محدود، Column Store به‌شدت برتر است.</a:t>
+            </a:r>
+          </a:p>
+        </p:txBody>
+      </p:sp>
+      <p:pic>
+        <p:nvPicPr>
+          <p:cNvPr id="5" name="Picture 4" descr="dictionary_vector.png"/>
+          <p:cNvPicPr>
+            <a:picLocks noChangeAspect="1"/>
+          </p:cNvPicPr>
+          <p:nvPr/>
+        </p:nvPicPr>
+        <p:blipFill>
+          <a:blip r:embed="rId2"/>
+          <a:stretch>
+            <a:fillRect/>
+          </a:stretch>
+        </p:blipFill>
+        <p:spPr>
+          <a:xfrm>
+            <a:off x="4572000" y="1097280"/>
+            <a:ext cx="4297680" cy="2127135"/>
+          </a:xfrm>
+          <a:prstGeom prst="rect">
+            <a:avLst/>
+          </a:prstGeom>
+        </p:spPr>
+      </p:pic>
+    </p:spTree>
+  </p:cSld>
+  <p:clrMapOvr>
+    <a:masterClrMapping/>
+  </p:clrMapOvr>
+</p:sld>
+</file>
+
+<file path=ppt/slides/slide15.xml><?xml version="1.0" encoding="utf-8"?>
+<p:sld xmlns:a="http://schemas.openxmlformats.org/drawingml/2006/main" xmlns:p="http://schemas.openxmlformats.org/presentationml/2006/main" xmlns:r="http://schemas.openxmlformats.org/officeDocument/2006/relationships">
+  <p:cSld>
+    <p:spTree>
+      <p:nvGrpSpPr>
+        <p:cNvPr id="1" name=""/>
+        <p:cNvGrpSpPr/>
+        <p:nvPr/>
+      </p:nvGrpSpPr>
+      <p:grpSpPr/>
+      <p:sp>
+        <p:nvSpPr>
+          <p:cNvPr id="2" name="TextBox 1"/>
+          <p:cNvSpPr txBox="1"/>
+          <p:nvPr/>
+        </p:nvSpPr>
+        <p:spPr>
+          <a:xfrm>
+            <a:off x="365760" y="228600"/>
+            <a:ext cx="8412480" cy="640080"/>
+          </a:xfrm>
+          <a:prstGeom prst="rect">
+            <a:avLst/>
+          </a:prstGeom>
+          <a:noFill/>
+        </p:spPr>
+        <p:txBody>
+          <a:bodyPr wrap="none">
+            <a:spAutoFit/>
+          </a:bodyPr>
+          <a:lstStyle/>
+          <a:p>
+            <a:pPr algn="r" a:rtl="1">
+              <a:defRPr sz="2400" b="1">
+                <a:solidFill>
+                  <a:srgbClr val="003366"/>
+                </a:solidFill>
+                <a:latin typeface="Vazir"/>
+              </a:defRPr>
+            </a:pPr>
+            <a:r>
+              <a:t>فشرده‌سازی Dictionary و Vector</a:t>
+            </a:r>
+          </a:p>
+        </p:txBody>
+      </p:sp>
+      <p:sp>
+        <p:nvSpPr>
+          <p:cNvPr id="3" name="Rectangle 2"/>
+          <p:cNvSpPr/>
+          <p:nvPr/>
+        </p:nvSpPr>
+        <p:spPr>
+          <a:xfrm>
+            <a:off x="365760" y="868680"/>
+            <a:ext cx="8412480" cy="18288"/>
+          </a:xfrm>
+          <a:prstGeom prst="rect">
+            <a:avLst/>
+          </a:prstGeom>
+          <a:solidFill>
+            <a:srgbClr val="006699"/>
+          </a:solidFill>
+          <a:ln>
+            <a:noFill/>
+          </a:ln>
+        </p:spPr>
+        <p:style>
+          <a:lnRef idx="1">
+            <a:schemeClr val="accent1"/>
+          </a:lnRef>
+          <a:fillRef idx="3">
+            <a:schemeClr val="accent1"/>
+          </a:fillRef>
+          <a:effectRef idx="2">
+            <a:schemeClr val="accent1"/>
+          </a:effectRef>
+          <a:fontRef idx="minor">
+            <a:schemeClr val="lt1"/>
+          </a:fontRef>
+        </p:style>
+        <p:txBody>
+          <a:bodyPr rtlCol="0" anchor="ctr"/>
+          <a:lstStyle/>
+          <a:p>
+            <a:pPr algn="ctr"/>
+          </a:p>
+        </p:txBody>
+      </p:sp>
+      <p:pic>
+        <p:nvPicPr>
+          <p:cNvPr id="4" name="Picture 3" descr="dictionary_vector.png"/>
+          <p:cNvPicPr>
+            <a:picLocks noChangeAspect="1"/>
+          </p:cNvPicPr>
+          <p:nvPr/>
+        </p:nvPicPr>
+        <p:blipFill>
+          <a:blip r:embed="rId2"/>
+          <a:stretch>
+            <a:fillRect/>
+          </a:stretch>
+        </p:blipFill>
+        <p:spPr>
+          <a:xfrm>
+            <a:off x="548640" y="1051560"/>
+            <a:ext cx="8046720" cy="3982720"/>
+          </a:xfrm>
+          <a:prstGeom prst="rect">
+            <a:avLst/>
+          </a:prstGeom>
+        </p:spPr>
+      </p:pic>
+      <p:sp>
+        <p:nvSpPr>
+          <p:cNvPr id="5" name="TextBox 4"/>
+          <p:cNvSpPr txBox="1"/>
+          <p:nvPr/>
+        </p:nvSpPr>
+        <p:spPr>
+          <a:xfrm>
+            <a:off x="457200" y="6263640"/>
+            <a:ext cx="8229600" cy="457200"/>
+          </a:xfrm>
+          <a:prstGeom prst="rect">
+            <a:avLst/>
+          </a:prstGeom>
+          <a:noFill/>
+        </p:spPr>
+        <p:txBody>
+          <a:bodyPr wrap="none">
+            <a:spAutoFit/>
+          </a:bodyPr>
+          <a:lstStyle/>
+          <a:p>
+            <a:pPr algn="ctr" a:rtl="1">
+              <a:defRPr sz="1200" b="0">
+                <a:solidFill>
+                  <a:srgbClr val="5A5A5A"/>
+                </a:solidFill>
+                <a:latin typeface="Vazir"/>
+              </a:defRPr>
+            </a:pPr>
+            <a:r>
+              <a:t>شکل ۲: نحوه فشرده‌سازی ستون Amount با Dictionary و Vector</a:t>
+            </a:r>
+          </a:p>
+        </p:txBody>
+      </p:sp>
+    </p:spTree>
+  </p:cSld>
+  <p:clrMapOvr>
+    <a:masterClrMapping/>
+  </p:clrMapOvr>
+</p:sld>
+</file>
+
+<file path=ppt/slides/slide16.xml><?xml version="1.0" encoding="utf-8"?>
+<p:sld xmlns:a="http://schemas.openxmlformats.org/drawingml/2006/main" xmlns:p="http://schemas.openxmlformats.org/presentationml/2006/main" xmlns:r="http://schemas.openxmlformats.org/officeDocument/2006/relationships">
+  <p:cSld>
+    <p:spTree>
+      <p:nvGrpSpPr>
+        <p:cNvPr id="1" name=""/>
+        <p:cNvGrpSpPr/>
+        <p:nvPr/>
+      </p:nvGrpSpPr>
+      <p:grpSpPr/>
+      <p:sp>
+        <p:nvSpPr>
+          <p:cNvPr id="2" name="TextBox 1"/>
+          <p:cNvSpPr txBox="1"/>
+          <p:nvPr/>
+        </p:nvSpPr>
+        <p:spPr>
+          <a:xfrm>
+            <a:off x="365760" y="228600"/>
+            <a:ext cx="8412480" cy="640080"/>
+          </a:xfrm>
+          <a:prstGeom prst="rect">
+            <a:avLst/>
+          </a:prstGeom>
+          <a:noFill/>
+        </p:spPr>
+        <p:txBody>
+          <a:bodyPr wrap="none">
+            <a:spAutoFit/>
+          </a:bodyPr>
+          <a:lstStyle/>
+          <a:p>
+            <a:pPr algn="r" a:rtl="1">
+              <a:defRPr sz="2400" b="1">
+                <a:solidFill>
+                  <a:srgbClr val="003366"/>
+                </a:solidFill>
+                <a:latin typeface="Vazir"/>
               </a:defRPr>
             </a:pPr>
             <a:r>
               <a:t>مزایای ذخیره‌سازی ستونی</a:t>
             </a:r>
+          </a:p>
+        </p:txBody>
+      </p:sp>
+      <p:sp>
+        <p:nvSpPr>
+          <p:cNvPr id="3" name="Rectangle 2"/>
+          <p:cNvSpPr/>
+          <p:nvPr/>
+        </p:nvSpPr>
+        <p:spPr>
+          <a:xfrm>
+            <a:off x="365760" y="868680"/>
+            <a:ext cx="8412480" cy="18288"/>
+          </a:xfrm>
+          <a:prstGeom prst="rect">
+            <a:avLst/>
+          </a:prstGeom>
+          <a:solidFill>
+            <a:srgbClr val="006699"/>
+          </a:solidFill>
+          <a:ln>
+            <a:noFill/>
+          </a:ln>
+        </p:spPr>
+        <p:style>
+          <a:lnRef idx="1">
+            <a:schemeClr val="accent1"/>
+          </a:lnRef>
+          <a:fillRef idx="3">
+            <a:schemeClr val="accent1"/>
+          </a:fillRef>
+          <a:effectRef idx="2">
+            <a:schemeClr val="accent1"/>
+          </a:effectRef>
+          <a:fontRef idx="minor">
+            <a:schemeClr val="lt1"/>
+          </a:fontRef>
+        </p:style>
+        <p:txBody>
+          <a:bodyPr rtlCol="0" anchor="ctr"/>
+          <a:lstStyle/>
+          <a:p>
+            <a:pPr algn="ctr"/>
+          </a:p>
+        </p:txBody>
+      </p:sp>
+      <p:pic>
+        <p:nvPicPr>
+          <p:cNvPr id="4" name="Picture 3" descr="column_benefits.png"/>
+          <p:cNvPicPr>
+            <a:picLocks noChangeAspect="1"/>
+          </p:cNvPicPr>
+          <p:nvPr/>
+        </p:nvPicPr>
+        <p:blipFill>
+          <a:blip r:embed="rId2"/>
+          <a:stretch>
+            <a:fillRect/>
+          </a:stretch>
+        </p:blipFill>
+        <p:spPr>
+          <a:xfrm>
+            <a:off x="548640" y="1051560"/>
+            <a:ext cx="8046720" cy="4889605"/>
+          </a:xfrm>
+          <a:prstGeom prst="rect">
+            <a:avLst/>
+          </a:prstGeom>
+        </p:spPr>
+      </p:pic>
+      <p:sp>
+        <p:nvSpPr>
+          <p:cNvPr id="5" name="TextBox 4"/>
+          <p:cNvSpPr txBox="1"/>
+          <p:nvPr/>
+        </p:nvSpPr>
+        <p:spPr>
+          <a:xfrm>
+            <a:off x="457200" y="6263640"/>
+            <a:ext cx="8229600" cy="457200"/>
+          </a:xfrm>
+          <a:prstGeom prst="rect">
+            <a:avLst/>
+          </a:prstGeom>
+          <a:noFill/>
+        </p:spPr>
+        <p:txBody>
+          <a:bodyPr wrap="none">
+            <a:spAutoFit/>
+          </a:bodyPr>
+          <a:lstStyle/>
+          <a:p>
+            <a:pPr algn="ctr" a:rtl="1">
+              <a:defRPr sz="1200" b="0">
+                <a:solidFill>
+                  <a:srgbClr val="5A5A5A"/>
+                </a:solidFill>
+                <a:latin typeface="Vazir"/>
+              </a:defRPr>
+            </a:pPr>
+            <a:r>
+              <a:t>شکل ۳: مقایسه بهبود سرعت تکنیک‌های Column Store</a:t>
+            </a:r>
+          </a:p>
+        </p:txBody>
+      </p:sp>
+    </p:spTree>
+  </p:cSld>
+  <p:clrMapOvr>
+    <a:masterClrMapping/>
+  </p:clrMapOvr>
+</p:sld>
+</file>
+
+<file path=ppt/slides/slide17.xml><?xml version="1.0" encoding="utf-8"?>
+<p:sld xmlns:a="http://schemas.openxmlformats.org/drawingml/2006/main" xmlns:p="http://schemas.openxmlformats.org/presentationml/2006/main" xmlns:r="http://schemas.openxmlformats.org/officeDocument/2006/relationships">
+  <p:cSld>
+    <p:spTree>
+      <p:nvGrpSpPr>
+        <p:cNvPr id="1" name=""/>
+        <p:cNvGrpSpPr/>
+        <p:nvPr/>
+      </p:nvGrpSpPr>
+      <p:grpSpPr/>
+      <p:sp>
+        <p:nvSpPr>
+          <p:cNvPr id="2" name="TextBox 1"/>
+          <p:cNvSpPr txBox="1"/>
+          <p:nvPr/>
+        </p:nvSpPr>
+        <p:spPr>
+          <a:xfrm>
+            <a:off x="365760" y="228600"/>
+            <a:ext cx="8412480" cy="640080"/>
+          </a:xfrm>
+          <a:prstGeom prst="rect">
+            <a:avLst/>
+          </a:prstGeom>
+          <a:noFill/>
+        </p:spPr>
+        <p:txBody>
+          <a:bodyPr wrap="none">
+            <a:spAutoFit/>
+          </a:bodyPr>
+          <a:lstStyle/>
+          <a:p>
+            <a:pPr algn="r" a:rtl="1">
+              <a:defRPr sz="2400" b="1">
+                <a:solidFill>
+                  <a:srgbClr val="003366"/>
+                </a:solidFill>
+                <a:latin typeface="Vazir"/>
+              </a:defRPr>
+            </a:pPr>
+            <a:r>
+              <a:t>جدول مزایای Column Store (از مقاله)</a:t>
+            </a:r>
+          </a:p>
+        </p:txBody>
+      </p:sp>
+      <p:sp>
+        <p:nvSpPr>
+          <p:cNvPr id="3" name="Rectangle 2"/>
+          <p:cNvSpPr/>
+          <p:nvPr/>
+        </p:nvSpPr>
+        <p:spPr>
+          <a:xfrm>
+            <a:off x="365760" y="868680"/>
+            <a:ext cx="8412480" cy="18288"/>
+          </a:xfrm>
+          <a:prstGeom prst="rect">
+            <a:avLst/>
+          </a:prstGeom>
+          <a:solidFill>
+            <a:srgbClr val="006699"/>
+          </a:solidFill>
+          <a:ln>
+            <a:noFill/>
+          </a:ln>
+        </p:spPr>
+        <p:style>
+          <a:lnRef idx="1">
+            <a:schemeClr val="accent1"/>
+          </a:lnRef>
+          <a:fillRef idx="3">
+            <a:schemeClr val="accent1"/>
+          </a:fillRef>
+          <a:effectRef idx="2">
+            <a:schemeClr val="accent1"/>
+          </a:effectRef>
+          <a:fontRef idx="minor">
+            <a:schemeClr val="lt1"/>
+          </a:fontRef>
+        </p:style>
+        <p:txBody>
+          <a:bodyPr rtlCol="0" anchor="ctr"/>
+          <a:lstStyle/>
+          <a:p>
+            <a:pPr algn="ctr"/>
           </a:p>
         </p:txBody>
       </p:sp>
       <p:graphicFrame>
         <p:nvGraphicFramePr>
-          <p:cNvPr id="3" name="Table 2"/>
+          <p:cNvPr id="4" name="Table 3"/>
           <p:cNvGraphicFramePr>
             <a:graphicFrameLocks noGrp="1"/>
           </p:cNvGraphicFramePr>
           <p:nvPr/>
         </p:nvGraphicFramePr>
         <p:xfrm>
-          <a:off x="274320" y="1005840"/>
-          <a:ext cx="8595360" cy="5303520"/>
+          <a:off x="274320" y="960120"/>
+          <a:ext cx="8595360" cy="5394960"/>
         </p:xfrm>
         <a:graphic>
           <a:graphicData uri="http://schemas.openxmlformats.org/drawingml/2006/table">
@@ -3810,18 +4578,18 @@
                 <a:gridCol w="4297680"/>
                 <a:gridCol w="4297680"/>
               </a:tblGrid>
-              <a:tr h="757645">
+              <a:tr h="770708">
                 <a:tc>
                   <a:txBody>
                     <a:bodyPr/>
                     <a:lstStyle/>
                     <a:p>
                       <a:pPr algn="ctr" a:rtl="1">
-                        <a:defRPr sz="1200" b="1">
+                        <a:defRPr sz="1100" b="1">
                           <a:solidFill>
                             <a:srgbClr val="FFFFFF"/>
                           </a:solidFill>
-                          <a:latin typeface="Noto Naskh Arabic"/>
+                          <a:latin typeface="Vazir"/>
                         </a:defRPr>
                       </a:pPr>
                       <a:r>
@@ -3841,11 +4609,11 @@
                     <a:lstStyle/>
                     <a:p>
                       <a:pPr algn="ctr" a:rtl="1">
-                        <a:defRPr sz="1200" b="1">
+                        <a:defRPr sz="1100" b="1">
                           <a:solidFill>
                             <a:srgbClr val="FFFFFF"/>
                           </a:solidFill>
-                          <a:latin typeface="Noto Naskh Arabic"/>
+                          <a:latin typeface="Vazir"/>
                         </a:defRPr>
                       </a:pPr>
                       <a:r>
@@ -3860,18 +4628,18 @@
                   </a:tcPr>
                 </a:tc>
               </a:tr>
-              <a:tr h="757645">
+              <a:tr h="770708">
                 <a:tc>
                   <a:txBody>
                     <a:bodyPr/>
                     <a:lstStyle/>
                     <a:p>
                       <a:pPr algn="ctr" a:rtl="1">
-                        <a:defRPr sz="1100">
+                        <a:defRPr sz="1000" b="0">
                           <a:solidFill>
                             <a:srgbClr val="282828"/>
                           </a:solidFill>
-                          <a:latin typeface="Noto Naskh Arabic"/>
+                          <a:latin typeface="Vazir"/>
                         </a:defRPr>
                       </a:pPr>
                       <a:r>
@@ -3887,11 +4655,11 @@
                     <a:lstStyle/>
                     <a:p>
                       <a:pPr algn="ctr" a:rtl="1">
-                        <a:defRPr sz="1100">
+                        <a:defRPr sz="1000" b="0">
                           <a:solidFill>
                             <a:srgbClr val="282828"/>
                           </a:solidFill>
-                          <a:latin typeface="Noto Naskh Arabic"/>
+                          <a:latin typeface="Vazir"/>
                         </a:defRPr>
                       </a:pPr>
                       <a:r>
@@ -3902,18 +4670,18 @@
                   <a:tcPr/>
                 </a:tc>
               </a:tr>
-              <a:tr h="757645">
+              <a:tr h="770708">
                 <a:tc>
                   <a:txBody>
                     <a:bodyPr/>
                     <a:lstStyle/>
                     <a:p>
                       <a:pPr algn="ctr" a:rtl="1">
-                        <a:defRPr sz="1100">
+                        <a:defRPr sz="1000" b="0">
                           <a:solidFill>
                             <a:srgbClr val="282828"/>
                           </a:solidFill>
-                          <a:latin typeface="Noto Naskh Arabic"/>
+                          <a:latin typeface="Vazir"/>
                         </a:defRPr>
                       </a:pPr>
                       <a:r>
@@ -3933,15 +4701,15 @@
                     <a:lstStyle/>
                     <a:p>
                       <a:pPr algn="ctr" a:rtl="1">
-                        <a:defRPr sz="1100">
+                        <a:defRPr sz="1000" b="0">
                           <a:solidFill>
                             <a:srgbClr val="282828"/>
                           </a:solidFill>
-                          <a:latin typeface="Noto Naskh Arabic"/>
+                          <a:latin typeface="Vazir"/>
                         </a:defRPr>
                       </a:pPr>
                       <a:r>
-                        <a:t>۳ برابر سریع‌تر</a:t>
+                        <a:t>۳× سریع‌تر</a:t>
                       </a:r>
                     </a:p>
                   </a:txBody>
@@ -3952,18 +4720,18 @@
                   </a:tcPr>
                 </a:tc>
               </a:tr>
-              <a:tr h="757645">
+              <a:tr h="770708">
                 <a:tc>
                   <a:txBody>
                     <a:bodyPr/>
                     <a:lstStyle/>
                     <a:p>
                       <a:pPr algn="ctr" a:rtl="1">
-                        <a:defRPr sz="1100">
+                        <a:defRPr sz="1000" b="0">
                           <a:solidFill>
                             <a:srgbClr val="282828"/>
                           </a:solidFill>
-                          <a:latin typeface="Noto Naskh Arabic"/>
+                          <a:latin typeface="Vazir"/>
                         </a:defRPr>
                       </a:pPr>
                       <a:r>
@@ -3979,33 +4747,33 @@
                     <a:lstStyle/>
                     <a:p>
                       <a:pPr algn="ctr" a:rtl="1">
-                        <a:defRPr sz="1100">
+                        <a:defRPr sz="1000" b="0">
                           <a:solidFill>
                             <a:srgbClr val="282828"/>
                           </a:solidFill>
-                          <a:latin typeface="Noto Naskh Arabic"/>
+                          <a:latin typeface="Vazir"/>
                         </a:defRPr>
                       </a:pPr>
                       <a:r>
-                        <a:t>۳–۶ برابر سریع‌تر</a:t>
+                        <a:t>۳–۶× سریع‌تر</a:t>
                       </a:r>
                     </a:p>
                   </a:txBody>
                   <a:tcPr/>
                 </a:tc>
               </a:tr>
-              <a:tr h="757645">
+              <a:tr h="770708">
                 <a:tc>
                   <a:txBody>
                     <a:bodyPr/>
                     <a:lstStyle/>
                     <a:p>
                       <a:pPr algn="ctr" a:rtl="1">
-                        <a:defRPr sz="1100">
+                        <a:defRPr sz="1000" b="0">
                           <a:solidFill>
                             <a:srgbClr val="282828"/>
                           </a:solidFill>
-                          <a:latin typeface="Noto Naskh Arabic"/>
+                          <a:latin typeface="Vazir"/>
                         </a:defRPr>
                       </a:pPr>
                       <a:r>
@@ -4025,15 +4793,15 @@
                     <a:lstStyle/>
                     <a:p>
                       <a:pPr algn="ctr" a:rtl="1">
-                        <a:defRPr sz="1100">
+                        <a:defRPr sz="1000" b="0">
                           <a:solidFill>
                             <a:srgbClr val="282828"/>
                           </a:solidFill>
-                          <a:latin typeface="Noto Naskh Arabic"/>
+                          <a:latin typeface="Vazir"/>
                         </a:defRPr>
                       </a:pPr>
                       <a:r>
-                        <a:t>۳–۱۰ برابر کوچک‌تر</a:t>
+                        <a:t>۳–۱۰× کوچک‌تر</a:t>
                       </a:r>
                     </a:p>
                   </a:txBody>
@@ -4044,18 +4812,18 @@
                   </a:tcPr>
                 </a:tc>
               </a:tr>
-              <a:tr h="757645">
+              <a:tr h="770708">
                 <a:tc>
                   <a:txBody>
                     <a:bodyPr/>
                     <a:lstStyle/>
                     <a:p>
                       <a:pPr algn="ctr" a:rtl="1">
-                        <a:defRPr sz="1100">
+                        <a:defRPr sz="1000" b="0">
                           <a:solidFill>
                             <a:srgbClr val="282828"/>
                           </a:solidFill>
-                          <a:latin typeface="Noto Naskh Arabic"/>
+                          <a:latin typeface="Vazir"/>
                         </a:defRPr>
                       </a:pPr>
                       <a:r>
@@ -4071,11 +4839,11 @@
                     <a:lstStyle/>
                     <a:p>
                       <a:pPr algn="ctr" a:rtl="1">
-                        <a:defRPr sz="1100">
+                        <a:defRPr sz="1000" b="0">
                           <a:solidFill>
                             <a:srgbClr val="282828"/>
                           </a:solidFill>
-                          <a:latin typeface="Noto Naskh Arabic"/>
+                          <a:latin typeface="Vazir"/>
                         </a:defRPr>
                       </a:pPr>
                       <a:r>
@@ -4086,18 +4854,18 @@
                   <a:tcPr/>
                 </a:tc>
               </a:tr>
-              <a:tr h="757650">
+              <a:tr h="770712">
                 <a:tc>
                   <a:txBody>
                     <a:bodyPr/>
                     <a:lstStyle/>
                     <a:p>
                       <a:pPr algn="ctr" a:rtl="1">
-                        <a:defRPr sz="1100">
+                        <a:defRPr sz="1000" b="0">
                           <a:solidFill>
                             <a:srgbClr val="282828"/>
                           </a:solidFill>
-                          <a:latin typeface="Noto Naskh Arabic"/>
+                          <a:latin typeface="Vazir"/>
                         </a:defRPr>
                       </a:pPr>
                       <a:r>
@@ -4117,15 +4885,15 @@
                     <a:lstStyle/>
                     <a:p>
                       <a:pPr algn="ctr" a:rtl="1">
-                        <a:defRPr sz="1100">
+                        <a:defRPr sz="1000" b="0">
                           <a:solidFill>
                             <a:srgbClr val="282828"/>
                           </a:solidFill>
-                          <a:latin typeface="Noto Naskh Arabic"/>
+                          <a:latin typeface="Vazir"/>
                         </a:defRPr>
                       </a:pPr>
                       <a:r>
-                        <a:t>۵–۱۶ برابر سریع‌تر</a:t>
+                        <a:t>۵–۱۶× سریع‌تر</a:t>
                       </a:r>
                     </a:p>
                   </a:txBody>
@@ -4148,7 +4916,7 @@
 </p:sld>
 </file>
 
-<file path=ppt/slides/slide15.xml><?xml version="1.0" encoding="utf-8"?>
+<file path=ppt/slides/slide18.xml><?xml version="1.0" encoding="utf-8"?>
 <p:sld xmlns:a="http://schemas.openxmlformats.org/drawingml/2006/main" xmlns:p="http://schemas.openxmlformats.org/presentationml/2006/main" xmlns:r="http://schemas.openxmlformats.org/officeDocument/2006/relationships">
   <p:cSld>
     <p:spTree>
@@ -4166,8 +4934,8 @@
         </p:nvSpPr>
         <p:spPr>
           <a:xfrm>
-            <a:off x="365760" y="274320"/>
-            <a:ext cx="8412480" cy="731520"/>
+            <a:off x="365760" y="228600"/>
+            <a:ext cx="8412480" cy="640080"/>
           </a:xfrm>
           <a:prstGeom prst="rect">
             <a:avLst/>
@@ -4181,11 +4949,11 @@
           <a:lstStyle/>
           <a:p>
             <a:pPr algn="r" a:rtl="1">
-              <a:defRPr sz="2600" b="1">
+              <a:defRPr sz="2400" b="1">
                 <a:solidFill>
                   <a:srgbClr val="003366"/>
                 </a:solidFill>
-                <a:latin typeface="Noto Naskh Arabic"/>
+                <a:latin typeface="Vazir"/>
               </a:defRPr>
             </a:pPr>
             <a:r>
@@ -4202,7 +4970,7 @@
         </p:nvSpPr>
         <p:spPr>
           <a:xfrm>
-            <a:off x="365760" y="960120"/>
+            <a:off x="365760" y="868680"/>
             <a:ext cx="8412480" cy="18288"/>
           </a:xfrm>
           <a:prstGeom prst="rect">
@@ -4245,8 +5013,8 @@
         </p:nvSpPr>
         <p:spPr>
           <a:xfrm>
-            <a:off x="457200" y="1097280"/>
-            <a:ext cx="8229600" cy="5303520"/>
+            <a:off x="411480" y="960120"/>
+            <a:ext cx="3840480" cy="5486400"/>
           </a:xfrm>
           <a:prstGeom prst="rect">
             <a:avLst/>
@@ -4261,85 +5029,125 @@
           <a:p>
             <a:pPr algn="r" a:rtl="1">
               <a:spcAft>
-                <a:spcPts val="800"/>
+                <a:spcPts val="500"/>
               </a:spcAft>
-              <a:defRPr sz="1700">
+              <a:defRPr sz="1200" b="0">
                 <a:solidFill>
                   <a:srgbClr val="282828"/>
                 </a:solidFill>
-                <a:latin typeface="Noto Naskh Arabic"/>
-              </a:defRPr>
-            </a:pPr>
-            <a:r>
-              <a:t>• جدول ORDERS با ۱۰۰ میلیون سطر — کوئری: SUM(Amount) WHERE Country='IN'</a:t>
+                <a:latin typeface="Vazir"/>
+              </a:defRPr>
+            </a:pPr>
+            <a:r>
+              <a:t>• سناریو: جدول ORDERS با ۱۰۰ میلیون سطر — کوئری SUM(Amount) WHERE Country='IN'</a:t>
             </a:r>
           </a:p>
           <a:p>
             <a:pPr algn="r" a:rtl="1">
               <a:spcAft>
-                <a:spcPts val="800"/>
+                <a:spcPts val="500"/>
               </a:spcAft>
-              <a:defRPr sz="1700">
+              <a:defRPr sz="1200" b="0">
                 <a:solidFill>
                   <a:srgbClr val="282828"/>
                 </a:solidFill>
-                <a:latin typeface="Noto Naskh Arabic"/>
-              </a:defRPr>
-            </a:pPr>
-            <a:r>
-              <a:t>• Row Store (اسکن کامل): ≈ ۷.۲ GB خوانده می‌شود؛ ۹۰٪ بی‌فایده</a:t>
+                <a:latin typeface="Vazir"/>
+              </a:defRPr>
+            </a:pPr>
+            <a:r>
+              <a:t>• Row Store (اسکن کامل): ≈ ۷.۲ GB خوانده می‌شود؛ در حالی که کوئری فقط به یک ستون نیاز دارد — ۹۰٪ داده بی‌فایده است.</a:t>
             </a:r>
           </a:p>
           <a:p>
             <a:pPr algn="r" a:rtl="1">
               <a:spcAft>
-                <a:spcPts val="800"/>
+                <a:spcPts val="500"/>
               </a:spcAft>
-              <a:defRPr sz="1700">
+              <a:defRPr sz="1200" b="0">
                 <a:solidFill>
                   <a:srgbClr val="282828"/>
                 </a:solidFill>
-                <a:latin typeface="Noto Naskh Arabic"/>
-              </a:defRPr>
-            </a:pPr>
-            <a:r>
-              <a:t>• Row Store (با B-tree index): ≈ ۳۶۰ MB + overhead دسترسی تصادفی</a:t>
+                <a:latin typeface="Vazir"/>
+              </a:defRPr>
+            </a:pPr>
+            <a:r>
+              <a:t>• Row Store (B-tree index روی Country): ≈ ۳۶۰ MB + overhead دسترسی تصادفی و cache miss.</a:t>
             </a:r>
           </a:p>
           <a:p>
             <a:pPr algn="r" a:rtl="1">
               <a:spcAft>
-                <a:spcPts val="800"/>
+                <a:spcPts val="500"/>
               </a:spcAft>
-              <a:defRPr sz="1700">
+              <a:defRPr sz="1200" b="0">
                 <a:solidFill>
                   <a:srgbClr val="282828"/>
                 </a:solidFill>
-                <a:latin typeface="Noto Naskh Arabic"/>
-              </a:defRPr>
-            </a:pPr>
-            <a:r>
-              <a:t>• Column Store: فقط ستون‌های Country (≈100 MB) + Amount (≈800 MB) ≈ ۹۰۰ MB</a:t>
+                <a:latin typeface="Vazir"/>
+              </a:defRPr>
+            </a:pPr>
+            <a:r>
+              <a:t>• Column Store: فقط Country (≈100 MB) + Amount (≈800 MB) = ≈ ۹۰۰ MB — داده فشرده و sequential.</a:t>
             </a:r>
           </a:p>
           <a:p>
             <a:pPr algn="r" a:rtl="1">
               <a:spcAft>
-                <a:spcPts val="800"/>
+                <a:spcPts val="500"/>
               </a:spcAft>
-              <a:defRPr sz="1700">
+              <a:defRPr sz="1200" b="0">
                 <a:solidFill>
                   <a:srgbClr val="282828"/>
                 </a:solidFill>
-                <a:latin typeface="Noto Naskh Arabic"/>
-              </a:defRPr>
-            </a:pPr>
-            <a:r>
-              <a:t>• Column Store حدود ۸ برابر سریع‌تر و CPU-friendlyتر است</a:t>
-            </a:r>
-          </a:p>
-        </p:txBody>
-      </p:sp>
+                <a:latin typeface="Vazir"/>
+              </a:defRPr>
+            </a:pPr>
+            <a:r>
+              <a:t>• نتیجه: Column Store حدود ۸× سریع‌تر و بسیار CPU-friendlyتر است.</a:t>
+            </a:r>
+          </a:p>
+          <a:p>
+            <a:pPr algn="r" a:rtl="1">
+              <a:spcAft>
+                <a:spcPts val="500"/>
+              </a:spcAft>
+              <a:defRPr sz="1200" b="0">
+                <a:solidFill>
+                  <a:srgbClr val="282828"/>
+                </a:solidFill>
+                <a:latin typeface="Vazir"/>
+              </a:defRPr>
+            </a:pPr>
+            <a:r>
+              <a:t>• دلیل: اسکن sequential ستونی + فشرده‌سازی + پردازش vectorized.</a:t>
+            </a:r>
+          </a:p>
+        </p:txBody>
+      </p:sp>
+      <p:pic>
+        <p:nvPicPr>
+          <p:cNvPr id="5" name="Picture 4" descr="row_vs_column.png"/>
+          <p:cNvPicPr>
+            <a:picLocks noChangeAspect="1"/>
+          </p:cNvPicPr>
+          <p:nvPr/>
+        </p:nvPicPr>
+        <p:blipFill>
+          <a:blip r:embed="rId2"/>
+          <a:stretch>
+            <a:fillRect/>
+          </a:stretch>
+        </p:blipFill>
+        <p:spPr>
+          <a:xfrm>
+            <a:off x="4389120" y="1097280"/>
+            <a:ext cx="4480560" cy="2718542"/>
+          </a:xfrm>
+          <a:prstGeom prst="rect">
+            <a:avLst/>
+          </a:prstGeom>
+        </p:spPr>
+      </p:pic>
     </p:spTree>
   </p:cSld>
   <p:clrMapOvr>
@@ -4348,7 +5156,7 @@
 </p:sld>
 </file>
 
-<file path=ppt/slides/slide16.xml><?xml version="1.0" encoding="utf-8"?>
+<file path=ppt/slides/slide19.xml><?xml version="1.0" encoding="utf-8"?>
 <p:sld xmlns:a="http://schemas.openxmlformats.org/drawingml/2006/main" xmlns:p="http://schemas.openxmlformats.org/presentationml/2006/main" xmlns:r="http://schemas.openxmlformats.org/officeDocument/2006/relationships">
   <p:cSld>
     <p:spTree>
@@ -4366,8 +5174,8 @@
         </p:nvSpPr>
         <p:spPr>
           <a:xfrm>
-            <a:off x="365760" y="274320"/>
-            <a:ext cx="8412480" cy="731520"/>
+            <a:off x="365760" y="228600"/>
+            <a:ext cx="8412480" cy="640080"/>
           </a:xfrm>
           <a:prstGeom prst="rect">
             <a:avLst/>
@@ -4381,15 +5189,15 @@
           <a:lstStyle/>
           <a:p>
             <a:pPr algn="r" a:rtl="1">
-              <a:defRPr sz="2600" b="1">
+              <a:defRPr sz="2400" b="1">
                 <a:solidFill>
                   <a:srgbClr val="003366"/>
                 </a:solidFill>
-                <a:latin typeface="Noto Naskh Arabic"/>
-              </a:defRPr>
-            </a:pPr>
-            <a:r>
-              <a:t>پردازش موازی (Parallel Processing)</a:t>
+                <a:latin typeface="Vazir"/>
+              </a:defRPr>
+            </a:pPr>
+            <a:r>
+              <a:t>نمودار مقایسه I/O</a:t>
             </a:r>
           </a:p>
         </p:txBody>
@@ -4402,7 +5210,7 @@
         </p:nvSpPr>
         <p:spPr>
           <a:xfrm>
-            <a:off x="365760" y="960120"/>
+            <a:off x="365760" y="868680"/>
             <a:ext cx="8412480" cy="18288"/>
           </a:xfrm>
           <a:prstGeom prst="rect">
@@ -4437,16 +5245,40 @@
           </a:p>
         </p:txBody>
       </p:sp>
-      <p:sp>
-        <p:nvSpPr>
-          <p:cNvPr id="4" name="TextBox 3"/>
+      <p:pic>
+        <p:nvPicPr>
+          <p:cNvPr id="4" name="Picture 3" descr="row_vs_column.png"/>
+          <p:cNvPicPr>
+            <a:picLocks noChangeAspect="1"/>
+          </p:cNvPicPr>
+          <p:nvPr/>
+        </p:nvPicPr>
+        <p:blipFill>
+          <a:blip r:embed="rId2"/>
+          <a:stretch>
+            <a:fillRect/>
+          </a:stretch>
+        </p:blipFill>
+        <p:spPr>
+          <a:xfrm>
+            <a:off x="548640" y="1051560"/>
+            <a:ext cx="8046720" cy="4882280"/>
+          </a:xfrm>
+          <a:prstGeom prst="rect">
+            <a:avLst/>
+          </a:prstGeom>
+        </p:spPr>
+      </p:pic>
+      <p:sp>
+        <p:nvSpPr>
+          <p:cNvPr id="5" name="TextBox 4"/>
           <p:cNvSpPr txBox="1"/>
           <p:nvPr/>
         </p:nvSpPr>
         <p:spPr>
           <a:xfrm>
-            <a:off x="457200" y="1097280"/>
-            <a:ext cx="8229600" cy="5303520"/>
+            <a:off x="457200" y="6263640"/>
+            <a:ext cx="8229600" cy="457200"/>
           </a:xfrm>
           <a:prstGeom prst="rect">
             <a:avLst/>
@@ -4454,88 +5286,21 @@
           <a:noFill/>
         </p:spPr>
         <p:txBody>
-          <a:bodyPr wrap="square">
+          <a:bodyPr wrap="none">
             <a:spAutoFit/>
           </a:bodyPr>
           <a:lstStyle/>
           <a:p>
-            <a:pPr algn="r" a:rtl="1">
-              <a:spcAft>
-                <a:spcPts val="800"/>
-              </a:spcAft>
-              <a:defRPr sz="1700">
-                <a:solidFill>
-                  <a:srgbClr val="282828"/>
-                </a:solidFill>
-                <a:latin typeface="Noto Naskh Arabic"/>
-              </a:defRPr>
-            </a:pPr>
-            <a:r>
-              <a:t>• استفاده از multi-core CPU و distributed nodes در SAP HANA</a:t>
-            </a:r>
-          </a:p>
-          <a:p>
-            <a:pPr algn="r" a:rtl="1">
-              <a:spcAft>
-                <a:spcPts val="800"/>
-              </a:spcAft>
-              <a:defRPr sz="1700">
-                <a:solidFill>
-                  <a:srgbClr val="282828"/>
-                </a:solidFill>
-                <a:latin typeface="Noto Naskh Arabic"/>
-              </a:defRPr>
-            </a:pPr>
-            <a:r>
-              <a:t>• تقسیم کوئری به subtaskهای همزمان (مثلاً هر منطقه جغرافیایی روی یک core)</a:t>
-            </a:r>
-          </a:p>
-          <a:p>
-            <a:pPr algn="r" a:rtl="1">
-              <a:spcAft>
-                <a:spcPts val="800"/>
-              </a:spcAft>
-              <a:defRPr sz="1700">
-                <a:solidFill>
-                  <a:srgbClr val="282828"/>
-                </a:solidFill>
-                <a:latin typeface="Noto Naskh Arabic"/>
-              </a:defRPr>
-            </a:pPr>
-            <a:r>
-              <a:t>• اسکن ستونی موازی: ۵–۱۶ برابر سریع‌تر</a:t>
-            </a:r>
-          </a:p>
-          <a:p>
-            <a:pPr algn="r" a:rtl="1">
-              <a:spcAft>
-                <a:spcPts val="800"/>
-              </a:spcAft>
-              <a:defRPr sz="1700">
-                <a:solidFill>
-                  <a:srgbClr val="282828"/>
-                </a:solidFill>
-                <a:latin typeface="Noto Naskh Arabic"/>
-              </a:defRPr>
-            </a:pPr>
-            <a:r>
-              <a:t>• تجمیع موازی: ۴–۱۲ برابر سریع‌تر</a:t>
-            </a:r>
-          </a:p>
-          <a:p>
-            <a:pPr algn="r" a:rtl="1">
-              <a:spcAft>
-                <a:spcPts val="800"/>
-              </a:spcAft>
-              <a:defRPr sz="1700">
-                <a:solidFill>
-                  <a:srgbClr val="282828"/>
-                </a:solidFill>
-                <a:latin typeface="Noto Naskh Arabic"/>
-              </a:defRPr>
-            </a:pPr>
-            <a:r>
-              <a:t>• Join موازی: ۳–۱۰ برابر سریع‌تر — runtime از دقیقه به ثانیه</a:t>
+            <a:pPr algn="ctr" a:rtl="1">
+              <a:defRPr sz="1200" b="0">
+                <a:solidFill>
+                  <a:srgbClr val="5A5A5A"/>
+                </a:solidFill>
+                <a:latin typeface="Vazir"/>
+              </a:defRPr>
+            </a:pPr>
+            <a:r>
+              <a:t>شکل ۴: حجم داده خوانده‌شده — Row Store در برابر Column Store</a:t>
             </a:r>
           </a:p>
         </p:txBody>
@@ -4548,7 +5313,7 @@
 </p:sld>
 </file>
 
-<file path=ppt/slides/slide17.xml><?xml version="1.0" encoding="utf-8"?>
+<file path=ppt/slides/slide2.xml><?xml version="1.0" encoding="utf-8"?>
 <p:sld xmlns:a="http://schemas.openxmlformats.org/drawingml/2006/main" xmlns:p="http://schemas.openxmlformats.org/presentationml/2006/main" xmlns:r="http://schemas.openxmlformats.org/officeDocument/2006/relationships">
   <p:cSld>
     <p:spTree>
@@ -4566,7 +5331,7 @@
         </p:nvSpPr>
         <p:spPr>
           <a:xfrm>
-            <a:off x="365760" y="274320"/>
+            <a:off x="365760" y="228600"/>
             <a:ext cx="8412480" cy="640080"/>
           </a:xfrm>
           <a:prstGeom prst="rect">
@@ -4581,30 +5346,670 @@
           <a:lstStyle/>
           <a:p>
             <a:pPr algn="r" a:rtl="1">
-              <a:defRPr sz="2200" b="1">
+              <a:defRPr sz="2400" b="1">
                 <a:solidFill>
                   <a:srgbClr val="003366"/>
                 </a:solidFill>
-                <a:latin typeface="Noto Naskh Arabic"/>
+                <a:latin typeface="Vazir"/>
+              </a:defRPr>
+            </a:pPr>
+            <a:r>
+              <a:t>چکیده مقاله</a:t>
+            </a:r>
+          </a:p>
+        </p:txBody>
+      </p:sp>
+      <p:sp>
+        <p:nvSpPr>
+          <p:cNvPr id="3" name="Rectangle 2"/>
+          <p:cNvSpPr/>
+          <p:nvPr/>
+        </p:nvSpPr>
+        <p:spPr>
+          <a:xfrm>
+            <a:off x="365760" y="868680"/>
+            <a:ext cx="8412480" cy="18288"/>
+          </a:xfrm>
+          <a:prstGeom prst="rect">
+            <a:avLst/>
+          </a:prstGeom>
+          <a:solidFill>
+            <a:srgbClr val="006699"/>
+          </a:solidFill>
+          <a:ln>
+            <a:noFill/>
+          </a:ln>
+        </p:spPr>
+        <p:style>
+          <a:lnRef idx="1">
+            <a:schemeClr val="accent1"/>
+          </a:lnRef>
+          <a:fillRef idx="3">
+            <a:schemeClr val="accent1"/>
+          </a:fillRef>
+          <a:effectRef idx="2">
+            <a:schemeClr val="accent1"/>
+          </a:effectRef>
+          <a:fontRef idx="minor">
+            <a:schemeClr val="lt1"/>
+          </a:fontRef>
+        </p:style>
+        <p:txBody>
+          <a:bodyPr rtlCol="0" anchor="ctr"/>
+          <a:lstStyle/>
+          <a:p>
+            <a:pPr algn="ctr"/>
+          </a:p>
+        </p:txBody>
+      </p:sp>
+      <p:sp>
+        <p:nvSpPr>
+          <p:cNvPr id="4" name="TextBox 3"/>
+          <p:cNvSpPr txBox="1"/>
+          <p:nvPr/>
+        </p:nvSpPr>
+        <p:spPr>
+          <a:xfrm>
+            <a:off x="411480" y="960120"/>
+            <a:ext cx="8321040" cy="5669280"/>
+          </a:xfrm>
+          <a:prstGeom prst="rect">
+            <a:avLst/>
+          </a:prstGeom>
+          <a:noFill/>
+        </p:spPr>
+        <p:txBody>
+          <a:bodyPr wrap="square">
+            <a:spAutoFit/>
+          </a:bodyPr>
+          <a:lstStyle/>
+          <a:p>
+            <a:pPr algn="r" a:rtl="1">
+              <a:spcAft>
+                <a:spcPts val="600"/>
+              </a:spcAft>
+              <a:defRPr sz="1400" b="0">
+                <a:solidFill>
+                  <a:srgbClr val="282828"/>
+                </a:solidFill>
+                <a:latin typeface="Vazir"/>
+              </a:defRPr>
+            </a:pPr>
+            <a:r>
+              <a:t>• هدف پژوهش: بررسی چگونگی دستیابی SAP S/4HANA به سرعت پردازش فوق‌العاده از طریق معماری درون‌حافظه‌ای و تحلیل لایه پایگاه‌داده HANA که منبع اصلی چالش‌های کارایی در سیستم‌های SAP است.</a:t>
+            </a:r>
+          </a:p>
+          <a:p>
+            <a:pPr algn="r" a:rtl="1">
+              <a:spcAft>
+                <a:spcPts val="600"/>
+              </a:spcAft>
+              <a:defRPr sz="1400" b="0">
+                <a:solidFill>
+                  <a:srgbClr val="282828"/>
+                </a:solidFill>
+                <a:latin typeface="Vazir"/>
+              </a:defRPr>
+            </a:pPr>
+            <a:r>
+              <a:t>• روش کار: مطالعه مستندات SAP HANA و S/4HANA، اجرای کوئری‌های SQL، CDS Views و SQL Script روی سیستم واقعی، و تحلیل با ابزارهای ST05، ST12، SAT، DBACOCKPIT و PlanViz.</a:t>
+            </a:r>
+          </a:p>
+          <a:p>
+            <a:pPr algn="r" a:rtl="1">
+              <a:spcAft>
+                <a:spcPts val="600"/>
+              </a:spcAft>
+              <a:defRPr sz="1400" b="0">
+                <a:solidFill>
+                  <a:srgbClr val="282828"/>
+                </a:solidFill>
+                <a:latin typeface="Vazir"/>
+              </a:defRPr>
+            </a:pPr>
+            <a:r>
+              <a:t>• یافته‌های کلیدی: ذخیره‌سازی ستونی، فشرده‌سازی Dictionary/Vector، پردازش Set-based، ایندکس‌گذاری پیشرفته و پارتیشن‌بندی، هرکدام به‌طور جداگانه و در کنار هم کارایی، مقیاس‌پذیری و تحلیل بلادرنگ را به‌شدت افزایش می‌دهند.</a:t>
+            </a:r>
+          </a:p>
+          <a:p>
+            <a:pPr algn="r" a:rtl="1">
+              <a:spcAft>
+                <a:spcPts val="600"/>
+              </a:spcAft>
+              <a:defRPr sz="1400" b="0">
+                <a:solidFill>
+                  <a:srgbClr val="282828"/>
+                </a:solidFill>
+                <a:latin typeface="Vazir"/>
+              </a:defRPr>
+            </a:pPr>
+            <a:r>
+              <a:t>• نتیجه کلی: ترکیب طراحی درون‌حافظه‌ای با بهینه‌سازی‌های آگاهانه در لایه پایگاه‌داده، پایه و اساس پردازش بلادرنگ و تراکنش‌های زیر یک ثانیه در S/4HANA است.</a:t>
+            </a:r>
+          </a:p>
+          <a:p>
+            <a:pPr algn="r" a:rtl="1">
+              <a:spcAft>
+                <a:spcPts val="600"/>
+              </a:spcAft>
+              <a:defRPr sz="1400" b="0">
+                <a:solidFill>
+                  <a:srgbClr val="282828"/>
+                </a:solidFill>
+                <a:latin typeface="Vazir"/>
+              </a:defRPr>
+            </a:pPr>
+            <a:r>
+              <a:t>• توصیه: توسعه‌دهندگان باید برنامه‌نویسی Set-based، ایندکس‌گذاری مناسب و پارتیشن‌بندی هوشمند را در اولویت قرار دهند و محاسبات را تا حد ممکن در لایه DB اجرا کنند.</a:t>
+            </a:r>
+          </a:p>
+        </p:txBody>
+      </p:sp>
+    </p:spTree>
+  </p:cSld>
+  <p:clrMapOvr>
+    <a:masterClrMapping/>
+  </p:clrMapOvr>
+</p:sld>
+</file>
+
+<file path=ppt/slides/slide20.xml><?xml version="1.0" encoding="utf-8"?>
+<p:sld xmlns:a="http://schemas.openxmlformats.org/drawingml/2006/main" xmlns:p="http://schemas.openxmlformats.org/presentationml/2006/main" xmlns:r="http://schemas.openxmlformats.org/officeDocument/2006/relationships">
+  <p:cSld>
+    <p:spTree>
+      <p:nvGrpSpPr>
+        <p:cNvPr id="1" name=""/>
+        <p:cNvGrpSpPr/>
+        <p:nvPr/>
+      </p:nvGrpSpPr>
+      <p:grpSpPr/>
+      <p:sp>
+        <p:nvSpPr>
+          <p:cNvPr id="2" name="TextBox 1"/>
+          <p:cNvSpPr txBox="1"/>
+          <p:nvPr/>
+        </p:nvSpPr>
+        <p:spPr>
+          <a:xfrm>
+            <a:off x="365760" y="228600"/>
+            <a:ext cx="8412480" cy="640080"/>
+          </a:xfrm>
+          <a:prstGeom prst="rect">
+            <a:avLst/>
+          </a:prstGeom>
+          <a:noFill/>
+        </p:spPr>
+        <p:txBody>
+          <a:bodyPr wrap="none">
+            <a:spAutoFit/>
+          </a:bodyPr>
+          <a:lstStyle/>
+          <a:p>
+            <a:pPr algn="r" a:rtl="1">
+              <a:defRPr sz="2400" b="1">
+                <a:solidFill>
+                  <a:srgbClr val="003366"/>
+                </a:solidFill>
+                <a:latin typeface="Vazir"/>
+              </a:defRPr>
+            </a:pPr>
+            <a:r>
+              <a:t>پردازش موازی (Parallel Processing)</a:t>
+            </a:r>
+          </a:p>
+        </p:txBody>
+      </p:sp>
+      <p:sp>
+        <p:nvSpPr>
+          <p:cNvPr id="3" name="Rectangle 2"/>
+          <p:cNvSpPr/>
+          <p:nvPr/>
+        </p:nvSpPr>
+        <p:spPr>
+          <a:xfrm>
+            <a:off x="365760" y="868680"/>
+            <a:ext cx="8412480" cy="18288"/>
+          </a:xfrm>
+          <a:prstGeom prst="rect">
+            <a:avLst/>
+          </a:prstGeom>
+          <a:solidFill>
+            <a:srgbClr val="006699"/>
+          </a:solidFill>
+          <a:ln>
+            <a:noFill/>
+          </a:ln>
+        </p:spPr>
+        <p:style>
+          <a:lnRef idx="1">
+            <a:schemeClr val="accent1"/>
+          </a:lnRef>
+          <a:fillRef idx="3">
+            <a:schemeClr val="accent1"/>
+          </a:fillRef>
+          <a:effectRef idx="2">
+            <a:schemeClr val="accent1"/>
+          </a:effectRef>
+          <a:fontRef idx="minor">
+            <a:schemeClr val="lt1"/>
+          </a:fontRef>
+        </p:style>
+        <p:txBody>
+          <a:bodyPr rtlCol="0" anchor="ctr"/>
+          <a:lstStyle/>
+          <a:p>
+            <a:pPr algn="ctr"/>
+          </a:p>
+        </p:txBody>
+      </p:sp>
+      <p:sp>
+        <p:nvSpPr>
+          <p:cNvPr id="4" name="TextBox 3"/>
+          <p:cNvSpPr txBox="1"/>
+          <p:nvPr/>
+        </p:nvSpPr>
+        <p:spPr>
+          <a:xfrm>
+            <a:off x="411480" y="960120"/>
+            <a:ext cx="4023360" cy="5486400"/>
+          </a:xfrm>
+          <a:prstGeom prst="rect">
+            <a:avLst/>
+          </a:prstGeom>
+          <a:noFill/>
+        </p:spPr>
+        <p:txBody>
+          <a:bodyPr wrap="square">
+            <a:spAutoFit/>
+          </a:bodyPr>
+          <a:lstStyle/>
+          <a:p>
+            <a:pPr algn="r" a:rtl="1">
+              <a:spcAft>
+                <a:spcPts val="500"/>
+              </a:spcAft>
+              <a:defRPr sz="1200" b="0">
+                <a:solidFill>
+                  <a:srgbClr val="282828"/>
+                </a:solidFill>
+                <a:latin typeface="Vazir"/>
+              </a:defRPr>
+            </a:pPr>
+            <a:r>
+              <a:t>• SAP HANA از multi-core CPU و distributed nodes برای توزیع بار استفاده می‌کند.</a:t>
+            </a:r>
+          </a:p>
+          <a:p>
+            <a:pPr algn="r" a:rtl="1">
+              <a:spcAft>
+                <a:spcPts val="500"/>
+              </a:spcAft>
+              <a:defRPr sz="1200" b="0">
+                <a:solidFill>
+                  <a:srgbClr val="282828"/>
+                </a:solidFill>
+                <a:latin typeface="Vazir"/>
+              </a:defRPr>
+            </a:pPr>
+            <a:r>
+              <a:t>• یک کوئری بزرگ به subtaskهای کوچک‌تر تقسیم و همزمان اجرا می‌شود — مثلاً هر region روی یک core.</a:t>
+            </a:r>
+          </a:p>
+          <a:p>
+            <a:pPr algn="r" a:rtl="1">
+              <a:spcAft>
+                <a:spcPts val="500"/>
+              </a:spcAft>
+              <a:defRPr sz="1200" b="0">
+                <a:solidFill>
+                  <a:srgbClr val="282828"/>
+                </a:solidFill>
+                <a:latin typeface="Vazir"/>
+              </a:defRPr>
+            </a:pPr>
+            <a:r>
+              <a:t>• Parallel column scans: ۵–۱۶× سریع‌تر از اسکن تک‌رشته‌ای.</a:t>
+            </a:r>
+          </a:p>
+          <a:p>
+            <a:pPr algn="r" a:rtl="1">
+              <a:spcAft>
+                <a:spcPts val="500"/>
+              </a:spcAft>
+              <a:defRPr sz="1200" b="0">
+                <a:solidFill>
+                  <a:srgbClr val="282828"/>
+                </a:solidFill>
+                <a:latin typeface="Vazir"/>
+              </a:defRPr>
+            </a:pPr>
+            <a:r>
+              <a:t>• Parallel aggregation: ۴–۱۲× سریع‌تر — SUM/COUNT روی partitionهای موازی.</a:t>
+            </a:r>
+          </a:p>
+          <a:p>
+            <a:pPr algn="r" a:rtl="1">
+              <a:spcAft>
+                <a:spcPts val="500"/>
+              </a:spcAft>
+              <a:defRPr sz="1200" b="0">
+                <a:solidFill>
+                  <a:srgbClr val="282828"/>
+                </a:solidFill>
+                <a:latin typeface="Vazir"/>
+              </a:defRPr>
+            </a:pPr>
+            <a:r>
+              <a:t>• Parallel join: ۳–۱۰× سریع‌تر — hash/merge join موازی.</a:t>
+            </a:r>
+          </a:p>
+          <a:p>
+            <a:pPr algn="r" a:rtl="1">
+              <a:spcAft>
+                <a:spcPts val="500"/>
+              </a:spcAft>
+              <a:defRPr sz="1200" b="0">
+                <a:solidFill>
+                  <a:srgbClr val="282828"/>
+                </a:solidFill>
+                <a:latin typeface="Vazir"/>
+              </a:defRPr>
+            </a:pPr>
+            <a:r>
+              <a:t>• CPU utilization: بهبود ۶۰–۹۰٪ — runtime از دقیقه به ثانیه.</a:t>
+            </a:r>
+          </a:p>
+        </p:txBody>
+      </p:sp>
+      <p:pic>
+        <p:nvPicPr>
+          <p:cNvPr id="5" name="Picture 4" descr="parallel_processing.png"/>
+          <p:cNvPicPr>
+            <a:picLocks noChangeAspect="1"/>
+          </p:cNvPicPr>
+          <p:nvPr/>
+        </p:nvPicPr>
+        <p:blipFill>
+          <a:blip r:embed="rId2"/>
+          <a:stretch>
+            <a:fillRect/>
+          </a:stretch>
+        </p:blipFill>
+        <p:spPr>
+          <a:xfrm>
+            <a:off x="4572000" y="1097280"/>
+            <a:ext cx="4297680" cy="2366138"/>
+          </a:xfrm>
+          <a:prstGeom prst="rect">
+            <a:avLst/>
+          </a:prstGeom>
+        </p:spPr>
+      </p:pic>
+    </p:spTree>
+  </p:cSld>
+  <p:clrMapOvr>
+    <a:masterClrMapping/>
+  </p:clrMapOvr>
+</p:sld>
+</file>
+
+<file path=ppt/slides/slide21.xml><?xml version="1.0" encoding="utf-8"?>
+<p:sld xmlns:a="http://schemas.openxmlformats.org/drawingml/2006/main" xmlns:p="http://schemas.openxmlformats.org/presentationml/2006/main" xmlns:r="http://schemas.openxmlformats.org/officeDocument/2006/relationships">
+  <p:cSld>
+    <p:spTree>
+      <p:nvGrpSpPr>
+        <p:cNvPr id="1" name=""/>
+        <p:cNvGrpSpPr/>
+        <p:nvPr/>
+      </p:nvGrpSpPr>
+      <p:grpSpPr/>
+      <p:sp>
+        <p:nvSpPr>
+          <p:cNvPr id="2" name="TextBox 1"/>
+          <p:cNvSpPr txBox="1"/>
+          <p:nvPr/>
+        </p:nvSpPr>
+        <p:spPr>
+          <a:xfrm>
+            <a:off x="365760" y="228600"/>
+            <a:ext cx="8412480" cy="640080"/>
+          </a:xfrm>
+          <a:prstGeom prst="rect">
+            <a:avLst/>
+          </a:prstGeom>
+          <a:noFill/>
+        </p:spPr>
+        <p:txBody>
+          <a:bodyPr wrap="none">
+            <a:spAutoFit/>
+          </a:bodyPr>
+          <a:lstStyle/>
+          <a:p>
+            <a:pPr algn="r" a:rtl="1">
+              <a:defRPr sz="2400" b="1">
+                <a:solidFill>
+                  <a:srgbClr val="003366"/>
+                </a:solidFill>
+                <a:latin typeface="Vazir"/>
               </a:defRPr>
             </a:pPr>
             <a:r>
               <a:t>HTAP: ترکیب OLTP و OLAP</a:t>
             </a:r>
+          </a:p>
+        </p:txBody>
+      </p:sp>
+      <p:sp>
+        <p:nvSpPr>
+          <p:cNvPr id="3" name="Rectangle 2"/>
+          <p:cNvSpPr/>
+          <p:nvPr/>
+        </p:nvSpPr>
+        <p:spPr>
+          <a:xfrm>
+            <a:off x="365760" y="868680"/>
+            <a:ext cx="8412480" cy="18288"/>
+          </a:xfrm>
+          <a:prstGeom prst="rect">
+            <a:avLst/>
+          </a:prstGeom>
+          <a:solidFill>
+            <a:srgbClr val="006699"/>
+          </a:solidFill>
+          <a:ln>
+            <a:noFill/>
+          </a:ln>
+        </p:spPr>
+        <p:style>
+          <a:lnRef idx="1">
+            <a:schemeClr val="accent1"/>
+          </a:lnRef>
+          <a:fillRef idx="3">
+            <a:schemeClr val="accent1"/>
+          </a:fillRef>
+          <a:effectRef idx="2">
+            <a:schemeClr val="accent1"/>
+          </a:effectRef>
+          <a:fontRef idx="minor">
+            <a:schemeClr val="lt1"/>
+          </a:fontRef>
+        </p:style>
+        <p:txBody>
+          <a:bodyPr rtlCol="0" anchor="ctr"/>
+          <a:lstStyle/>
+          <a:p>
+            <a:pPr algn="ctr"/>
+          </a:p>
+        </p:txBody>
+      </p:sp>
+      <p:pic>
+        <p:nvPicPr>
+          <p:cNvPr id="4" name="Picture 3" descr="htap_comparison.png"/>
+          <p:cNvPicPr>
+            <a:picLocks noChangeAspect="1"/>
+          </p:cNvPicPr>
+          <p:nvPr/>
+        </p:nvPicPr>
+        <p:blipFill>
+          <a:blip r:embed="rId2"/>
+          <a:stretch>
+            <a:fillRect/>
+          </a:stretch>
+        </p:blipFill>
+        <p:spPr>
+          <a:xfrm>
+            <a:off x="548640" y="1051560"/>
+            <a:ext cx="8046720" cy="4882280"/>
+          </a:xfrm>
+          <a:prstGeom prst="rect">
+            <a:avLst/>
+          </a:prstGeom>
+        </p:spPr>
+      </p:pic>
+      <p:sp>
+        <p:nvSpPr>
+          <p:cNvPr id="5" name="TextBox 4"/>
+          <p:cNvSpPr txBox="1"/>
+          <p:nvPr/>
+        </p:nvSpPr>
+        <p:spPr>
+          <a:xfrm>
+            <a:off x="457200" y="6263640"/>
+            <a:ext cx="8229600" cy="457200"/>
+          </a:xfrm>
+          <a:prstGeom prst="rect">
+            <a:avLst/>
+          </a:prstGeom>
+          <a:noFill/>
+        </p:spPr>
+        <p:txBody>
+          <a:bodyPr wrap="none">
+            <a:spAutoFit/>
+          </a:bodyPr>
+          <a:lstStyle/>
+          <a:p>
+            <a:pPr algn="ctr" a:rtl="1">
+              <a:defRPr sz="1200" b="0">
+                <a:solidFill>
+                  <a:srgbClr val="5A5A5A"/>
+                </a:solidFill>
+                <a:latin typeface="Vazir"/>
+              </a:defRPr>
+            </a:pPr>
+            <a:r>
+              <a:t>شکل ۵: مقایسه ECC سنتی و SAP HANA در بارهای ترکیبی</a:t>
+            </a:r>
+          </a:p>
+        </p:txBody>
+      </p:sp>
+    </p:spTree>
+  </p:cSld>
+  <p:clrMapOvr>
+    <a:masterClrMapping/>
+  </p:clrMapOvr>
+</p:sld>
+</file>
+
+<file path=ppt/slides/slide22.xml><?xml version="1.0" encoding="utf-8"?>
+<p:sld xmlns:a="http://schemas.openxmlformats.org/drawingml/2006/main" xmlns:p="http://schemas.openxmlformats.org/presentationml/2006/main" xmlns:r="http://schemas.openxmlformats.org/officeDocument/2006/relationships">
+  <p:cSld>
+    <p:spTree>
+      <p:nvGrpSpPr>
+        <p:cNvPr id="1" name=""/>
+        <p:cNvGrpSpPr/>
+        <p:nvPr/>
+      </p:nvGrpSpPr>
+      <p:grpSpPr/>
+      <p:sp>
+        <p:nvSpPr>
+          <p:cNvPr id="2" name="TextBox 1"/>
+          <p:cNvSpPr txBox="1"/>
+          <p:nvPr/>
+        </p:nvSpPr>
+        <p:spPr>
+          <a:xfrm>
+            <a:off x="365760" y="228600"/>
+            <a:ext cx="8412480" cy="640080"/>
+          </a:xfrm>
+          <a:prstGeom prst="rect">
+            <a:avLst/>
+          </a:prstGeom>
+          <a:noFill/>
+        </p:spPr>
+        <p:txBody>
+          <a:bodyPr wrap="none">
+            <a:spAutoFit/>
+          </a:bodyPr>
+          <a:lstStyle/>
+          <a:p>
+            <a:pPr algn="r" a:rtl="1">
+              <a:defRPr sz="2400" b="1">
+                <a:solidFill>
+                  <a:srgbClr val="003366"/>
+                </a:solidFill>
+                <a:latin typeface="Vazir"/>
+              </a:defRPr>
+            </a:pPr>
+            <a:r>
+              <a:t>جدول HTAP: ECC در برابر S/4HANA</a:t>
+            </a:r>
+          </a:p>
+        </p:txBody>
+      </p:sp>
+      <p:sp>
+        <p:nvSpPr>
+          <p:cNvPr id="3" name="Rectangle 2"/>
+          <p:cNvSpPr/>
+          <p:nvPr/>
+        </p:nvSpPr>
+        <p:spPr>
+          <a:xfrm>
+            <a:off x="365760" y="868680"/>
+            <a:ext cx="8412480" cy="18288"/>
+          </a:xfrm>
+          <a:prstGeom prst="rect">
+            <a:avLst/>
+          </a:prstGeom>
+          <a:solidFill>
+            <a:srgbClr val="006699"/>
+          </a:solidFill>
+          <a:ln>
+            <a:noFill/>
+          </a:ln>
+        </p:spPr>
+        <p:style>
+          <a:lnRef idx="1">
+            <a:schemeClr val="accent1"/>
+          </a:lnRef>
+          <a:fillRef idx="3">
+            <a:schemeClr val="accent1"/>
+          </a:fillRef>
+          <a:effectRef idx="2">
+            <a:schemeClr val="accent1"/>
+          </a:effectRef>
+          <a:fontRef idx="minor">
+            <a:schemeClr val="lt1"/>
+          </a:fontRef>
+        </p:style>
+        <p:txBody>
+          <a:bodyPr rtlCol="0" anchor="ctr"/>
+          <a:lstStyle/>
+          <a:p>
+            <a:pPr algn="ctr"/>
           </a:p>
         </p:txBody>
       </p:sp>
       <p:graphicFrame>
         <p:nvGraphicFramePr>
-          <p:cNvPr id="3" name="Table 2"/>
+          <p:cNvPr id="4" name="Table 3"/>
           <p:cNvGraphicFramePr>
             <a:graphicFrameLocks noGrp="1"/>
           </p:cNvGraphicFramePr>
           <p:nvPr/>
         </p:nvGraphicFramePr>
         <p:xfrm>
-          <a:off x="274320" y="1005840"/>
-          <a:ext cx="8595360" cy="5303520"/>
+          <a:off x="274320" y="960120"/>
+          <a:ext cx="8595360" cy="5394960"/>
         </p:xfrm>
         <a:graphic>
           <a:graphicData uri="http://schemas.openxmlformats.org/drawingml/2006/table">
@@ -4618,18 +6023,18 @@
                 <a:gridCol w="2148840"/>
                 <a:gridCol w="2148840"/>
               </a:tblGrid>
-              <a:tr h="883920">
+              <a:tr h="899160">
                 <a:tc>
                   <a:txBody>
                     <a:bodyPr/>
                     <a:lstStyle/>
                     <a:p>
                       <a:pPr algn="ctr" a:rtl="1">
-                        <a:defRPr sz="1200" b="1">
+                        <a:defRPr sz="1100" b="1">
                           <a:solidFill>
                             <a:srgbClr val="FFFFFF"/>
                           </a:solidFill>
-                          <a:latin typeface="Noto Naskh Arabic"/>
+                          <a:latin typeface="Vazir"/>
                         </a:defRPr>
                       </a:pPr>
                       <a:r>
@@ -4649,11 +6054,11 @@
                     <a:lstStyle/>
                     <a:p>
                       <a:pPr algn="ctr" a:rtl="1">
-                        <a:defRPr sz="1200" b="1">
+                        <a:defRPr sz="1100" b="1">
                           <a:solidFill>
                             <a:srgbClr val="FFFFFF"/>
                           </a:solidFill>
-                          <a:latin typeface="Noto Naskh Arabic"/>
+                          <a:latin typeface="Vazir"/>
                         </a:defRPr>
                       </a:pPr>
                       <a:r>
@@ -4673,15 +6078,15 @@
                     <a:lstStyle/>
                     <a:p>
                       <a:pPr algn="ctr" a:rtl="1">
-                        <a:defRPr sz="1200" b="1">
+                        <a:defRPr sz="1100" b="1">
                           <a:solidFill>
                             <a:srgbClr val="FFFFFF"/>
                           </a:solidFill>
-                          <a:latin typeface="Noto Naskh Arabic"/>
+                          <a:latin typeface="Vazir"/>
                         </a:defRPr>
                       </a:pPr>
                       <a:r>
-                        <a:t>SAP HANA (HTAP)</a:t>
+                        <a:t>SAP HANA</a:t>
                       </a:r>
                     </a:p>
                   </a:txBody>
@@ -4697,11 +6102,11 @@
                     <a:lstStyle/>
                     <a:p>
                       <a:pPr algn="ctr" a:rtl="1">
-                        <a:defRPr sz="1200" b="1">
+                        <a:defRPr sz="1100" b="1">
                           <a:solidFill>
                             <a:srgbClr val="FFFFFF"/>
                           </a:solidFill>
-                          <a:latin typeface="Noto Naskh Arabic"/>
+                          <a:latin typeface="Vazir"/>
                         </a:defRPr>
                       </a:pPr>
                       <a:r>
@@ -4716,18 +6121,18 @@
                   </a:tcPr>
                 </a:tc>
               </a:tr>
-              <a:tr h="883920">
+              <a:tr h="899160">
                 <a:tc>
                   <a:txBody>
                     <a:bodyPr/>
                     <a:lstStyle/>
                     <a:p>
                       <a:pPr algn="ctr" a:rtl="1">
-                        <a:defRPr sz="1100">
+                        <a:defRPr sz="1000" b="0">
                           <a:solidFill>
                             <a:srgbClr val="282828"/>
                           </a:solidFill>
-                          <a:latin typeface="Noto Naskh Arabic"/>
+                          <a:latin typeface="Vazir"/>
                         </a:defRPr>
                       </a:pPr>
                       <a:r>
@@ -4743,11 +6148,11 @@
                     <a:lstStyle/>
                     <a:p>
                       <a:pPr algn="ctr" a:rtl="1">
-                        <a:defRPr sz="1100">
+                        <a:defRPr sz="1000" b="0">
                           <a:solidFill>
                             <a:srgbClr val="282828"/>
                           </a:solidFill>
-                          <a:latin typeface="Noto Naskh Arabic"/>
+                          <a:latin typeface="Vazir"/>
                         </a:defRPr>
                       </a:pPr>
                       <a:r>
@@ -4763,11 +6168,11 @@
                     <a:lstStyle/>
                     <a:p>
                       <a:pPr algn="ctr" a:rtl="1">
-                        <a:defRPr sz="1100">
+                        <a:defRPr sz="1000" b="0">
                           <a:solidFill>
                             <a:srgbClr val="282828"/>
                           </a:solidFill>
-                          <a:latin typeface="Noto Naskh Arabic"/>
+                          <a:latin typeface="Vazir"/>
                         </a:defRPr>
                       </a:pPr>
                       <a:r>
@@ -4783,11 +6188,11 @@
                     <a:lstStyle/>
                     <a:p>
                       <a:pPr algn="ctr" a:rtl="1">
-                        <a:defRPr sz="1100">
+                        <a:defRPr sz="1000" b="0">
                           <a:solidFill>
                             <a:srgbClr val="282828"/>
                           </a:solidFill>
-                          <a:latin typeface="Noto Naskh Arabic"/>
+                          <a:latin typeface="Vazir"/>
                         </a:defRPr>
                       </a:pPr>
                       <a:r>
@@ -4798,18 +6203,18 @@
                   <a:tcPr/>
                 </a:tc>
               </a:tr>
-              <a:tr h="883920">
+              <a:tr h="899160">
                 <a:tc>
                   <a:txBody>
                     <a:bodyPr/>
                     <a:lstStyle/>
                     <a:p>
                       <a:pPr algn="ctr" a:rtl="1">
-                        <a:defRPr sz="1100">
+                        <a:defRPr sz="1000" b="0">
                           <a:solidFill>
                             <a:srgbClr val="282828"/>
                           </a:solidFill>
-                          <a:latin typeface="Noto Naskh Arabic"/>
+                          <a:latin typeface="Vazir"/>
                         </a:defRPr>
                       </a:pPr>
                       <a:r>
@@ -4829,11 +6234,11 @@
                     <a:lstStyle/>
                     <a:p>
                       <a:pPr algn="ctr" a:rtl="1">
-                        <a:defRPr sz="1100">
+                        <a:defRPr sz="1000" b="0">
                           <a:solidFill>
                             <a:srgbClr val="282828"/>
                           </a:solidFill>
-                          <a:latin typeface="Noto Naskh Arabic"/>
+                          <a:latin typeface="Vazir"/>
                         </a:defRPr>
                       </a:pPr>
                       <a:r>
@@ -4853,11 +6258,11 @@
                     <a:lstStyle/>
                     <a:p>
                       <a:pPr algn="ctr" a:rtl="1">
-                        <a:defRPr sz="1100">
+                        <a:defRPr sz="1000" b="0">
                           <a:solidFill>
                             <a:srgbClr val="282828"/>
                           </a:solidFill>
-                          <a:latin typeface="Noto Naskh Arabic"/>
+                          <a:latin typeface="Vazir"/>
                         </a:defRPr>
                       </a:pPr>
                       <a:r>
@@ -4877,11 +6282,11 @@
                     <a:lstStyle/>
                     <a:p>
                       <a:pPr algn="ctr" a:rtl="1">
-                        <a:defRPr sz="1100">
+                        <a:defRPr sz="1000" b="0">
                           <a:solidFill>
                             <a:srgbClr val="282828"/>
                           </a:solidFill>
-                          <a:latin typeface="Noto Naskh Arabic"/>
+                          <a:latin typeface="Vazir"/>
                         </a:defRPr>
                       </a:pPr>
                       <a:r>
@@ -4896,22 +6301,22 @@
                   </a:tcPr>
                 </a:tc>
               </a:tr>
-              <a:tr h="883920">
+              <a:tr h="899160">
                 <a:tc>
                   <a:txBody>
                     <a:bodyPr/>
                     <a:lstStyle/>
                     <a:p>
                       <a:pPr algn="ctr" a:rtl="1">
-                        <a:defRPr sz="1100">
+                        <a:defRPr sz="1000" b="0">
                           <a:solidFill>
                             <a:srgbClr val="282828"/>
                           </a:solidFill>
-                          <a:latin typeface="Noto Naskh Arabic"/>
+                          <a:latin typeface="Vazir"/>
                         </a:defRPr>
                       </a:pPr>
                       <a:r>
-                        <a:t>زمان کوئری تحلیلی</a:t>
+                        <a:t>کوئری تحلیلی</a:t>
                       </a:r>
                     </a:p>
                   </a:txBody>
@@ -4923,11 +6328,11 @@
                     <a:lstStyle/>
                     <a:p>
                       <a:pPr algn="ctr" a:rtl="1">
-                        <a:defRPr sz="1100">
+                        <a:defRPr sz="1000" b="0">
                           <a:solidFill>
                             <a:srgbClr val="282828"/>
                           </a:solidFill>
-                          <a:latin typeface="Noto Naskh Arabic"/>
+                          <a:latin typeface="Vazir"/>
                         </a:defRPr>
                       </a:pPr>
                       <a:r>
@@ -4943,11 +6348,11 @@
                     <a:lstStyle/>
                     <a:p>
                       <a:pPr algn="ctr" a:rtl="1">
-                        <a:defRPr sz="1100">
+                        <a:defRPr sz="1000" b="0">
                           <a:solidFill>
                             <a:srgbClr val="282828"/>
                           </a:solidFill>
-                          <a:latin typeface="Noto Naskh Arabic"/>
+                          <a:latin typeface="Vazir"/>
                         </a:defRPr>
                       </a:pPr>
                       <a:r>
@@ -4963,11 +6368,11 @@
                     <a:lstStyle/>
                     <a:p>
                       <a:pPr algn="ctr" a:rtl="1">
-                        <a:defRPr sz="1100">
+                        <a:defRPr sz="1000" b="0">
                           <a:solidFill>
                             <a:srgbClr val="282828"/>
                           </a:solidFill>
-                          <a:latin typeface="Noto Naskh Arabic"/>
+                          <a:latin typeface="Vazir"/>
                         </a:defRPr>
                       </a:pPr>
                       <a:r>
@@ -4978,22 +6383,22 @@
                   <a:tcPr/>
                 </a:tc>
               </a:tr>
-              <a:tr h="883920">
+              <a:tr h="899160">
                 <a:tc>
                   <a:txBody>
                     <a:bodyPr/>
                     <a:lstStyle/>
                     <a:p>
                       <a:pPr algn="ctr" a:rtl="1">
-                        <a:defRPr sz="1100">
+                        <a:defRPr sz="1000" b="0">
                           <a:solidFill>
                             <a:srgbClr val="282828"/>
                           </a:solidFill>
-                          <a:latin typeface="Noto Naskh Arabic"/>
+                          <a:latin typeface="Vazir"/>
                         </a:defRPr>
                       </a:pPr>
                       <a:r>
-                        <a:t>Dashboard بلادرنگ</a:t>
+                        <a:t>Dashboard</a:t>
                       </a:r>
                     </a:p>
                   </a:txBody>
@@ -5009,11 +6414,11 @@
                     <a:lstStyle/>
                     <a:p>
                       <a:pPr algn="ctr" a:rtl="1">
-                        <a:defRPr sz="1100">
+                        <a:defRPr sz="1000" b="0">
                           <a:solidFill>
                             <a:srgbClr val="282828"/>
                           </a:solidFill>
-                          <a:latin typeface="Noto Naskh Arabic"/>
+                          <a:latin typeface="Vazir"/>
                         </a:defRPr>
                       </a:pPr>
                       <a:r>
@@ -5033,15 +6438,15 @@
                     <a:lstStyle/>
                     <a:p>
                       <a:pPr algn="ctr" a:rtl="1">
-                        <a:defRPr sz="1100">
+                        <a:defRPr sz="1000" b="0">
                           <a:solidFill>
                             <a:srgbClr val="282828"/>
                           </a:solidFill>
-                          <a:latin typeface="Noto Naskh Arabic"/>
+                          <a:latin typeface="Vazir"/>
                         </a:defRPr>
                       </a:pPr>
                       <a:r>
-                        <a:t>فوری</a:t>
+                        <a:t>بلادرنگ</a:t>
                       </a:r>
                     </a:p>
                   </a:txBody>
@@ -5057,15 +6462,15 @@
                     <a:lstStyle/>
                     <a:p>
                       <a:pPr algn="ctr" a:rtl="1">
-                        <a:defRPr sz="1100">
+                        <a:defRPr sz="1000" b="0">
                           <a:solidFill>
                             <a:srgbClr val="282828"/>
                           </a:solidFill>
-                          <a:latin typeface="Noto Naskh Arabic"/>
+                          <a:latin typeface="Vazir"/>
                         </a:defRPr>
                       </a:pPr>
                       <a:r>
-                        <a:t>بلادرنگ</a:t>
+                        <a:t>فوری</a:t>
                       </a:r>
                     </a:p>
                   </a:txBody>
@@ -5076,22 +6481,22 @@
                   </a:tcPr>
                 </a:tc>
               </a:tr>
-              <a:tr h="883920">
+              <a:tr h="899160">
                 <a:tc>
                   <a:txBody>
                     <a:bodyPr/>
                     <a:lstStyle/>
                     <a:p>
                       <a:pPr algn="ctr" a:rtl="1">
-                        <a:defRPr sz="1100">
+                        <a:defRPr sz="1000" b="0">
                           <a:solidFill>
                             <a:srgbClr val="282828"/>
                           </a:solidFill>
-                          <a:latin typeface="Noto Naskh Arabic"/>
+                          <a:latin typeface="Vazir"/>
                         </a:defRPr>
                       </a:pPr>
                       <a:r>
-                        <a:t>پیچیدگی landscape</a:t>
+                        <a:t>پیچیدگی</a:t>
                       </a:r>
                     </a:p>
                   </a:txBody>
@@ -5103,11 +6508,11 @@
                     <a:lstStyle/>
                     <a:p>
                       <a:pPr algn="ctr" a:rtl="1">
-                        <a:defRPr sz="1100">
+                        <a:defRPr sz="1000" b="0">
                           <a:solidFill>
                             <a:srgbClr val="282828"/>
                           </a:solidFill>
-                          <a:latin typeface="Noto Naskh Arabic"/>
+                          <a:latin typeface="Vazir"/>
                         </a:defRPr>
                       </a:pPr>
                       <a:r>
@@ -5123,15 +6528,15 @@
                     <a:lstStyle/>
                     <a:p>
                       <a:pPr algn="ctr" a:rtl="1">
-                        <a:defRPr sz="1100">
+                        <a:defRPr sz="1000" b="0">
                           <a:solidFill>
                             <a:srgbClr val="282828"/>
                           </a:solidFill>
-                          <a:latin typeface="Noto Naskh Arabic"/>
+                          <a:latin typeface="Vazir"/>
                         </a:defRPr>
                       </a:pPr>
                       <a:r>
-                        <a:t>یک پایگاه HANA</a:t>
+                        <a:t>یک HANA</a:t>
                       </a:r>
                     </a:p>
                   </a:txBody>
@@ -5143,11 +6548,11 @@
                     <a:lstStyle/>
                     <a:p>
                       <a:pPr algn="ctr" a:rtl="1">
-                        <a:defRPr sz="1100">
+                        <a:defRPr sz="1000" b="0">
                           <a:solidFill>
                             <a:srgbClr val="282828"/>
                           </a:solidFill>
-                          <a:latin typeface="Noto Naskh Arabic"/>
+                          <a:latin typeface="Vazir"/>
                         </a:defRPr>
                       </a:pPr>
                       <a:r>
@@ -5170,7 +6575,207 @@
 </p:sld>
 </file>
 
-<file path=ppt/slides/slide18.xml><?xml version="1.0" encoding="utf-8"?>
+<file path=ppt/slides/slide23.xml><?xml version="1.0" encoding="utf-8"?>
+<p:sld xmlns:a="http://schemas.openxmlformats.org/drawingml/2006/main" xmlns:p="http://schemas.openxmlformats.org/presentationml/2006/main" xmlns:r="http://schemas.openxmlformats.org/officeDocument/2006/relationships">
+  <p:cSld>
+    <p:spTree>
+      <p:nvGrpSpPr>
+        <p:cNvPr id="1" name=""/>
+        <p:cNvGrpSpPr/>
+        <p:nvPr/>
+      </p:nvGrpSpPr>
+      <p:grpSpPr/>
+      <p:sp>
+        <p:nvSpPr>
+          <p:cNvPr id="2" name="TextBox 1"/>
+          <p:cNvSpPr txBox="1"/>
+          <p:nvPr/>
+        </p:nvSpPr>
+        <p:spPr>
+          <a:xfrm>
+            <a:off x="365760" y="228600"/>
+            <a:ext cx="8412480" cy="640080"/>
+          </a:xfrm>
+          <a:prstGeom prst="rect">
+            <a:avLst/>
+          </a:prstGeom>
+          <a:noFill/>
+        </p:spPr>
+        <p:txBody>
+          <a:bodyPr wrap="none">
+            <a:spAutoFit/>
+          </a:bodyPr>
+          <a:lstStyle/>
+          <a:p>
+            <a:pPr algn="r" a:rtl="1">
+              <a:defRPr sz="2400" b="1">
+                <a:solidFill>
+                  <a:srgbClr val="003366"/>
+                </a:solidFill>
+                <a:latin typeface="Vazir"/>
+              </a:defRPr>
+            </a:pPr>
+            <a:r>
+              <a:t>HTAP / Translytical Processing (توضیحات)</a:t>
+            </a:r>
+          </a:p>
+        </p:txBody>
+      </p:sp>
+      <p:sp>
+        <p:nvSpPr>
+          <p:cNvPr id="3" name="Rectangle 2"/>
+          <p:cNvSpPr/>
+          <p:nvPr/>
+        </p:nvSpPr>
+        <p:spPr>
+          <a:xfrm>
+            <a:off x="365760" y="868680"/>
+            <a:ext cx="8412480" cy="18288"/>
+          </a:xfrm>
+          <a:prstGeom prst="rect">
+            <a:avLst/>
+          </a:prstGeom>
+          <a:solidFill>
+            <a:srgbClr val="006699"/>
+          </a:solidFill>
+          <a:ln>
+            <a:noFill/>
+          </a:ln>
+        </p:spPr>
+        <p:style>
+          <a:lnRef idx="1">
+            <a:schemeClr val="accent1"/>
+          </a:lnRef>
+          <a:fillRef idx="3">
+            <a:schemeClr val="accent1"/>
+          </a:fillRef>
+          <a:effectRef idx="2">
+            <a:schemeClr val="accent1"/>
+          </a:effectRef>
+          <a:fontRef idx="minor">
+            <a:schemeClr val="lt1"/>
+          </a:fontRef>
+        </p:style>
+        <p:txBody>
+          <a:bodyPr rtlCol="0" anchor="ctr"/>
+          <a:lstStyle/>
+          <a:p>
+            <a:pPr algn="ctr"/>
+          </a:p>
+        </p:txBody>
+      </p:sp>
+      <p:sp>
+        <p:nvSpPr>
+          <p:cNvPr id="4" name="TextBox 3"/>
+          <p:cNvSpPr txBox="1"/>
+          <p:nvPr/>
+        </p:nvSpPr>
+        <p:spPr>
+          <a:xfrm>
+            <a:off x="411480" y="960120"/>
+            <a:ext cx="8321040" cy="5669280"/>
+          </a:xfrm>
+          <a:prstGeom prst="rect">
+            <a:avLst/>
+          </a:prstGeom>
+          <a:noFill/>
+        </p:spPr>
+        <p:txBody>
+          <a:bodyPr wrap="square">
+            <a:spAutoFit/>
+          </a:bodyPr>
+          <a:lstStyle/>
+          <a:p>
+            <a:pPr algn="r" a:rtl="1">
+              <a:spcAft>
+                <a:spcPts val="600"/>
+              </a:spcAft>
+              <a:defRPr sz="1400" b="0">
+                <a:solidFill>
+                  <a:srgbClr val="282828"/>
+                </a:solidFill>
+                <a:latin typeface="Vazir"/>
+              </a:defRPr>
+            </a:pPr>
+            <a:r>
+              <a:t>• در سیستم‌های قدیمی: OLTP (تراکنش) و OLAP (تحلیل) روی دو DB جدا — داده شبانه به BW منتقل می‌شد.</a:t>
+            </a:r>
+          </a:p>
+          <a:p>
+            <a:pPr algn="r" a:rtl="1">
+              <a:spcAft>
+                <a:spcPts val="600"/>
+              </a:spcAft>
+              <a:defRPr sz="1400" b="0">
+                <a:solidFill>
+                  <a:srgbClr val="282828"/>
+                </a:solidFill>
+                <a:latin typeface="Vazir"/>
+              </a:defRPr>
+            </a:pPr>
+            <a:r>
+              <a:t>• نتیجه: dashboard همیشه دیروز را نشان می‌داد، نه وضعیت لحظه‌ای.</a:t>
+            </a:r>
+          </a:p>
+          <a:p>
+            <a:pPr algn="r" a:rtl="1">
+              <a:spcAft>
+                <a:spcPts val="600"/>
+              </a:spcAft>
+              <a:defRPr sz="1400" b="0">
+                <a:solidFill>
+                  <a:srgbClr val="282828"/>
+                </a:solidFill>
+                <a:latin typeface="Vazir"/>
+              </a:defRPr>
+            </a:pPr>
+            <a:r>
+              <a:t>• S/4HANA هر دو را روی یک پلتفرم in-memory اجرا می‌کند — Translytical Processing.</a:t>
+            </a:r>
+          </a:p>
+          <a:p>
+            <a:pPr algn="r" a:rtl="1">
+              <a:spcAft>
+                <a:spcPts val="600"/>
+              </a:spcAft>
+              <a:defRPr sz="1400" b="0">
+                <a:solidFill>
+                  <a:srgbClr val="282828"/>
+                </a:solidFill>
+                <a:latin typeface="Vazir"/>
+              </a:defRPr>
+            </a:pPr>
+            <a:r>
+              <a:t>• مثال: با ثبت سفارش فروش (OLTP)، مدیر بلافاصله گزارش سود و موجودی (OLAP) را می‌بیند.</a:t>
+            </a:r>
+          </a:p>
+          <a:p>
+            <a:pPr algn="r" a:rtl="1">
+              <a:spcAft>
+                <a:spcPts val="600"/>
+              </a:spcAft>
+              <a:defRPr sz="1400" b="0">
+                <a:solidFill>
+                  <a:srgbClr val="282828"/>
+                </a:solidFill>
+                <a:latin typeface="Vazir"/>
+              </a:defRPr>
+            </a:pPr>
+            <a:r>
+              <a:t>• ETL حذف می‌شود → کاهش latency، ساده‌سازی landscape و هزینه عملیاتی.</a:t>
+            </a:r>
+          </a:p>
+        </p:txBody>
+      </p:sp>
+    </p:spTree>
+  </p:cSld>
+  <p:clrMapOvr>
+    <a:masterClrMapping/>
+  </p:clrMapOvr>
+</p:sld>
+</file>
+
+<file path=ppt/slides/slide24.xml><?xml version="1.0" encoding="utf-8"?>
 <p:sld xmlns:a="http://schemas.openxmlformats.org/drawingml/2006/main" xmlns:p="http://schemas.openxmlformats.org/presentationml/2006/main" xmlns:r="http://schemas.openxmlformats.org/officeDocument/2006/relationships">
   <p:cSld>
     <p:bg>
@@ -5215,7 +6820,7 @@
                 <a:solidFill>
                   <a:srgbClr val="FFFFFF"/>
                 </a:solidFill>
-                <a:latin typeface="Noto Naskh Arabic"/>
+                <a:latin typeface="Vazir"/>
               </a:defRPr>
             </a:pPr>
             <a:r>
@@ -5232,7 +6837,7 @@
 </p:sld>
 </file>
 
-<file path=ppt/slides/slide19.xml><?xml version="1.0" encoding="utf-8"?>
+<file path=ppt/slides/slide25.xml><?xml version="1.0" encoding="utf-8"?>
 <p:sld xmlns:a="http://schemas.openxmlformats.org/drawingml/2006/main" xmlns:p="http://schemas.openxmlformats.org/presentationml/2006/main" xmlns:r="http://schemas.openxmlformats.org/officeDocument/2006/relationships">
   <p:cSld>
     <p:spTree>
@@ -5250,8 +6855,8 @@
         </p:nvSpPr>
         <p:spPr>
           <a:xfrm>
-            <a:off x="365760" y="274320"/>
-            <a:ext cx="8412480" cy="731520"/>
+            <a:off x="365760" y="228600"/>
+            <a:ext cx="8412480" cy="640080"/>
           </a:xfrm>
           <a:prstGeom prst="rect">
             <a:avLst/>
@@ -5265,15 +6870,15 @@
           <a:lstStyle/>
           <a:p>
             <a:pPr algn="r" a:rtl="1">
-              <a:defRPr sz="2600" b="1">
+              <a:defRPr sz="2400" b="1">
                 <a:solidFill>
                   <a:srgbClr val="003366"/>
                 </a:solidFill>
-                <a:latin typeface="Noto Naskh Arabic"/>
-              </a:defRPr>
-            </a:pPr>
-            <a:r>
-              <a:t>پردازش Push-Down چیست؟</a:t>
+                <a:latin typeface="Vazir"/>
+              </a:defRPr>
+            </a:pPr>
+            <a:r>
+              <a:t>پردازش Push-Down</a:t>
             </a:r>
           </a:p>
         </p:txBody>
@@ -5286,7 +6891,7 @@
         </p:nvSpPr>
         <p:spPr>
           <a:xfrm>
-            <a:off x="365760" y="960120"/>
+            <a:off x="365760" y="868680"/>
             <a:ext cx="8412480" cy="18288"/>
           </a:xfrm>
           <a:prstGeom prst="rect">
@@ -5321,16 +6926,40 @@
           </a:p>
         </p:txBody>
       </p:sp>
-      <p:sp>
-        <p:nvSpPr>
-          <p:cNvPr id="4" name="TextBox 3"/>
+      <p:pic>
+        <p:nvPicPr>
+          <p:cNvPr id="4" name="Picture 3" descr="pushdown_flow.png"/>
+          <p:cNvPicPr>
+            <a:picLocks noChangeAspect="1"/>
+          </p:cNvPicPr>
+          <p:nvPr/>
+        </p:nvPicPr>
+        <p:blipFill>
+          <a:blip r:embed="rId2"/>
+          <a:stretch>
+            <a:fillRect/>
+          </a:stretch>
+        </p:blipFill>
+        <p:spPr>
+          <a:xfrm>
+            <a:off x="548640" y="1051560"/>
+            <a:ext cx="8046720" cy="4389120"/>
+          </a:xfrm>
+          <a:prstGeom prst="rect">
+            <a:avLst/>
+          </a:prstGeom>
+        </p:spPr>
+      </p:pic>
+      <p:sp>
+        <p:nvSpPr>
+          <p:cNvPr id="5" name="TextBox 4"/>
           <p:cNvSpPr txBox="1"/>
           <p:nvPr/>
         </p:nvSpPr>
         <p:spPr>
           <a:xfrm>
-            <a:off x="457200" y="1097280"/>
-            <a:ext cx="8229600" cy="5303520"/>
+            <a:off x="457200" y="6263640"/>
+            <a:ext cx="8229600" cy="457200"/>
           </a:xfrm>
           <a:prstGeom prst="rect">
             <a:avLst/>
@@ -5338,88 +6967,21 @@
           <a:noFill/>
         </p:spPr>
         <p:txBody>
-          <a:bodyPr wrap="square">
+          <a:bodyPr wrap="none">
             <a:spAutoFit/>
           </a:bodyPr>
           <a:lstStyle/>
           <a:p>
-            <a:pPr algn="r" a:rtl="1">
-              <a:spcAft>
-                <a:spcPts val="800"/>
-              </a:spcAft>
-              <a:defRPr sz="1700">
-                <a:solidFill>
-                  <a:srgbClr val="282828"/>
-                </a:solidFill>
-                <a:latin typeface="Noto Naskh Arabic"/>
-              </a:defRPr>
-            </a:pPr>
-            <a:r>
-              <a:t>• در SAP سنتی: منطق کسب‌وکار در Application Server (ABAP) اجرا می‌شد</a:t>
-            </a:r>
-          </a:p>
-          <a:p>
-            <a:pPr algn="r" a:rtl="1">
-              <a:spcAft>
-                <a:spcPts val="800"/>
-              </a:spcAft>
-              <a:defRPr sz="1700">
-                <a:solidFill>
-                  <a:srgbClr val="282828"/>
-                </a:solidFill>
-                <a:latin typeface="Noto Naskh Arabic"/>
-              </a:defRPr>
-            </a:pPr>
-            <a:r>
-              <a:t>• داده خام از DB به App Server منتقل و در حلقه پردازش می‌شد → بار شبکه بالا</a:t>
-            </a:r>
-          </a:p>
-          <a:p>
-            <a:pPr algn="r" a:rtl="1">
-              <a:spcAft>
-                <a:spcPts val="800"/>
-              </a:spcAft>
-              <a:defRPr sz="1700">
-                <a:solidFill>
-                  <a:srgbClr val="282828"/>
-                </a:solidFill>
-                <a:latin typeface="Noto Naskh Arabic"/>
-              </a:defRPr>
-            </a:pPr>
-            <a:r>
-              <a:t>• S/4HANA: محاسبات به لایه پایگاه‌داده «فرو رانده» می‌شوند</a:t>
-            </a:r>
-          </a:p>
-          <a:p>
-            <a:pPr algn="r" a:rtl="1">
-              <a:spcAft>
-                <a:spcPts val="800"/>
-              </a:spcAft>
-              <a:defRPr sz="1700">
-                <a:solidFill>
-                  <a:srgbClr val="282828"/>
-                </a:solidFill>
-                <a:latin typeface="Noto Naskh Arabic"/>
-              </a:defRPr>
-            </a:pPr>
-            <a:r>
-              <a:t>• HANA تجمیع، join و filter را درون حافظه انجام می‌دهد</a:t>
-            </a:r>
-          </a:p>
-          <a:p>
-            <a:pPr algn="r" a:rtl="1">
-              <a:spcAft>
-                <a:spcPts val="800"/>
-              </a:spcAft>
-              <a:defRPr sz="1700">
-                <a:solidFill>
-                  <a:srgbClr val="282828"/>
-                </a:solidFill>
-                <a:latin typeface="Noto Naskh Arabic"/>
-              </a:defRPr>
-            </a:pPr>
-            <a:r>
-              <a:t>• فقط نتیجه نهایی (نه داده خام) به App Server برمی‌گردد — کاهش ۸۰–۹۵٪ انتقال داده</a:t>
+            <a:pPr algn="ctr" a:rtl="1">
+              <a:defRPr sz="1200" b="0">
+                <a:solidFill>
+                  <a:srgbClr val="5A5A5A"/>
+                </a:solidFill>
+                <a:latin typeface="Vazir"/>
+              </a:defRPr>
+            </a:pPr>
+            <a:r>
+              <a:t>شکل ۶: جریان داده در روش سنتی در برابر Push-Down</a:t>
             </a:r>
           </a:p>
         </p:txBody>
@@ -5432,7 +6994,7 @@
 </p:sld>
 </file>
 
-<file path=ppt/slides/slide2.xml><?xml version="1.0" encoding="utf-8"?>
+<file path=ppt/slides/slide26.xml><?xml version="1.0" encoding="utf-8"?>
 <p:sld xmlns:a="http://schemas.openxmlformats.org/drawingml/2006/main" xmlns:p="http://schemas.openxmlformats.org/presentationml/2006/main" xmlns:r="http://schemas.openxmlformats.org/officeDocument/2006/relationships">
   <p:cSld>
     <p:spTree>
@@ -5450,8 +7012,8 @@
         </p:nvSpPr>
         <p:spPr>
           <a:xfrm>
-            <a:off x="365760" y="274320"/>
-            <a:ext cx="8412480" cy="731520"/>
+            <a:off x="365760" y="228600"/>
+            <a:ext cx="8412480" cy="640080"/>
           </a:xfrm>
           <a:prstGeom prst="rect">
             <a:avLst/>
@@ -5465,15 +7027,15 @@
           <a:lstStyle/>
           <a:p>
             <a:pPr algn="r" a:rtl="1">
-              <a:defRPr sz="2600" b="1">
+              <a:defRPr sz="2400" b="1">
                 <a:solidFill>
                   <a:srgbClr val="003366"/>
                 </a:solidFill>
-                <a:latin typeface="Noto Naskh Arabic"/>
-              </a:defRPr>
-            </a:pPr>
-            <a:r>
-              <a:t>چکیده</a:t>
+                <a:latin typeface="Vazir"/>
+              </a:defRPr>
+            </a:pPr>
+            <a:r>
+              <a:t>پردازش Push-Down — توضیحات کامل</a:t>
             </a:r>
           </a:p>
         </p:txBody>
@@ -5486,7 +7048,7 @@
         </p:nvSpPr>
         <p:spPr>
           <a:xfrm>
-            <a:off x="365760" y="960120"/>
+            <a:off x="365760" y="868680"/>
             <a:ext cx="8412480" cy="18288"/>
           </a:xfrm>
           <a:prstGeom prst="rect">
@@ -5529,8 +7091,8 @@
         </p:nvSpPr>
         <p:spPr>
           <a:xfrm>
-            <a:off x="457200" y="1097280"/>
-            <a:ext cx="8229600" cy="5303520"/>
+            <a:off x="411480" y="960120"/>
+            <a:ext cx="8321040" cy="5669280"/>
           </a:xfrm>
           <a:prstGeom prst="rect">
             <a:avLst/>
@@ -5545,65 +7107,97 @@
           <a:p>
             <a:pPr algn="r" a:rtl="1">
               <a:spcAft>
-                <a:spcPts val="800"/>
+                <a:spcPts val="600"/>
               </a:spcAft>
-              <a:defRPr sz="1700">
+              <a:defRPr sz="1400" b="0">
                 <a:solidFill>
                   <a:srgbClr val="282828"/>
                 </a:solidFill>
-                <a:latin typeface="Noto Naskh Arabic"/>
-              </a:defRPr>
-            </a:pPr>
-            <a:r>
-              <a:t>• هدف: بررسی چگونگی دستیابی SAP S/4HANA به سرعت پردازش فوق‌العاده از طریق معماری درون‌حافظه‌ای</a:t>
+                <a:latin typeface="Vazir"/>
+              </a:defRPr>
+            </a:pPr>
+            <a:r>
+              <a:t>• روش سنتی SAP: منطق کسب‌وکار در Application Server (ABAP) اجرا می‌شد. DB فقط store/retrieve می‌کرد.</a:t>
             </a:r>
           </a:p>
           <a:p>
             <a:pPr algn="r" a:rtl="1">
               <a:spcAft>
-                <a:spcPts val="800"/>
+                <a:spcPts val="600"/>
               </a:spcAft>
-              <a:defRPr sz="1700">
+              <a:defRPr sz="1400" b="0">
                 <a:solidFill>
                   <a:srgbClr val="282828"/>
                 </a:solidFill>
-                <a:latin typeface="Noto Naskh Arabic"/>
-              </a:defRPr>
-            </a:pPr>
-            <a:r>
-              <a:t>• روش: مطالعه مستندات SAP HANA، اجرای کوئری‌های SQL، CDS Views و SQL Script، و تحلیل با ابزارهای ST05، ST12، SAT، DBACOCKPIT و PlanViz</a:t>
+                <a:latin typeface="Vazir"/>
+              </a:defRPr>
+            </a:pPr>
+            <a:r>
+              <a:t>• مشکل: SELECT * → انتقال میلیون‌ها سطر به App Server → LOOP AT → SELECT SINGLE — بار شبکه و CPU بالا.</a:t>
             </a:r>
           </a:p>
           <a:p>
             <a:pPr algn="r" a:rtl="1">
               <a:spcAft>
-                <a:spcPts val="800"/>
+                <a:spcPts val="600"/>
               </a:spcAft>
-              <a:defRPr sz="1700">
+              <a:defRPr sz="1400" b="0">
                 <a:solidFill>
                   <a:srgbClr val="282828"/>
                 </a:solidFill>
-                <a:latin typeface="Noto Naskh Arabic"/>
-              </a:defRPr>
-            </a:pPr>
-            <a:r>
-              <a:t>• یافته‌ها: ذخیره‌سازی ستونی، فشرده‌سازی Dictionary/Vector، پردازش Set-based، ایندکس‌گذاری و پارتیشن‌بندی کارایی را به‌شدت افزایش می‌دهند</a:t>
+                <a:latin typeface="Vazir"/>
+              </a:defRPr>
+            </a:pPr>
+            <a:r>
+              <a:t>• Push-Down: منطق به DB «فرو رانده» می‌شود — HANA join، aggregate و filter را در RAM انجام می‌دهد.</a:t>
             </a:r>
           </a:p>
           <a:p>
             <a:pPr algn="r" a:rtl="1">
               <a:spcAft>
-                <a:spcPts val="800"/>
+                <a:spcPts val="600"/>
               </a:spcAft>
-              <a:defRPr sz="1700">
+              <a:defRPr sz="1400" b="0">
                 <a:solidFill>
                   <a:srgbClr val="282828"/>
                 </a:solidFill>
-                <a:latin typeface="Noto Naskh Arabic"/>
-              </a:defRPr>
-            </a:pPr>
-            <a:r>
-              <a:t>• نتیجه: ترکیب طراحی درون‌حافظه‌ای با بهینه‌سازی‌های لایه پایگاه‌داده، پایه پردازش بلادرنگ S/4HANA است</a:t>
+                <a:latin typeface="Vazir"/>
+              </a:defRPr>
+            </a:pPr>
+            <a:r>
+              <a:t>• فقط نتیجه نهایی (مثلاً یک سطر SUM) به App Server برمی‌گردد — کاهش ۸۰–۹۵٪ transfer.</a:t>
+            </a:r>
+          </a:p>
+          <a:p>
+            <a:pPr algn="r" a:rtl="1">
+              <a:spcAft>
+                <a:spcPts val="600"/>
+              </a:spcAft>
+              <a:defRPr sz="1400" b="0">
+                <a:solidFill>
+                  <a:srgbClr val="282828"/>
+                </a:solidFill>
+                <a:latin typeface="Vazir"/>
+              </a:defRPr>
+            </a:pPr>
+            <a:r>
+              <a:t>• پیاده‌سازی: CDS Views، AMDP (ABAP Managed DB Procedures)، SQL Script.</a:t>
+            </a:r>
+          </a:p>
+          <a:p>
+            <a:pPr algn="r" a:rtl="1">
+              <a:spcAft>
+                <a:spcPts val="600"/>
+              </a:spcAft>
+              <a:defRPr sz="1400" b="0">
+                <a:solidFill>
+                  <a:srgbClr val="282828"/>
+                </a:solidFill>
+                <a:latin typeface="Vazir"/>
+              </a:defRPr>
+            </a:pPr>
+            <a:r>
+              <a:t>• HANA به‌عنوان columnar + parallel engine، محاسبات را بسیار سریع‌تر از ABAP loop انجام می‌دهد.</a:t>
             </a:r>
           </a:p>
         </p:txBody>
@@ -5616,7 +7210,7 @@
 </p:sld>
 </file>
 
-<file path=ppt/slides/slide20.xml><?xml version="1.0" encoding="utf-8"?>
+<file path=ppt/slides/slide27.xml><?xml version="1.0" encoding="utf-8"?>
 <p:sld xmlns:a="http://schemas.openxmlformats.org/drawingml/2006/main" xmlns:p="http://schemas.openxmlformats.org/presentationml/2006/main" xmlns:r="http://schemas.openxmlformats.org/officeDocument/2006/relationships">
   <p:cSld>
     <p:spTree>
@@ -5634,8 +7228,8 @@
         </p:nvSpPr>
         <p:spPr>
           <a:xfrm>
-            <a:off x="365760" y="274320"/>
-            <a:ext cx="8412480" cy="731520"/>
+            <a:off x="365760" y="228600"/>
+            <a:ext cx="8412480" cy="640080"/>
           </a:xfrm>
           <a:prstGeom prst="rect">
             <a:avLst/>
@@ -5649,15 +7243,15 @@
           <a:lstStyle/>
           <a:p>
             <a:pPr algn="r" a:rtl="1">
-              <a:defRPr sz="2600" b="1">
+              <a:defRPr sz="2400" b="1">
                 <a:solidFill>
                   <a:srgbClr val="003366"/>
                 </a:solidFill>
-                <a:latin typeface="Noto Naskh Arabic"/>
-              </a:defRPr>
-            </a:pPr>
-            <a:r>
-              <a:t>طراحی کوئری (Query Design)</a:t>
+                <a:latin typeface="Vazir"/>
+              </a:defRPr>
+            </a:pPr>
+            <a:r>
+              <a:t>طراحی کوئری (Query Design) — بهترین شیوه‌ها</a:t>
             </a:r>
           </a:p>
         </p:txBody>
@@ -5670,7 +7264,7 @@
         </p:nvSpPr>
         <p:spPr>
           <a:xfrm>
-            <a:off x="365760" y="960120"/>
+            <a:off x="365760" y="868680"/>
             <a:ext cx="8412480" cy="18288"/>
           </a:xfrm>
           <a:prstGeom prst="rect">
@@ -5713,8 +7307,8 @@
         </p:nvSpPr>
         <p:spPr>
           <a:xfrm>
-            <a:off x="457200" y="1097280"/>
-            <a:ext cx="8229600" cy="5303520"/>
+            <a:off x="411480" y="960120"/>
+            <a:ext cx="8321040" cy="5669280"/>
           </a:xfrm>
           <a:prstGeom prst="rect">
             <a:avLst/>
@@ -5729,81 +7323,97 @@
           <a:p>
             <a:pPr algn="r" a:rtl="1">
               <a:spcAft>
-                <a:spcPts val="800"/>
+                <a:spcPts val="600"/>
               </a:spcAft>
-              <a:defRPr sz="1700">
+              <a:defRPr sz="1400" b="0">
                 <a:solidFill>
                   <a:srgbClr val="282828"/>
                 </a:solidFill>
-                <a:latin typeface="Noto Naskh Arabic"/>
-              </a:defRPr>
-            </a:pPr>
-            <a:r>
-              <a:t>• به‌جای ABAP Loop از Join، CDS View و Set-based logic استفاده کنید</a:t>
+                <a:latin typeface="Vazir"/>
+              </a:defRPr>
+            </a:pPr>
+            <a:r>
+              <a:t>• به‌جای ABAP Loop از JOIN، CDS View و set-based logic استفاده کنید.</a:t>
             </a:r>
           </a:p>
           <a:p>
             <a:pPr algn="r" a:rtl="1">
               <a:spcAft>
-                <a:spcPts val="800"/>
+                <a:spcPts val="600"/>
               </a:spcAft>
-              <a:defRPr sz="1700">
+              <a:defRPr sz="1400" b="0">
                 <a:solidFill>
                   <a:srgbClr val="282828"/>
                 </a:solidFill>
-                <a:latin typeface="Noto Naskh Arabic"/>
-              </a:defRPr>
-            </a:pPr>
-            <a:r>
-              <a:t>• CDS Views: Interface (I_)، Composite (C_)، Consumption (Z_/Y_)</a:t>
+                <a:latin typeface="Vazir"/>
+              </a:defRPr>
+            </a:pPr>
+            <a:r>
+              <a:t>• CDS Views لایه‌بندی: Interface (I_) برای raw data، Composite (C_) برای join/enrichment، Consumption (Z_/Y_) برای Fiori/OData.</a:t>
             </a:r>
           </a:p>
           <a:p>
             <a:pPr algn="r" a:rtl="1">
               <a:spcAft>
-                <a:spcPts val="800"/>
+                <a:spcPts val="600"/>
               </a:spcAft>
-              <a:defRPr sz="1700">
+              <a:defRPr sz="1400" b="0">
                 <a:solidFill>
                   <a:srgbClr val="282828"/>
                 </a:solidFill>
-                <a:latin typeface="Noto Naskh Arabic"/>
-              </a:defRPr>
-            </a:pPr>
-            <a:r>
-              <a:t>• فیلتر را زود اعمال کنید (WHERE قبل از HAVING)</a:t>
+                <a:latin typeface="Vazir"/>
+              </a:defRPr>
+            </a:pPr>
+            <a:r>
+              <a:t>• فیلتر را زود اعمال کنید: WHERE قبل از HAVING — کاهش داده قبل از join.</a:t>
             </a:r>
           </a:p>
           <a:p>
             <a:pPr algn="r" a:rtl="1">
               <a:spcAft>
-                <a:spcPts val="800"/>
+                <a:spcPts val="600"/>
               </a:spcAft>
-              <a:defRPr sz="1700">
+              <a:defRPr sz="1400" b="0">
                 <a:solidFill>
                   <a:srgbClr val="282828"/>
                 </a:solidFill>
-                <a:latin typeface="Noto Naskh Arabic"/>
-              </a:defRPr>
-            </a:pPr>
-            <a:r>
-              <a:t>• از Window Functions استفاده کنید: ROW_NUMBER، RANK، LEAD، LAG</a:t>
+                <a:latin typeface="Vazir"/>
+              </a:defRPr>
+            </a:pPr>
+            <a:r>
+              <a:t>• Window Functions: ROW_NUMBER، RANK، LEAD، LAG — محاسبات analytical بدون GROUP BY.</a:t>
             </a:r>
           </a:p>
           <a:p>
             <a:pPr algn="r" a:rtl="1">
               <a:spcAft>
-                <a:spcPts val="800"/>
+                <a:spcPts val="600"/>
               </a:spcAft>
-              <a:defRPr sz="1700">
+              <a:defRPr sz="1400" b="0">
                 <a:solidFill>
                   <a:srgbClr val="282828"/>
                 </a:solidFill>
-                <a:latin typeface="Noto Naskh Arabic"/>
-              </a:defRPr>
-            </a:pPr>
-            <a:r>
-              <a:t>• اصول Clean Core: namespace Z/Y، Extension Views، Adapt before Build</a:t>
+                <a:latin typeface="Vazir"/>
+              </a:defRPr>
+            </a:pPr>
+            <a:r>
+              <a:t>• Associations به‌جای join مستقیم — خوانایی و filter pushdown بهتر.</a:t>
+            </a:r>
+          </a:p>
+          <a:p>
+            <a:pPr algn="r" a:rtl="1">
+              <a:spcAft>
+                <a:spcPts val="600"/>
+              </a:spcAft>
+              <a:defRPr sz="1400" b="0">
+                <a:solidFill>
+                  <a:srgbClr val="282828"/>
+                </a:solidFill>
+                <a:latin typeface="Vazir"/>
+              </a:defRPr>
+            </a:pPr>
+            <a:r>
+              <a:t>• Clean Core: namespace Z/Y، Extension Views، Adapt before Build — سازگاری با upgrade.</a:t>
             </a:r>
           </a:p>
         </p:txBody>
@@ -5816,7 +7426,7 @@
 </p:sld>
 </file>
 
-<file path=ppt/slides/slide21.xml><?xml version="1.0" encoding="utf-8"?>
+<file path=ppt/slides/slide28.xml><?xml version="1.0" encoding="utf-8"?>
 <p:sld xmlns:a="http://schemas.openxmlformats.org/drawingml/2006/main" xmlns:p="http://schemas.openxmlformats.org/presentationml/2006/main" xmlns:r="http://schemas.openxmlformats.org/officeDocument/2006/relationships">
   <p:cSld>
     <p:spTree>
@@ -5834,7 +7444,7 @@
         </p:nvSpPr>
         <p:spPr>
           <a:xfrm>
-            <a:off x="365760" y="274320"/>
+            <a:off x="365760" y="228600"/>
             <a:ext cx="8412480" cy="640080"/>
           </a:xfrm>
           <a:prstGeom prst="rect">
@@ -5849,30 +7459,230 @@
           <a:lstStyle/>
           <a:p>
             <a:pPr algn="r" a:rtl="1">
-              <a:defRPr sz="2200" b="1">
+              <a:defRPr sz="2400" b="1">
                 <a:solidFill>
                   <a:srgbClr val="003366"/>
                 </a:solidFill>
-                <a:latin typeface="Noto Naskh Arabic"/>
+                <a:latin typeface="Vazir"/>
               </a:defRPr>
             </a:pPr>
             <a:r>
               <a:t>مزایای بهینه‌سازی کوئری</a:t>
             </a:r>
+          </a:p>
+        </p:txBody>
+      </p:sp>
+      <p:sp>
+        <p:nvSpPr>
+          <p:cNvPr id="3" name="Rectangle 2"/>
+          <p:cNvSpPr/>
+          <p:nvPr/>
+        </p:nvSpPr>
+        <p:spPr>
+          <a:xfrm>
+            <a:off x="365760" y="868680"/>
+            <a:ext cx="8412480" cy="18288"/>
+          </a:xfrm>
+          <a:prstGeom prst="rect">
+            <a:avLst/>
+          </a:prstGeom>
+          <a:solidFill>
+            <a:srgbClr val="006699"/>
+          </a:solidFill>
+          <a:ln>
+            <a:noFill/>
+          </a:ln>
+        </p:spPr>
+        <p:style>
+          <a:lnRef idx="1">
+            <a:schemeClr val="accent1"/>
+          </a:lnRef>
+          <a:fillRef idx="3">
+            <a:schemeClr val="accent1"/>
+          </a:fillRef>
+          <a:effectRef idx="2">
+            <a:schemeClr val="accent1"/>
+          </a:effectRef>
+          <a:fontRef idx="minor">
+            <a:schemeClr val="lt1"/>
+          </a:fontRef>
+        </p:style>
+        <p:txBody>
+          <a:bodyPr rtlCol="0" anchor="ctr"/>
+          <a:lstStyle/>
+          <a:p>
+            <a:pPr algn="ctr"/>
+          </a:p>
+        </p:txBody>
+      </p:sp>
+      <p:pic>
+        <p:nvPicPr>
+          <p:cNvPr id="4" name="Picture 3" descr="query_optimization.png"/>
+          <p:cNvPicPr>
+            <a:picLocks noChangeAspect="1"/>
+          </p:cNvPicPr>
+          <p:nvPr/>
+        </p:nvPicPr>
+        <p:blipFill>
+          <a:blip r:embed="rId2"/>
+          <a:stretch>
+            <a:fillRect/>
+          </a:stretch>
+        </p:blipFill>
+        <p:spPr>
+          <a:xfrm>
+            <a:off x="548640" y="1051560"/>
+            <a:ext cx="8046720" cy="4882280"/>
+          </a:xfrm>
+          <a:prstGeom prst="rect">
+            <a:avLst/>
+          </a:prstGeom>
+        </p:spPr>
+      </p:pic>
+      <p:sp>
+        <p:nvSpPr>
+          <p:cNvPr id="5" name="TextBox 4"/>
+          <p:cNvSpPr txBox="1"/>
+          <p:nvPr/>
+        </p:nvSpPr>
+        <p:spPr>
+          <a:xfrm>
+            <a:off x="457200" y="6263640"/>
+            <a:ext cx="8229600" cy="457200"/>
+          </a:xfrm>
+          <a:prstGeom prst="rect">
+            <a:avLst/>
+          </a:prstGeom>
+          <a:noFill/>
+        </p:spPr>
+        <p:txBody>
+          <a:bodyPr wrap="none">
+            <a:spAutoFit/>
+          </a:bodyPr>
+          <a:lstStyle/>
+          <a:p>
+            <a:pPr algn="ctr" a:rtl="1">
+              <a:defRPr sz="1200" b="0">
+                <a:solidFill>
+                  <a:srgbClr val="5A5A5A"/>
+                </a:solidFill>
+                <a:latin typeface="Vazir"/>
+              </a:defRPr>
+            </a:pPr>
+            <a:r>
+              <a:t>شکل ۷: بهبود سرعت با Push-Down در HANA</a:t>
+            </a:r>
+          </a:p>
+        </p:txBody>
+      </p:sp>
+    </p:spTree>
+  </p:cSld>
+  <p:clrMapOvr>
+    <a:masterClrMapping/>
+  </p:clrMapOvr>
+</p:sld>
+</file>
+
+<file path=ppt/slides/slide29.xml><?xml version="1.0" encoding="utf-8"?>
+<p:sld xmlns:a="http://schemas.openxmlformats.org/drawingml/2006/main" xmlns:p="http://schemas.openxmlformats.org/presentationml/2006/main" xmlns:r="http://schemas.openxmlformats.org/officeDocument/2006/relationships">
+  <p:cSld>
+    <p:spTree>
+      <p:nvGrpSpPr>
+        <p:cNvPr id="1" name=""/>
+        <p:cNvGrpSpPr/>
+        <p:nvPr/>
+      </p:nvGrpSpPr>
+      <p:grpSpPr/>
+      <p:sp>
+        <p:nvSpPr>
+          <p:cNvPr id="2" name="TextBox 1"/>
+          <p:cNvSpPr txBox="1"/>
+          <p:nvPr/>
+        </p:nvSpPr>
+        <p:spPr>
+          <a:xfrm>
+            <a:off x="365760" y="228600"/>
+            <a:ext cx="8412480" cy="640080"/>
+          </a:xfrm>
+          <a:prstGeom prst="rect">
+            <a:avLst/>
+          </a:prstGeom>
+          <a:noFill/>
+        </p:spPr>
+        <p:txBody>
+          <a:bodyPr wrap="none">
+            <a:spAutoFit/>
+          </a:bodyPr>
+          <a:lstStyle/>
+          <a:p>
+            <a:pPr algn="r" a:rtl="1">
+              <a:defRPr sz="2400" b="1">
+                <a:solidFill>
+                  <a:srgbClr val="003366"/>
+                </a:solidFill>
+                <a:latin typeface="Vazir"/>
+              </a:defRPr>
+            </a:pPr>
+            <a:r>
+              <a:t>جدول بهینه‌سازی کوئری</a:t>
+            </a:r>
+          </a:p>
+        </p:txBody>
+      </p:sp>
+      <p:sp>
+        <p:nvSpPr>
+          <p:cNvPr id="3" name="Rectangle 2"/>
+          <p:cNvSpPr/>
+          <p:nvPr/>
+        </p:nvSpPr>
+        <p:spPr>
+          <a:xfrm>
+            <a:off x="365760" y="868680"/>
+            <a:ext cx="8412480" cy="18288"/>
+          </a:xfrm>
+          <a:prstGeom prst="rect">
+            <a:avLst/>
+          </a:prstGeom>
+          <a:solidFill>
+            <a:srgbClr val="006699"/>
+          </a:solidFill>
+          <a:ln>
+            <a:noFill/>
+          </a:ln>
+        </p:spPr>
+        <p:style>
+          <a:lnRef idx="1">
+            <a:schemeClr val="accent1"/>
+          </a:lnRef>
+          <a:fillRef idx="3">
+            <a:schemeClr val="accent1"/>
+          </a:fillRef>
+          <a:effectRef idx="2">
+            <a:schemeClr val="accent1"/>
+          </a:effectRef>
+          <a:fontRef idx="minor">
+            <a:schemeClr val="lt1"/>
+          </a:fontRef>
+        </p:style>
+        <p:txBody>
+          <a:bodyPr rtlCol="0" anchor="ctr"/>
+          <a:lstStyle/>
+          <a:p>
+            <a:pPr algn="ctr"/>
           </a:p>
         </p:txBody>
       </p:sp>
       <p:graphicFrame>
         <p:nvGraphicFramePr>
-          <p:cNvPr id="3" name="Table 2"/>
+          <p:cNvPr id="4" name="Table 3"/>
           <p:cNvGraphicFramePr>
             <a:graphicFrameLocks noGrp="1"/>
           </p:cNvGraphicFramePr>
           <p:nvPr/>
         </p:nvGraphicFramePr>
         <p:xfrm>
-          <a:off x="274320" y="1005840"/>
-          <a:ext cx="8595360" cy="5303520"/>
+          <a:off x="274320" y="960120"/>
+          <a:ext cx="8595360" cy="5394960"/>
         </p:xfrm>
         <a:graphic>
           <a:graphicData uri="http://schemas.openxmlformats.org/drawingml/2006/table">
@@ -5886,18 +7696,18 @@
                 <a:gridCol w="2148840"/>
                 <a:gridCol w="2148840"/>
               </a:tblGrid>
-              <a:tr h="883920">
+              <a:tr h="899160">
                 <a:tc>
                   <a:txBody>
                     <a:bodyPr/>
                     <a:lstStyle/>
                     <a:p>
                       <a:pPr algn="ctr" a:rtl="1">
-                        <a:defRPr sz="1200" b="1">
+                        <a:defRPr sz="1100" b="1">
                           <a:solidFill>
                             <a:srgbClr val="FFFFFF"/>
                           </a:solidFill>
-                          <a:latin typeface="Noto Naskh Arabic"/>
+                          <a:latin typeface="Vazir"/>
                         </a:defRPr>
                       </a:pPr>
                       <a:r>
@@ -5917,11 +7727,11 @@
                     <a:lstStyle/>
                     <a:p>
                       <a:pPr algn="ctr" a:rtl="1">
-                        <a:defRPr sz="1200" b="1">
+                        <a:defRPr sz="1100" b="1">
                           <a:solidFill>
                             <a:srgbClr val="FFFFFF"/>
                           </a:solidFill>
-                          <a:latin typeface="Noto Naskh Arabic"/>
+                          <a:latin typeface="Vazir"/>
                         </a:defRPr>
                       </a:pPr>
                       <a:r>
@@ -5941,11 +7751,11 @@
                     <a:lstStyle/>
                     <a:p>
                       <a:pPr algn="ctr" a:rtl="1">
-                        <a:defRPr sz="1200" b="1">
+                        <a:defRPr sz="1100" b="1">
                           <a:solidFill>
                             <a:srgbClr val="FFFFFF"/>
                           </a:solidFill>
-                          <a:latin typeface="Noto Naskh Arabic"/>
+                          <a:latin typeface="Vazir"/>
                         </a:defRPr>
                       </a:pPr>
                       <a:r>
@@ -5965,11 +7775,11 @@
                     <a:lstStyle/>
                     <a:p>
                       <a:pPr algn="ctr" a:rtl="1">
-                        <a:defRPr sz="1200" b="1">
+                        <a:defRPr sz="1100" b="1">
                           <a:solidFill>
                             <a:srgbClr val="FFFFFF"/>
                           </a:solidFill>
-                          <a:latin typeface="Noto Naskh Arabic"/>
+                          <a:latin typeface="Vazir"/>
                         </a:defRPr>
                       </a:pPr>
                       <a:r>
@@ -5984,22 +7794,22 @@
                   </a:tcPr>
                 </a:tc>
               </a:tr>
-              <a:tr h="883920">
+              <a:tr h="899160">
                 <a:tc>
                   <a:txBody>
                     <a:bodyPr/>
                     <a:lstStyle/>
                     <a:p>
                       <a:pPr algn="ctr" a:rtl="1">
-                        <a:defRPr sz="1100">
+                        <a:defRPr sz="1000" b="0">
                           <a:solidFill>
                             <a:srgbClr val="282828"/>
                           </a:solidFill>
-                          <a:latin typeface="Noto Naskh Arabic"/>
+                          <a:latin typeface="Vazir"/>
                         </a:defRPr>
                       </a:pPr>
                       <a:r>
-                        <a:t>حجم انتقال داده</a:t>
+                        <a:t>انتقال داده</a:t>
                       </a:r>
                     </a:p>
                   </a:txBody>
@@ -6011,11 +7821,11 @@
                     <a:lstStyle/>
                     <a:p>
                       <a:pPr algn="ctr" a:rtl="1">
-                        <a:defRPr sz="1100">
+                        <a:defRPr sz="1000" b="0">
                           <a:solidFill>
                             <a:srgbClr val="282828"/>
                           </a:solidFill>
-                          <a:latin typeface="Noto Naskh Arabic"/>
+                          <a:latin typeface="Vazir"/>
                         </a:defRPr>
                       </a:pPr>
                       <a:r>
@@ -6031,15 +7841,15 @@
                     <a:lstStyle/>
                     <a:p>
                       <a:pPr algn="ctr" a:rtl="1">
-                        <a:defRPr sz="1100">
+                        <a:defRPr sz="1000" b="0">
                           <a:solidFill>
                             <a:srgbClr val="282828"/>
                           </a:solidFill>
-                          <a:latin typeface="Noto Naskh Arabic"/>
+                          <a:latin typeface="Vazir"/>
                         </a:defRPr>
                       </a:pPr>
                       <a:r>
-                        <a:t>فقط نتیجه فیلتر/تجمیع</a:t>
+                        <a:t>فقط نتیجه</a:t>
                       </a:r>
                     </a:p>
                   </a:txBody>
@@ -6051,11 +7861,11 @@
                     <a:lstStyle/>
                     <a:p>
                       <a:pPr algn="ctr" a:rtl="1">
-                        <a:defRPr sz="1100">
+                        <a:defRPr sz="1000" b="0">
                           <a:solidFill>
                             <a:srgbClr val="282828"/>
                           </a:solidFill>
-                          <a:latin typeface="Noto Naskh Arabic"/>
+                          <a:latin typeface="Vazir"/>
                         </a:defRPr>
                       </a:pPr>
                       <a:r>
@@ -6066,22 +7876,22 @@
                   <a:tcPr/>
                 </a:tc>
               </a:tr>
-              <a:tr h="883920">
+              <a:tr h="899160">
                 <a:tc>
                   <a:txBody>
                     <a:bodyPr/>
                     <a:lstStyle/>
                     <a:p>
                       <a:pPr algn="ctr" a:rtl="1">
-                        <a:defRPr sz="1100">
+                        <a:defRPr sz="1000" b="0">
                           <a:solidFill>
                             <a:srgbClr val="282828"/>
                           </a:solidFill>
-                          <a:latin typeface="Noto Naskh Arabic"/>
+                          <a:latin typeface="Vazir"/>
                         </a:defRPr>
                       </a:pPr>
                       <a:r>
-                        <a:t>محاسبات حلقه‌ای</a:t>
+                        <a:t>Loop</a:t>
                       </a:r>
                     </a:p>
                   </a:txBody>
@@ -6097,11 +7907,11 @@
                     <a:lstStyle/>
                     <a:p>
                       <a:pPr algn="ctr" a:rtl="1">
-                        <a:defRPr sz="1100">
+                        <a:defRPr sz="1000" b="0">
                           <a:solidFill>
                             <a:srgbClr val="282828"/>
                           </a:solidFill>
-                          <a:latin typeface="Noto Naskh Arabic"/>
+                          <a:latin typeface="Vazir"/>
                         </a:defRPr>
                       </a:pPr>
                       <a:r>
@@ -6121,15 +7931,15 @@
                     <a:lstStyle/>
                     <a:p>
                       <a:pPr algn="ctr" a:rtl="1">
-                        <a:defRPr sz="1100">
+                        <a:defRPr sz="1000" b="0">
                           <a:solidFill>
                             <a:srgbClr val="282828"/>
                           </a:solidFill>
-                          <a:latin typeface="Noto Naskh Arabic"/>
+                          <a:latin typeface="Vazir"/>
                         </a:defRPr>
                       </a:pPr>
                       <a:r>
-                        <a:t>Vectorized در HANA</a:t>
+                        <a:t>Vectorized HANA</a:t>
                       </a:r>
                     </a:p>
                   </a:txBody>
@@ -6145,11 +7955,11 @@
                     <a:lstStyle/>
                     <a:p>
                       <a:pPr algn="ctr" a:rtl="1">
-                        <a:defRPr sz="1100">
+                        <a:defRPr sz="1000" b="0">
                           <a:solidFill>
                             <a:srgbClr val="282828"/>
                           </a:solidFill>
-                          <a:latin typeface="Noto Naskh Arabic"/>
+                          <a:latin typeface="Vazir"/>
                         </a:defRPr>
                       </a:pPr>
                       <a:r>
@@ -6164,22 +7974,22 @@
                   </a:tcPr>
                 </a:tc>
               </a:tr>
-              <a:tr h="883920">
+              <a:tr h="899160">
                 <a:tc>
                   <a:txBody>
                     <a:bodyPr/>
                     <a:lstStyle/>
                     <a:p>
                       <a:pPr algn="ctr" a:rtl="1">
-                        <a:defRPr sz="1100">
+                        <a:defRPr sz="1000" b="0">
                           <a:solidFill>
                             <a:srgbClr val="282828"/>
                           </a:solidFill>
-                          <a:latin typeface="Noto Naskh Arabic"/>
+                          <a:latin typeface="Vazir"/>
                         </a:defRPr>
                       </a:pPr>
                       <a:r>
-                        <a:t>Aggregations</a:t>
+                        <a:t>Aggregate</a:t>
                       </a:r>
                     </a:p>
                   </a:txBody>
@@ -6191,15 +8001,15 @@
                     <a:lstStyle/>
                     <a:p>
                       <a:pPr algn="ctr" a:rtl="1">
-                        <a:defRPr sz="1100">
+                        <a:defRPr sz="1000" b="0">
                           <a:solidFill>
                             <a:srgbClr val="282828"/>
                           </a:solidFill>
-                          <a:latin typeface="Noto Naskh Arabic"/>
+                          <a:latin typeface="Vazir"/>
                         </a:defRPr>
                       </a:pPr>
                       <a:r>
-                        <a:t>Loop در ABAP</a:t>
+                        <a:t>Loop ABAP</a:t>
                       </a:r>
                     </a:p>
                   </a:txBody>
@@ -6211,15 +8021,15 @@
                     <a:lstStyle/>
                     <a:p>
                       <a:pPr algn="ctr" a:rtl="1">
-                        <a:defRPr sz="1100">
+                        <a:defRPr sz="1000" b="0">
                           <a:solidFill>
                             <a:srgbClr val="282828"/>
                           </a:solidFill>
-                          <a:latin typeface="Noto Naskh Arabic"/>
+                          <a:latin typeface="Vazir"/>
                         </a:defRPr>
                       </a:pPr>
                       <a:r>
-                        <a:t>Columnar در RAM</a:t>
+                        <a:t>Columnar RAM</a:t>
                       </a:r>
                     </a:p>
                   </a:txBody>
@@ -6231,11 +8041,11 @@
                     <a:lstStyle/>
                     <a:p>
                       <a:pPr algn="ctr" a:rtl="1">
-                        <a:defRPr sz="1100">
+                        <a:defRPr sz="1000" b="0">
                           <a:solidFill>
                             <a:srgbClr val="282828"/>
                           </a:solidFill>
-                          <a:latin typeface="Noto Naskh Arabic"/>
+                          <a:latin typeface="Vazir"/>
                         </a:defRPr>
                       </a:pPr>
                       <a:r>
@@ -6246,22 +8056,22 @@
                   <a:tcPr/>
                 </a:tc>
               </a:tr>
-              <a:tr h="883920">
+              <a:tr h="899160">
                 <a:tc>
                   <a:txBody>
                     <a:bodyPr/>
                     <a:lstStyle/>
                     <a:p>
                       <a:pPr algn="ctr" a:rtl="1">
-                        <a:defRPr sz="1100">
+                        <a:defRPr sz="1000" b="0">
                           <a:solidFill>
                             <a:srgbClr val="282828"/>
                           </a:solidFill>
-                          <a:latin typeface="Noto Naskh Arabic"/>
+                          <a:latin typeface="Vazir"/>
                         </a:defRPr>
                       </a:pPr>
                       <a:r>
-                        <a:t>Joins</a:t>
+                        <a:t>Join</a:t>
                       </a:r>
                     </a:p>
                   </a:txBody>
@@ -6277,15 +8087,15 @@
                     <a:lstStyle/>
                     <a:p>
                       <a:pPr algn="ctr" a:rtl="1">
-                        <a:defRPr sz="1100">
+                        <a:defRPr sz="1000" b="0">
                           <a:solidFill>
                             <a:srgbClr val="282828"/>
                           </a:solidFill>
-                          <a:latin typeface="Noto Naskh Arabic"/>
+                          <a:latin typeface="Vazir"/>
                         </a:defRPr>
                       </a:pPr>
                       <a:r>
-                        <a:t>SELECT SINGLE متعدد</a:t>
+                        <a:t>SELECT SINGLE</a:t>
                       </a:r>
                     </a:p>
                   </a:txBody>
@@ -6301,15 +8111,15 @@
                     <a:lstStyle/>
                     <a:p>
                       <a:pPr algn="ctr" a:rtl="1">
-                        <a:defRPr sz="1100">
+                        <a:defRPr sz="1000" b="0">
                           <a:solidFill>
                             <a:srgbClr val="282828"/>
                           </a:solidFill>
-                          <a:latin typeface="Noto Naskh Arabic"/>
+                          <a:latin typeface="Vazir"/>
                         </a:defRPr>
                       </a:pPr>
                       <a:r>
-                        <a:t>Parallel join در HANA</a:t>
+                        <a:t>Parallel join</a:t>
                       </a:r>
                     </a:p>
                   </a:txBody>
@@ -6325,11 +8135,11 @@
                     <a:lstStyle/>
                     <a:p>
                       <a:pPr algn="ctr" a:rtl="1">
-                        <a:defRPr sz="1100">
+                        <a:defRPr sz="1000" b="0">
                           <a:solidFill>
                             <a:srgbClr val="282828"/>
                           </a:solidFill>
-                          <a:latin typeface="Noto Naskh Arabic"/>
+                          <a:latin typeface="Vazir"/>
                         </a:defRPr>
                       </a:pPr>
                       <a:r>
@@ -6344,22 +8154,22 @@
                   </a:tcPr>
                 </a:tc>
               </a:tr>
-              <a:tr h="883920">
+              <a:tr h="899160">
                 <a:tc>
                   <a:txBody>
                     <a:bodyPr/>
                     <a:lstStyle/>
                     <a:p>
                       <a:pPr algn="ctr" a:rtl="1">
-                        <a:defRPr sz="1100">
+                        <a:defRPr sz="1000" b="0">
                           <a:solidFill>
                             <a:srgbClr val="282828"/>
                           </a:solidFill>
-                          <a:latin typeface="Noto Naskh Arabic"/>
+                          <a:latin typeface="Vazir"/>
                         </a:defRPr>
                       </a:pPr>
                       <a:r>
-                        <a:t>Filters</a:t>
+                        <a:t>Filter</a:t>
                       </a:r>
                     </a:p>
                   </a:txBody>
@@ -6371,15 +8181,15 @@
                     <a:lstStyle/>
                     <a:p>
                       <a:pPr algn="ctr" a:rtl="1">
-                        <a:defRPr sz="1100">
+                        <a:defRPr sz="1000" b="0">
                           <a:solidFill>
                             <a:srgbClr val="282828"/>
                           </a:solidFill>
-                          <a:latin typeface="Noto Naskh Arabic"/>
+                          <a:latin typeface="Vazir"/>
                         </a:defRPr>
                       </a:pPr>
                       <a:r>
-                        <a:t>Boolean در ABAP</a:t>
+                        <a:t>Boolean loop</a:t>
                       </a:r>
                     </a:p>
                   </a:txBody>
@@ -6391,11 +8201,11 @@
                     <a:lstStyle/>
                     <a:p>
                       <a:pPr algn="ctr" a:rtl="1">
-                        <a:defRPr sz="1100">
+                        <a:defRPr sz="1000" b="0">
                           <a:solidFill>
                             <a:srgbClr val="282828"/>
                           </a:solidFill>
-                          <a:latin typeface="Noto Naskh Arabic"/>
+                          <a:latin typeface="Vazir"/>
                         </a:defRPr>
                       </a:pPr>
                       <a:r>
@@ -6411,11 +8221,11 @@
                     <a:lstStyle/>
                     <a:p>
                       <a:pPr algn="ctr" a:rtl="1">
-                        <a:defRPr sz="1100">
+                        <a:defRPr sz="1000" b="0">
                           <a:solidFill>
                             <a:srgbClr val="282828"/>
                           </a:solidFill>
-                          <a:latin typeface="Noto Naskh Arabic"/>
+                          <a:latin typeface="Vazir"/>
                         </a:defRPr>
                       </a:pPr>
                       <a:r>
@@ -6438,7 +8248,7 @@
 </p:sld>
 </file>
 
-<file path=ppt/slides/slide22.xml><?xml version="1.0" encoding="utf-8"?>
+<file path=ppt/slides/slide3.xml><?xml version="1.0" encoding="utf-8"?>
 <p:sld xmlns:a="http://schemas.openxmlformats.org/drawingml/2006/main" xmlns:p="http://schemas.openxmlformats.org/presentationml/2006/main" xmlns:r="http://schemas.openxmlformats.org/officeDocument/2006/relationships">
   <p:cSld>
     <p:spTree>
@@ -6456,8 +8266,8 @@
         </p:nvSpPr>
         <p:spPr>
           <a:xfrm>
-            <a:off x="365760" y="274320"/>
-            <a:ext cx="8412480" cy="731520"/>
+            <a:off x="365760" y="228600"/>
+            <a:ext cx="8412480" cy="640080"/>
           </a:xfrm>
           <a:prstGeom prst="rect">
             <a:avLst/>
@@ -6471,15 +8281,15 @@
           <a:lstStyle/>
           <a:p>
             <a:pPr algn="r" a:rtl="1">
-              <a:defRPr sz="2600" b="1">
+              <a:defRPr sz="2400" b="1">
                 <a:solidFill>
                   <a:srgbClr val="003366"/>
                 </a:solidFill>
-                <a:latin typeface="Noto Naskh Arabic"/>
-              </a:defRPr>
-            </a:pPr>
-            <a:r>
-              <a:t>ایندکس‌گذاری (Indexing)</a:t>
+                <a:latin typeface="Vazir"/>
+              </a:defRPr>
+            </a:pPr>
+            <a:r>
+              <a:t>کلمات کلیدی</a:t>
             </a:r>
           </a:p>
         </p:txBody>
@@ -6492,7 +8302,7 @@
         </p:nvSpPr>
         <p:spPr>
           <a:xfrm>
-            <a:off x="365760" y="960120"/>
+            <a:off x="365760" y="868680"/>
             <a:ext cx="8412480" cy="18288"/>
           </a:xfrm>
           <a:prstGeom prst="rect">
@@ -6535,8 +8345,8 @@
         </p:nvSpPr>
         <p:spPr>
           <a:xfrm>
-            <a:off x="457200" y="1097280"/>
-            <a:ext cx="8229600" cy="5303520"/>
+            <a:off x="411480" y="960120"/>
+            <a:ext cx="8321040" cy="5669280"/>
           </a:xfrm>
           <a:prstGeom prst="rect">
             <a:avLst/>
@@ -6551,81 +8361,113 @@
           <a:p>
             <a:pPr algn="r" a:rtl="1">
               <a:spcAft>
-                <a:spcPts val="800"/>
+                <a:spcPts val="600"/>
               </a:spcAft>
-              <a:defRPr sz="1700">
+              <a:defRPr sz="1500" b="0">
                 <a:solidFill>
                   <a:srgbClr val="282828"/>
                 </a:solidFill>
-                <a:latin typeface="Noto Naskh Arabic"/>
-              </a:defRPr>
-            </a:pPr>
-            <a:r>
-              <a:t>• Dictionary encoding خود به‌نوعی index سبک است</a:t>
+                <a:latin typeface="Vazir"/>
+              </a:defRPr>
+            </a:pPr>
+            <a:r>
+              <a:t>• SAP S/4HANA — نسل جدید ERP ساپ با موتور HANA</a:t>
             </a:r>
           </a:p>
           <a:p>
             <a:pPr algn="r" a:rtl="1">
               <a:spcAft>
-                <a:spcPts val="800"/>
+                <a:spcPts val="600"/>
               </a:spcAft>
-              <a:defRPr sz="1700">
+              <a:defRPr sz="1500" b="0">
                 <a:solidFill>
                   <a:srgbClr val="282828"/>
                 </a:solidFill>
-                <a:latin typeface="Noto Naskh Arabic"/>
-              </a:defRPr>
-            </a:pPr>
-            <a:r>
-              <a:t>• Inverted Index: نگاشت ValueID → Row IDs (جستجوی سریع)</a:t>
+                <a:latin typeface="Vazir"/>
+              </a:defRPr>
+            </a:pPr>
+            <a:r>
+              <a:t>• In-Memory Computing — نگهداری و پردازش داده در RAM به‌جای دیسک</a:t>
             </a:r>
           </a:p>
           <a:p>
             <a:pPr algn="r" a:rtl="1">
               <a:spcAft>
-                <a:spcPts val="800"/>
+                <a:spcPts val="600"/>
               </a:spcAft>
-              <a:defRPr sz="1700">
+              <a:defRPr sz="1500" b="0">
                 <a:solidFill>
                   <a:srgbClr val="282828"/>
                 </a:solidFill>
-                <a:latin typeface="Noto Naskh Arabic"/>
-              </a:defRPr>
-            </a:pPr>
-            <a:r>
-              <a:t>• Full-Text Index: جستجوی متنی با حذف stop words</a:t>
+                <a:latin typeface="Vazir"/>
+              </a:defRPr>
+            </a:pPr>
+            <a:r>
+              <a:t>• Columnar Storage — ذخیره‌سازی ستونی برای کوئری‌های تحلیلی</a:t>
             </a:r>
           </a:p>
           <a:p>
             <a:pPr algn="r" a:rtl="1">
               <a:spcAft>
-                <a:spcPts val="800"/>
+                <a:spcPts val="600"/>
               </a:spcAft>
-              <a:defRPr sz="1700">
+              <a:defRPr sz="1500" b="0">
                 <a:solidFill>
                   <a:srgbClr val="282828"/>
                 </a:solidFill>
-                <a:latin typeface="Noto Naskh Arabic"/>
-              </a:defRPr>
-            </a:pPr>
-            <a:r>
-              <a:t>• Multi-Column Index: dictionary ترکیبی برای چند ستون</a:t>
+                <a:latin typeface="Vazir"/>
+              </a:defRPr>
+            </a:pPr>
+            <a:r>
+              <a:t>• Real-time Analytics — تحلیل بلادرنگ بدون تأخیر ETL</a:t>
             </a:r>
           </a:p>
           <a:p>
             <a:pPr algn="r" a:rtl="1">
               <a:spcAft>
-                <a:spcPts val="800"/>
+                <a:spcPts val="600"/>
               </a:spcAft>
-              <a:defRPr sz="1700">
+              <a:defRPr sz="1500" b="0">
                 <a:solidFill>
                   <a:srgbClr val="282828"/>
                 </a:solidFill>
-                <a:latin typeface="Noto Naskh Arabic"/>
-              </a:defRPr>
-            </a:pPr>
-            <a:r>
-              <a:t>• انواع: Inverted Value، Inverted Hash، Inverted Individual</a:t>
+                <a:latin typeface="Vazir"/>
+              </a:defRPr>
+            </a:pPr>
+            <a:r>
+              <a:t>• Set-based Processing — پردازش مجموعه‌ای به‌جای حلقه‌های تک‌سطری</a:t>
+            </a:r>
+          </a:p>
+          <a:p>
+            <a:pPr algn="r" a:rtl="1">
+              <a:spcAft>
+                <a:spcPts val="600"/>
+              </a:spcAft>
+              <a:defRPr sz="1500" b="0">
+                <a:solidFill>
+                  <a:srgbClr val="282828"/>
+                </a:solidFill>
+                <a:latin typeface="Vazir"/>
+              </a:defRPr>
+            </a:pPr>
+            <a:r>
+              <a:t>• Push-down Processing — انتقال منطق محاسباتی به لایه پایگاه‌داده</a:t>
+            </a:r>
+          </a:p>
+          <a:p>
+            <a:pPr algn="r" a:rtl="1">
+              <a:spcAft>
+                <a:spcPts val="600"/>
+              </a:spcAft>
+              <a:defRPr sz="1500" b="0">
+                <a:solidFill>
+                  <a:srgbClr val="282828"/>
+                </a:solidFill>
+                <a:latin typeface="Vazir"/>
+              </a:defRPr>
+            </a:pPr>
+            <a:r>
+              <a:t>• Parallel Processing &amp; Table Partitioning — پردازش و توزیع موازی داده</a:t>
             </a:r>
           </a:p>
         </p:txBody>
@@ -6638,7 +8480,7 @@
 </p:sld>
 </file>
 
-<file path=ppt/slides/slide23.xml><?xml version="1.0" encoding="utf-8"?>
+<file path=ppt/slides/slide30.xml><?xml version="1.0" encoding="utf-8"?>
 <p:sld xmlns:a="http://schemas.openxmlformats.org/drawingml/2006/main" xmlns:p="http://schemas.openxmlformats.org/presentationml/2006/main" xmlns:r="http://schemas.openxmlformats.org/officeDocument/2006/relationships">
   <p:cSld>
     <p:spTree>
@@ -6656,8 +8498,8 @@
         </p:nvSpPr>
         <p:spPr>
           <a:xfrm>
-            <a:off x="365760" y="274320"/>
-            <a:ext cx="8412480" cy="731520"/>
+            <a:off x="365760" y="228600"/>
+            <a:ext cx="8412480" cy="640080"/>
           </a:xfrm>
           <a:prstGeom prst="rect">
             <a:avLst/>
@@ -6671,15 +8513,15 @@
           <a:lstStyle/>
           <a:p>
             <a:pPr algn="r" a:rtl="1">
-              <a:defRPr sz="2600" b="1">
+              <a:defRPr sz="2400" b="1">
                 <a:solidFill>
                   <a:srgbClr val="003366"/>
                 </a:solidFill>
-                <a:latin typeface="Noto Naskh Arabic"/>
-              </a:defRPr>
-            </a:pPr>
-            <a:r>
-              <a:t>بهترین شیوه‌های Index</a:t>
+                <a:latin typeface="Vazir"/>
+              </a:defRPr>
+            </a:pPr>
+            <a:r>
+              <a:t>ایندکس‌گذاری (Indexing) — انواع و کاربرد</a:t>
             </a:r>
           </a:p>
         </p:txBody>
@@ -6692,7 +8534,7 @@
         </p:nvSpPr>
         <p:spPr>
           <a:xfrm>
-            <a:off x="365760" y="960120"/>
+            <a:off x="365760" y="868680"/>
             <a:ext cx="8412480" cy="18288"/>
           </a:xfrm>
           <a:prstGeom prst="rect">
@@ -6735,8 +8577,8 @@
         </p:nvSpPr>
         <p:spPr>
           <a:xfrm>
-            <a:off x="457200" y="1097280"/>
-            <a:ext cx="8229600" cy="5303520"/>
+            <a:off x="411480" y="960120"/>
+            <a:ext cx="8321040" cy="5669280"/>
           </a:xfrm>
           <a:prstGeom prst="rect">
             <a:avLst/>
@@ -6751,97 +8593,113 @@
           <a:p>
             <a:pPr algn="r" a:rtl="1">
               <a:spcAft>
-                <a:spcPts val="800"/>
+                <a:spcPts val="600"/>
               </a:spcAft>
-              <a:defRPr sz="1700">
+              <a:defRPr sz="1300" b="0">
                 <a:solidFill>
                   <a:srgbClr val="282828"/>
                 </a:solidFill>
-                <a:latin typeface="Noto Naskh Arabic"/>
-              </a:defRPr>
-            </a:pPr>
-            <a:r>
-              <a:t>• Inverted Value: سریع‌ترین read/join — برای PK و unique constraints</a:t>
+                <a:latin typeface="Vazir"/>
+              </a:defRPr>
+            </a:pPr>
+            <a:r>
+              <a:t>• Dictionary encoding در column store خود یک index سبک است — ValueID-based filtering.</a:t>
             </a:r>
           </a:p>
           <a:p>
             <a:pPr algn="r" a:rtl="1">
               <a:spcAft>
-                <a:spcPts val="800"/>
+                <a:spcPts val="600"/>
               </a:spcAft>
-              <a:defRPr sz="1700">
+              <a:defRPr sz="1300" b="0">
                 <a:solidFill>
                   <a:srgbClr val="282828"/>
                 </a:solidFill>
-                <a:latin typeface="Noto Naskh Arabic"/>
-              </a:defRPr>
-            </a:pPr>
-            <a:r>
-              <a:t>• Inverted Hash: کاهش ≈۳۰٪ حافظه — برای PK با ستون‌های بلند</a:t>
+                <a:latin typeface="Vazir"/>
+              </a:defRPr>
+            </a:pPr>
+            <a:r>
+              <a:t>• Inverted Index: نگاشت ValueID → Row IDs — جستجوی سریع مقادیر (مثلاً Artist = Lady Gaga → rows 2,6).</a:t>
             </a:r>
           </a:p>
           <a:p>
             <a:pPr algn="r" a:rtl="1">
               <a:spcAft>
-                <a:spcPts val="800"/>
+                <a:spcPts val="600"/>
               </a:spcAft>
-              <a:defRPr sz="1700">
+              <a:defRPr sz="1300" b="0">
                 <a:solidFill>
                   <a:srgbClr val="282828"/>
                 </a:solidFill>
-                <a:latin typeface="Noto Naskh Arabic"/>
-              </a:defRPr>
-            </a:pPr>
-            <a:r>
-              <a:t>• Inverted Individual: DML سریع‌تر — read کمی کندتر (۱۰–۲۰٪)</a:t>
+                <a:latin typeface="Vazir"/>
+              </a:defRPr>
+            </a:pPr>
+            <a:r>
+              <a:t>• Full-Text Index: جستجوی متنی — حذف stop words و inverted index برای terms.</a:t>
             </a:r>
           </a:p>
           <a:p>
             <a:pPr algn="r" a:rtl="1">
               <a:spcAft>
-                <a:spcPts val="800"/>
+                <a:spcPts val="600"/>
               </a:spcAft>
-              <a:defRPr sz="1700">
+              <a:defRPr sz="1300" b="0">
                 <a:solidFill>
                   <a:srgbClr val="282828"/>
                 </a:solidFill>
-                <a:latin typeface="Noto Naskh Arabic"/>
-              </a:defRPr>
-            </a:pPr>
-            <a:r>
-              <a:t>• Composite key: ستون‌های selective اول، سپس equality، سپس range</a:t>
+                <a:latin typeface="Vazir"/>
+              </a:defRPr>
+            </a:pPr>
+            <a:r>
+              <a:t>• Multi-Column Index: dictionary ترکیبی برای چند ستون (Region + Product).</a:t>
             </a:r>
           </a:p>
           <a:p>
             <a:pPr algn="r" a:rtl="1">
               <a:spcAft>
-                <a:spcPts val="800"/>
+                <a:spcPts val="600"/>
               </a:spcAft>
-              <a:defRPr sz="1700">
+              <a:defRPr sz="1300" b="0">
                 <a:solidFill>
                   <a:srgbClr val="282828"/>
                 </a:solidFill>
-                <a:latin typeface="Noto Naskh Arabic"/>
-              </a:defRPr>
-            </a:pPr>
-            <a:r>
-              <a:t>• از index روی ستون‌های low-selectivity (Boolean/status) خودداری کنید</a:t>
+                <a:latin typeface="Vazir"/>
+              </a:defRPr>
+            </a:pPr>
+            <a:r>
+              <a:t>• Inverted Value: سریع‌ترین read/join — PK و unique constraints.</a:t>
             </a:r>
           </a:p>
           <a:p>
             <a:pPr algn="r" a:rtl="1">
               <a:spcAft>
-                <a:spcPts val="800"/>
+                <a:spcPts val="600"/>
               </a:spcAft>
-              <a:defRPr sz="1700">
+              <a:defRPr sz="1300" b="0">
                 <a:solidFill>
                   <a:srgbClr val="282828"/>
                 </a:solidFill>
-                <a:latin typeface="Noto Naskh Arabic"/>
-              </a:defRPr>
-            </a:pPr>
-            <a:r>
-              <a:t>• فقط وقتی index بسازید که Expensive Statement Trace نیاز را نشان دهد</a:t>
+                <a:latin typeface="Vazir"/>
+              </a:defRPr>
+            </a:pPr>
+            <a:r>
+              <a:t>• Inverted Hash: ≈۳۰٪ کمتر RAM — PK با ستون‌های بلند.</a:t>
+            </a:r>
+          </a:p>
+          <a:p>
+            <a:pPr algn="r" a:rtl="1">
+              <a:spcAft>
+                <a:spcPts val="600"/>
+              </a:spcAft>
+              <a:defRPr sz="1300" b="0">
+                <a:solidFill>
+                  <a:srgbClr val="282828"/>
+                </a:solidFill>
+                <a:latin typeface="Vazir"/>
+              </a:defRPr>
+            </a:pPr>
+            <a:r>
+              <a:t>• Inverted Individual: DML سریع‌تر — read کمی کندتر (۱۰–۲۰٪).</a:t>
             </a:r>
           </a:p>
         </p:txBody>
@@ -6854,7 +8712,7 @@
 </p:sld>
 </file>
 
-<file path=ppt/slides/slide24.xml><?xml version="1.0" encoding="utf-8"?>
+<file path=ppt/slides/slide31.xml><?xml version="1.0" encoding="utf-8"?>
 <p:sld xmlns:a="http://schemas.openxmlformats.org/drawingml/2006/main" xmlns:p="http://schemas.openxmlformats.org/presentationml/2006/main" xmlns:r="http://schemas.openxmlformats.org/officeDocument/2006/relationships">
   <p:cSld>
     <p:spTree>
@@ -6872,8 +8730,8 @@
         </p:nvSpPr>
         <p:spPr>
           <a:xfrm>
-            <a:off x="365760" y="274320"/>
-            <a:ext cx="8412480" cy="731520"/>
+            <a:off x="365760" y="228600"/>
+            <a:ext cx="8412480" cy="640080"/>
           </a:xfrm>
           <a:prstGeom prst="rect">
             <a:avLst/>
@@ -6887,15 +8745,15 @@
           <a:lstStyle/>
           <a:p>
             <a:pPr algn="r" a:rtl="1">
-              <a:defRPr sz="2600" b="1">
+              <a:defRPr sz="2400" b="1">
                 <a:solidFill>
                   <a:srgbClr val="003366"/>
                 </a:solidFill>
-                <a:latin typeface="Noto Naskh Arabic"/>
-              </a:defRPr>
-            </a:pPr>
-            <a:r>
-              <a:t>پارتیشن‌بندی جداول (Table Partitioning)</a:t>
+                <a:latin typeface="Vazir"/>
+              </a:defRPr>
+            </a:pPr>
+            <a:r>
+              <a:t>بهترین شیوه‌های Index</a:t>
             </a:r>
           </a:p>
         </p:txBody>
@@ -6908,7 +8766,7 @@
         </p:nvSpPr>
         <p:spPr>
           <a:xfrm>
-            <a:off x="365760" y="960120"/>
+            <a:off x="365760" y="868680"/>
             <a:ext cx="8412480" cy="18288"/>
           </a:xfrm>
           <a:prstGeom prst="rect">
@@ -6951,8 +8809,8 @@
         </p:nvSpPr>
         <p:spPr>
           <a:xfrm>
-            <a:off x="457200" y="1097280"/>
-            <a:ext cx="8229600" cy="5303520"/>
+            <a:off x="411480" y="960120"/>
+            <a:ext cx="8321040" cy="5669280"/>
           </a:xfrm>
           <a:prstGeom prst="rect">
             <a:avLst/>
@@ -6967,81 +8825,97 @@
           <a:p>
             <a:pPr algn="r" a:rtl="1">
               <a:spcAft>
-                <a:spcPts val="800"/>
+                <a:spcPts val="600"/>
               </a:spcAft>
-              <a:defRPr sz="1700">
+              <a:defRPr sz="1400" b="0">
                 <a:solidFill>
                   <a:srgbClr val="282828"/>
                 </a:solidFill>
-                <a:latin typeface="Noto Naskh Arabic"/>
-              </a:defRPr>
-            </a:pPr>
-            <a:r>
-              <a:t>• Hash Partitioning: توزیع یکنواخت بر اساس hash کلید — مناسب CUSTOMER_ID</a:t>
+                <a:latin typeface="Vazir"/>
+              </a:defRPr>
+            </a:pPr>
+            <a:r>
+              <a:t>• Composite key: ستون‌های selective (بیشترین تمایز) اول، سپس equality، سپس range/sort.</a:t>
             </a:r>
           </a:p>
           <a:p>
             <a:pPr algn="r" a:rtl="1">
               <a:spcAft>
-                <a:spcPts val="800"/>
+                <a:spcPts val="600"/>
               </a:spcAft>
-              <a:defRPr sz="1700">
+              <a:defRPr sz="1400" b="0">
                 <a:solidFill>
                   <a:srgbClr val="282828"/>
                 </a:solidFill>
-                <a:latin typeface="Noto Naskh Arabic"/>
-              </a:defRPr>
-            </a:pPr>
-            <a:r>
-              <a:t>• Round-Robin: توزیع چرخشی — مناسب staging/ETL، نه lookup انتخابی</a:t>
+                <a:latin typeface="Vazir"/>
+              </a:defRPr>
+            </a:pPr>
+            <a:r>
+              <a:t>• Join columns: ترتیب و data type یکسان در هر دو طرف join — مثلاً (BUKRS, BELNR).</a:t>
             </a:r>
           </a:p>
           <a:p>
             <a:pPr algn="r" a:rtl="1">
               <a:spcAft>
-                <a:spcPts val="800"/>
+                <a:spcPts val="600"/>
               </a:spcAft>
-              <a:defRPr sz="1700">
+              <a:defRPr sz="1400" b="0">
                 <a:solidFill>
                   <a:srgbClr val="282828"/>
                 </a:solidFill>
-                <a:latin typeface="Noto Naskh Arabic"/>
-              </a:defRPr>
-            </a:pPr>
-            <a:r>
-              <a:t>• Range Partitioning: بر اساس بازه (مثلاً FISCAL_YEAR) — partition pruning</a:t>
+                <a:latin typeface="Vazir"/>
+              </a:defRPr>
+            </a:pPr>
+            <a:r>
+              <a:t>• از index روی ستون‌های low-selectivity (Boolean، status با ۲–۳ مقدار) خودداری کنید.</a:t>
             </a:r>
           </a:p>
           <a:p>
             <a:pPr algn="r" a:rtl="1">
               <a:spcAft>
-                <a:spcPts val="800"/>
+                <a:spcPts val="600"/>
               </a:spcAft>
-              <a:defRPr sz="1700">
+              <a:defRPr sz="1400" b="0">
                 <a:solidFill>
                   <a:srgbClr val="282828"/>
                 </a:solidFill>
-                <a:latin typeface="Noto Naskh Arabic"/>
-              </a:defRPr>
-            </a:pPr>
-            <a:r>
-              <a:t>• Hash: عبور از محدودیت ۲ میلیارد سطر + parallel scan روی nodes</a:t>
+                <a:latin typeface="Vazir"/>
+              </a:defRPr>
+            </a:pPr>
+            <a:r>
+              <a:t>• اگر PK/unique index همه predicates را پوشش می‌دهد، secondary index اضافه نکنید.</a:t>
             </a:r>
           </a:p>
           <a:p>
             <a:pPr algn="r" a:rtl="1">
               <a:spcAft>
-                <a:spcPts val="800"/>
+                <a:spcPts val="600"/>
               </a:spcAft>
-              <a:defRPr sz="1700">
+              <a:defRPr sz="1400" b="0">
                 <a:solidFill>
                   <a:srgbClr val="282828"/>
                 </a:solidFill>
-                <a:latin typeface="Noto Naskh Arabic"/>
-              </a:defRPr>
-            </a:pPr>
-            <a:r>
-              <a:t>• Range: ایده‌آل برای داده سری‌زمانی (CALMONTH، DOC_DATE)</a:t>
+                <a:latin typeface="Vazir"/>
+              </a:defRPr>
+            </a:pPr>
+            <a:r>
+              <a:t>• برای workload تحلیلی scan-heavy: CDS logic، partitioning یا preaggregation — نه index زیاد.</a:t>
+            </a:r>
+          </a:p>
+          <a:p>
+            <a:pPr algn="r" a:rtl="1">
+              <a:spcAft>
+                <a:spcPts val="600"/>
+              </a:spcAft>
+              <a:defRPr sz="1400" b="0">
+                <a:solidFill>
+                  <a:srgbClr val="282828"/>
+                </a:solidFill>
+                <a:latin typeface="Vazir"/>
+              </a:defRPr>
+            </a:pPr>
+            <a:r>
+              <a:t>• Expensive Statement Trace → PlanViz → ST05: فقط indexهای واقعاً لازم بسازید.</a:t>
             </a:r>
           </a:p>
         </p:txBody>
@@ -7054,7 +8928,7 @@
 </p:sld>
 </file>
 
-<file path=ppt/slides/slide25.xml><?xml version="1.0" encoding="utf-8"?>
+<file path=ppt/slides/slide32.xml><?xml version="1.0" encoding="utf-8"?>
 <p:sld xmlns:a="http://schemas.openxmlformats.org/drawingml/2006/main" xmlns:p="http://schemas.openxmlformats.org/presentationml/2006/main" xmlns:r="http://schemas.openxmlformats.org/officeDocument/2006/relationships">
   <p:cSld>
     <p:spTree>
@@ -7072,7 +8946,7 @@
         </p:nvSpPr>
         <p:spPr>
           <a:xfrm>
-            <a:off x="365760" y="274320"/>
+            <a:off x="365760" y="228600"/>
             <a:ext cx="8412480" cy="640080"/>
           </a:xfrm>
           <a:prstGeom prst="rect">
@@ -7087,30 +8961,430 @@
           <a:lstStyle/>
           <a:p>
             <a:pPr algn="r" a:rtl="1">
-              <a:defRPr sz="2200" b="1">
+              <a:defRPr sz="2400" b="1">
                 <a:solidFill>
                   <a:srgbClr val="003366"/>
                 </a:solidFill>
-                <a:latin typeface="Noto Naskh Arabic"/>
-              </a:defRPr>
-            </a:pPr>
-            <a:r>
-              <a:t>مزایای پارتیشن‌بندی</a:t>
-            </a:r>
+                <a:latin typeface="Vazir"/>
+              </a:defRPr>
+            </a:pPr>
+            <a:r>
+              <a:t>انواع پارتیشن‌بندی</a:t>
+            </a:r>
+          </a:p>
+        </p:txBody>
+      </p:sp>
+      <p:sp>
+        <p:nvSpPr>
+          <p:cNvPr id="3" name="Rectangle 2"/>
+          <p:cNvSpPr/>
+          <p:nvPr/>
+        </p:nvSpPr>
+        <p:spPr>
+          <a:xfrm>
+            <a:off x="365760" y="868680"/>
+            <a:ext cx="8412480" cy="18288"/>
+          </a:xfrm>
+          <a:prstGeom prst="rect">
+            <a:avLst/>
+          </a:prstGeom>
+          <a:solidFill>
+            <a:srgbClr val="006699"/>
+          </a:solidFill>
+          <a:ln>
+            <a:noFill/>
+          </a:ln>
+        </p:spPr>
+        <p:style>
+          <a:lnRef idx="1">
+            <a:schemeClr val="accent1"/>
+          </a:lnRef>
+          <a:fillRef idx="3">
+            <a:schemeClr val="accent1"/>
+          </a:fillRef>
+          <a:effectRef idx="2">
+            <a:schemeClr val="accent1"/>
+          </a:effectRef>
+          <a:fontRef idx="minor">
+            <a:schemeClr val="lt1"/>
+          </a:fontRef>
+        </p:style>
+        <p:txBody>
+          <a:bodyPr rtlCol="0" anchor="ctr"/>
+          <a:lstStyle/>
+          <a:p>
+            <a:pPr algn="ctr"/>
+          </a:p>
+        </p:txBody>
+      </p:sp>
+      <p:pic>
+        <p:nvPicPr>
+          <p:cNvPr id="4" name="Picture 3" descr="partitioning_types.png"/>
+          <p:cNvPicPr>
+            <a:picLocks noChangeAspect="1"/>
+          </p:cNvPicPr>
+          <p:nvPr/>
+        </p:nvPicPr>
+        <p:blipFill>
+          <a:blip r:embed="rId2"/>
+          <a:stretch>
+            <a:fillRect/>
+          </a:stretch>
+        </p:blipFill>
+        <p:spPr>
+          <a:xfrm>
+            <a:off x="548640" y="1051560"/>
+            <a:ext cx="8046720" cy="3982720"/>
+          </a:xfrm>
+          <a:prstGeom prst="rect">
+            <a:avLst/>
+          </a:prstGeom>
+        </p:spPr>
+      </p:pic>
+      <p:sp>
+        <p:nvSpPr>
+          <p:cNvPr id="5" name="TextBox 4"/>
+          <p:cNvSpPr txBox="1"/>
+          <p:nvPr/>
+        </p:nvSpPr>
+        <p:spPr>
+          <a:xfrm>
+            <a:off x="457200" y="6263640"/>
+            <a:ext cx="8229600" cy="457200"/>
+          </a:xfrm>
+          <a:prstGeom prst="rect">
+            <a:avLst/>
+          </a:prstGeom>
+          <a:noFill/>
+        </p:spPr>
+        <p:txBody>
+          <a:bodyPr wrap="none">
+            <a:spAutoFit/>
+          </a:bodyPr>
+          <a:lstStyle/>
+          <a:p>
+            <a:pPr algn="ctr" a:rtl="1">
+              <a:defRPr sz="1200" b="0">
+                <a:solidFill>
+                  <a:srgbClr val="5A5A5A"/>
+                </a:solidFill>
+                <a:latin typeface="Vazir"/>
+              </a:defRPr>
+            </a:pPr>
+            <a:r>
+              <a:t>شکل ۸: Hash، Range و Round-Robin Partitioning</a:t>
+            </a:r>
+          </a:p>
+        </p:txBody>
+      </p:sp>
+    </p:spTree>
+  </p:cSld>
+  <p:clrMapOvr>
+    <a:masterClrMapping/>
+  </p:clrMapOvr>
+</p:sld>
+</file>
+
+<file path=ppt/slides/slide33.xml><?xml version="1.0" encoding="utf-8"?>
+<p:sld xmlns:a="http://schemas.openxmlformats.org/drawingml/2006/main" xmlns:p="http://schemas.openxmlformats.org/presentationml/2006/main" xmlns:r="http://schemas.openxmlformats.org/officeDocument/2006/relationships">
+  <p:cSld>
+    <p:spTree>
+      <p:nvGrpSpPr>
+        <p:cNvPr id="1" name=""/>
+        <p:cNvGrpSpPr/>
+        <p:nvPr/>
+      </p:nvGrpSpPr>
+      <p:grpSpPr/>
+      <p:sp>
+        <p:nvSpPr>
+          <p:cNvPr id="2" name="TextBox 1"/>
+          <p:cNvSpPr txBox="1"/>
+          <p:nvPr/>
+        </p:nvSpPr>
+        <p:spPr>
+          <a:xfrm>
+            <a:off x="365760" y="228600"/>
+            <a:ext cx="8412480" cy="640080"/>
+          </a:xfrm>
+          <a:prstGeom prst="rect">
+            <a:avLst/>
+          </a:prstGeom>
+          <a:noFill/>
+        </p:spPr>
+        <p:txBody>
+          <a:bodyPr wrap="none">
+            <a:spAutoFit/>
+          </a:bodyPr>
+          <a:lstStyle/>
+          <a:p>
+            <a:pPr algn="r" a:rtl="1">
+              <a:defRPr sz="2400" b="1">
+                <a:solidFill>
+                  <a:srgbClr val="003366"/>
+                </a:solidFill>
+                <a:latin typeface="Vazir"/>
+              </a:defRPr>
+            </a:pPr>
+            <a:r>
+              <a:t>پارتیشن‌بندی جداول — توضیحات</a:t>
+            </a:r>
+          </a:p>
+        </p:txBody>
+      </p:sp>
+      <p:sp>
+        <p:nvSpPr>
+          <p:cNvPr id="3" name="Rectangle 2"/>
+          <p:cNvSpPr/>
+          <p:nvPr/>
+        </p:nvSpPr>
+        <p:spPr>
+          <a:xfrm>
+            <a:off x="365760" y="868680"/>
+            <a:ext cx="8412480" cy="18288"/>
+          </a:xfrm>
+          <a:prstGeom prst="rect">
+            <a:avLst/>
+          </a:prstGeom>
+          <a:solidFill>
+            <a:srgbClr val="006699"/>
+          </a:solidFill>
+          <a:ln>
+            <a:noFill/>
+          </a:ln>
+        </p:spPr>
+        <p:style>
+          <a:lnRef idx="1">
+            <a:schemeClr val="accent1"/>
+          </a:lnRef>
+          <a:fillRef idx="3">
+            <a:schemeClr val="accent1"/>
+          </a:fillRef>
+          <a:effectRef idx="2">
+            <a:schemeClr val="accent1"/>
+          </a:effectRef>
+          <a:fontRef idx="minor">
+            <a:schemeClr val="lt1"/>
+          </a:fontRef>
+        </p:style>
+        <p:txBody>
+          <a:bodyPr rtlCol="0" anchor="ctr"/>
+          <a:lstStyle/>
+          <a:p>
+            <a:pPr algn="ctr"/>
+          </a:p>
+        </p:txBody>
+      </p:sp>
+      <p:sp>
+        <p:nvSpPr>
+          <p:cNvPr id="4" name="TextBox 3"/>
+          <p:cNvSpPr txBox="1"/>
+          <p:nvPr/>
+        </p:nvSpPr>
+        <p:spPr>
+          <a:xfrm>
+            <a:off x="411480" y="960120"/>
+            <a:ext cx="8321040" cy="5669280"/>
+          </a:xfrm>
+          <a:prstGeom prst="rect">
+            <a:avLst/>
+          </a:prstGeom>
+          <a:noFill/>
+        </p:spPr>
+        <p:txBody>
+          <a:bodyPr wrap="square">
+            <a:spAutoFit/>
+          </a:bodyPr>
+          <a:lstStyle/>
+          <a:p>
+            <a:pPr algn="r" a:rtl="1">
+              <a:spcAft>
+                <a:spcPts val="600"/>
+              </a:spcAft>
+              <a:defRPr sz="1400" b="0">
+                <a:solidFill>
+                  <a:srgbClr val="282828"/>
+                </a:solidFill>
+                <a:latin typeface="Vazir"/>
+              </a:defRPr>
+            </a:pPr>
+            <a:r>
+              <a:t>• Hash: CUSTOMER_ID → hash → partition — توزیع یکنواخت، عبور از limit ۲B rows، parallel scan.</a:t>
+            </a:r>
+          </a:p>
+          <a:p>
+            <a:pPr algn="r" a:rtl="1">
+              <a:spcAft>
+                <a:spcPts val="600"/>
+              </a:spcAft>
+              <a:defRPr sz="1400" b="0">
+                <a:solidFill>
+                  <a:srgbClr val="282828"/>
+                </a:solidFill>
+                <a:latin typeface="Vazir"/>
+              </a:defRPr>
+            </a:pPr>
+            <a:r>
+              <a:t>• Range: FISCAL_YEAR → P2019, P2020, ... — partition pruning: فقط partition مرتبط اسکن می‌شود.</a:t>
+            </a:r>
+          </a:p>
+          <a:p>
+            <a:pPr algn="r" a:rtl="1">
+              <a:spcAft>
+                <a:spcPts val="600"/>
+              </a:spcAft>
+              <a:defRPr sz="1400" b="0">
+                <a:solidFill>
+                  <a:srgbClr val="282828"/>
+                </a:solidFill>
+                <a:latin typeface="Vazir"/>
+              </a:defRPr>
+            </a:pPr>
+            <a:r>
+              <a:t>• Round-Robin: row1→P1, row2→P2, ... — balance load، مناسب staging/ETL، نه key lookup.</a:t>
+            </a:r>
+          </a:p>
+          <a:p>
+            <a:pPr algn="r" a:rtl="1">
+              <a:spcAft>
+                <a:spcPts val="600"/>
+              </a:spcAft>
+              <a:defRPr sz="1400" b="0">
+                <a:solidFill>
+                  <a:srgbClr val="282828"/>
+                </a:solidFill>
+                <a:latin typeface="Vazir"/>
+              </a:defRPr>
+            </a:pPr>
+            <a:r>
+              <a:t>• Range + Hash composite: برای hot partitions (داده اخیر بیشتر) — range اول، سپس hash.</a:t>
+            </a:r>
+          </a:p>
+          <a:p>
+            <a:pPr algn="r" a:rtl="1">
+              <a:spcAft>
+                <a:spcPts val="600"/>
+              </a:spcAft>
+              <a:defRPr sz="1400" b="0">
+                <a:solidFill>
+                  <a:srgbClr val="282828"/>
+                </a:solidFill>
+                <a:latin typeface="Vazir"/>
+              </a:defRPr>
+            </a:pPr>
+            <a:r>
+              <a:t>• مزایا: تا ۹۵٪ کمتر data scanned، ۵–۲۵× parallel scan، ۳–۱۵× join/aggregate.</a:t>
+            </a:r>
+          </a:p>
+        </p:txBody>
+      </p:sp>
+    </p:spTree>
+  </p:cSld>
+  <p:clrMapOvr>
+    <a:masterClrMapping/>
+  </p:clrMapOvr>
+</p:sld>
+</file>
+
+<file path=ppt/slides/slide34.xml><?xml version="1.0" encoding="utf-8"?>
+<p:sld xmlns:a="http://schemas.openxmlformats.org/drawingml/2006/main" xmlns:p="http://schemas.openxmlformats.org/presentationml/2006/main" xmlns:r="http://schemas.openxmlformats.org/officeDocument/2006/relationships">
+  <p:cSld>
+    <p:spTree>
+      <p:nvGrpSpPr>
+        <p:cNvPr id="1" name=""/>
+        <p:cNvGrpSpPr/>
+        <p:nvPr/>
+      </p:nvGrpSpPr>
+      <p:grpSpPr/>
+      <p:sp>
+        <p:nvSpPr>
+          <p:cNvPr id="2" name="TextBox 1"/>
+          <p:cNvSpPr txBox="1"/>
+          <p:nvPr/>
+        </p:nvSpPr>
+        <p:spPr>
+          <a:xfrm>
+            <a:off x="365760" y="228600"/>
+            <a:ext cx="8412480" cy="640080"/>
+          </a:xfrm>
+          <a:prstGeom prst="rect">
+            <a:avLst/>
+          </a:prstGeom>
+          <a:noFill/>
+        </p:spPr>
+        <p:txBody>
+          <a:bodyPr wrap="none">
+            <a:spAutoFit/>
+          </a:bodyPr>
+          <a:lstStyle/>
+          <a:p>
+            <a:pPr algn="r" a:rtl="1">
+              <a:defRPr sz="2400" b="1">
+                <a:solidFill>
+                  <a:srgbClr val="003366"/>
+                </a:solidFill>
+                <a:latin typeface="Vazir"/>
+              </a:defRPr>
+            </a:pPr>
+            <a:r>
+              <a:t>جدول مزایای پارتیشن‌بندی</a:t>
+            </a:r>
+          </a:p>
+        </p:txBody>
+      </p:sp>
+      <p:sp>
+        <p:nvSpPr>
+          <p:cNvPr id="3" name="Rectangle 2"/>
+          <p:cNvSpPr/>
+          <p:nvPr/>
+        </p:nvSpPr>
+        <p:spPr>
+          <a:xfrm>
+            <a:off x="365760" y="868680"/>
+            <a:ext cx="8412480" cy="18288"/>
+          </a:xfrm>
+          <a:prstGeom prst="rect">
+            <a:avLst/>
+          </a:prstGeom>
+          <a:solidFill>
+            <a:srgbClr val="006699"/>
+          </a:solidFill>
+          <a:ln>
+            <a:noFill/>
+          </a:ln>
+        </p:spPr>
+        <p:style>
+          <a:lnRef idx="1">
+            <a:schemeClr val="accent1"/>
+          </a:lnRef>
+          <a:fillRef idx="3">
+            <a:schemeClr val="accent1"/>
+          </a:fillRef>
+          <a:effectRef idx="2">
+            <a:schemeClr val="accent1"/>
+          </a:effectRef>
+          <a:fontRef idx="minor">
+            <a:schemeClr val="lt1"/>
+          </a:fontRef>
+        </p:style>
+        <p:txBody>
+          <a:bodyPr rtlCol="0" anchor="ctr"/>
+          <a:lstStyle/>
+          <a:p>
+            <a:pPr algn="ctr"/>
           </a:p>
         </p:txBody>
       </p:sp>
       <p:graphicFrame>
         <p:nvGraphicFramePr>
-          <p:cNvPr id="3" name="Table 2"/>
+          <p:cNvPr id="4" name="Table 3"/>
           <p:cNvGraphicFramePr>
             <a:graphicFrameLocks noGrp="1"/>
           </p:cNvGraphicFramePr>
           <p:nvPr/>
         </p:nvGraphicFramePr>
         <p:xfrm>
-          <a:off x="274320" y="1005840"/>
-          <a:ext cx="8595360" cy="5303520"/>
+          <a:off x="274320" y="960120"/>
+          <a:ext cx="8595360" cy="5394960"/>
         </p:xfrm>
         <a:graphic>
           <a:graphicData uri="http://schemas.openxmlformats.org/drawingml/2006/table">
@@ -7124,18 +9398,18 @@
                 <a:gridCol w="2148840"/>
                 <a:gridCol w="2148840"/>
               </a:tblGrid>
-              <a:tr h="1325880">
+              <a:tr h="1348740">
                 <a:tc>
                   <a:txBody>
                     <a:bodyPr/>
                     <a:lstStyle/>
                     <a:p>
                       <a:pPr algn="ctr" a:rtl="1">
-                        <a:defRPr sz="1200" b="1">
+                        <a:defRPr sz="1100" b="1">
                           <a:solidFill>
                             <a:srgbClr val="FFFFFF"/>
                           </a:solidFill>
-                          <a:latin typeface="Noto Naskh Arabic"/>
+                          <a:latin typeface="Vazir"/>
                         </a:defRPr>
                       </a:pPr>
                       <a:r>
@@ -7155,11 +9429,11 @@
                     <a:lstStyle/>
                     <a:p>
                       <a:pPr algn="ctr" a:rtl="1">
-                        <a:defRPr sz="1200" b="1">
+                        <a:defRPr sz="1100" b="1">
                           <a:solidFill>
                             <a:srgbClr val="FFFFFF"/>
                           </a:solidFill>
-                          <a:latin typeface="Noto Naskh Arabic"/>
+                          <a:latin typeface="Vazir"/>
                         </a:defRPr>
                       </a:pPr>
                       <a:r>
@@ -7179,11 +9453,11 @@
                     <a:lstStyle/>
                     <a:p>
                       <a:pPr algn="ctr" a:rtl="1">
-                        <a:defRPr sz="1200" b="1">
+                        <a:defRPr sz="1100" b="1">
                           <a:solidFill>
                             <a:srgbClr val="FFFFFF"/>
                           </a:solidFill>
-                          <a:latin typeface="Noto Naskh Arabic"/>
+                          <a:latin typeface="Vazir"/>
                         </a:defRPr>
                       </a:pPr>
                       <a:r>
@@ -7203,11 +9477,11 @@
                     <a:lstStyle/>
                     <a:p>
                       <a:pPr algn="ctr" a:rtl="1">
-                        <a:defRPr sz="1200" b="1">
+                        <a:defRPr sz="1100" b="1">
                           <a:solidFill>
                             <a:srgbClr val="FFFFFF"/>
                           </a:solidFill>
-                          <a:latin typeface="Noto Naskh Arabic"/>
+                          <a:latin typeface="Vazir"/>
                         </a:defRPr>
                       </a:pPr>
                       <a:r>
@@ -7222,18 +9496,18 @@
                   </a:tcPr>
                 </a:tc>
               </a:tr>
-              <a:tr h="1325880">
+              <a:tr h="1348740">
                 <a:tc>
                   <a:txBody>
                     <a:bodyPr/>
                     <a:lstStyle/>
                     <a:p>
                       <a:pPr algn="ctr" a:rtl="1">
-                        <a:defRPr sz="1100">
+                        <a:defRPr sz="1000" b="0">
                           <a:solidFill>
                             <a:srgbClr val="282828"/>
                           </a:solidFill>
-                          <a:latin typeface="Noto Naskh Arabic"/>
+                          <a:latin typeface="Vazir"/>
                         </a:defRPr>
                       </a:pPr>
                       <a:r>
@@ -7249,11 +9523,11 @@
                     <a:lstStyle/>
                     <a:p>
                       <a:pPr algn="ctr" a:rtl="1">
-                        <a:defRPr sz="1100">
+                        <a:defRPr sz="1000" b="0">
                           <a:solidFill>
                             <a:srgbClr val="282828"/>
                           </a:solidFill>
-                          <a:latin typeface="Noto Naskh Arabic"/>
+                          <a:latin typeface="Vazir"/>
                         </a:defRPr>
                       </a:pPr>
                       <a:r>
@@ -7269,15 +9543,15 @@
                     <a:lstStyle/>
                     <a:p>
                       <a:pPr algn="ctr" a:rtl="1">
-                        <a:defRPr sz="1100">
+                        <a:defRPr sz="1000" b="0">
                           <a:solidFill>
                             <a:srgbClr val="282828"/>
                           </a:solidFill>
-                          <a:latin typeface="Noto Naskh Arabic"/>
+                          <a:latin typeface="Vazir"/>
                         </a:defRPr>
                       </a:pPr>
                       <a:r>
-                        <a:t>فقط partition مرتبط</a:t>
+                        <a:t>Partition pruning</a:t>
                       </a:r>
                     </a:p>
                   </a:txBody>
@@ -7289,37 +9563,37 @@
                     <a:lstStyle/>
                     <a:p>
                       <a:pPr algn="ctr" a:rtl="1">
-                        <a:defRPr sz="1100">
+                        <a:defRPr sz="1000" b="0">
                           <a:solidFill>
                             <a:srgbClr val="282828"/>
                           </a:solidFill>
-                          <a:latin typeface="Noto Naskh Arabic"/>
+                          <a:latin typeface="Vazir"/>
                         </a:defRPr>
                       </a:pPr>
                       <a:r>
-                        <a:t>تا ۹۵٪ کمتر</a:t>
+                        <a:t>تا ۹۵٪</a:t>
                       </a:r>
                     </a:p>
                   </a:txBody>
                   <a:tcPr/>
                 </a:tc>
               </a:tr>
-              <a:tr h="1325880">
+              <a:tr h="1348740">
                 <a:tc>
                   <a:txBody>
                     <a:bodyPr/>
                     <a:lstStyle/>
                     <a:p>
                       <a:pPr algn="ctr" a:rtl="1">
-                        <a:defRPr sz="1100">
+                        <a:defRPr sz="1000" b="0">
                           <a:solidFill>
                             <a:srgbClr val="282828"/>
                           </a:solidFill>
-                          <a:latin typeface="Noto Naskh Arabic"/>
+                          <a:latin typeface="Vazir"/>
                         </a:defRPr>
                       </a:pPr>
                       <a:r>
-                        <a:t>Parallel Processing</a:t>
+                        <a:t>Parallel</a:t>
                       </a:r>
                     </a:p>
                   </a:txBody>
@@ -7335,11 +9609,11 @@
                     <a:lstStyle/>
                     <a:p>
                       <a:pPr algn="ctr" a:rtl="1">
-                        <a:defRPr sz="1100">
+                        <a:defRPr sz="1000" b="0">
                           <a:solidFill>
                             <a:srgbClr val="282828"/>
                           </a:solidFill>
-                          <a:latin typeface="Noto Naskh Arabic"/>
+                          <a:latin typeface="Vazir"/>
                         </a:defRPr>
                       </a:pPr>
                       <a:r>
@@ -7359,15 +9633,15 @@
                     <a:lstStyle/>
                     <a:p>
                       <a:pPr algn="ctr" a:rtl="1">
-                        <a:defRPr sz="1100">
+                        <a:defRPr sz="1000" b="0">
                           <a:solidFill>
                             <a:srgbClr val="282828"/>
                           </a:solidFill>
-                          <a:latin typeface="Noto Naskh Arabic"/>
+                          <a:latin typeface="Vazir"/>
                         </a:defRPr>
                       </a:pPr>
                       <a:r>
-                        <a:t>هر partition روی core جدا</a:t>
+                        <a:t>هر partition روی core</a:t>
                       </a:r>
                     </a:p>
                   </a:txBody>
@@ -7383,11 +9657,11 @@
                     <a:lstStyle/>
                     <a:p>
                       <a:pPr algn="ctr" a:rtl="1">
-                        <a:defRPr sz="1100">
+                        <a:defRPr sz="1000" b="0">
                           <a:solidFill>
                             <a:srgbClr val="282828"/>
                           </a:solidFill>
-                          <a:latin typeface="Noto Naskh Arabic"/>
+                          <a:latin typeface="Vazir"/>
                         </a:defRPr>
                       </a:pPr>
                       <a:r>
@@ -7402,22 +9676,22 @@
                   </a:tcPr>
                 </a:tc>
               </a:tr>
-              <a:tr h="1325880">
+              <a:tr h="1348740">
                 <a:tc>
                   <a:txBody>
                     <a:bodyPr/>
                     <a:lstStyle/>
                     <a:p>
                       <a:pPr algn="ctr" a:rtl="1">
-                        <a:defRPr sz="1100">
+                        <a:defRPr sz="1000" b="0">
                           <a:solidFill>
                             <a:srgbClr val="282828"/>
                           </a:solidFill>
-                          <a:latin typeface="Noto Naskh Arabic"/>
+                          <a:latin typeface="Vazir"/>
                         </a:defRPr>
                       </a:pPr>
                       <a:r>
-                        <a:t>Join &amp; Aggregate</a:t>
+                        <a:t>Join/Aggregate</a:t>
                       </a:r>
                     </a:p>
                   </a:txBody>
@@ -7429,15 +9703,15 @@
                     <a:lstStyle/>
                     <a:p>
                       <a:pPr algn="ctr" a:rtl="1">
-                        <a:defRPr sz="1100">
+                        <a:defRPr sz="1000" b="0">
                           <a:solidFill>
                             <a:srgbClr val="282828"/>
                           </a:solidFill>
-                          <a:latin typeface="Noto Naskh Arabic"/>
+                          <a:latin typeface="Vazir"/>
                         </a:defRPr>
                       </a:pPr>
                       <a:r>
-                        <a:t>روی کل جدول</a:t>
+                        <a:t>کل جدول</a:t>
                       </a:r>
                     </a:p>
                   </a:txBody>
@@ -7449,15 +9723,15 @@
                     <a:lstStyle/>
                     <a:p>
                       <a:pPr algn="ctr" a:rtl="1">
-                        <a:defRPr sz="1100">
+                        <a:defRPr sz="1000" b="0">
                           <a:solidFill>
                             <a:srgbClr val="282828"/>
                           </a:solidFill>
-                          <a:latin typeface="Noto Naskh Arabic"/>
+                          <a:latin typeface="Vazir"/>
                         </a:defRPr>
                       </a:pPr>
                       <a:r>
-                        <a:t>Partition-wise موازی</a:t>
+                        <a:t>Partition-wise</a:t>
                       </a:r>
                     </a:p>
                   </a:txBody>
@@ -7469,11 +9743,11 @@
                     <a:lstStyle/>
                     <a:p>
                       <a:pPr algn="ctr" a:rtl="1">
-                        <a:defRPr sz="1100">
+                        <a:defRPr sz="1000" b="0">
                           <a:solidFill>
                             <a:srgbClr val="282828"/>
                           </a:solidFill>
-                          <a:latin typeface="Noto Naskh Arabic"/>
+                          <a:latin typeface="Vazir"/>
                         </a:defRPr>
                       </a:pPr>
                       <a:r>
@@ -7496,7 +9770,7 @@
 </p:sld>
 </file>
 
-<file path=ppt/slides/slide26.xml><?xml version="1.0" encoding="utf-8"?>
+<file path=ppt/slides/slide35.xml><?xml version="1.0" encoding="utf-8"?>
 <p:sld xmlns:a="http://schemas.openxmlformats.org/drawingml/2006/main" xmlns:p="http://schemas.openxmlformats.org/presentationml/2006/main" xmlns:r="http://schemas.openxmlformats.org/officeDocument/2006/relationships">
   <p:cSld>
     <p:bg>
@@ -7541,7 +9815,7 @@
                 <a:solidFill>
                   <a:srgbClr val="FFFFFF"/>
                 </a:solidFill>
-                <a:latin typeface="Noto Naskh Arabic"/>
+                <a:latin typeface="Vazir"/>
               </a:defRPr>
             </a:pPr>
             <a:r>
@@ -7558,7 +9832,7 @@
 </p:sld>
 </file>
 
-<file path=ppt/slides/slide27.xml><?xml version="1.0" encoding="utf-8"?>
+<file path=ppt/slides/slide36.xml><?xml version="1.0" encoding="utf-8"?>
 <p:sld xmlns:a="http://schemas.openxmlformats.org/drawingml/2006/main" xmlns:p="http://schemas.openxmlformats.org/presentationml/2006/main" xmlns:r="http://schemas.openxmlformats.org/officeDocument/2006/relationships">
   <p:cSld>
     <p:spTree>
@@ -7576,8 +9850,8 @@
         </p:nvSpPr>
         <p:spPr>
           <a:xfrm>
-            <a:off x="365760" y="274320"/>
-            <a:ext cx="8412480" cy="731520"/>
+            <a:off x="365760" y="228600"/>
+            <a:ext cx="8412480" cy="640080"/>
           </a:xfrm>
           <a:prstGeom prst="rect">
             <a:avLst/>
@@ -7591,11 +9865,11 @@
           <a:lstStyle/>
           <a:p>
             <a:pPr algn="r" a:rtl="1">
-              <a:defRPr sz="2600" b="1">
+              <a:defRPr sz="2400" b="1">
                 <a:solidFill>
                   <a:srgbClr val="003366"/>
                 </a:solidFill>
-                <a:latin typeface="Noto Naskh Arabic"/>
+                <a:latin typeface="Vazir"/>
               </a:defRPr>
             </a:pPr>
             <a:r>
@@ -7612,7 +9886,7 @@
         </p:nvSpPr>
         <p:spPr>
           <a:xfrm>
-            <a:off x="365760" y="960120"/>
+            <a:off x="365760" y="868680"/>
             <a:ext cx="8412480" cy="18288"/>
           </a:xfrm>
           <a:prstGeom prst="rect">
@@ -7655,8 +9929,8 @@
         </p:nvSpPr>
         <p:spPr>
           <a:xfrm>
-            <a:off x="457200" y="1097280"/>
-            <a:ext cx="8229600" cy="5303520"/>
+            <a:off x="411480" y="960120"/>
+            <a:ext cx="8321040" cy="5669280"/>
           </a:xfrm>
           <a:prstGeom prst="rect">
             <a:avLst/>
@@ -7671,81 +9945,97 @@
           <a:p>
             <a:pPr algn="r" a:rtl="1">
               <a:spcAft>
-                <a:spcPts val="800"/>
+                <a:spcPts val="600"/>
               </a:spcAft>
-              <a:defRPr sz="1700">
+              <a:defRPr sz="1400" b="0">
                 <a:solidFill>
                   <a:srgbClr val="282828"/>
                 </a:solidFill>
-                <a:latin typeface="Noto Naskh Arabic"/>
-              </a:defRPr>
-            </a:pPr>
-            <a:r>
-              <a:t>• معماری درون‌حافظه S/4HANA با column store، compression، parallel processing و HTAP کارایی را متحول می‌کند</a:t>
+                <a:latin typeface="Vazir"/>
+              </a:defRPr>
+            </a:pPr>
+            <a:r>
+              <a:t>• معماری in-memory S/4HANA با column store، compression، parallel processing و HTAP، پارادigm پردازش enterprise را متحول کرده است.</a:t>
             </a:r>
           </a:p>
           <a:p>
             <a:pPr algn="r" a:rtl="1">
               <a:spcAft>
-                <a:spcPts val="800"/>
+                <a:spcPts val="600"/>
               </a:spcAft>
-              <a:defRPr sz="1700">
+              <a:defRPr sz="1400" b="0">
                 <a:solidFill>
                   <a:srgbClr val="282828"/>
                 </a:solidFill>
-                <a:latin typeface="Noto Naskh Arabic"/>
-              </a:defRPr>
-            </a:pPr>
-            <a:r>
-              <a:t>• Push-down، indexing و partitioning باید به‌صورت یکپارچه در طراحی سیستم لحاظ شوند</a:t>
+                <a:latin typeface="Vazir"/>
+              </a:defRPr>
+            </a:pPr>
+            <a:r>
+              <a:t>• Push-down، indexing و partitioning باید به‌صورت یکپارچه و متناسب با workload طراحی شوند — نه به‌صورت جداگانه.</a:t>
             </a:r>
           </a:p>
           <a:p>
             <a:pPr algn="r" a:rtl="1">
               <a:spcAft>
-                <a:spcPts val="800"/>
+                <a:spcPts val="600"/>
               </a:spcAft>
-              <a:defRPr sz="1700">
+              <a:defRPr sz="1400" b="0">
                 <a:solidFill>
                   <a:srgbClr val="282828"/>
                 </a:solidFill>
-                <a:latin typeface="Noto Naskh Arabic"/>
-              </a:defRPr>
-            </a:pPr>
-            <a:r>
-              <a:t>• انتقال محاسبات از ABAP Loop به CDS/SQL Script کاهش چشمگیر runtime و network load دارد</a:t>
+                <a:latin typeface="Vazir"/>
+              </a:defRPr>
+            </a:pPr>
+            <a:r>
+              <a:t>• انتقال محاسبات از ABAP Loop به CDS/SQL Script: کاهش چشمگیر runtime، network load و app server CPU.</a:t>
             </a:r>
           </a:p>
           <a:p>
             <a:pPr algn="r" a:rtl="1">
               <a:spcAft>
-                <a:spcPts val="800"/>
+                <a:spcPts val="600"/>
               </a:spcAft>
-              <a:defRPr sz="1700">
+              <a:defRPr sz="1400" b="0">
                 <a:solidFill>
                   <a:srgbClr val="282828"/>
                 </a:solidFill>
-                <a:latin typeface="Noto Naskh Arabic"/>
-              </a:defRPr>
-            </a:pPr>
-            <a:r>
-              <a:t>• ابزارهای trace (ST05، PlanViz، ...) برای tuning عملی ضروری هستند</a:t>
+                <a:latin typeface="Vazir"/>
+              </a:defRPr>
+            </a:pPr>
+            <a:r>
+              <a:t>• ابزارهای trace (ST05، PlanViz، DBACOCKPIT) برای performance engineering عملی ضروری هستند.</a:t>
             </a:r>
           </a:p>
           <a:p>
             <a:pPr algn="r" a:rtl="1">
               <a:spcAft>
-                <a:spcPts val="800"/>
+                <a:spcPts val="600"/>
               </a:spcAft>
-              <a:defRPr sz="1700">
+              <a:defRPr sz="1400" b="0">
                 <a:solidFill>
                   <a:srgbClr val="282828"/>
                 </a:solidFill>
-                <a:latin typeface="Noto Naskh Arabic"/>
-              </a:defRPr>
-            </a:pPr>
-            <a:r>
-              <a:t>• پژوهش‌های آینده: سناریوهای صنعتی، cloud multi-tenant و بارهای AI</a:t>
+                <a:latin typeface="Vazir"/>
+              </a:defRPr>
+            </a:pPr>
+            <a:r>
+              <a:t>• Clean-core CDS practices: سیستم upgrade-safe و cloud-ready باقی می‌ماند.</a:t>
+            </a:r>
+          </a:p>
+          <a:p>
+            <a:pPr algn="r" a:rtl="1">
+              <a:spcAft>
+                <a:spcPts val="600"/>
+              </a:spcAft>
+              <a:defRPr sz="1400" b="0">
+                <a:solidFill>
+                  <a:srgbClr val="282828"/>
+                </a:solidFill>
+                <a:latin typeface="Vazir"/>
+              </a:defRPr>
+            </a:pPr>
+            <a:r>
+              <a:t>• پژوهش آینده: سناریوهای صنعتی، multi-tenant cloud و AI workloads.</a:t>
             </a:r>
           </a:p>
         </p:txBody>
@@ -7758,7 +10048,7 @@
 </p:sld>
 </file>
 
-<file path=ppt/slides/slide28.xml><?xml version="1.0" encoding="utf-8"?>
+<file path=ppt/slides/slide37.xml><?xml version="1.0" encoding="utf-8"?>
 <p:sld xmlns:a="http://schemas.openxmlformats.org/drawingml/2006/main" xmlns:p="http://schemas.openxmlformats.org/presentationml/2006/main" xmlns:r="http://schemas.openxmlformats.org/officeDocument/2006/relationships">
   <p:cSld>
     <p:spTree>
@@ -7776,8 +10066,8 @@
         </p:nvSpPr>
         <p:spPr>
           <a:xfrm>
-            <a:off x="365760" y="274320"/>
-            <a:ext cx="8412480" cy="731520"/>
+            <a:off x="365760" y="228600"/>
+            <a:ext cx="8412480" cy="640080"/>
           </a:xfrm>
           <a:prstGeom prst="rect">
             <a:avLst/>
@@ -7791,15 +10081,15 @@
           <a:lstStyle/>
           <a:p>
             <a:pPr algn="r" a:rtl="1">
-              <a:defRPr sz="2600" b="1">
+              <a:defRPr sz="2400" b="1">
                 <a:solidFill>
                   <a:srgbClr val="003366"/>
                 </a:solidFill>
-                <a:latin typeface="Noto Naskh Arabic"/>
-              </a:defRPr>
-            </a:pPr>
-            <a:r>
-              <a:t>توصیه‌های عملی</a:t>
+                <a:latin typeface="Vazir"/>
+              </a:defRPr>
+            </a:pPr>
+            <a:r>
+              <a:t>توصیه‌های عملی برای توسعه‌دهندگان</a:t>
             </a:r>
           </a:p>
         </p:txBody>
@@ -7812,7 +10102,7 @@
         </p:nvSpPr>
         <p:spPr>
           <a:xfrm>
-            <a:off x="365760" y="960120"/>
+            <a:off x="365760" y="868680"/>
             <a:ext cx="8412480" cy="18288"/>
           </a:xfrm>
           <a:prstGeom prst="rect">
@@ -7855,8 +10145,8 @@
         </p:nvSpPr>
         <p:spPr>
           <a:xfrm>
-            <a:off x="457200" y="1097280"/>
-            <a:ext cx="8229600" cy="5303520"/>
+            <a:off x="411480" y="960120"/>
+            <a:ext cx="8321040" cy="5669280"/>
           </a:xfrm>
           <a:prstGeom prst="rect">
             <a:avLst/>
@@ -7871,81 +10161,97 @@
           <a:p>
             <a:pPr algn="r" a:rtl="1">
               <a:spcAft>
-                <a:spcPts val="800"/>
+                <a:spcPts val="600"/>
               </a:spcAft>
-              <a:defRPr sz="1700">
+              <a:defRPr sz="1400" b="0">
                 <a:solidFill>
                   <a:srgbClr val="282828"/>
                 </a:solidFill>
-                <a:latin typeface="Noto Naskh Arabic"/>
-              </a:defRPr>
-            </a:pPr>
-            <a:r>
-              <a:t>• برنامه‌نویسی Set-based را به push-down در پایگاه‌داده ترجیح دهید</a:t>
+                <a:latin typeface="Vazir"/>
+              </a:defRPr>
+            </a:pPr>
+            <a:r>
+              <a:t>• Set-based programming و push-down را به ABAP loop ترجیح دهید.</a:t>
             </a:r>
           </a:p>
           <a:p>
             <a:pPr algn="r" a:rtl="1">
               <a:spcAft>
-                <a:spcPts val="800"/>
+                <a:spcPts val="600"/>
               </a:spcAft>
-              <a:defRPr sz="1700">
+              <a:defRPr sz="1400" b="0">
                 <a:solidFill>
                   <a:srgbClr val="282828"/>
                 </a:solidFill>
-                <a:latin typeface="Noto Naskh Arabic"/>
-              </a:defRPr>
-            </a:pPr>
-            <a:r>
-              <a:t>• Indexing و partitioning را متناسب با الگوی workload طراحی کنید</a:t>
+                <a:latin typeface="Vazir"/>
+              </a:defRPr>
+            </a:pPr>
+            <a:r>
+              <a:t>• Indexing و partitioning را بر اساس الگوی query و data volume طراحی کنید.</a:t>
             </a:r>
           </a:p>
           <a:p>
             <a:pPr algn="r" a:rtl="1">
               <a:spcAft>
-                <a:spcPts val="800"/>
+                <a:spcPts val="600"/>
               </a:spcAft>
-              <a:defRPr sz="1700">
+              <a:defRPr sz="1400" b="0">
                 <a:solidFill>
                   <a:srgbClr val="282828"/>
                 </a:solidFill>
-                <a:latin typeface="Noto Naskh Arabic"/>
-              </a:defRPr>
-            </a:pPr>
-            <a:r>
-              <a:t>• CDS Views لایه‌بندی‌شده و Clean Core را رعایت کنید</a:t>
+                <a:latin typeface="Vazir"/>
+              </a:defRPr>
+            </a:pPr>
+            <a:r>
+              <a:t>• CDS Views لایه‌بندی‌شده (I_/C_/Z_) و Clean Core را رعایت کنید.</a:t>
             </a:r>
           </a:p>
           <a:p>
             <a:pPr algn="r" a:rtl="1">
               <a:spcAft>
-                <a:spcPts val="800"/>
+                <a:spcPts val="600"/>
               </a:spcAft>
-              <a:defRPr sz="1700">
+              <a:defRPr sz="1400" b="0">
                 <a:solidFill>
                   <a:srgbClr val="282828"/>
                 </a:solidFill>
-                <a:latin typeface="Noto Naskh Arabic"/>
-              </a:defRPr>
-            </a:pPr>
-            <a:r>
-              <a:t>• Performance engineering را در چرخه پیاده‌سازی بگنجانید</a:t>
+                <a:latin typeface="Vazir"/>
+              </a:defRPr>
+            </a:pPr>
+            <a:r>
+              <a:t>• Performance engineering را از ابتدای چرخه پیاده‌سازی بگنجانید — نه فقط در انتها.</a:t>
             </a:r>
           </a:p>
           <a:p>
             <a:pPr algn="r" a:rtl="1">
               <a:spcAft>
-                <a:spcPts val="800"/>
+                <a:spcPts val="600"/>
               </a:spcAft>
-              <a:defRPr sz="1700">
+              <a:defRPr sz="1400" b="0">
                 <a:solidFill>
                   <a:srgbClr val="282828"/>
                 </a:solidFill>
-                <a:latin typeface="Noto Naskh Arabic"/>
-              </a:defRPr>
-            </a:pPr>
-            <a:r>
-              <a:t>• از HTAP برای حذف ETL و dashboard بلادرنگ روی داده عملیاتی بهره ببرید</a:t>
+                <a:latin typeface="Vazir"/>
+              </a:defRPr>
+            </a:pPr>
+            <a:r>
+              <a:t>• از HTAP برای حذف ETL، dashboard بلادرنگ و analytics روی داده عملیاتی استفاده کنید.</a:t>
+            </a:r>
+          </a:p>
+          <a:p>
+            <a:pPr algn="r" a:rtl="1">
+              <a:spcAft>
+                <a:spcPts val="600"/>
+              </a:spcAft>
+              <a:defRPr sz="1400" b="0">
+                <a:solidFill>
+                  <a:srgbClr val="282828"/>
+                </a:solidFill>
+                <a:latin typeface="Vazir"/>
+              </a:defRPr>
+            </a:pPr>
+            <a:r>
+              <a:t>• Expensive Statement Trace و PlanViz را برای شناسایی bottleneckها به‌کار ببرید.</a:t>
             </a:r>
           </a:p>
         </p:txBody>
@@ -7958,7 +10264,7 @@
 </p:sld>
 </file>
 
-<file path=ppt/slides/slide29.xml><?xml version="1.0" encoding="utf-8"?>
+<file path=ppt/slides/slide38.xml><?xml version="1.0" encoding="utf-8"?>
 <p:sld xmlns:a="http://schemas.openxmlformats.org/drawingml/2006/main" xmlns:p="http://schemas.openxmlformats.org/presentationml/2006/main" xmlns:r="http://schemas.openxmlformats.org/officeDocument/2006/relationships">
   <p:cSld>
     <p:spTree>
@@ -7976,8 +10282,8 @@
         </p:nvSpPr>
         <p:spPr>
           <a:xfrm>
-            <a:off x="365760" y="274320"/>
-            <a:ext cx="8412480" cy="731520"/>
+            <a:off x="365760" y="228600"/>
+            <a:ext cx="8412480" cy="640080"/>
           </a:xfrm>
           <a:prstGeom prst="rect">
             <a:avLst/>
@@ -7991,11 +10297,11 @@
           <a:lstStyle/>
           <a:p>
             <a:pPr algn="r" a:rtl="1">
-              <a:defRPr sz="2600" b="1">
+              <a:defRPr sz="2400" b="1">
                 <a:solidFill>
                   <a:srgbClr val="003366"/>
                 </a:solidFill>
-                <a:latin typeface="Noto Naskh Arabic"/>
+                <a:latin typeface="Vazir"/>
               </a:defRPr>
             </a:pPr>
             <a:r>
@@ -8012,7 +10318,7 @@
         </p:nvSpPr>
         <p:spPr>
           <a:xfrm>
-            <a:off x="365760" y="960120"/>
+            <a:off x="365760" y="868680"/>
             <a:ext cx="8412480" cy="18288"/>
           </a:xfrm>
           <a:prstGeom prst="rect">
@@ -8055,8 +10361,8 @@
         </p:nvSpPr>
         <p:spPr>
           <a:xfrm>
-            <a:off x="457200" y="1097280"/>
-            <a:ext cx="8229600" cy="5303520"/>
+            <a:off x="411480" y="960120"/>
+            <a:ext cx="8321040" cy="5669280"/>
           </a:xfrm>
           <a:prstGeom prst="rect">
             <a:avLst/>
@@ -8071,29 +10377,29 @@
           <a:p>
             <a:pPr algn="r" a:rtl="1">
               <a:spcAft>
-                <a:spcPts val="800"/>
+                <a:spcPts val="600"/>
               </a:spcAft>
-              <a:defRPr sz="1700">
+              <a:defRPr sz="1300" b="0">
                 <a:solidFill>
                   <a:srgbClr val="282828"/>
                 </a:solidFill>
-                <a:latin typeface="Noto Naskh Arabic"/>
-              </a:defRPr>
-            </a:pPr>
-            <a:r>
-              <a:t>• CDS: Core Data Services | RAM: Random Access Memory</a:t>
+                <a:latin typeface="Vazir"/>
+              </a:defRPr>
+            </a:pPr>
+            <a:r>
+              <a:t>• CDS: Core Data Services | RAM: Random Access Memory | CPU: Central Processing Unit</a:t>
             </a:r>
           </a:p>
           <a:p>
             <a:pPr algn="r" a:rtl="1">
               <a:spcAft>
-                <a:spcPts val="800"/>
+                <a:spcPts val="600"/>
               </a:spcAft>
-              <a:defRPr sz="1700">
+              <a:defRPr sz="1300" b="0">
                 <a:solidFill>
                   <a:srgbClr val="282828"/>
                 </a:solidFill>
-                <a:latin typeface="Noto Naskh Arabic"/>
+                <a:latin typeface="Vazir"/>
               </a:defRPr>
             </a:pPr>
             <a:r>
@@ -8103,13 +10409,13 @@
           <a:p>
             <a:pPr algn="r" a:rtl="1">
               <a:spcAft>
-                <a:spcPts val="800"/>
+                <a:spcPts val="600"/>
               </a:spcAft>
-              <a:defRPr sz="1700">
+              <a:defRPr sz="1300" b="0">
                 <a:solidFill>
                   <a:srgbClr val="282828"/>
                 </a:solidFill>
-                <a:latin typeface="Noto Naskh Arabic"/>
+                <a:latin typeface="Vazir"/>
               </a:defRPr>
             </a:pPr>
             <a:r>
@@ -8119,13 +10425,29 @@
           <a:p>
             <a:pPr algn="r" a:rtl="1">
               <a:spcAft>
-                <a:spcPts val="800"/>
+                <a:spcPts val="600"/>
               </a:spcAft>
-              <a:defRPr sz="1700">
+              <a:defRPr sz="1300" b="0">
                 <a:solidFill>
                   <a:srgbClr val="282828"/>
                 </a:solidFill>
-                <a:latin typeface="Noto Naskh Arabic"/>
+                <a:latin typeface="Vazir"/>
+              </a:defRPr>
+            </a:pPr>
+            <a:r>
+              <a:t>• PK: Primary Key | AMDP: ABAP Managed Database Procedures</a:t>
+            </a:r>
+          </a:p>
+          <a:p>
+            <a:pPr algn="r" a:rtl="1">
+              <a:spcAft>
+                <a:spcPts val="600"/>
+              </a:spcAft>
+              <a:defRPr sz="1300" b="0">
+                <a:solidFill>
+                  <a:srgbClr val="282828"/>
+                </a:solidFill>
+                <a:latin typeface="Vazir"/>
               </a:defRPr>
             </a:pPr>
             <a:r>
@@ -8135,13 +10457,13 @@
           <a:p>
             <a:pPr algn="r" a:rtl="1">
               <a:spcAft>
-                <a:spcPts val="800"/>
+                <a:spcPts val="600"/>
               </a:spcAft>
-              <a:defRPr sz="1700">
+              <a:defRPr sz="1300" b="0">
                 <a:solidFill>
                   <a:srgbClr val="282828"/>
                 </a:solidFill>
-                <a:latin typeface="Noto Naskh Arabic"/>
+                <a:latin typeface="Vazir"/>
               </a:defRPr>
             </a:pPr>
             <a:r>
@@ -8158,239 +10480,7 @@
 </p:sld>
 </file>
 
-<file path=ppt/slides/slide3.xml><?xml version="1.0" encoding="utf-8"?>
-<p:sld xmlns:a="http://schemas.openxmlformats.org/drawingml/2006/main" xmlns:p="http://schemas.openxmlformats.org/presentationml/2006/main" xmlns:r="http://schemas.openxmlformats.org/officeDocument/2006/relationships">
-  <p:cSld>
-    <p:spTree>
-      <p:nvGrpSpPr>
-        <p:cNvPr id="1" name=""/>
-        <p:cNvGrpSpPr/>
-        <p:nvPr/>
-      </p:nvGrpSpPr>
-      <p:grpSpPr/>
-      <p:sp>
-        <p:nvSpPr>
-          <p:cNvPr id="2" name="TextBox 1"/>
-          <p:cNvSpPr txBox="1"/>
-          <p:nvPr/>
-        </p:nvSpPr>
-        <p:spPr>
-          <a:xfrm>
-            <a:off x="365760" y="274320"/>
-            <a:ext cx="8412480" cy="731520"/>
-          </a:xfrm>
-          <a:prstGeom prst="rect">
-            <a:avLst/>
-          </a:prstGeom>
-          <a:noFill/>
-        </p:spPr>
-        <p:txBody>
-          <a:bodyPr wrap="none">
-            <a:spAutoFit/>
-          </a:bodyPr>
-          <a:lstStyle/>
-          <a:p>
-            <a:pPr algn="r" a:rtl="1">
-              <a:defRPr sz="2600" b="1">
-                <a:solidFill>
-                  <a:srgbClr val="003366"/>
-                </a:solidFill>
-                <a:latin typeface="Noto Naskh Arabic"/>
-              </a:defRPr>
-            </a:pPr>
-            <a:r>
-              <a:t>کلمات کلیدی</a:t>
-            </a:r>
-          </a:p>
-        </p:txBody>
-      </p:sp>
-      <p:sp>
-        <p:nvSpPr>
-          <p:cNvPr id="3" name="Rectangle 2"/>
-          <p:cNvSpPr/>
-          <p:nvPr/>
-        </p:nvSpPr>
-        <p:spPr>
-          <a:xfrm>
-            <a:off x="365760" y="960120"/>
-            <a:ext cx="8412480" cy="18288"/>
-          </a:xfrm>
-          <a:prstGeom prst="rect">
-            <a:avLst/>
-          </a:prstGeom>
-          <a:solidFill>
-            <a:srgbClr val="006699"/>
-          </a:solidFill>
-          <a:ln>
-            <a:noFill/>
-          </a:ln>
-        </p:spPr>
-        <p:style>
-          <a:lnRef idx="1">
-            <a:schemeClr val="accent1"/>
-          </a:lnRef>
-          <a:fillRef idx="3">
-            <a:schemeClr val="accent1"/>
-          </a:fillRef>
-          <a:effectRef idx="2">
-            <a:schemeClr val="accent1"/>
-          </a:effectRef>
-          <a:fontRef idx="minor">
-            <a:schemeClr val="lt1"/>
-          </a:fontRef>
-        </p:style>
-        <p:txBody>
-          <a:bodyPr rtlCol="0" anchor="ctr"/>
-          <a:lstStyle/>
-          <a:p>
-            <a:pPr algn="ctr"/>
-          </a:p>
-        </p:txBody>
-      </p:sp>
-      <p:sp>
-        <p:nvSpPr>
-          <p:cNvPr id="4" name="TextBox 3"/>
-          <p:cNvSpPr txBox="1"/>
-          <p:nvPr/>
-        </p:nvSpPr>
-        <p:spPr>
-          <a:xfrm>
-            <a:off x="457200" y="1097280"/>
-            <a:ext cx="8229600" cy="5303520"/>
-          </a:xfrm>
-          <a:prstGeom prst="rect">
-            <a:avLst/>
-          </a:prstGeom>
-          <a:noFill/>
-        </p:spPr>
-        <p:txBody>
-          <a:bodyPr wrap="square">
-            <a:spAutoFit/>
-          </a:bodyPr>
-          <a:lstStyle/>
-          <a:p>
-            <a:pPr algn="r" a:rtl="1">
-              <a:spcAft>
-                <a:spcPts val="800"/>
-              </a:spcAft>
-              <a:defRPr sz="1700">
-                <a:solidFill>
-                  <a:srgbClr val="282828"/>
-                </a:solidFill>
-                <a:latin typeface="Noto Naskh Arabic"/>
-              </a:defRPr>
-            </a:pPr>
-            <a:r>
-              <a:t>• SAP S/4HANA</a:t>
-            </a:r>
-          </a:p>
-          <a:p>
-            <a:pPr algn="r" a:rtl="1">
-              <a:spcAft>
-                <a:spcPts val="800"/>
-              </a:spcAft>
-              <a:defRPr sz="1700">
-                <a:solidFill>
-                  <a:srgbClr val="282828"/>
-                </a:solidFill>
-                <a:latin typeface="Noto Naskh Arabic"/>
-              </a:defRPr>
-            </a:pPr>
-            <a:r>
-              <a:t>• محاسبات درون‌حافظه‌ای (In-Memory Computing)</a:t>
-            </a:r>
-          </a:p>
-          <a:p>
-            <a:pPr algn="r" a:rtl="1">
-              <a:spcAft>
-                <a:spcPts val="800"/>
-              </a:spcAft>
-              <a:defRPr sz="1700">
-                <a:solidFill>
-                  <a:srgbClr val="282828"/>
-                </a:solidFill>
-                <a:latin typeface="Noto Naskh Arabic"/>
-              </a:defRPr>
-            </a:pPr>
-            <a:r>
-              <a:t>• بهینه‌سازی کارایی پایگاه‌داده</a:t>
-            </a:r>
-          </a:p>
-          <a:p>
-            <a:pPr algn="r" a:rtl="1">
-              <a:spcAft>
-                <a:spcPts val="800"/>
-              </a:spcAft>
-              <a:defRPr sz="1700">
-                <a:solidFill>
-                  <a:srgbClr val="282828"/>
-                </a:solidFill>
-                <a:latin typeface="Noto Naskh Arabic"/>
-              </a:defRPr>
-            </a:pPr>
-            <a:r>
-              <a:t>• تحلیل بلادرنگ (Real-time Analytics)</a:t>
-            </a:r>
-          </a:p>
-          <a:p>
-            <a:pPr algn="r" a:rtl="1">
-              <a:spcAft>
-                <a:spcPts val="800"/>
-              </a:spcAft>
-              <a:defRPr sz="1700">
-                <a:solidFill>
-                  <a:srgbClr val="282828"/>
-                </a:solidFill>
-                <a:latin typeface="Noto Naskh Arabic"/>
-              </a:defRPr>
-            </a:pPr>
-            <a:r>
-              <a:t>• ذخیره‌سازی ستونی (Columnar Storage)</a:t>
-            </a:r>
-          </a:p>
-          <a:p>
-            <a:pPr algn="r" a:rtl="1">
-              <a:spcAft>
-                <a:spcPts val="800"/>
-              </a:spcAft>
-              <a:defRPr sz="1700">
-                <a:solidFill>
-                  <a:srgbClr val="282828"/>
-                </a:solidFill>
-                <a:latin typeface="Noto Naskh Arabic"/>
-              </a:defRPr>
-            </a:pPr>
-            <a:r>
-              <a:t>• پردازش Set-based و Push-down</a:t>
-            </a:r>
-          </a:p>
-          <a:p>
-            <a:pPr algn="r" a:rtl="1">
-              <a:spcAft>
-                <a:spcPts val="800"/>
-              </a:spcAft>
-              <a:defRPr sz="1700">
-                <a:solidFill>
-                  <a:srgbClr val="282828"/>
-                </a:solidFill>
-                <a:latin typeface="Noto Naskh Arabic"/>
-              </a:defRPr>
-            </a:pPr>
-            <a:r>
-              <a:t>• پردازش موازی و پارتیشن‌بندی جداول</a:t>
-            </a:r>
-          </a:p>
-        </p:txBody>
-      </p:sp>
-    </p:spTree>
-  </p:cSld>
-  <p:clrMapOvr>
-    <a:masterClrMapping/>
-  </p:clrMapOvr>
-</p:sld>
-</file>
-
-<file path=ppt/slides/slide30.xml><?xml version="1.0" encoding="utf-8"?>
+<file path=ppt/slides/slide39.xml><?xml version="1.0" encoding="utf-8"?>
 <p:sld xmlns:a="http://schemas.openxmlformats.org/drawingml/2006/main" xmlns:p="http://schemas.openxmlformats.org/presentationml/2006/main" xmlns:r="http://schemas.openxmlformats.org/officeDocument/2006/relationships">
   <p:cSld>
     <p:bg>
@@ -8416,8 +10506,8 @@
         </p:nvSpPr>
         <p:spPr>
           <a:xfrm>
-            <a:off x="457200" y="1828800"/>
-            <a:ext cx="8229600" cy="1645920"/>
+            <a:off x="457200" y="2286000"/>
+            <a:ext cx="8229600" cy="1828800"/>
           </a:xfrm>
           <a:prstGeom prst="rect">
             <a:avLst/>
@@ -8425,55 +10515,36 @@
           <a:noFill/>
         </p:spPr>
         <p:txBody>
-          <a:bodyPr wrap="square">
+          <a:bodyPr wrap="none">
             <a:spAutoFit/>
           </a:bodyPr>
           <a:lstStyle/>
           <a:p>
             <a:pPr algn="ctr" a:rtl="1">
-              <a:defRPr sz="3200" b="1">
+              <a:defRPr sz="3600" b="1">
                 <a:solidFill>
                   <a:srgbClr val="003366"/>
                 </a:solidFill>
-                <a:latin typeface="Noto Naskh Arabic"/>
+                <a:latin typeface="Vazir"/>
               </a:defRPr>
             </a:pPr>
             <a:r>
               <a:t>سپاس از توجه شما</a:t>
             </a:r>
           </a:p>
-        </p:txBody>
-      </p:sp>
-      <p:sp>
-        <p:nvSpPr>
-          <p:cNvPr id="3" name="TextBox 2"/>
-          <p:cNvSpPr txBox="1"/>
-          <p:nvPr/>
-        </p:nvSpPr>
-        <p:spPr>
-          <a:xfrm>
-            <a:off x="457200" y="3657600"/>
-            <a:ext cx="8229600" cy="2286000"/>
-          </a:xfrm>
-          <a:prstGeom prst="rect">
-            <a:avLst/>
-          </a:prstGeom>
-          <a:noFill/>
-        </p:spPr>
-        <p:txBody>
-          <a:bodyPr wrap="square">
-            <a:spAutoFit/>
-          </a:bodyPr>
-          <a:lstStyle/>
           <a:p>
             <a:pPr algn="ctr" a:rtl="1">
-              <a:defRPr sz="1800">
+              <a:defRPr sz="2000" b="0">
                 <a:solidFill>
                   <a:srgbClr val="006699"/>
                 </a:solidFill>
-                <a:latin typeface="Noto Naskh Arabic"/>
-              </a:defRPr>
-            </a:pPr>
+                <a:latin typeface="Vazir"/>
+              </a:defRPr>
+            </a:pPr>
+            <a:r>
+              <a:t>سید علی زین الدینی</a:t>
+            </a:r>
+            <a:br/>
             <a:r>
               <a:t>سوالات؟</a:t>
             </a:r>
@@ -8533,7 +10604,7 @@
                 <a:solidFill>
                   <a:srgbClr val="FFFFFF"/>
                 </a:solidFill>
-                <a:latin typeface="Noto Naskh Arabic"/>
+                <a:latin typeface="Vazir"/>
               </a:defRPr>
             </a:pPr>
             <a:r>
@@ -8568,8 +10639,8 @@
         </p:nvSpPr>
         <p:spPr>
           <a:xfrm>
-            <a:off x="365760" y="274320"/>
-            <a:ext cx="8412480" cy="731520"/>
+            <a:off x="365760" y="228600"/>
+            <a:ext cx="8412480" cy="640080"/>
           </a:xfrm>
           <a:prstGeom prst="rect">
             <a:avLst/>
@@ -8583,11 +10654,11 @@
           <a:lstStyle/>
           <a:p>
             <a:pPr algn="r" a:rtl="1">
-              <a:defRPr sz="2600" b="1">
+              <a:defRPr sz="2400" b="1">
                 <a:solidFill>
                   <a:srgbClr val="003366"/>
                 </a:solidFill>
-                <a:latin typeface="Noto Naskh Arabic"/>
+                <a:latin typeface="Vazir"/>
               </a:defRPr>
             </a:pPr>
             <a:r>
@@ -8604,7 +10675,7 @@
         </p:nvSpPr>
         <p:spPr>
           <a:xfrm>
-            <a:off x="365760" y="960120"/>
+            <a:off x="365760" y="868680"/>
             <a:ext cx="8412480" cy="18288"/>
           </a:xfrm>
           <a:prstGeom prst="rect">
@@ -8647,8 +10718,8 @@
         </p:nvSpPr>
         <p:spPr>
           <a:xfrm>
-            <a:off x="457200" y="1097280"/>
-            <a:ext cx="8229600" cy="5303520"/>
+            <a:off x="411480" y="960120"/>
+            <a:ext cx="4206240" cy="5486400"/>
           </a:xfrm>
           <a:prstGeom prst="rect">
             <a:avLst/>
@@ -8663,85 +10734,109 @@
           <a:p>
             <a:pPr algn="r" a:rtl="1">
               <a:spcAft>
-                <a:spcPts val="800"/>
+                <a:spcPts val="500"/>
               </a:spcAft>
-              <a:defRPr sz="1700">
+              <a:defRPr sz="1300" b="0">
                 <a:solidFill>
                   <a:srgbClr val="282828"/>
                 </a:solidFill>
-                <a:latin typeface="Noto Naskh Arabic"/>
-              </a:defRPr>
-            </a:pPr>
-            <a:r>
-              <a:t>• کارایی SAP S/4HANA تحت تأثیر سه لایه وابسته به هم است: پایگاه‌داده، کاربرد (Application) و زیرساخت</a:t>
+                <a:latin typeface="Vazir"/>
+              </a:defRPr>
+            </a:pPr>
+            <a:r>
+              <a:t>• کارایی SAP S/4HANA تحت تأثیر سه لایه وابسته است: پایگاه‌داده، لایه کاربرد (Application) و زیرساخت سخت‌افزاری. بهینه‌سازی هر لایه برای دستیابی به کارایی پایدار ضروری است.</a:t>
             </a:r>
           </a:p>
           <a:p>
             <a:pPr algn="r" a:rtl="1">
               <a:spcAft>
-                <a:spcPts val="800"/>
+                <a:spcPts val="500"/>
               </a:spcAft>
-              <a:defRPr sz="1700">
+              <a:defRPr sz="1300" b="0">
                 <a:solidFill>
                   <a:srgbClr val="282828"/>
                 </a:solidFill>
-                <a:latin typeface="Noto Naskh Arabic"/>
-              </a:defRPr>
-            </a:pPr>
-            <a:r>
-              <a:t>• در پایگاه‌داده‌های سنتی، هر کوئری تأخیر I/O دیسک ایجاد می‌کند</a:t>
+                <a:latin typeface="Vazir"/>
+              </a:defRPr>
+            </a:pPr>
+            <a:r>
+              <a:t>• در پایگاه‌داده‌های سنتی مبتنی بر دیسک، هر کوئری باید داده را از storage فیزیکی بخواند که تأخیر I/O ایجاد می‌کند. این موضوع در سیستم‌هایی با هزاران کاربر همزمان به‌شدت محسوس می‌شود.</a:t>
             </a:r>
           </a:p>
           <a:p>
             <a:pPr algn="r" a:rtl="1">
               <a:spcAft>
-                <a:spcPts val="800"/>
+                <a:spcPts val="500"/>
               </a:spcAft>
-              <a:defRPr sz="1700">
+              <a:defRPr sz="1300" b="0">
                 <a:solidFill>
                   <a:srgbClr val="282828"/>
                 </a:solidFill>
-                <a:latin typeface="Noto Naskh Arabic"/>
-              </a:defRPr>
-            </a:pPr>
-            <a:r>
-              <a:t>• S/4HANA کل جداول، ایندکس‌ها و نتایج میانی را در RAM نگه می‌دارد و فقط برای پایداری گاه‌به‌گاه روی دیسک می‌نویسد</a:t>
+                <a:latin typeface="Vazir"/>
+              </a:defRPr>
+            </a:pPr>
+            <a:r>
+              <a:t>• S/4HANA کل جداول، ایندکس‌ها و نتایج میانی را در RAM نگه می‌دارد. نوشتن روی دیسک فقط برای persistence، backup و recovery انجام می‌شود.</a:t>
             </a:r>
           </a:p>
           <a:p>
             <a:pPr algn="r" a:rtl="1">
               <a:spcAft>
-                <a:spcPts val="800"/>
+                <a:spcPts val="500"/>
               </a:spcAft>
-              <a:defRPr sz="1700">
+              <a:defRPr sz="1300" b="0">
                 <a:solidFill>
                   <a:srgbClr val="282828"/>
                 </a:solidFill>
-                <a:latin typeface="Noto Naskh Arabic"/>
-              </a:defRPr>
-            </a:pPr>
-            <a:r>
-              <a:t>• دسترسی به داده در میکروثانیه (به‌جای میلی‌ثانیه) تحول بنیادینی در پردازش بارهای سازمانی ایجاد می‌کند</a:t>
+                <a:latin typeface="Vazir"/>
+              </a:defRPr>
+            </a:pPr>
+            <a:r>
+              <a:t>• دسترسی به داده در میکروثانیه (به‌جای میلی‌ثانیه) تحول بنیادینی ایجاد می‌کند: تراکنش‌های زیر یک ثانیه، dashboard بلادرنگ و تحلیل روی داده عملیاتی.</a:t>
             </a:r>
           </a:p>
           <a:p>
             <a:pPr algn="r" a:rtl="1">
               <a:spcAft>
-                <a:spcPts val="800"/>
+                <a:spcPts val="500"/>
               </a:spcAft>
-              <a:defRPr sz="1700">
+              <a:defRPr sz="1300" b="0">
                 <a:solidFill>
                   <a:srgbClr val="282828"/>
                 </a:solidFill>
-                <a:latin typeface="Noto Naskh Arabic"/>
-              </a:defRPr>
-            </a:pPr>
-            <a:r>
-              <a:t>• معماری HTAP امکان اجرای همزمان تراکنش (OLTP) و تحلیل (OLAP) را بدون ETL فراهم می‌کند</a:t>
-            </a:r>
-          </a:p>
-        </p:txBody>
-      </p:sp>
+                <a:latin typeface="Vazir"/>
+              </a:defRPr>
+            </a:pPr>
+            <a:r>
+              <a:t>• معماری HTAP (Hybrid OLTP+OLAP) امکان اجرای همزمان تراکنش و تحلیل را بدون نیاز به ETL شبانه فراهم می‌کند.</a:t>
+            </a:r>
+          </a:p>
+        </p:txBody>
+      </p:sp>
+      <p:pic>
+        <p:nvPicPr>
+          <p:cNvPr id="5" name="Picture 4" descr="architecture_layers.png"/>
+          <p:cNvPicPr>
+            <a:picLocks noChangeAspect="1"/>
+          </p:cNvPicPr>
+          <p:nvPr/>
+        </p:nvPicPr>
+        <p:blipFill>
+          <a:blip r:embed="rId2"/>
+          <a:stretch>
+            <a:fillRect/>
+          </a:stretch>
+        </p:blipFill>
+        <p:spPr>
+          <a:xfrm>
+            <a:off x="4754880" y="1097280"/>
+            <a:ext cx="4114800" cy="2452255"/>
+          </a:xfrm>
+          <a:prstGeom prst="rect">
+            <a:avLst/>
+          </a:prstGeom>
+        </p:spPr>
+      </p:pic>
     </p:spTree>
   </p:cSld>
   <p:clrMapOvr>
@@ -8768,8 +10863,8 @@
         </p:nvSpPr>
         <p:spPr>
           <a:xfrm>
-            <a:off x="365760" y="274320"/>
-            <a:ext cx="8412480" cy="731520"/>
+            <a:off x="365760" y="228600"/>
+            <a:ext cx="8412480" cy="640080"/>
           </a:xfrm>
           <a:prstGeom prst="rect">
             <a:avLst/>
@@ -8783,11 +10878,11 @@
           <a:lstStyle/>
           <a:p>
             <a:pPr algn="r" a:rtl="1">
-              <a:defRPr sz="2600" b="1">
+              <a:defRPr sz="2400" b="1">
                 <a:solidFill>
                   <a:srgbClr val="003366"/>
                 </a:solidFill>
-                <a:latin typeface="Noto Naskh Arabic"/>
+                <a:latin typeface="Vazir"/>
               </a:defRPr>
             </a:pPr>
             <a:r>
@@ -8804,7 +10899,7 @@
         </p:nvSpPr>
         <p:spPr>
           <a:xfrm>
-            <a:off x="365760" y="960120"/>
+            <a:off x="365760" y="868680"/>
             <a:ext cx="8412480" cy="18288"/>
           </a:xfrm>
           <a:prstGeom prst="rect">
@@ -8839,16 +10934,40 @@
           </a:p>
         </p:txBody>
       </p:sp>
-      <p:sp>
-        <p:nvSpPr>
-          <p:cNvPr id="4" name="TextBox 3"/>
+      <p:pic>
+        <p:nvPicPr>
+          <p:cNvPr id="4" name="Picture 3" descr="architecture_layers.png"/>
+          <p:cNvPicPr>
+            <a:picLocks noChangeAspect="1"/>
+          </p:cNvPicPr>
+          <p:nvPr/>
+        </p:nvPicPr>
+        <p:blipFill>
+          <a:blip r:embed="rId2"/>
+          <a:stretch>
+            <a:fillRect/>
+          </a:stretch>
+        </p:blipFill>
+        <p:spPr>
+          <a:xfrm>
+            <a:off x="548640" y="1051560"/>
+            <a:ext cx="8046720" cy="4795520"/>
+          </a:xfrm>
+          <a:prstGeom prst="rect">
+            <a:avLst/>
+          </a:prstGeom>
+        </p:spPr>
+      </p:pic>
+      <p:sp>
+        <p:nvSpPr>
+          <p:cNvPr id="5" name="TextBox 4"/>
           <p:cNvSpPr txBox="1"/>
           <p:nvPr/>
         </p:nvSpPr>
         <p:spPr>
           <a:xfrm>
-            <a:off x="457200" y="1097280"/>
-            <a:ext cx="8229600" cy="5303520"/>
+            <a:off x="457200" y="6263640"/>
+            <a:ext cx="8229600" cy="457200"/>
           </a:xfrm>
           <a:prstGeom prst="rect">
             <a:avLst/>
@@ -8856,127 +10975,21 @@
           <a:noFill/>
         </p:spPr>
         <p:txBody>
-          <a:bodyPr wrap="square">
+          <a:bodyPr wrap="none">
             <a:spAutoFit/>
           </a:bodyPr>
           <a:lstStyle/>
           <a:p>
-            <a:pPr algn="r" a:rtl="1">
-              <a:spcAft>
-                <a:spcPts val="800"/>
-              </a:spcAft>
-              <a:defRPr sz="1700">
-                <a:solidFill>
-                  <a:srgbClr val="282828"/>
-                </a:solidFill>
-                <a:latin typeface="Noto Naskh Arabic"/>
-              </a:defRPr>
-            </a:pPr>
-            <a:r>
-              <a:t>• Connection &amp; Session Management: مدیریت اتصال و نشست کاربران</a:t>
-            </a:r>
-          </a:p>
-          <a:p>
-            <a:pPr algn="r" a:rtl="1">
-              <a:spcAft>
-                <a:spcPts val="800"/>
-              </a:spcAft>
-              <a:defRPr sz="1700">
-                <a:solidFill>
-                  <a:srgbClr val="282828"/>
-                </a:solidFill>
-                <a:latin typeface="Noto Naskh Arabic"/>
-              </a:defRPr>
-            </a:pPr>
-            <a:r>
-              <a:t>• Calculation Engine: پردازش کوئری‌های SQL، SQL Script و MDX</a:t>
-            </a:r>
-          </a:p>
-          <a:p>
-            <a:pPr algn="r" a:rtl="1">
-              <a:spcAft>
-                <a:spcPts val="800"/>
-              </a:spcAft>
-              <a:defRPr sz="1700">
-                <a:solidFill>
-                  <a:srgbClr val="282828"/>
-                </a:solidFill>
-                <a:latin typeface="Noto Naskh Arabic"/>
-              </a:defRPr>
-            </a:pPr>
-            <a:r>
-              <a:t>• Optimizer &amp; Plan Generator: یافتن سریع‌ترین مسیر اجرا</a:t>
-            </a:r>
-          </a:p>
-          <a:p>
-            <a:pPr algn="r" a:rtl="1">
-              <a:spcAft>
-                <a:spcPts val="800"/>
-              </a:spcAft>
-              <a:defRPr sz="1700">
-                <a:solidFill>
-                  <a:srgbClr val="282828"/>
-                </a:solidFill>
-                <a:latin typeface="Noto Naskh Arabic"/>
-              </a:defRPr>
-            </a:pPr>
-            <a:r>
-              <a:t>• In-Memory Processing Engines:</a:t>
-            </a:r>
-          </a:p>
-          <a:p>
-            <a:pPr algn="r" lvl="1" a:rtl="1">
-              <a:defRPr sz="1500">
-                <a:solidFill>
-                  <a:srgbClr val="464646"/>
-                </a:solidFill>
-                <a:latin typeface="Noto Naskh Arabic"/>
-              </a:defRPr>
-            </a:pPr>
-            <a:r>
-              <a:t>  ◦ Column/Row Engine — داده ساخت‌یافته</a:t>
-            </a:r>
-          </a:p>
-          <a:p>
-            <a:pPr algn="r" lvl="1" a:rtl="1">
-              <a:defRPr sz="1500">
-                <a:solidFill>
-                  <a:srgbClr val="464646"/>
-                </a:solidFill>
-                <a:latin typeface="Noto Naskh Arabic"/>
-              </a:defRPr>
-            </a:pPr>
-            <a:r>
-              <a:t>  ◦ Graph Engine — روابط و سلسله‌مراتب</a:t>
-            </a:r>
-          </a:p>
-          <a:p>
-            <a:pPr algn="r" lvl="1" a:rtl="1">
-              <a:defRPr sz="1500">
-                <a:solidFill>
-                  <a:srgbClr val="464646"/>
-                </a:solidFill>
-                <a:latin typeface="Noto Naskh Arabic"/>
-              </a:defRPr>
-            </a:pPr>
-            <a:r>
-              <a:t>  ◦ Text Engine — جستجوی متنی</a:t>
-            </a:r>
-          </a:p>
-          <a:p>
-            <a:pPr algn="r" a:rtl="1">
-              <a:spcAft>
-                <a:spcPts val="800"/>
-              </a:spcAft>
-              <a:defRPr sz="1700">
-                <a:solidFill>
-                  <a:srgbClr val="282828"/>
-                </a:solidFill>
-                <a:latin typeface="Noto Naskh Arabic"/>
-              </a:defRPr>
-            </a:pPr>
-            <a:r>
-              <a:t>• Persistence Layer: ثبت لاگ، بازیابی و ذخیره‌سازی پایدار</a:t>
+            <a:pPr algn="ctr" a:rtl="1">
+              <a:defRPr sz="1200" b="0">
+                <a:solidFill>
+                  <a:srgbClr val="5A5A5A"/>
+                </a:solidFill>
+                <a:latin typeface="Vazir"/>
+              </a:defRPr>
+            </a:pPr>
+            <a:r>
+              <a:t>شکل ۱: لایه‌های اصلی معماری In-Memory SAP S/4HANA</a:t>
             </a:r>
           </a:p>
         </p:txBody>
@@ -8990,6 +11003,238 @@
 </file>
 
 <file path=ppt/slides/slide7.xml><?xml version="1.0" encoding="utf-8"?>
+<p:sld xmlns:a="http://schemas.openxmlformats.org/drawingml/2006/main" xmlns:p="http://schemas.openxmlformats.org/presentationml/2006/main" xmlns:r="http://schemas.openxmlformats.org/officeDocument/2006/relationships">
+  <p:cSld>
+    <p:spTree>
+      <p:nvGrpSpPr>
+        <p:cNvPr id="1" name=""/>
+        <p:cNvGrpSpPr/>
+        <p:nvPr/>
+      </p:nvGrpSpPr>
+      <p:grpSpPr/>
+      <p:sp>
+        <p:nvSpPr>
+          <p:cNvPr id="2" name="TextBox 1"/>
+          <p:cNvSpPr txBox="1"/>
+          <p:nvPr/>
+        </p:nvSpPr>
+        <p:spPr>
+          <a:xfrm>
+            <a:off x="365760" y="228600"/>
+            <a:ext cx="8412480" cy="640080"/>
+          </a:xfrm>
+          <a:prstGeom prst="rect">
+            <a:avLst/>
+          </a:prstGeom>
+          <a:noFill/>
+        </p:spPr>
+        <p:txBody>
+          <a:bodyPr wrap="none">
+            <a:spAutoFit/>
+          </a:bodyPr>
+          <a:lstStyle/>
+          <a:p>
+            <a:pPr algn="r" a:rtl="1">
+              <a:defRPr sz="2400" b="1">
+                <a:solidFill>
+                  <a:srgbClr val="003366"/>
+                </a:solidFill>
+                <a:latin typeface="Vazir"/>
+              </a:defRPr>
+            </a:pPr>
+            <a:r>
+              <a:t>اجزای کلیدی معماری (توضیحات)</a:t>
+            </a:r>
+          </a:p>
+        </p:txBody>
+      </p:sp>
+      <p:sp>
+        <p:nvSpPr>
+          <p:cNvPr id="3" name="Rectangle 2"/>
+          <p:cNvSpPr/>
+          <p:nvPr/>
+        </p:nvSpPr>
+        <p:spPr>
+          <a:xfrm>
+            <a:off x="365760" y="868680"/>
+            <a:ext cx="8412480" cy="18288"/>
+          </a:xfrm>
+          <a:prstGeom prst="rect">
+            <a:avLst/>
+          </a:prstGeom>
+          <a:solidFill>
+            <a:srgbClr val="006699"/>
+          </a:solidFill>
+          <a:ln>
+            <a:noFill/>
+          </a:ln>
+        </p:spPr>
+        <p:style>
+          <a:lnRef idx="1">
+            <a:schemeClr val="accent1"/>
+          </a:lnRef>
+          <a:fillRef idx="3">
+            <a:schemeClr val="accent1"/>
+          </a:fillRef>
+          <a:effectRef idx="2">
+            <a:schemeClr val="accent1"/>
+          </a:effectRef>
+          <a:fontRef idx="minor">
+            <a:schemeClr val="lt1"/>
+          </a:fontRef>
+        </p:style>
+        <p:txBody>
+          <a:bodyPr rtlCol="0" anchor="ctr"/>
+          <a:lstStyle/>
+          <a:p>
+            <a:pPr algn="ctr"/>
+          </a:p>
+        </p:txBody>
+      </p:sp>
+      <p:sp>
+        <p:nvSpPr>
+          <p:cNvPr id="4" name="TextBox 3"/>
+          <p:cNvSpPr txBox="1"/>
+          <p:nvPr/>
+        </p:nvSpPr>
+        <p:spPr>
+          <a:xfrm>
+            <a:off x="411480" y="960120"/>
+            <a:ext cx="8321040" cy="5669280"/>
+          </a:xfrm>
+          <a:prstGeom prst="rect">
+            <a:avLst/>
+          </a:prstGeom>
+          <a:noFill/>
+        </p:spPr>
+        <p:txBody>
+          <a:bodyPr wrap="square">
+            <a:spAutoFit/>
+          </a:bodyPr>
+          <a:lstStyle/>
+          <a:p>
+            <a:pPr algn="r" a:rtl="1">
+              <a:spcAft>
+                <a:spcPts val="600"/>
+              </a:spcAft>
+              <a:defRPr sz="1400" b="0">
+                <a:solidFill>
+                  <a:srgbClr val="282828"/>
+                </a:solidFill>
+                <a:latin typeface="Vazir"/>
+              </a:defRPr>
+            </a:pPr>
+            <a:r>
+              <a:t>• Connection &amp; Session Management: مدیریت اتصال کاربران و نشست‌ها — نقطه ورود تمام درخواست‌ها به سیستم.</a:t>
+            </a:r>
+          </a:p>
+          <a:p>
+            <a:pPr algn="r" a:rtl="1">
+              <a:spcAft>
+                <a:spcPts val="600"/>
+              </a:spcAft>
+              <a:defRPr sz="1400" b="0">
+                <a:solidFill>
+                  <a:srgbClr val="282828"/>
+                </a:solidFill>
+                <a:latin typeface="Vazir"/>
+              </a:defRPr>
+            </a:pPr>
+            <a:r>
+              <a:t>• Authorization Manager: کنترل دسترسی — فقط کاربران مجاز می‌توانند داده را ببینند یا تغییر دهند.</a:t>
+            </a:r>
+          </a:p>
+          <a:p>
+            <a:pPr algn="r" a:rtl="1">
+              <a:spcAft>
+                <a:spcPts val="600"/>
+              </a:spcAft>
+              <a:defRPr sz="1400" b="0">
+                <a:solidFill>
+                  <a:srgbClr val="282828"/>
+                </a:solidFill>
+                <a:latin typeface="Vazir"/>
+              </a:defRPr>
+            </a:pPr>
+            <a:r>
+              <a:t>• Calculation Engine: دریافت کوئری‌های SQL، SQL Script و MDX و انجام محاسبات.</a:t>
+            </a:r>
+          </a:p>
+          <a:p>
+            <a:pPr algn="r" a:rtl="1">
+              <a:spcAft>
+                <a:spcPts val="600"/>
+              </a:spcAft>
+              <a:defRPr sz="1400" b="0">
+                <a:solidFill>
+                  <a:srgbClr val="282828"/>
+                </a:solidFill>
+                <a:latin typeface="Vazir"/>
+              </a:defRPr>
+            </a:pPr>
+            <a:r>
+              <a:t>• Optimizer &amp; Plan Generator: یافتن سریع‌ترین plan اجرا با تحلیل cost-based.</a:t>
+            </a:r>
+          </a:p>
+          <a:p>
+            <a:pPr algn="r" a:rtl="1">
+              <a:spcAft>
+                <a:spcPts val="600"/>
+              </a:spcAft>
+              <a:defRPr sz="1400" b="0">
+                <a:solidFill>
+                  <a:srgbClr val="282828"/>
+                </a:solidFill>
+                <a:latin typeface="Vazir"/>
+              </a:defRPr>
+            </a:pPr>
+            <a:r>
+              <a:t>• In-Memory Processing Engines: Column/Row Engine (جداول)، Graph Engine (شبکه/سلسله‌مراتب)، Text Engine (جستجوی متنی).</a:t>
+            </a:r>
+          </a:p>
+          <a:p>
+            <a:pPr algn="r" a:rtl="1">
+              <a:spcAft>
+                <a:spcPts val="600"/>
+              </a:spcAft>
+              <a:defRPr sz="1400" b="0">
+                <a:solidFill>
+                  <a:srgbClr val="282828"/>
+                </a:solidFill>
+                <a:latin typeface="Vazir"/>
+              </a:defRPr>
+            </a:pPr>
+            <a:r>
+              <a:t>• Transaction Manager: تضمین ACID و consistency در بار همزمان.</a:t>
+            </a:r>
+          </a:p>
+          <a:p>
+            <a:pPr algn="r" a:rtl="1">
+              <a:spcAft>
+                <a:spcPts val="600"/>
+              </a:spcAft>
+              <a:defRPr sz="1400" b="0">
+                <a:solidFill>
+                  <a:srgbClr val="282828"/>
+                </a:solidFill>
+                <a:latin typeface="Vazir"/>
+              </a:defRPr>
+            </a:pPr>
+            <a:r>
+              <a:t>• Persistence Layer: logging، recovery و ذخیره‌سازی پایدار برای جلوگیری از از دست رفتن داده.</a:t>
+            </a:r>
+          </a:p>
+        </p:txBody>
+      </p:sp>
+    </p:spTree>
+  </p:cSld>
+  <p:clrMapOvr>
+    <a:masterClrMapping/>
+  </p:clrMapOvr>
+</p:sld>
+</file>
+
+<file path=ppt/slides/slide8.xml><?xml version="1.0" encoding="utf-8"?>
 <p:sld xmlns:a="http://schemas.openxmlformats.org/drawingml/2006/main" xmlns:p="http://schemas.openxmlformats.org/presentationml/2006/main" xmlns:r="http://schemas.openxmlformats.org/officeDocument/2006/relationships">
   <p:cSld>
     <p:bg>
@@ -9034,195 +11279,11 @@
                 <a:solidFill>
                   <a:srgbClr val="FFFFFF"/>
                 </a:solidFill>
-                <a:latin typeface="Noto Naskh Arabic"/>
+                <a:latin typeface="Vazir"/>
               </a:defRPr>
             </a:pPr>
             <a:r>
               <a:t>۲. مرور ادبیات</a:t>
-            </a:r>
-          </a:p>
-        </p:txBody>
-      </p:sp>
-    </p:spTree>
-  </p:cSld>
-  <p:clrMapOvr>
-    <a:masterClrMapping/>
-  </p:clrMapOvr>
-</p:sld>
-</file>
-
-<file path=ppt/slides/slide8.xml><?xml version="1.0" encoding="utf-8"?>
-<p:sld xmlns:a="http://schemas.openxmlformats.org/drawingml/2006/main" xmlns:p="http://schemas.openxmlformats.org/presentationml/2006/main" xmlns:r="http://schemas.openxmlformats.org/officeDocument/2006/relationships">
-  <p:cSld>
-    <p:spTree>
-      <p:nvGrpSpPr>
-        <p:cNvPr id="1" name=""/>
-        <p:cNvGrpSpPr/>
-        <p:nvPr/>
-      </p:nvGrpSpPr>
-      <p:grpSpPr/>
-      <p:sp>
-        <p:nvSpPr>
-          <p:cNvPr id="2" name="TextBox 1"/>
-          <p:cNvSpPr txBox="1"/>
-          <p:nvPr/>
-        </p:nvSpPr>
-        <p:spPr>
-          <a:xfrm>
-            <a:off x="365760" y="274320"/>
-            <a:ext cx="8412480" cy="731520"/>
-          </a:xfrm>
-          <a:prstGeom prst="rect">
-            <a:avLst/>
-          </a:prstGeom>
-          <a:noFill/>
-        </p:spPr>
-        <p:txBody>
-          <a:bodyPr wrap="none">
-            <a:spAutoFit/>
-          </a:bodyPr>
-          <a:lstStyle/>
-          <a:p>
-            <a:pPr algn="r" a:rtl="1">
-              <a:defRPr sz="2600" b="1">
-                <a:solidFill>
-                  <a:srgbClr val="003366"/>
-                </a:solidFill>
-                <a:latin typeface="Noto Naskh Arabic"/>
-              </a:defRPr>
-            </a:pPr>
-            <a:r>
-              <a:t>پژوهش‌های پیشین</a:t>
-            </a:r>
-          </a:p>
-        </p:txBody>
-      </p:sp>
-      <p:sp>
-        <p:nvSpPr>
-          <p:cNvPr id="3" name="Rectangle 2"/>
-          <p:cNvSpPr/>
-          <p:nvPr/>
-        </p:nvSpPr>
-        <p:spPr>
-          <a:xfrm>
-            <a:off x="365760" y="960120"/>
-            <a:ext cx="8412480" cy="18288"/>
-          </a:xfrm>
-          <a:prstGeom prst="rect">
-            <a:avLst/>
-          </a:prstGeom>
-          <a:solidFill>
-            <a:srgbClr val="006699"/>
-          </a:solidFill>
-          <a:ln>
-            <a:noFill/>
-          </a:ln>
-        </p:spPr>
-        <p:style>
-          <a:lnRef idx="1">
-            <a:schemeClr val="accent1"/>
-          </a:lnRef>
-          <a:fillRef idx="3">
-            <a:schemeClr val="accent1"/>
-          </a:fillRef>
-          <a:effectRef idx="2">
-            <a:schemeClr val="accent1"/>
-          </a:effectRef>
-          <a:fontRef idx="minor">
-            <a:schemeClr val="lt1"/>
-          </a:fontRef>
-        </p:style>
-        <p:txBody>
-          <a:bodyPr rtlCol="0" anchor="ctr"/>
-          <a:lstStyle/>
-          <a:p>
-            <a:pPr algn="ctr"/>
-          </a:p>
-        </p:txBody>
-      </p:sp>
-      <p:sp>
-        <p:nvSpPr>
-          <p:cNvPr id="4" name="TextBox 3"/>
-          <p:cNvSpPr txBox="1"/>
-          <p:nvPr/>
-        </p:nvSpPr>
-        <p:spPr>
-          <a:xfrm>
-            <a:off x="457200" y="1097280"/>
-            <a:ext cx="8229600" cy="5303520"/>
-          </a:xfrm>
-          <a:prstGeom prst="rect">
-            <a:avLst/>
-          </a:prstGeom>
-          <a:noFill/>
-        </p:spPr>
-        <p:txBody>
-          <a:bodyPr wrap="square">
-            <a:spAutoFit/>
-          </a:bodyPr>
-          <a:lstStyle/>
-          <a:p>
-            <a:pPr algn="r" a:rtl="1">
-              <a:spcAft>
-                <a:spcPts val="800"/>
-              </a:spcAft>
-              <a:defRPr sz="1700">
-                <a:solidFill>
-                  <a:srgbClr val="282828"/>
-                </a:solidFill>
-                <a:latin typeface="Noto Naskh Arabic"/>
-              </a:defRPr>
-            </a:pPr>
-            <a:r>
-              <a:t>• Zhang Mei (2024): بهره‌گیری از مدل درون‌حافظه HANA برای تحلیل بلادرنگ و کاهش افزونگی</a:t>
-            </a:r>
-          </a:p>
-          <a:p>
-            <a:pPr algn="r" a:rtl="1">
-              <a:spcAft>
-                <a:spcPts val="800"/>
-              </a:spcAft>
-              <a:defRPr sz="1700">
-                <a:solidFill>
-                  <a:srgbClr val="282828"/>
-                </a:solidFill>
-                <a:latin typeface="Noto Naskh Arabic"/>
-              </a:defRPr>
-            </a:pPr>
-            <a:r>
-              <a:t>• IRJMETS (2022/2025): تکنیک‌های partition pruning، push-down projection و data tiering</a:t>
-            </a:r>
-          </a:p>
-          <a:p>
-            <a:pPr algn="r" a:rtl="1">
-              <a:spcAft>
-                <a:spcPts val="800"/>
-              </a:spcAft>
-              <a:defRPr sz="1700">
-                <a:solidFill>
-                  <a:srgbClr val="282828"/>
-                </a:solidFill>
-                <a:latin typeface="Noto Naskh Arabic"/>
-              </a:defRPr>
-            </a:pPr>
-            <a:r>
-              <a:t>• Müller et al. (2015): بهینه‌سازی join با aggregate cache و object-awareness</a:t>
-            </a:r>
-          </a:p>
-          <a:p>
-            <a:pPr algn="r" a:rtl="1">
-              <a:spcAft>
-                <a:spcPts val="800"/>
-              </a:spcAft>
-              <a:defRPr sz="1700">
-                <a:solidFill>
-                  <a:srgbClr val="282828"/>
-                </a:solidFill>
-                <a:latin typeface="Noto Naskh Arabic"/>
-              </a:defRPr>
-            </a:pPr>
-            <a:r>
-              <a:t>• Plattner (2014): پایه نظری column store، فشرده‌سازی و pushdown در مدیریت داده درون‌حافظه‌ای</a:t>
             </a:r>
           </a:p>
         </p:txBody>
@@ -9253,8 +11314,8 @@
         </p:nvSpPr>
         <p:spPr>
           <a:xfrm>
-            <a:off x="365760" y="274320"/>
-            <a:ext cx="8412480" cy="731520"/>
+            <a:off x="365760" y="228600"/>
+            <a:ext cx="8412480" cy="640080"/>
           </a:xfrm>
           <a:prstGeom prst="rect">
             <a:avLst/>
@@ -9268,15 +11329,15 @@
           <a:lstStyle/>
           <a:p>
             <a:pPr algn="r" a:rtl="1">
-              <a:defRPr sz="2600" b="1">
+              <a:defRPr sz="2400" b="1">
                 <a:solidFill>
                   <a:srgbClr val="003366"/>
                 </a:solidFill>
-                <a:latin typeface="Noto Naskh Arabic"/>
-              </a:defRPr>
-            </a:pPr>
-            <a:r>
-              <a:t>شکاف‌های پژوهشی</a:t>
+                <a:latin typeface="Vazir"/>
+              </a:defRPr>
+            </a:pPr>
+            <a:r>
+              <a:t>پژوهش‌های پیشین</a:t>
             </a:r>
           </a:p>
         </p:txBody>
@@ -9289,7 +11350,7 @@
         </p:nvSpPr>
         <p:spPr>
           <a:xfrm>
-            <a:off x="365760" y="960120"/>
+            <a:off x="365760" y="868680"/>
             <a:ext cx="8412480" cy="18288"/>
           </a:xfrm>
           <a:prstGeom prst="rect">
@@ -9332,8 +11393,8 @@
         </p:nvSpPr>
         <p:spPr>
           <a:xfrm>
-            <a:off x="457200" y="1097280"/>
-            <a:ext cx="8229600" cy="5303520"/>
+            <a:off x="411480" y="960120"/>
+            <a:ext cx="8321040" cy="5669280"/>
           </a:xfrm>
           <a:prstGeom prst="rect">
             <a:avLst/>
@@ -9348,81 +11409,81 @@
           <a:p>
             <a:pPr algn="r" a:rtl="1">
               <a:spcAft>
-                <a:spcPts val="800"/>
+                <a:spcPts val="600"/>
               </a:spcAft>
-              <a:defRPr sz="1700">
+              <a:defRPr sz="1400" b="0">
                 <a:solidFill>
                   <a:srgbClr val="282828"/>
                 </a:solidFill>
-                <a:latin typeface="Noto Naskh Arabic"/>
-              </a:defRPr>
-            </a:pPr>
-            <a:r>
-              <a:t>• بیشتر مطالعات ویژگی‌ها را توضیح می‌دهند اما معیارهای واقعی runtime در S/4HANA ارائه نمی‌کنند</a:t>
+                <a:latin typeface="Vazir"/>
+              </a:defRPr>
+            </a:pPr>
+            <a:r>
+              <a:t>• Zhang Mei (2024): تأکید بر استفاده از مدل درون‌حافظه HANA برای تحلیل بلادرنگ، بهینه‌سازی مدل داده و کاهش افزونگی — نه فقط scale کردن سخت‌افزار.</a:t>
             </a:r>
           </a:p>
           <a:p>
             <a:pPr algn="r" a:rtl="1">
               <a:spcAft>
-                <a:spcPts val="800"/>
+                <a:spcPts val="600"/>
               </a:spcAft>
-              <a:defRPr sz="1700">
+              <a:defRPr sz="1400" b="0">
                 <a:solidFill>
                   <a:srgbClr val="282828"/>
                 </a:solidFill>
-                <a:latin typeface="Noto Naskh Arabic"/>
-              </a:defRPr>
-            </a:pPr>
-            <a:r>
-              <a:t>• تأثیر indexing و partitioning روی بارهای کاری مختلف به‌طور کمی بررسی نشده</a:t>
+                <a:latin typeface="Vazir"/>
+              </a:defRPr>
+            </a:pPr>
+            <a:r>
+              <a:t>• IRJMETS (2022/2025): تکنیک‌های partition pruning، push-down projection، data tiering و workload-aware tuning برای کاهش مصرف حافظه و runtime.</a:t>
             </a:r>
           </a:p>
           <a:p>
             <a:pPr algn="r" a:rtl="1">
               <a:spcAft>
-                <a:spcPts val="800"/>
+                <a:spcPts val="600"/>
               </a:spcAft>
-              <a:defRPr sz="1700">
+              <a:defRPr sz="1400" b="0">
                 <a:solidFill>
                   <a:srgbClr val="282828"/>
                 </a:solidFill>
-                <a:latin typeface="Noto Naskh Arabic"/>
-              </a:defRPr>
-            </a:pPr>
-            <a:r>
-              <a:t>• ابزارهای SAP مانند ST05، PlanViz و DBACOCKPIT کمتر در ادبیات استفاده شده‌اند</a:t>
+                <a:latin typeface="Vazir"/>
+              </a:defRPr>
+            </a:pPr>
+            <a:r>
+              <a:t>• Müller et al. (2015): بهینه‌سازی join با aggregate cache و object-awareness — بهبود چند-magnitude در کوئری‌های join-aggregate.</a:t>
             </a:r>
           </a:p>
           <a:p>
             <a:pPr algn="r" a:rtl="1">
               <a:spcAft>
-                <a:spcPts val="800"/>
+                <a:spcPts val="600"/>
               </a:spcAft>
-              <a:defRPr sz="1700">
+              <a:defRPr sz="1400" b="0">
                 <a:solidFill>
                   <a:srgbClr val="282828"/>
                 </a:solidFill>
-                <a:latin typeface="Noto Naskh Arabic"/>
-              </a:defRPr>
-            </a:pPr>
-            <a:r>
-              <a:t>• چارچوب یکپارچه‌ای برای تعامل query design، compression، indexing و partitioning وجود ندارد</a:t>
+                <a:latin typeface="Vazir"/>
+              </a:defRPr>
+            </a:pPr>
+            <a:r>
+              <a:t>• Plattner (2014): پایه نظری column store، compression و pushdown — بنیان‌گذار مفاهیم In-Memory Data Management.</a:t>
             </a:r>
           </a:p>
           <a:p>
             <a:pPr algn="r" a:rtl="1">
               <a:spcAft>
-                <a:spcPts val="800"/>
+                <a:spcPts val="600"/>
               </a:spcAft>
-              <a:defRPr sz="1700">
+              <a:defRPr sz="1400" b="0">
                 <a:solidFill>
                   <a:srgbClr val="282828"/>
                 </a:solidFill>
-                <a:latin typeface="Noto Naskh Arabic"/>
-              </a:defRPr>
-            </a:pPr>
-            <a:r>
-              <a:t>• این مقاله با رویکرد عملی این شکاف‌ها را پر می‌کند</a:t>
+                <a:latin typeface="Vazir"/>
+              </a:defRPr>
+            </a:pPr>
+            <a:r>
+              <a:t>• Jain (n.d.): بهینه‌سازی indexing و partitioning برای workloadهای حجیم.</a:t>
             </a:r>
           </a:p>
         </p:txBody>

--- a/SAP_S4HANA_InMemory_Presentation_FA.pptx
+++ b/SAP_S4HANA_InMemory_Presentation_FA.pptx
@@ -3365,6 +3365,157 @@
           </a:p>
         </p:txBody>
       </p:sp>
+      <p:sp>
+        <p:nvSpPr>
+          <p:cNvPr id="6" name="Rectangle 5"/>
+          <p:cNvSpPr/>
+          <p:nvPr/>
+        </p:nvSpPr>
+        <p:spPr>
+          <a:xfrm>
+            <a:off x="365760" y="6419088"/>
+            <a:ext cx="8412480" cy="13716"/>
+          </a:xfrm>
+          <a:prstGeom prst="rect">
+            <a:avLst/>
+          </a:prstGeom>
+          <a:solidFill>
+            <a:srgbClr val="D2DCE6"/>
+          </a:solidFill>
+          <a:ln>
+            <a:noFill/>
+          </a:ln>
+        </p:spPr>
+        <p:style>
+          <a:lnRef idx="1">
+            <a:schemeClr val="accent1"/>
+          </a:lnRef>
+          <a:fillRef idx="3">
+            <a:schemeClr val="accent1"/>
+          </a:fillRef>
+          <a:effectRef idx="2">
+            <a:schemeClr val="accent1"/>
+          </a:effectRef>
+          <a:fontRef idx="minor">
+            <a:schemeClr val="lt1"/>
+          </a:fontRef>
+        </p:style>
+        <p:txBody>
+          <a:bodyPr rtlCol="0" anchor="ctr"/>
+          <a:lstStyle/>
+          <a:p>
+            <a:pPr algn="ctr"/>
+          </a:p>
+        </p:txBody>
+      </p:sp>
+      <p:sp>
+        <p:nvSpPr>
+          <p:cNvPr id="7" name="TextBox 6"/>
+          <p:cNvSpPr txBox="1"/>
+          <p:nvPr/>
+        </p:nvSpPr>
+        <p:spPr>
+          <a:xfrm>
+            <a:off x="411480" y="6473952"/>
+            <a:ext cx="4114800" cy="292608"/>
+          </a:xfrm>
+          <a:prstGeom prst="rect">
+            <a:avLst/>
+          </a:prstGeom>
+          <a:noFill/>
+        </p:spPr>
+        <p:txBody>
+          <a:bodyPr wrap="none">
+            <a:spAutoFit/>
+          </a:bodyPr>
+          <a:lstStyle/>
+          <a:p>
+            <a:pPr algn="r" a:rtl="1">
+              <a:defRPr sz="1000" b="0">
+                <a:solidFill>
+                  <a:srgbClr val="8C8C8C"/>
+                </a:solidFill>
+                <a:latin typeface="Vazir"/>
+              </a:defRPr>
+            </a:pPr>
+            <a:r>
+              <a:t>پایگاه داده پیشرفته | سید علی زین الدینی</a:t>
+            </a:r>
+          </a:p>
+        </p:txBody>
+      </p:sp>
+      <p:sp>
+        <p:nvSpPr>
+          <p:cNvPr id="8" name="TextBox 7"/>
+          <p:cNvSpPr txBox="1"/>
+          <p:nvPr/>
+        </p:nvSpPr>
+        <p:spPr>
+          <a:xfrm>
+            <a:off x="3657600" y="6446520"/>
+            <a:ext cx="1828800" cy="320040"/>
+          </a:xfrm>
+          <a:prstGeom prst="rect">
+            <a:avLst/>
+          </a:prstGeom>
+          <a:noFill/>
+        </p:spPr>
+        <p:txBody>
+          <a:bodyPr wrap="none">
+            <a:spAutoFit/>
+          </a:bodyPr>
+          <a:lstStyle/>
+          <a:p>
+            <a:pPr algn="ctr" a:rtl="1">
+              <a:defRPr sz="1100" b="1">
+                <a:solidFill>
+                  <a:srgbClr val="6E6E6E"/>
+                </a:solidFill>
+                <a:latin typeface="Vazir"/>
+              </a:defRPr>
+            </a:pPr>
+            <a:r>
+              <a:t>صفحه 1 از 39</a:t>
+            </a:r>
+          </a:p>
+        </p:txBody>
+      </p:sp>
+      <p:sp>
+        <p:nvSpPr>
+          <p:cNvPr id="9" name="TextBox 8"/>
+          <p:cNvSpPr txBox="1"/>
+          <p:nvPr/>
+        </p:nvSpPr>
+        <p:spPr>
+          <a:xfrm>
+            <a:off x="7315200" y="6473952"/>
+            <a:ext cx="1371600" cy="292608"/>
+          </a:xfrm>
+          <a:prstGeom prst="rect">
+            <a:avLst/>
+          </a:prstGeom>
+          <a:noFill/>
+        </p:spPr>
+        <p:txBody>
+          <a:bodyPr wrap="none">
+            <a:spAutoFit/>
+          </a:bodyPr>
+          <a:lstStyle/>
+          <a:p>
+            <a:pPr algn="l" a:rtl="1">
+              <a:defRPr sz="1000" b="0">
+                <a:solidFill>
+                  <a:srgbClr val="8C8C8C"/>
+                </a:solidFill>
+                <a:latin typeface="Vazir"/>
+              </a:defRPr>
+            </a:pPr>
+            <a:r>
+              <a:t>1</a:t>
+            </a:r>
+          </a:p>
+        </p:txBody>
+      </p:sp>
     </p:spTree>
   </p:cSld>
   <p:clrMapOvr>
@@ -3376,6 +3527,12 @@
 <file path=ppt/slides/slide10.xml><?xml version="1.0" encoding="utf-8"?>
 <p:sld xmlns:a="http://schemas.openxmlformats.org/drawingml/2006/main" xmlns:p="http://schemas.openxmlformats.org/presentationml/2006/main" xmlns:r="http://schemas.openxmlformats.org/officeDocument/2006/relationships">
   <p:cSld>
+    <p:bg>
+      <p:bgPr>
+        <a:noFill/>
+        <a:effectLst/>
+      </p:bgPr>
+    </p:bg>
     <p:spTree>
       <p:nvGrpSpPr>
         <p:cNvPr id="1" name=""/>
@@ -3561,6 +3718,157 @@
             </a:pPr>
             <a:r>
               <a:t>• این مقاله با رویکرد عملی (hands-on) و استفاده از ابزارهای trace، این شکاف‌ها را پر می‌کند و یک framework یکپارچه ارائه می‌دهد.</a:t>
+            </a:r>
+          </a:p>
+        </p:txBody>
+      </p:sp>
+      <p:sp>
+        <p:nvSpPr>
+          <p:cNvPr id="5" name="Rectangle 4"/>
+          <p:cNvSpPr/>
+          <p:nvPr/>
+        </p:nvSpPr>
+        <p:spPr>
+          <a:xfrm>
+            <a:off x="365760" y="6419088"/>
+            <a:ext cx="8412480" cy="13716"/>
+          </a:xfrm>
+          <a:prstGeom prst="rect">
+            <a:avLst/>
+          </a:prstGeom>
+          <a:solidFill>
+            <a:srgbClr val="D2DCE6"/>
+          </a:solidFill>
+          <a:ln>
+            <a:noFill/>
+          </a:ln>
+        </p:spPr>
+        <p:style>
+          <a:lnRef idx="1">
+            <a:schemeClr val="accent1"/>
+          </a:lnRef>
+          <a:fillRef idx="3">
+            <a:schemeClr val="accent1"/>
+          </a:fillRef>
+          <a:effectRef idx="2">
+            <a:schemeClr val="accent1"/>
+          </a:effectRef>
+          <a:fontRef idx="minor">
+            <a:schemeClr val="lt1"/>
+          </a:fontRef>
+        </p:style>
+        <p:txBody>
+          <a:bodyPr rtlCol="0" anchor="ctr"/>
+          <a:lstStyle/>
+          <a:p>
+            <a:pPr algn="ctr"/>
+          </a:p>
+        </p:txBody>
+      </p:sp>
+      <p:sp>
+        <p:nvSpPr>
+          <p:cNvPr id="6" name="TextBox 5"/>
+          <p:cNvSpPr txBox="1"/>
+          <p:nvPr/>
+        </p:nvSpPr>
+        <p:spPr>
+          <a:xfrm>
+            <a:off x="411480" y="6473952"/>
+            <a:ext cx="4114800" cy="292608"/>
+          </a:xfrm>
+          <a:prstGeom prst="rect">
+            <a:avLst/>
+          </a:prstGeom>
+          <a:noFill/>
+        </p:spPr>
+        <p:txBody>
+          <a:bodyPr wrap="none">
+            <a:spAutoFit/>
+          </a:bodyPr>
+          <a:lstStyle/>
+          <a:p>
+            <a:pPr algn="r" a:rtl="1">
+              <a:defRPr sz="1000" b="0">
+                <a:solidFill>
+                  <a:srgbClr val="8C8C8C"/>
+                </a:solidFill>
+                <a:latin typeface="Vazir"/>
+              </a:defRPr>
+            </a:pPr>
+            <a:r>
+              <a:t>پایگاه داده پیشرفته | سید علی زین الدینی</a:t>
+            </a:r>
+          </a:p>
+        </p:txBody>
+      </p:sp>
+      <p:sp>
+        <p:nvSpPr>
+          <p:cNvPr id="7" name="TextBox 6"/>
+          <p:cNvSpPr txBox="1"/>
+          <p:nvPr/>
+        </p:nvSpPr>
+        <p:spPr>
+          <a:xfrm>
+            <a:off x="3657600" y="6446520"/>
+            <a:ext cx="1828800" cy="320040"/>
+          </a:xfrm>
+          <a:prstGeom prst="rect">
+            <a:avLst/>
+          </a:prstGeom>
+          <a:noFill/>
+        </p:spPr>
+        <p:txBody>
+          <a:bodyPr wrap="none">
+            <a:spAutoFit/>
+          </a:bodyPr>
+          <a:lstStyle/>
+          <a:p>
+            <a:pPr algn="ctr" a:rtl="1">
+              <a:defRPr sz="1100" b="1">
+                <a:solidFill>
+                  <a:srgbClr val="6E6E6E"/>
+                </a:solidFill>
+                <a:latin typeface="Vazir"/>
+              </a:defRPr>
+            </a:pPr>
+            <a:r>
+              <a:t>صفحه 10 از 39</a:t>
+            </a:r>
+          </a:p>
+        </p:txBody>
+      </p:sp>
+      <p:sp>
+        <p:nvSpPr>
+          <p:cNvPr id="8" name="TextBox 7"/>
+          <p:cNvSpPr txBox="1"/>
+          <p:nvPr/>
+        </p:nvSpPr>
+        <p:spPr>
+          <a:xfrm>
+            <a:off x="7315200" y="6473952"/>
+            <a:ext cx="1371600" cy="292608"/>
+          </a:xfrm>
+          <a:prstGeom prst="rect">
+            <a:avLst/>
+          </a:prstGeom>
+          <a:noFill/>
+        </p:spPr>
+        <p:txBody>
+          <a:bodyPr wrap="none">
+            <a:spAutoFit/>
+          </a:bodyPr>
+          <a:lstStyle/>
+          <a:p>
+            <a:pPr algn="l" a:rtl="1">
+              <a:defRPr sz="1000" b="0">
+                <a:solidFill>
+                  <a:srgbClr val="8C8C8C"/>
+                </a:solidFill>
+                <a:latin typeface="Vazir"/>
+              </a:defRPr>
+            </a:pPr>
+            <a:r>
+              <a:t>10</a:t>
             </a:r>
           </a:p>
         </p:txBody>
@@ -3627,6 +3935,157 @@
           </a:p>
         </p:txBody>
       </p:sp>
+      <p:sp>
+        <p:nvSpPr>
+          <p:cNvPr id="3" name="Rectangle 2"/>
+          <p:cNvSpPr/>
+          <p:nvPr/>
+        </p:nvSpPr>
+        <p:spPr>
+          <a:xfrm>
+            <a:off x="365760" y="6419088"/>
+            <a:ext cx="8412480" cy="13716"/>
+          </a:xfrm>
+          <a:prstGeom prst="rect">
+            <a:avLst/>
+          </a:prstGeom>
+          <a:solidFill>
+            <a:srgbClr val="FFFFFF"/>
+          </a:solidFill>
+          <a:ln>
+            <a:noFill/>
+          </a:ln>
+        </p:spPr>
+        <p:style>
+          <a:lnRef idx="1">
+            <a:schemeClr val="accent1"/>
+          </a:lnRef>
+          <a:fillRef idx="3">
+            <a:schemeClr val="accent1"/>
+          </a:fillRef>
+          <a:effectRef idx="2">
+            <a:schemeClr val="accent1"/>
+          </a:effectRef>
+          <a:fontRef idx="minor">
+            <a:schemeClr val="lt1"/>
+          </a:fontRef>
+        </p:style>
+        <p:txBody>
+          <a:bodyPr rtlCol="0" anchor="ctr"/>
+          <a:lstStyle/>
+          <a:p>
+            <a:pPr algn="ctr"/>
+          </a:p>
+        </p:txBody>
+      </p:sp>
+      <p:sp>
+        <p:nvSpPr>
+          <p:cNvPr id="4" name="TextBox 3"/>
+          <p:cNvSpPr txBox="1"/>
+          <p:nvPr/>
+        </p:nvSpPr>
+        <p:spPr>
+          <a:xfrm>
+            <a:off x="411480" y="6473952"/>
+            <a:ext cx="4114800" cy="292608"/>
+          </a:xfrm>
+          <a:prstGeom prst="rect">
+            <a:avLst/>
+          </a:prstGeom>
+          <a:noFill/>
+        </p:spPr>
+        <p:txBody>
+          <a:bodyPr wrap="none">
+            <a:spAutoFit/>
+          </a:bodyPr>
+          <a:lstStyle/>
+          <a:p>
+            <a:pPr algn="r" a:rtl="1">
+              <a:defRPr sz="1000" b="0">
+                <a:solidFill>
+                  <a:srgbClr val="DCDCDC"/>
+                </a:solidFill>
+                <a:latin typeface="Vazir"/>
+              </a:defRPr>
+            </a:pPr>
+            <a:r>
+              <a:t>پایگاه داده پیشرفته | سید علی زین الدینی</a:t>
+            </a:r>
+          </a:p>
+        </p:txBody>
+      </p:sp>
+      <p:sp>
+        <p:nvSpPr>
+          <p:cNvPr id="5" name="TextBox 4"/>
+          <p:cNvSpPr txBox="1"/>
+          <p:nvPr/>
+        </p:nvSpPr>
+        <p:spPr>
+          <a:xfrm>
+            <a:off x="3657600" y="6446520"/>
+            <a:ext cx="1828800" cy="320040"/>
+          </a:xfrm>
+          <a:prstGeom prst="rect">
+            <a:avLst/>
+          </a:prstGeom>
+          <a:noFill/>
+        </p:spPr>
+        <p:txBody>
+          <a:bodyPr wrap="none">
+            <a:spAutoFit/>
+          </a:bodyPr>
+          <a:lstStyle/>
+          <a:p>
+            <a:pPr algn="ctr" a:rtl="1">
+              <a:defRPr sz="1100" b="1">
+                <a:solidFill>
+                  <a:srgbClr val="FFFFFF"/>
+                </a:solidFill>
+                <a:latin typeface="Vazir"/>
+              </a:defRPr>
+            </a:pPr>
+            <a:r>
+              <a:t>صفحه 11 از 39</a:t>
+            </a:r>
+          </a:p>
+        </p:txBody>
+      </p:sp>
+      <p:sp>
+        <p:nvSpPr>
+          <p:cNvPr id="6" name="TextBox 5"/>
+          <p:cNvSpPr txBox="1"/>
+          <p:nvPr/>
+        </p:nvSpPr>
+        <p:spPr>
+          <a:xfrm>
+            <a:off x="7315200" y="6473952"/>
+            <a:ext cx="1371600" cy="292608"/>
+          </a:xfrm>
+          <a:prstGeom prst="rect">
+            <a:avLst/>
+          </a:prstGeom>
+          <a:noFill/>
+        </p:spPr>
+        <p:txBody>
+          <a:bodyPr wrap="none">
+            <a:spAutoFit/>
+          </a:bodyPr>
+          <a:lstStyle/>
+          <a:p>
+            <a:pPr algn="l" a:rtl="1">
+              <a:defRPr sz="1000" b="0">
+                <a:solidFill>
+                  <a:srgbClr val="DCDCDC"/>
+                </a:solidFill>
+                <a:latin typeface="Vazir"/>
+              </a:defRPr>
+            </a:pPr>
+            <a:r>
+              <a:t>11</a:t>
+            </a:r>
+          </a:p>
+        </p:txBody>
+      </p:sp>
     </p:spTree>
   </p:cSld>
   <p:clrMapOvr>
@@ -3638,6 +4097,12 @@
 <file path=ppt/slides/slide12.xml><?xml version="1.0" encoding="utf-8"?>
 <p:sld xmlns:a="http://schemas.openxmlformats.org/drawingml/2006/main" xmlns:p="http://schemas.openxmlformats.org/presentationml/2006/main" xmlns:r="http://schemas.openxmlformats.org/officeDocument/2006/relationships">
   <p:cSld>
+    <p:bg>
+      <p:bgPr>
+        <a:noFill/>
+        <a:effectLst/>
+      </p:bgPr>
+    </p:bg>
     <p:spTree>
       <p:nvGrpSpPr>
         <p:cNvPr id="1" name=""/>
@@ -3839,6 +4304,157 @@
             </a:pPr>
             <a:r>
               <a:t>• هدف: درک اینکه چگونه storage structures، compression، indexing و partitioning روی runtime تأثیر می‌گذارند.</a:t>
+            </a:r>
+          </a:p>
+        </p:txBody>
+      </p:sp>
+      <p:sp>
+        <p:nvSpPr>
+          <p:cNvPr id="5" name="Rectangle 4"/>
+          <p:cNvSpPr/>
+          <p:nvPr/>
+        </p:nvSpPr>
+        <p:spPr>
+          <a:xfrm>
+            <a:off x="365760" y="6419088"/>
+            <a:ext cx="8412480" cy="13716"/>
+          </a:xfrm>
+          <a:prstGeom prst="rect">
+            <a:avLst/>
+          </a:prstGeom>
+          <a:solidFill>
+            <a:srgbClr val="D2DCE6"/>
+          </a:solidFill>
+          <a:ln>
+            <a:noFill/>
+          </a:ln>
+        </p:spPr>
+        <p:style>
+          <a:lnRef idx="1">
+            <a:schemeClr val="accent1"/>
+          </a:lnRef>
+          <a:fillRef idx="3">
+            <a:schemeClr val="accent1"/>
+          </a:fillRef>
+          <a:effectRef idx="2">
+            <a:schemeClr val="accent1"/>
+          </a:effectRef>
+          <a:fontRef idx="minor">
+            <a:schemeClr val="lt1"/>
+          </a:fontRef>
+        </p:style>
+        <p:txBody>
+          <a:bodyPr rtlCol="0" anchor="ctr"/>
+          <a:lstStyle/>
+          <a:p>
+            <a:pPr algn="ctr"/>
+          </a:p>
+        </p:txBody>
+      </p:sp>
+      <p:sp>
+        <p:nvSpPr>
+          <p:cNvPr id="6" name="TextBox 5"/>
+          <p:cNvSpPr txBox="1"/>
+          <p:nvPr/>
+        </p:nvSpPr>
+        <p:spPr>
+          <a:xfrm>
+            <a:off x="411480" y="6473952"/>
+            <a:ext cx="4114800" cy="292608"/>
+          </a:xfrm>
+          <a:prstGeom prst="rect">
+            <a:avLst/>
+          </a:prstGeom>
+          <a:noFill/>
+        </p:spPr>
+        <p:txBody>
+          <a:bodyPr wrap="none">
+            <a:spAutoFit/>
+          </a:bodyPr>
+          <a:lstStyle/>
+          <a:p>
+            <a:pPr algn="r" a:rtl="1">
+              <a:defRPr sz="1000" b="0">
+                <a:solidFill>
+                  <a:srgbClr val="8C8C8C"/>
+                </a:solidFill>
+                <a:latin typeface="Vazir"/>
+              </a:defRPr>
+            </a:pPr>
+            <a:r>
+              <a:t>پایگاه داده پیشرفته | سید علی زین الدینی</a:t>
+            </a:r>
+          </a:p>
+        </p:txBody>
+      </p:sp>
+      <p:sp>
+        <p:nvSpPr>
+          <p:cNvPr id="7" name="TextBox 6"/>
+          <p:cNvSpPr txBox="1"/>
+          <p:nvPr/>
+        </p:nvSpPr>
+        <p:spPr>
+          <a:xfrm>
+            <a:off x="3657600" y="6446520"/>
+            <a:ext cx="1828800" cy="320040"/>
+          </a:xfrm>
+          <a:prstGeom prst="rect">
+            <a:avLst/>
+          </a:prstGeom>
+          <a:noFill/>
+        </p:spPr>
+        <p:txBody>
+          <a:bodyPr wrap="none">
+            <a:spAutoFit/>
+          </a:bodyPr>
+          <a:lstStyle/>
+          <a:p>
+            <a:pPr algn="ctr" a:rtl="1">
+              <a:defRPr sz="1100" b="1">
+                <a:solidFill>
+                  <a:srgbClr val="6E6E6E"/>
+                </a:solidFill>
+                <a:latin typeface="Vazir"/>
+              </a:defRPr>
+            </a:pPr>
+            <a:r>
+              <a:t>صفحه 12 از 39</a:t>
+            </a:r>
+          </a:p>
+        </p:txBody>
+      </p:sp>
+      <p:sp>
+        <p:nvSpPr>
+          <p:cNvPr id="8" name="TextBox 7"/>
+          <p:cNvSpPr txBox="1"/>
+          <p:nvPr/>
+        </p:nvSpPr>
+        <p:spPr>
+          <a:xfrm>
+            <a:off x="7315200" y="6473952"/>
+            <a:ext cx="1371600" cy="292608"/>
+          </a:xfrm>
+          <a:prstGeom prst="rect">
+            <a:avLst/>
+          </a:prstGeom>
+          <a:noFill/>
+        </p:spPr>
+        <p:txBody>
+          <a:bodyPr wrap="none">
+            <a:spAutoFit/>
+          </a:bodyPr>
+          <a:lstStyle/>
+          <a:p>
+            <a:pPr algn="l" a:rtl="1">
+              <a:defRPr sz="1000" b="0">
+                <a:solidFill>
+                  <a:srgbClr val="8C8C8C"/>
+                </a:solidFill>
+                <a:latin typeface="Vazir"/>
+              </a:defRPr>
+            </a:pPr>
+            <a:r>
+              <a:t>12</a:t>
             </a:r>
           </a:p>
         </p:txBody>
@@ -3905,6 +4521,157 @@
           </a:p>
         </p:txBody>
       </p:sp>
+      <p:sp>
+        <p:nvSpPr>
+          <p:cNvPr id="3" name="Rectangle 2"/>
+          <p:cNvSpPr/>
+          <p:nvPr/>
+        </p:nvSpPr>
+        <p:spPr>
+          <a:xfrm>
+            <a:off x="365760" y="6419088"/>
+            <a:ext cx="8412480" cy="13716"/>
+          </a:xfrm>
+          <a:prstGeom prst="rect">
+            <a:avLst/>
+          </a:prstGeom>
+          <a:solidFill>
+            <a:srgbClr val="FFFFFF"/>
+          </a:solidFill>
+          <a:ln>
+            <a:noFill/>
+          </a:ln>
+        </p:spPr>
+        <p:style>
+          <a:lnRef idx="1">
+            <a:schemeClr val="accent1"/>
+          </a:lnRef>
+          <a:fillRef idx="3">
+            <a:schemeClr val="accent1"/>
+          </a:fillRef>
+          <a:effectRef idx="2">
+            <a:schemeClr val="accent1"/>
+          </a:effectRef>
+          <a:fontRef idx="minor">
+            <a:schemeClr val="lt1"/>
+          </a:fontRef>
+        </p:style>
+        <p:txBody>
+          <a:bodyPr rtlCol="0" anchor="ctr"/>
+          <a:lstStyle/>
+          <a:p>
+            <a:pPr algn="ctr"/>
+          </a:p>
+        </p:txBody>
+      </p:sp>
+      <p:sp>
+        <p:nvSpPr>
+          <p:cNvPr id="4" name="TextBox 3"/>
+          <p:cNvSpPr txBox="1"/>
+          <p:nvPr/>
+        </p:nvSpPr>
+        <p:spPr>
+          <a:xfrm>
+            <a:off x="411480" y="6473952"/>
+            <a:ext cx="4114800" cy="292608"/>
+          </a:xfrm>
+          <a:prstGeom prst="rect">
+            <a:avLst/>
+          </a:prstGeom>
+          <a:noFill/>
+        </p:spPr>
+        <p:txBody>
+          <a:bodyPr wrap="none">
+            <a:spAutoFit/>
+          </a:bodyPr>
+          <a:lstStyle/>
+          <a:p>
+            <a:pPr algn="r" a:rtl="1">
+              <a:defRPr sz="1000" b="0">
+                <a:solidFill>
+                  <a:srgbClr val="DCDCDC"/>
+                </a:solidFill>
+                <a:latin typeface="Vazir"/>
+              </a:defRPr>
+            </a:pPr>
+            <a:r>
+              <a:t>پایگاه داده پیشرفته | سید علی زین الدینی</a:t>
+            </a:r>
+          </a:p>
+        </p:txBody>
+      </p:sp>
+      <p:sp>
+        <p:nvSpPr>
+          <p:cNvPr id="5" name="TextBox 4"/>
+          <p:cNvSpPr txBox="1"/>
+          <p:nvPr/>
+        </p:nvSpPr>
+        <p:spPr>
+          <a:xfrm>
+            <a:off x="3657600" y="6446520"/>
+            <a:ext cx="1828800" cy="320040"/>
+          </a:xfrm>
+          <a:prstGeom prst="rect">
+            <a:avLst/>
+          </a:prstGeom>
+          <a:noFill/>
+        </p:spPr>
+        <p:txBody>
+          <a:bodyPr wrap="none">
+            <a:spAutoFit/>
+          </a:bodyPr>
+          <a:lstStyle/>
+          <a:p>
+            <a:pPr algn="ctr" a:rtl="1">
+              <a:defRPr sz="1100" b="1">
+                <a:solidFill>
+                  <a:srgbClr val="FFFFFF"/>
+                </a:solidFill>
+                <a:latin typeface="Vazir"/>
+              </a:defRPr>
+            </a:pPr>
+            <a:r>
+              <a:t>صفحه 13 از 39</a:t>
+            </a:r>
+          </a:p>
+        </p:txBody>
+      </p:sp>
+      <p:sp>
+        <p:nvSpPr>
+          <p:cNvPr id="6" name="TextBox 5"/>
+          <p:cNvSpPr txBox="1"/>
+          <p:nvPr/>
+        </p:nvSpPr>
+        <p:spPr>
+          <a:xfrm>
+            <a:off x="7315200" y="6473952"/>
+            <a:ext cx="1371600" cy="292608"/>
+          </a:xfrm>
+          <a:prstGeom prst="rect">
+            <a:avLst/>
+          </a:prstGeom>
+          <a:noFill/>
+        </p:spPr>
+        <p:txBody>
+          <a:bodyPr wrap="none">
+            <a:spAutoFit/>
+          </a:bodyPr>
+          <a:lstStyle/>
+          <a:p>
+            <a:pPr algn="l" a:rtl="1">
+              <a:defRPr sz="1000" b="0">
+                <a:solidFill>
+                  <a:srgbClr val="DCDCDC"/>
+                </a:solidFill>
+                <a:latin typeface="Vazir"/>
+              </a:defRPr>
+            </a:pPr>
+            <a:r>
+              <a:t>13</a:t>
+            </a:r>
+          </a:p>
+        </p:txBody>
+      </p:sp>
     </p:spTree>
   </p:cSld>
   <p:clrMapOvr>
@@ -3916,6 +4683,12 @@
 <file path=ppt/slides/slide14.xml><?xml version="1.0" encoding="utf-8"?>
 <p:sld xmlns:a="http://schemas.openxmlformats.org/drawingml/2006/main" xmlns:p="http://schemas.openxmlformats.org/presentationml/2006/main" xmlns:r="http://schemas.openxmlformats.org/officeDocument/2006/relationships">
   <p:cSld>
+    <p:bg>
+      <p:bgPr>
+        <a:noFill/>
+        <a:effectLst/>
+      </p:bgPr>
+    </p:bg>
     <p:spTree>
       <p:nvGrpSpPr>
         <p:cNvPr id="1" name=""/>
@@ -4145,6 +4918,157 @@
           </a:prstGeom>
         </p:spPr>
       </p:pic>
+      <p:sp>
+        <p:nvSpPr>
+          <p:cNvPr id="6" name="Rectangle 5"/>
+          <p:cNvSpPr/>
+          <p:nvPr/>
+        </p:nvSpPr>
+        <p:spPr>
+          <a:xfrm>
+            <a:off x="365760" y="6419088"/>
+            <a:ext cx="8412480" cy="13716"/>
+          </a:xfrm>
+          <a:prstGeom prst="rect">
+            <a:avLst/>
+          </a:prstGeom>
+          <a:solidFill>
+            <a:srgbClr val="D2DCE6"/>
+          </a:solidFill>
+          <a:ln>
+            <a:noFill/>
+          </a:ln>
+        </p:spPr>
+        <p:style>
+          <a:lnRef idx="1">
+            <a:schemeClr val="accent1"/>
+          </a:lnRef>
+          <a:fillRef idx="3">
+            <a:schemeClr val="accent1"/>
+          </a:fillRef>
+          <a:effectRef idx="2">
+            <a:schemeClr val="accent1"/>
+          </a:effectRef>
+          <a:fontRef idx="minor">
+            <a:schemeClr val="lt1"/>
+          </a:fontRef>
+        </p:style>
+        <p:txBody>
+          <a:bodyPr rtlCol="0" anchor="ctr"/>
+          <a:lstStyle/>
+          <a:p>
+            <a:pPr algn="ctr"/>
+          </a:p>
+        </p:txBody>
+      </p:sp>
+      <p:sp>
+        <p:nvSpPr>
+          <p:cNvPr id="7" name="TextBox 6"/>
+          <p:cNvSpPr txBox="1"/>
+          <p:nvPr/>
+        </p:nvSpPr>
+        <p:spPr>
+          <a:xfrm>
+            <a:off x="411480" y="6473952"/>
+            <a:ext cx="4114800" cy="292608"/>
+          </a:xfrm>
+          <a:prstGeom prst="rect">
+            <a:avLst/>
+          </a:prstGeom>
+          <a:noFill/>
+        </p:spPr>
+        <p:txBody>
+          <a:bodyPr wrap="none">
+            <a:spAutoFit/>
+          </a:bodyPr>
+          <a:lstStyle/>
+          <a:p>
+            <a:pPr algn="r" a:rtl="1">
+              <a:defRPr sz="1000" b="0">
+                <a:solidFill>
+                  <a:srgbClr val="8C8C8C"/>
+                </a:solidFill>
+                <a:latin typeface="Vazir"/>
+              </a:defRPr>
+            </a:pPr>
+            <a:r>
+              <a:t>پایگاه داده پیشرفته | سید علی زین الدینی</a:t>
+            </a:r>
+          </a:p>
+        </p:txBody>
+      </p:sp>
+      <p:sp>
+        <p:nvSpPr>
+          <p:cNvPr id="8" name="TextBox 7"/>
+          <p:cNvSpPr txBox="1"/>
+          <p:nvPr/>
+        </p:nvSpPr>
+        <p:spPr>
+          <a:xfrm>
+            <a:off x="3657600" y="6446520"/>
+            <a:ext cx="1828800" cy="320040"/>
+          </a:xfrm>
+          <a:prstGeom prst="rect">
+            <a:avLst/>
+          </a:prstGeom>
+          <a:noFill/>
+        </p:spPr>
+        <p:txBody>
+          <a:bodyPr wrap="none">
+            <a:spAutoFit/>
+          </a:bodyPr>
+          <a:lstStyle/>
+          <a:p>
+            <a:pPr algn="ctr" a:rtl="1">
+              <a:defRPr sz="1100" b="1">
+                <a:solidFill>
+                  <a:srgbClr val="6E6E6E"/>
+                </a:solidFill>
+                <a:latin typeface="Vazir"/>
+              </a:defRPr>
+            </a:pPr>
+            <a:r>
+              <a:t>صفحه 14 از 39</a:t>
+            </a:r>
+          </a:p>
+        </p:txBody>
+      </p:sp>
+      <p:sp>
+        <p:nvSpPr>
+          <p:cNvPr id="9" name="TextBox 8"/>
+          <p:cNvSpPr txBox="1"/>
+          <p:nvPr/>
+        </p:nvSpPr>
+        <p:spPr>
+          <a:xfrm>
+            <a:off x="7315200" y="6473952"/>
+            <a:ext cx="1371600" cy="292608"/>
+          </a:xfrm>
+          <a:prstGeom prst="rect">
+            <a:avLst/>
+          </a:prstGeom>
+          <a:noFill/>
+        </p:spPr>
+        <p:txBody>
+          <a:bodyPr wrap="none">
+            <a:spAutoFit/>
+          </a:bodyPr>
+          <a:lstStyle/>
+          <a:p>
+            <a:pPr algn="l" a:rtl="1">
+              <a:defRPr sz="1000" b="0">
+                <a:solidFill>
+                  <a:srgbClr val="8C8C8C"/>
+                </a:solidFill>
+                <a:latin typeface="Vazir"/>
+              </a:defRPr>
+            </a:pPr>
+            <a:r>
+              <a:t>14</a:t>
+            </a:r>
+          </a:p>
+        </p:txBody>
+      </p:sp>
     </p:spTree>
   </p:cSld>
   <p:clrMapOvr>
@@ -4156,6 +5080,12 @@
 <file path=ppt/slides/slide15.xml><?xml version="1.0" encoding="utf-8"?>
 <p:sld xmlns:a="http://schemas.openxmlformats.org/drawingml/2006/main" xmlns:p="http://schemas.openxmlformats.org/presentationml/2006/main" xmlns:r="http://schemas.openxmlformats.org/officeDocument/2006/relationships">
   <p:cSld>
+    <p:bg>
+      <p:bgPr>
+        <a:noFill/>
+        <a:effectLst/>
+      </p:bgPr>
+    </p:bg>
     <p:spTree>
       <p:nvGrpSpPr>
         <p:cNvPr id="1" name=""/>
@@ -4298,6 +5228,157 @@
             </a:pPr>
             <a:r>
               <a:t>شکل ۲: نحوه فشرده‌سازی ستون Amount با Dictionary و Vector</a:t>
+            </a:r>
+          </a:p>
+        </p:txBody>
+      </p:sp>
+      <p:sp>
+        <p:nvSpPr>
+          <p:cNvPr id="6" name="Rectangle 5"/>
+          <p:cNvSpPr/>
+          <p:nvPr/>
+        </p:nvSpPr>
+        <p:spPr>
+          <a:xfrm>
+            <a:off x="365760" y="6419088"/>
+            <a:ext cx="8412480" cy="13716"/>
+          </a:xfrm>
+          <a:prstGeom prst="rect">
+            <a:avLst/>
+          </a:prstGeom>
+          <a:solidFill>
+            <a:srgbClr val="D2DCE6"/>
+          </a:solidFill>
+          <a:ln>
+            <a:noFill/>
+          </a:ln>
+        </p:spPr>
+        <p:style>
+          <a:lnRef idx="1">
+            <a:schemeClr val="accent1"/>
+          </a:lnRef>
+          <a:fillRef idx="3">
+            <a:schemeClr val="accent1"/>
+          </a:fillRef>
+          <a:effectRef idx="2">
+            <a:schemeClr val="accent1"/>
+          </a:effectRef>
+          <a:fontRef idx="minor">
+            <a:schemeClr val="lt1"/>
+          </a:fontRef>
+        </p:style>
+        <p:txBody>
+          <a:bodyPr rtlCol="0" anchor="ctr"/>
+          <a:lstStyle/>
+          <a:p>
+            <a:pPr algn="ctr"/>
+          </a:p>
+        </p:txBody>
+      </p:sp>
+      <p:sp>
+        <p:nvSpPr>
+          <p:cNvPr id="7" name="TextBox 6"/>
+          <p:cNvSpPr txBox="1"/>
+          <p:nvPr/>
+        </p:nvSpPr>
+        <p:spPr>
+          <a:xfrm>
+            <a:off x="411480" y="6473952"/>
+            <a:ext cx="4114800" cy="292608"/>
+          </a:xfrm>
+          <a:prstGeom prst="rect">
+            <a:avLst/>
+          </a:prstGeom>
+          <a:noFill/>
+        </p:spPr>
+        <p:txBody>
+          <a:bodyPr wrap="none">
+            <a:spAutoFit/>
+          </a:bodyPr>
+          <a:lstStyle/>
+          <a:p>
+            <a:pPr algn="r" a:rtl="1">
+              <a:defRPr sz="1000" b="0">
+                <a:solidFill>
+                  <a:srgbClr val="8C8C8C"/>
+                </a:solidFill>
+                <a:latin typeface="Vazir"/>
+              </a:defRPr>
+            </a:pPr>
+            <a:r>
+              <a:t>پایگاه داده پیشرفته | سید علی زین الدینی</a:t>
+            </a:r>
+          </a:p>
+        </p:txBody>
+      </p:sp>
+      <p:sp>
+        <p:nvSpPr>
+          <p:cNvPr id="8" name="TextBox 7"/>
+          <p:cNvSpPr txBox="1"/>
+          <p:nvPr/>
+        </p:nvSpPr>
+        <p:spPr>
+          <a:xfrm>
+            <a:off x="3657600" y="6446520"/>
+            <a:ext cx="1828800" cy="320040"/>
+          </a:xfrm>
+          <a:prstGeom prst="rect">
+            <a:avLst/>
+          </a:prstGeom>
+          <a:noFill/>
+        </p:spPr>
+        <p:txBody>
+          <a:bodyPr wrap="none">
+            <a:spAutoFit/>
+          </a:bodyPr>
+          <a:lstStyle/>
+          <a:p>
+            <a:pPr algn="ctr" a:rtl="1">
+              <a:defRPr sz="1100" b="1">
+                <a:solidFill>
+                  <a:srgbClr val="6E6E6E"/>
+                </a:solidFill>
+                <a:latin typeface="Vazir"/>
+              </a:defRPr>
+            </a:pPr>
+            <a:r>
+              <a:t>صفحه 15 از 39</a:t>
+            </a:r>
+          </a:p>
+        </p:txBody>
+      </p:sp>
+      <p:sp>
+        <p:nvSpPr>
+          <p:cNvPr id="9" name="TextBox 8"/>
+          <p:cNvSpPr txBox="1"/>
+          <p:nvPr/>
+        </p:nvSpPr>
+        <p:spPr>
+          <a:xfrm>
+            <a:off x="7315200" y="6473952"/>
+            <a:ext cx="1371600" cy="292608"/>
+          </a:xfrm>
+          <a:prstGeom prst="rect">
+            <a:avLst/>
+          </a:prstGeom>
+          <a:noFill/>
+        </p:spPr>
+        <p:txBody>
+          <a:bodyPr wrap="none">
+            <a:spAutoFit/>
+          </a:bodyPr>
+          <a:lstStyle/>
+          <a:p>
+            <a:pPr algn="l" a:rtl="1">
+              <a:defRPr sz="1000" b="0">
+                <a:solidFill>
+                  <a:srgbClr val="8C8C8C"/>
+                </a:solidFill>
+                <a:latin typeface="Vazir"/>
+              </a:defRPr>
+            </a:pPr>
+            <a:r>
+              <a:t>15</a:t>
             </a:r>
           </a:p>
         </p:txBody>
@@ -4313,6 +5394,12 @@
 <file path=ppt/slides/slide16.xml><?xml version="1.0" encoding="utf-8"?>
 <p:sld xmlns:a="http://schemas.openxmlformats.org/drawingml/2006/main" xmlns:p="http://schemas.openxmlformats.org/presentationml/2006/main" xmlns:r="http://schemas.openxmlformats.org/officeDocument/2006/relationships">
   <p:cSld>
+    <p:bg>
+      <p:bgPr>
+        <a:noFill/>
+        <a:effectLst/>
+      </p:bgPr>
+    </p:bg>
     <p:spTree>
       <p:nvGrpSpPr>
         <p:cNvPr id="1" name=""/>
@@ -4455,6 +5542,157 @@
             </a:pPr>
             <a:r>
               <a:t>شکل ۳: مقایسه بهبود سرعت تکنیک‌های Column Store</a:t>
+            </a:r>
+          </a:p>
+        </p:txBody>
+      </p:sp>
+      <p:sp>
+        <p:nvSpPr>
+          <p:cNvPr id="6" name="Rectangle 5"/>
+          <p:cNvSpPr/>
+          <p:nvPr/>
+        </p:nvSpPr>
+        <p:spPr>
+          <a:xfrm>
+            <a:off x="365760" y="6419088"/>
+            <a:ext cx="8412480" cy="13716"/>
+          </a:xfrm>
+          <a:prstGeom prst="rect">
+            <a:avLst/>
+          </a:prstGeom>
+          <a:solidFill>
+            <a:srgbClr val="D2DCE6"/>
+          </a:solidFill>
+          <a:ln>
+            <a:noFill/>
+          </a:ln>
+        </p:spPr>
+        <p:style>
+          <a:lnRef idx="1">
+            <a:schemeClr val="accent1"/>
+          </a:lnRef>
+          <a:fillRef idx="3">
+            <a:schemeClr val="accent1"/>
+          </a:fillRef>
+          <a:effectRef idx="2">
+            <a:schemeClr val="accent1"/>
+          </a:effectRef>
+          <a:fontRef idx="minor">
+            <a:schemeClr val="lt1"/>
+          </a:fontRef>
+        </p:style>
+        <p:txBody>
+          <a:bodyPr rtlCol="0" anchor="ctr"/>
+          <a:lstStyle/>
+          <a:p>
+            <a:pPr algn="ctr"/>
+          </a:p>
+        </p:txBody>
+      </p:sp>
+      <p:sp>
+        <p:nvSpPr>
+          <p:cNvPr id="7" name="TextBox 6"/>
+          <p:cNvSpPr txBox="1"/>
+          <p:nvPr/>
+        </p:nvSpPr>
+        <p:spPr>
+          <a:xfrm>
+            <a:off x="411480" y="6473952"/>
+            <a:ext cx="4114800" cy="292608"/>
+          </a:xfrm>
+          <a:prstGeom prst="rect">
+            <a:avLst/>
+          </a:prstGeom>
+          <a:noFill/>
+        </p:spPr>
+        <p:txBody>
+          <a:bodyPr wrap="none">
+            <a:spAutoFit/>
+          </a:bodyPr>
+          <a:lstStyle/>
+          <a:p>
+            <a:pPr algn="r" a:rtl="1">
+              <a:defRPr sz="1000" b="0">
+                <a:solidFill>
+                  <a:srgbClr val="8C8C8C"/>
+                </a:solidFill>
+                <a:latin typeface="Vazir"/>
+              </a:defRPr>
+            </a:pPr>
+            <a:r>
+              <a:t>پایگاه داده پیشرفته | سید علی زین الدینی</a:t>
+            </a:r>
+          </a:p>
+        </p:txBody>
+      </p:sp>
+      <p:sp>
+        <p:nvSpPr>
+          <p:cNvPr id="8" name="TextBox 7"/>
+          <p:cNvSpPr txBox="1"/>
+          <p:nvPr/>
+        </p:nvSpPr>
+        <p:spPr>
+          <a:xfrm>
+            <a:off x="3657600" y="6446520"/>
+            <a:ext cx="1828800" cy="320040"/>
+          </a:xfrm>
+          <a:prstGeom prst="rect">
+            <a:avLst/>
+          </a:prstGeom>
+          <a:noFill/>
+        </p:spPr>
+        <p:txBody>
+          <a:bodyPr wrap="none">
+            <a:spAutoFit/>
+          </a:bodyPr>
+          <a:lstStyle/>
+          <a:p>
+            <a:pPr algn="ctr" a:rtl="1">
+              <a:defRPr sz="1100" b="1">
+                <a:solidFill>
+                  <a:srgbClr val="6E6E6E"/>
+                </a:solidFill>
+                <a:latin typeface="Vazir"/>
+              </a:defRPr>
+            </a:pPr>
+            <a:r>
+              <a:t>صفحه 16 از 39</a:t>
+            </a:r>
+          </a:p>
+        </p:txBody>
+      </p:sp>
+      <p:sp>
+        <p:nvSpPr>
+          <p:cNvPr id="9" name="TextBox 8"/>
+          <p:cNvSpPr txBox="1"/>
+          <p:nvPr/>
+        </p:nvSpPr>
+        <p:spPr>
+          <a:xfrm>
+            <a:off x="7315200" y="6473952"/>
+            <a:ext cx="1371600" cy="292608"/>
+          </a:xfrm>
+          <a:prstGeom prst="rect">
+            <a:avLst/>
+          </a:prstGeom>
+          <a:noFill/>
+        </p:spPr>
+        <p:txBody>
+          <a:bodyPr wrap="none">
+            <a:spAutoFit/>
+          </a:bodyPr>
+          <a:lstStyle/>
+          <a:p>
+            <a:pPr algn="l" a:rtl="1">
+              <a:defRPr sz="1000" b="0">
+                <a:solidFill>
+                  <a:srgbClr val="8C8C8C"/>
+                </a:solidFill>
+                <a:latin typeface="Vazir"/>
+              </a:defRPr>
+            </a:pPr>
+            <a:r>
+              <a:t>16</a:t>
             </a:r>
           </a:p>
         </p:txBody>
@@ -4470,6 +5708,12 @@
 <file path=ppt/slides/slide17.xml><?xml version="1.0" encoding="utf-8"?>
 <p:sld xmlns:a="http://schemas.openxmlformats.org/drawingml/2006/main" xmlns:p="http://schemas.openxmlformats.org/presentationml/2006/main" xmlns:r="http://schemas.openxmlformats.org/officeDocument/2006/relationships">
   <p:cSld>
+    <p:bg>
+      <p:bgPr>
+        <a:noFill/>
+        <a:effectLst/>
+      </p:bgPr>
+    </p:bg>
     <p:spTree>
       <p:nvGrpSpPr>
         <p:cNvPr id="1" name=""/>
@@ -4508,7 +5752,7 @@
               </a:defRPr>
             </a:pPr>
             <a:r>
-              <a:t>جدول مزایای Column Store (از مقاله)</a:t>
+              <a:t>جدول ۱: مزایای Column Store (از مقاله)</a:t>
             </a:r>
           </a:p>
         </p:txBody>
@@ -4908,6 +6152,157 @@
           </a:graphicData>
         </a:graphic>
       </p:graphicFrame>
+      <p:sp>
+        <p:nvSpPr>
+          <p:cNvPr id="5" name="Rectangle 4"/>
+          <p:cNvSpPr/>
+          <p:nvPr/>
+        </p:nvSpPr>
+        <p:spPr>
+          <a:xfrm>
+            <a:off x="365760" y="6419088"/>
+            <a:ext cx="8412480" cy="13716"/>
+          </a:xfrm>
+          <a:prstGeom prst="rect">
+            <a:avLst/>
+          </a:prstGeom>
+          <a:solidFill>
+            <a:srgbClr val="D2DCE6"/>
+          </a:solidFill>
+          <a:ln>
+            <a:noFill/>
+          </a:ln>
+        </p:spPr>
+        <p:style>
+          <a:lnRef idx="1">
+            <a:schemeClr val="accent1"/>
+          </a:lnRef>
+          <a:fillRef idx="3">
+            <a:schemeClr val="accent1"/>
+          </a:fillRef>
+          <a:effectRef idx="2">
+            <a:schemeClr val="accent1"/>
+          </a:effectRef>
+          <a:fontRef idx="minor">
+            <a:schemeClr val="lt1"/>
+          </a:fontRef>
+        </p:style>
+        <p:txBody>
+          <a:bodyPr rtlCol="0" anchor="ctr"/>
+          <a:lstStyle/>
+          <a:p>
+            <a:pPr algn="ctr"/>
+          </a:p>
+        </p:txBody>
+      </p:sp>
+      <p:sp>
+        <p:nvSpPr>
+          <p:cNvPr id="6" name="TextBox 5"/>
+          <p:cNvSpPr txBox="1"/>
+          <p:nvPr/>
+        </p:nvSpPr>
+        <p:spPr>
+          <a:xfrm>
+            <a:off x="411480" y="6473952"/>
+            <a:ext cx="4114800" cy="292608"/>
+          </a:xfrm>
+          <a:prstGeom prst="rect">
+            <a:avLst/>
+          </a:prstGeom>
+          <a:noFill/>
+        </p:spPr>
+        <p:txBody>
+          <a:bodyPr wrap="none">
+            <a:spAutoFit/>
+          </a:bodyPr>
+          <a:lstStyle/>
+          <a:p>
+            <a:pPr algn="r" a:rtl="1">
+              <a:defRPr sz="1000" b="0">
+                <a:solidFill>
+                  <a:srgbClr val="8C8C8C"/>
+                </a:solidFill>
+                <a:latin typeface="Vazir"/>
+              </a:defRPr>
+            </a:pPr>
+            <a:r>
+              <a:t>پایگاه داده پیشرفته | سید علی زین الدینی</a:t>
+            </a:r>
+          </a:p>
+        </p:txBody>
+      </p:sp>
+      <p:sp>
+        <p:nvSpPr>
+          <p:cNvPr id="7" name="TextBox 6"/>
+          <p:cNvSpPr txBox="1"/>
+          <p:nvPr/>
+        </p:nvSpPr>
+        <p:spPr>
+          <a:xfrm>
+            <a:off x="3657600" y="6446520"/>
+            <a:ext cx="1828800" cy="320040"/>
+          </a:xfrm>
+          <a:prstGeom prst="rect">
+            <a:avLst/>
+          </a:prstGeom>
+          <a:noFill/>
+        </p:spPr>
+        <p:txBody>
+          <a:bodyPr wrap="none">
+            <a:spAutoFit/>
+          </a:bodyPr>
+          <a:lstStyle/>
+          <a:p>
+            <a:pPr algn="ctr" a:rtl="1">
+              <a:defRPr sz="1100" b="1">
+                <a:solidFill>
+                  <a:srgbClr val="6E6E6E"/>
+                </a:solidFill>
+                <a:latin typeface="Vazir"/>
+              </a:defRPr>
+            </a:pPr>
+            <a:r>
+              <a:t>صفحه 17 از 39</a:t>
+            </a:r>
+          </a:p>
+        </p:txBody>
+      </p:sp>
+      <p:sp>
+        <p:nvSpPr>
+          <p:cNvPr id="8" name="TextBox 7"/>
+          <p:cNvSpPr txBox="1"/>
+          <p:nvPr/>
+        </p:nvSpPr>
+        <p:spPr>
+          <a:xfrm>
+            <a:off x="7315200" y="6473952"/>
+            <a:ext cx="1371600" cy="292608"/>
+          </a:xfrm>
+          <a:prstGeom prst="rect">
+            <a:avLst/>
+          </a:prstGeom>
+          <a:noFill/>
+        </p:spPr>
+        <p:txBody>
+          <a:bodyPr wrap="none">
+            <a:spAutoFit/>
+          </a:bodyPr>
+          <a:lstStyle/>
+          <a:p>
+            <a:pPr algn="l" a:rtl="1">
+              <a:defRPr sz="1000" b="0">
+                <a:solidFill>
+                  <a:srgbClr val="8C8C8C"/>
+                </a:solidFill>
+                <a:latin typeface="Vazir"/>
+              </a:defRPr>
+            </a:pPr>
+            <a:r>
+              <a:t>17</a:t>
+            </a:r>
+          </a:p>
+        </p:txBody>
+      </p:sp>
     </p:spTree>
   </p:cSld>
   <p:clrMapOvr>
@@ -4919,6 +6314,12 @@
 <file path=ppt/slides/slide18.xml><?xml version="1.0" encoding="utf-8"?>
 <p:sld xmlns:a="http://schemas.openxmlformats.org/drawingml/2006/main" xmlns:p="http://schemas.openxmlformats.org/presentationml/2006/main" xmlns:r="http://schemas.openxmlformats.org/officeDocument/2006/relationships">
   <p:cSld>
+    <p:bg>
+      <p:bgPr>
+        <a:noFill/>
+        <a:effectLst/>
+      </p:bgPr>
+    </p:bg>
     <p:spTree>
       <p:nvGrpSpPr>
         <p:cNvPr id="1" name=""/>
@@ -5148,6 +6549,157 @@
           </a:prstGeom>
         </p:spPr>
       </p:pic>
+      <p:sp>
+        <p:nvSpPr>
+          <p:cNvPr id="6" name="Rectangle 5"/>
+          <p:cNvSpPr/>
+          <p:nvPr/>
+        </p:nvSpPr>
+        <p:spPr>
+          <a:xfrm>
+            <a:off x="365760" y="6419088"/>
+            <a:ext cx="8412480" cy="13716"/>
+          </a:xfrm>
+          <a:prstGeom prst="rect">
+            <a:avLst/>
+          </a:prstGeom>
+          <a:solidFill>
+            <a:srgbClr val="D2DCE6"/>
+          </a:solidFill>
+          <a:ln>
+            <a:noFill/>
+          </a:ln>
+        </p:spPr>
+        <p:style>
+          <a:lnRef idx="1">
+            <a:schemeClr val="accent1"/>
+          </a:lnRef>
+          <a:fillRef idx="3">
+            <a:schemeClr val="accent1"/>
+          </a:fillRef>
+          <a:effectRef idx="2">
+            <a:schemeClr val="accent1"/>
+          </a:effectRef>
+          <a:fontRef idx="minor">
+            <a:schemeClr val="lt1"/>
+          </a:fontRef>
+        </p:style>
+        <p:txBody>
+          <a:bodyPr rtlCol="0" anchor="ctr"/>
+          <a:lstStyle/>
+          <a:p>
+            <a:pPr algn="ctr"/>
+          </a:p>
+        </p:txBody>
+      </p:sp>
+      <p:sp>
+        <p:nvSpPr>
+          <p:cNvPr id="7" name="TextBox 6"/>
+          <p:cNvSpPr txBox="1"/>
+          <p:nvPr/>
+        </p:nvSpPr>
+        <p:spPr>
+          <a:xfrm>
+            <a:off x="411480" y="6473952"/>
+            <a:ext cx="4114800" cy="292608"/>
+          </a:xfrm>
+          <a:prstGeom prst="rect">
+            <a:avLst/>
+          </a:prstGeom>
+          <a:noFill/>
+        </p:spPr>
+        <p:txBody>
+          <a:bodyPr wrap="none">
+            <a:spAutoFit/>
+          </a:bodyPr>
+          <a:lstStyle/>
+          <a:p>
+            <a:pPr algn="r" a:rtl="1">
+              <a:defRPr sz="1000" b="0">
+                <a:solidFill>
+                  <a:srgbClr val="8C8C8C"/>
+                </a:solidFill>
+                <a:latin typeface="Vazir"/>
+              </a:defRPr>
+            </a:pPr>
+            <a:r>
+              <a:t>پایگاه داده پیشرفته | سید علی زین الدینی</a:t>
+            </a:r>
+          </a:p>
+        </p:txBody>
+      </p:sp>
+      <p:sp>
+        <p:nvSpPr>
+          <p:cNvPr id="8" name="TextBox 7"/>
+          <p:cNvSpPr txBox="1"/>
+          <p:nvPr/>
+        </p:nvSpPr>
+        <p:spPr>
+          <a:xfrm>
+            <a:off x="3657600" y="6446520"/>
+            <a:ext cx="1828800" cy="320040"/>
+          </a:xfrm>
+          <a:prstGeom prst="rect">
+            <a:avLst/>
+          </a:prstGeom>
+          <a:noFill/>
+        </p:spPr>
+        <p:txBody>
+          <a:bodyPr wrap="none">
+            <a:spAutoFit/>
+          </a:bodyPr>
+          <a:lstStyle/>
+          <a:p>
+            <a:pPr algn="ctr" a:rtl="1">
+              <a:defRPr sz="1100" b="1">
+                <a:solidFill>
+                  <a:srgbClr val="6E6E6E"/>
+                </a:solidFill>
+                <a:latin typeface="Vazir"/>
+              </a:defRPr>
+            </a:pPr>
+            <a:r>
+              <a:t>صفحه 18 از 39</a:t>
+            </a:r>
+          </a:p>
+        </p:txBody>
+      </p:sp>
+      <p:sp>
+        <p:nvSpPr>
+          <p:cNvPr id="9" name="TextBox 8"/>
+          <p:cNvSpPr txBox="1"/>
+          <p:nvPr/>
+        </p:nvSpPr>
+        <p:spPr>
+          <a:xfrm>
+            <a:off x="7315200" y="6473952"/>
+            <a:ext cx="1371600" cy="292608"/>
+          </a:xfrm>
+          <a:prstGeom prst="rect">
+            <a:avLst/>
+          </a:prstGeom>
+          <a:noFill/>
+        </p:spPr>
+        <p:txBody>
+          <a:bodyPr wrap="none">
+            <a:spAutoFit/>
+          </a:bodyPr>
+          <a:lstStyle/>
+          <a:p>
+            <a:pPr algn="l" a:rtl="1">
+              <a:defRPr sz="1000" b="0">
+                <a:solidFill>
+                  <a:srgbClr val="8C8C8C"/>
+                </a:solidFill>
+                <a:latin typeface="Vazir"/>
+              </a:defRPr>
+            </a:pPr>
+            <a:r>
+              <a:t>18</a:t>
+            </a:r>
+          </a:p>
+        </p:txBody>
+      </p:sp>
     </p:spTree>
   </p:cSld>
   <p:clrMapOvr>
@@ -5159,6 +6711,12 @@
 <file path=ppt/slides/slide19.xml><?xml version="1.0" encoding="utf-8"?>
 <p:sld xmlns:a="http://schemas.openxmlformats.org/drawingml/2006/main" xmlns:p="http://schemas.openxmlformats.org/presentationml/2006/main" xmlns:r="http://schemas.openxmlformats.org/officeDocument/2006/relationships">
   <p:cSld>
+    <p:bg>
+      <p:bgPr>
+        <a:noFill/>
+        <a:effectLst/>
+      </p:bgPr>
+    </p:bg>
     <p:spTree>
       <p:nvGrpSpPr>
         <p:cNvPr id="1" name=""/>
@@ -5301,6 +6859,157 @@
             </a:pPr>
             <a:r>
               <a:t>شکل ۴: حجم داده خوانده‌شده — Row Store در برابر Column Store</a:t>
+            </a:r>
+          </a:p>
+        </p:txBody>
+      </p:sp>
+      <p:sp>
+        <p:nvSpPr>
+          <p:cNvPr id="6" name="Rectangle 5"/>
+          <p:cNvSpPr/>
+          <p:nvPr/>
+        </p:nvSpPr>
+        <p:spPr>
+          <a:xfrm>
+            <a:off x="365760" y="6419088"/>
+            <a:ext cx="8412480" cy="13716"/>
+          </a:xfrm>
+          <a:prstGeom prst="rect">
+            <a:avLst/>
+          </a:prstGeom>
+          <a:solidFill>
+            <a:srgbClr val="D2DCE6"/>
+          </a:solidFill>
+          <a:ln>
+            <a:noFill/>
+          </a:ln>
+        </p:spPr>
+        <p:style>
+          <a:lnRef idx="1">
+            <a:schemeClr val="accent1"/>
+          </a:lnRef>
+          <a:fillRef idx="3">
+            <a:schemeClr val="accent1"/>
+          </a:fillRef>
+          <a:effectRef idx="2">
+            <a:schemeClr val="accent1"/>
+          </a:effectRef>
+          <a:fontRef idx="minor">
+            <a:schemeClr val="lt1"/>
+          </a:fontRef>
+        </p:style>
+        <p:txBody>
+          <a:bodyPr rtlCol="0" anchor="ctr"/>
+          <a:lstStyle/>
+          <a:p>
+            <a:pPr algn="ctr"/>
+          </a:p>
+        </p:txBody>
+      </p:sp>
+      <p:sp>
+        <p:nvSpPr>
+          <p:cNvPr id="7" name="TextBox 6"/>
+          <p:cNvSpPr txBox="1"/>
+          <p:nvPr/>
+        </p:nvSpPr>
+        <p:spPr>
+          <a:xfrm>
+            <a:off x="411480" y="6473952"/>
+            <a:ext cx="4114800" cy="292608"/>
+          </a:xfrm>
+          <a:prstGeom prst="rect">
+            <a:avLst/>
+          </a:prstGeom>
+          <a:noFill/>
+        </p:spPr>
+        <p:txBody>
+          <a:bodyPr wrap="none">
+            <a:spAutoFit/>
+          </a:bodyPr>
+          <a:lstStyle/>
+          <a:p>
+            <a:pPr algn="r" a:rtl="1">
+              <a:defRPr sz="1000" b="0">
+                <a:solidFill>
+                  <a:srgbClr val="8C8C8C"/>
+                </a:solidFill>
+                <a:latin typeface="Vazir"/>
+              </a:defRPr>
+            </a:pPr>
+            <a:r>
+              <a:t>پایگاه داده پیشرفته | سید علی زین الدینی</a:t>
+            </a:r>
+          </a:p>
+        </p:txBody>
+      </p:sp>
+      <p:sp>
+        <p:nvSpPr>
+          <p:cNvPr id="8" name="TextBox 7"/>
+          <p:cNvSpPr txBox="1"/>
+          <p:nvPr/>
+        </p:nvSpPr>
+        <p:spPr>
+          <a:xfrm>
+            <a:off x="3657600" y="6446520"/>
+            <a:ext cx="1828800" cy="320040"/>
+          </a:xfrm>
+          <a:prstGeom prst="rect">
+            <a:avLst/>
+          </a:prstGeom>
+          <a:noFill/>
+        </p:spPr>
+        <p:txBody>
+          <a:bodyPr wrap="none">
+            <a:spAutoFit/>
+          </a:bodyPr>
+          <a:lstStyle/>
+          <a:p>
+            <a:pPr algn="ctr" a:rtl="1">
+              <a:defRPr sz="1100" b="1">
+                <a:solidFill>
+                  <a:srgbClr val="6E6E6E"/>
+                </a:solidFill>
+                <a:latin typeface="Vazir"/>
+              </a:defRPr>
+            </a:pPr>
+            <a:r>
+              <a:t>صفحه 19 از 39</a:t>
+            </a:r>
+          </a:p>
+        </p:txBody>
+      </p:sp>
+      <p:sp>
+        <p:nvSpPr>
+          <p:cNvPr id="9" name="TextBox 8"/>
+          <p:cNvSpPr txBox="1"/>
+          <p:nvPr/>
+        </p:nvSpPr>
+        <p:spPr>
+          <a:xfrm>
+            <a:off x="7315200" y="6473952"/>
+            <a:ext cx="1371600" cy="292608"/>
+          </a:xfrm>
+          <a:prstGeom prst="rect">
+            <a:avLst/>
+          </a:prstGeom>
+          <a:noFill/>
+        </p:spPr>
+        <p:txBody>
+          <a:bodyPr wrap="none">
+            <a:spAutoFit/>
+          </a:bodyPr>
+          <a:lstStyle/>
+          <a:p>
+            <a:pPr algn="l" a:rtl="1">
+              <a:defRPr sz="1000" b="0">
+                <a:solidFill>
+                  <a:srgbClr val="8C8C8C"/>
+                </a:solidFill>
+                <a:latin typeface="Vazir"/>
+              </a:defRPr>
+            </a:pPr>
+            <a:r>
+              <a:t>19</a:t>
             </a:r>
           </a:p>
         </p:txBody>
@@ -5316,6 +7025,12 @@
 <file path=ppt/slides/slide2.xml><?xml version="1.0" encoding="utf-8"?>
 <p:sld xmlns:a="http://schemas.openxmlformats.org/drawingml/2006/main" xmlns:p="http://schemas.openxmlformats.org/presentationml/2006/main" xmlns:r="http://schemas.openxmlformats.org/officeDocument/2006/relationships">
   <p:cSld>
+    <p:bg>
+      <p:bgPr>
+        <a:noFill/>
+        <a:effectLst/>
+      </p:bgPr>
+    </p:bg>
     <p:spTree>
       <p:nvGrpSpPr>
         <p:cNvPr id="1" name=""/>
@@ -5501,6 +7216,157 @@
             </a:pPr>
             <a:r>
               <a:t>• توصیه: توسعه‌دهندگان باید برنامه‌نویسی Set-based، ایندکس‌گذاری مناسب و پارتیشن‌بندی هوشمند را در اولویت قرار دهند و محاسبات را تا حد ممکن در لایه DB اجرا کنند.</a:t>
+            </a:r>
+          </a:p>
+        </p:txBody>
+      </p:sp>
+      <p:sp>
+        <p:nvSpPr>
+          <p:cNvPr id="5" name="Rectangle 4"/>
+          <p:cNvSpPr/>
+          <p:nvPr/>
+        </p:nvSpPr>
+        <p:spPr>
+          <a:xfrm>
+            <a:off x="365760" y="6419088"/>
+            <a:ext cx="8412480" cy="13716"/>
+          </a:xfrm>
+          <a:prstGeom prst="rect">
+            <a:avLst/>
+          </a:prstGeom>
+          <a:solidFill>
+            <a:srgbClr val="D2DCE6"/>
+          </a:solidFill>
+          <a:ln>
+            <a:noFill/>
+          </a:ln>
+        </p:spPr>
+        <p:style>
+          <a:lnRef idx="1">
+            <a:schemeClr val="accent1"/>
+          </a:lnRef>
+          <a:fillRef idx="3">
+            <a:schemeClr val="accent1"/>
+          </a:fillRef>
+          <a:effectRef idx="2">
+            <a:schemeClr val="accent1"/>
+          </a:effectRef>
+          <a:fontRef idx="minor">
+            <a:schemeClr val="lt1"/>
+          </a:fontRef>
+        </p:style>
+        <p:txBody>
+          <a:bodyPr rtlCol="0" anchor="ctr"/>
+          <a:lstStyle/>
+          <a:p>
+            <a:pPr algn="ctr"/>
+          </a:p>
+        </p:txBody>
+      </p:sp>
+      <p:sp>
+        <p:nvSpPr>
+          <p:cNvPr id="6" name="TextBox 5"/>
+          <p:cNvSpPr txBox="1"/>
+          <p:nvPr/>
+        </p:nvSpPr>
+        <p:spPr>
+          <a:xfrm>
+            <a:off x="411480" y="6473952"/>
+            <a:ext cx="4114800" cy="292608"/>
+          </a:xfrm>
+          <a:prstGeom prst="rect">
+            <a:avLst/>
+          </a:prstGeom>
+          <a:noFill/>
+        </p:spPr>
+        <p:txBody>
+          <a:bodyPr wrap="none">
+            <a:spAutoFit/>
+          </a:bodyPr>
+          <a:lstStyle/>
+          <a:p>
+            <a:pPr algn="r" a:rtl="1">
+              <a:defRPr sz="1000" b="0">
+                <a:solidFill>
+                  <a:srgbClr val="8C8C8C"/>
+                </a:solidFill>
+                <a:latin typeface="Vazir"/>
+              </a:defRPr>
+            </a:pPr>
+            <a:r>
+              <a:t>پایگاه داده پیشرفته | سید علی زین الدینی</a:t>
+            </a:r>
+          </a:p>
+        </p:txBody>
+      </p:sp>
+      <p:sp>
+        <p:nvSpPr>
+          <p:cNvPr id="7" name="TextBox 6"/>
+          <p:cNvSpPr txBox="1"/>
+          <p:nvPr/>
+        </p:nvSpPr>
+        <p:spPr>
+          <a:xfrm>
+            <a:off x="3657600" y="6446520"/>
+            <a:ext cx="1828800" cy="320040"/>
+          </a:xfrm>
+          <a:prstGeom prst="rect">
+            <a:avLst/>
+          </a:prstGeom>
+          <a:noFill/>
+        </p:spPr>
+        <p:txBody>
+          <a:bodyPr wrap="none">
+            <a:spAutoFit/>
+          </a:bodyPr>
+          <a:lstStyle/>
+          <a:p>
+            <a:pPr algn="ctr" a:rtl="1">
+              <a:defRPr sz="1100" b="1">
+                <a:solidFill>
+                  <a:srgbClr val="6E6E6E"/>
+                </a:solidFill>
+                <a:latin typeface="Vazir"/>
+              </a:defRPr>
+            </a:pPr>
+            <a:r>
+              <a:t>صفحه 2 از 39</a:t>
+            </a:r>
+          </a:p>
+        </p:txBody>
+      </p:sp>
+      <p:sp>
+        <p:nvSpPr>
+          <p:cNvPr id="8" name="TextBox 7"/>
+          <p:cNvSpPr txBox="1"/>
+          <p:nvPr/>
+        </p:nvSpPr>
+        <p:spPr>
+          <a:xfrm>
+            <a:off x="7315200" y="6473952"/>
+            <a:ext cx="1371600" cy="292608"/>
+          </a:xfrm>
+          <a:prstGeom prst="rect">
+            <a:avLst/>
+          </a:prstGeom>
+          <a:noFill/>
+        </p:spPr>
+        <p:txBody>
+          <a:bodyPr wrap="none">
+            <a:spAutoFit/>
+          </a:bodyPr>
+          <a:lstStyle/>
+          <a:p>
+            <a:pPr algn="l" a:rtl="1">
+              <a:defRPr sz="1000" b="0">
+                <a:solidFill>
+                  <a:srgbClr val="8C8C8C"/>
+                </a:solidFill>
+                <a:latin typeface="Vazir"/>
+              </a:defRPr>
+            </a:pPr>
+            <a:r>
+              <a:t>2</a:t>
             </a:r>
           </a:p>
         </p:txBody>
@@ -5516,6 +7382,12 @@
 <file path=ppt/slides/slide20.xml><?xml version="1.0" encoding="utf-8"?>
 <p:sld xmlns:a="http://schemas.openxmlformats.org/drawingml/2006/main" xmlns:p="http://schemas.openxmlformats.org/presentationml/2006/main" xmlns:r="http://schemas.openxmlformats.org/officeDocument/2006/relationships">
   <p:cSld>
+    <p:bg>
+      <p:bgPr>
+        <a:noFill/>
+        <a:effectLst/>
+      </p:bgPr>
+    </p:bg>
     <p:spTree>
       <p:nvGrpSpPr>
         <p:cNvPr id="1" name=""/>
@@ -5745,6 +7617,157 @@
           </a:prstGeom>
         </p:spPr>
       </p:pic>
+      <p:sp>
+        <p:nvSpPr>
+          <p:cNvPr id="6" name="Rectangle 5"/>
+          <p:cNvSpPr/>
+          <p:nvPr/>
+        </p:nvSpPr>
+        <p:spPr>
+          <a:xfrm>
+            <a:off x="365760" y="6419088"/>
+            <a:ext cx="8412480" cy="13716"/>
+          </a:xfrm>
+          <a:prstGeom prst="rect">
+            <a:avLst/>
+          </a:prstGeom>
+          <a:solidFill>
+            <a:srgbClr val="D2DCE6"/>
+          </a:solidFill>
+          <a:ln>
+            <a:noFill/>
+          </a:ln>
+        </p:spPr>
+        <p:style>
+          <a:lnRef idx="1">
+            <a:schemeClr val="accent1"/>
+          </a:lnRef>
+          <a:fillRef idx="3">
+            <a:schemeClr val="accent1"/>
+          </a:fillRef>
+          <a:effectRef idx="2">
+            <a:schemeClr val="accent1"/>
+          </a:effectRef>
+          <a:fontRef idx="minor">
+            <a:schemeClr val="lt1"/>
+          </a:fontRef>
+        </p:style>
+        <p:txBody>
+          <a:bodyPr rtlCol="0" anchor="ctr"/>
+          <a:lstStyle/>
+          <a:p>
+            <a:pPr algn="ctr"/>
+          </a:p>
+        </p:txBody>
+      </p:sp>
+      <p:sp>
+        <p:nvSpPr>
+          <p:cNvPr id="7" name="TextBox 6"/>
+          <p:cNvSpPr txBox="1"/>
+          <p:nvPr/>
+        </p:nvSpPr>
+        <p:spPr>
+          <a:xfrm>
+            <a:off x="411480" y="6473952"/>
+            <a:ext cx="4114800" cy="292608"/>
+          </a:xfrm>
+          <a:prstGeom prst="rect">
+            <a:avLst/>
+          </a:prstGeom>
+          <a:noFill/>
+        </p:spPr>
+        <p:txBody>
+          <a:bodyPr wrap="none">
+            <a:spAutoFit/>
+          </a:bodyPr>
+          <a:lstStyle/>
+          <a:p>
+            <a:pPr algn="r" a:rtl="1">
+              <a:defRPr sz="1000" b="0">
+                <a:solidFill>
+                  <a:srgbClr val="8C8C8C"/>
+                </a:solidFill>
+                <a:latin typeface="Vazir"/>
+              </a:defRPr>
+            </a:pPr>
+            <a:r>
+              <a:t>پایگاه داده پیشرفته | سید علی زین الدینی</a:t>
+            </a:r>
+          </a:p>
+        </p:txBody>
+      </p:sp>
+      <p:sp>
+        <p:nvSpPr>
+          <p:cNvPr id="8" name="TextBox 7"/>
+          <p:cNvSpPr txBox="1"/>
+          <p:nvPr/>
+        </p:nvSpPr>
+        <p:spPr>
+          <a:xfrm>
+            <a:off x="3657600" y="6446520"/>
+            <a:ext cx="1828800" cy="320040"/>
+          </a:xfrm>
+          <a:prstGeom prst="rect">
+            <a:avLst/>
+          </a:prstGeom>
+          <a:noFill/>
+        </p:spPr>
+        <p:txBody>
+          <a:bodyPr wrap="none">
+            <a:spAutoFit/>
+          </a:bodyPr>
+          <a:lstStyle/>
+          <a:p>
+            <a:pPr algn="ctr" a:rtl="1">
+              <a:defRPr sz="1100" b="1">
+                <a:solidFill>
+                  <a:srgbClr val="6E6E6E"/>
+                </a:solidFill>
+                <a:latin typeface="Vazir"/>
+              </a:defRPr>
+            </a:pPr>
+            <a:r>
+              <a:t>صفحه 20 از 39</a:t>
+            </a:r>
+          </a:p>
+        </p:txBody>
+      </p:sp>
+      <p:sp>
+        <p:nvSpPr>
+          <p:cNvPr id="9" name="TextBox 8"/>
+          <p:cNvSpPr txBox="1"/>
+          <p:nvPr/>
+        </p:nvSpPr>
+        <p:spPr>
+          <a:xfrm>
+            <a:off x="7315200" y="6473952"/>
+            <a:ext cx="1371600" cy="292608"/>
+          </a:xfrm>
+          <a:prstGeom prst="rect">
+            <a:avLst/>
+          </a:prstGeom>
+          <a:noFill/>
+        </p:spPr>
+        <p:txBody>
+          <a:bodyPr wrap="none">
+            <a:spAutoFit/>
+          </a:bodyPr>
+          <a:lstStyle/>
+          <a:p>
+            <a:pPr algn="l" a:rtl="1">
+              <a:defRPr sz="1000" b="0">
+                <a:solidFill>
+                  <a:srgbClr val="8C8C8C"/>
+                </a:solidFill>
+                <a:latin typeface="Vazir"/>
+              </a:defRPr>
+            </a:pPr>
+            <a:r>
+              <a:t>20</a:t>
+            </a:r>
+          </a:p>
+        </p:txBody>
+      </p:sp>
     </p:spTree>
   </p:cSld>
   <p:clrMapOvr>
@@ -5756,6 +7779,12 @@
 <file path=ppt/slides/slide21.xml><?xml version="1.0" encoding="utf-8"?>
 <p:sld xmlns:a="http://schemas.openxmlformats.org/drawingml/2006/main" xmlns:p="http://schemas.openxmlformats.org/presentationml/2006/main" xmlns:r="http://schemas.openxmlformats.org/officeDocument/2006/relationships">
   <p:cSld>
+    <p:bg>
+      <p:bgPr>
+        <a:noFill/>
+        <a:effectLst/>
+      </p:bgPr>
+    </p:bg>
     <p:spTree>
       <p:nvGrpSpPr>
         <p:cNvPr id="1" name=""/>
@@ -5898,6 +7927,157 @@
             </a:pPr>
             <a:r>
               <a:t>شکل ۵: مقایسه ECC سنتی و SAP HANA در بارهای ترکیبی</a:t>
+            </a:r>
+          </a:p>
+        </p:txBody>
+      </p:sp>
+      <p:sp>
+        <p:nvSpPr>
+          <p:cNvPr id="6" name="Rectangle 5"/>
+          <p:cNvSpPr/>
+          <p:nvPr/>
+        </p:nvSpPr>
+        <p:spPr>
+          <a:xfrm>
+            <a:off x="365760" y="6419088"/>
+            <a:ext cx="8412480" cy="13716"/>
+          </a:xfrm>
+          <a:prstGeom prst="rect">
+            <a:avLst/>
+          </a:prstGeom>
+          <a:solidFill>
+            <a:srgbClr val="D2DCE6"/>
+          </a:solidFill>
+          <a:ln>
+            <a:noFill/>
+          </a:ln>
+        </p:spPr>
+        <p:style>
+          <a:lnRef idx="1">
+            <a:schemeClr val="accent1"/>
+          </a:lnRef>
+          <a:fillRef idx="3">
+            <a:schemeClr val="accent1"/>
+          </a:fillRef>
+          <a:effectRef idx="2">
+            <a:schemeClr val="accent1"/>
+          </a:effectRef>
+          <a:fontRef idx="minor">
+            <a:schemeClr val="lt1"/>
+          </a:fontRef>
+        </p:style>
+        <p:txBody>
+          <a:bodyPr rtlCol="0" anchor="ctr"/>
+          <a:lstStyle/>
+          <a:p>
+            <a:pPr algn="ctr"/>
+          </a:p>
+        </p:txBody>
+      </p:sp>
+      <p:sp>
+        <p:nvSpPr>
+          <p:cNvPr id="7" name="TextBox 6"/>
+          <p:cNvSpPr txBox="1"/>
+          <p:nvPr/>
+        </p:nvSpPr>
+        <p:spPr>
+          <a:xfrm>
+            <a:off x="411480" y="6473952"/>
+            <a:ext cx="4114800" cy="292608"/>
+          </a:xfrm>
+          <a:prstGeom prst="rect">
+            <a:avLst/>
+          </a:prstGeom>
+          <a:noFill/>
+        </p:spPr>
+        <p:txBody>
+          <a:bodyPr wrap="none">
+            <a:spAutoFit/>
+          </a:bodyPr>
+          <a:lstStyle/>
+          <a:p>
+            <a:pPr algn="r" a:rtl="1">
+              <a:defRPr sz="1000" b="0">
+                <a:solidFill>
+                  <a:srgbClr val="8C8C8C"/>
+                </a:solidFill>
+                <a:latin typeface="Vazir"/>
+              </a:defRPr>
+            </a:pPr>
+            <a:r>
+              <a:t>پایگاه داده پیشرفته | سید علی زین الدینی</a:t>
+            </a:r>
+          </a:p>
+        </p:txBody>
+      </p:sp>
+      <p:sp>
+        <p:nvSpPr>
+          <p:cNvPr id="8" name="TextBox 7"/>
+          <p:cNvSpPr txBox="1"/>
+          <p:nvPr/>
+        </p:nvSpPr>
+        <p:spPr>
+          <a:xfrm>
+            <a:off x="3657600" y="6446520"/>
+            <a:ext cx="1828800" cy="320040"/>
+          </a:xfrm>
+          <a:prstGeom prst="rect">
+            <a:avLst/>
+          </a:prstGeom>
+          <a:noFill/>
+        </p:spPr>
+        <p:txBody>
+          <a:bodyPr wrap="none">
+            <a:spAutoFit/>
+          </a:bodyPr>
+          <a:lstStyle/>
+          <a:p>
+            <a:pPr algn="ctr" a:rtl="1">
+              <a:defRPr sz="1100" b="1">
+                <a:solidFill>
+                  <a:srgbClr val="6E6E6E"/>
+                </a:solidFill>
+                <a:latin typeface="Vazir"/>
+              </a:defRPr>
+            </a:pPr>
+            <a:r>
+              <a:t>صفحه 21 از 39</a:t>
+            </a:r>
+          </a:p>
+        </p:txBody>
+      </p:sp>
+      <p:sp>
+        <p:nvSpPr>
+          <p:cNvPr id="9" name="TextBox 8"/>
+          <p:cNvSpPr txBox="1"/>
+          <p:nvPr/>
+        </p:nvSpPr>
+        <p:spPr>
+          <a:xfrm>
+            <a:off x="7315200" y="6473952"/>
+            <a:ext cx="1371600" cy="292608"/>
+          </a:xfrm>
+          <a:prstGeom prst="rect">
+            <a:avLst/>
+          </a:prstGeom>
+          <a:noFill/>
+        </p:spPr>
+        <p:txBody>
+          <a:bodyPr wrap="none">
+            <a:spAutoFit/>
+          </a:bodyPr>
+          <a:lstStyle/>
+          <a:p>
+            <a:pPr algn="l" a:rtl="1">
+              <a:defRPr sz="1000" b="0">
+                <a:solidFill>
+                  <a:srgbClr val="8C8C8C"/>
+                </a:solidFill>
+                <a:latin typeface="Vazir"/>
+              </a:defRPr>
+            </a:pPr>
+            <a:r>
+              <a:t>21</a:t>
             </a:r>
           </a:p>
         </p:txBody>
@@ -5913,6 +8093,12 @@
 <file path=ppt/slides/slide22.xml><?xml version="1.0" encoding="utf-8"?>
 <p:sld xmlns:a="http://schemas.openxmlformats.org/drawingml/2006/main" xmlns:p="http://schemas.openxmlformats.org/presentationml/2006/main" xmlns:r="http://schemas.openxmlformats.org/officeDocument/2006/relationships">
   <p:cSld>
+    <p:bg>
+      <p:bgPr>
+        <a:noFill/>
+        <a:effectLst/>
+      </p:bgPr>
+    </p:bg>
     <p:spTree>
       <p:nvGrpSpPr>
         <p:cNvPr id="1" name=""/>
@@ -5951,7 +8137,7 @@
               </a:defRPr>
             </a:pPr>
             <a:r>
-              <a:t>جدول HTAP: ECC در برابر S/4HANA</a:t>
+              <a:t>جدول ۲: HTAP — ECC در برابر S/4HANA</a:t>
             </a:r>
           </a:p>
         </p:txBody>
@@ -6567,6 +8753,157 @@
           </a:graphicData>
         </a:graphic>
       </p:graphicFrame>
+      <p:sp>
+        <p:nvSpPr>
+          <p:cNvPr id="5" name="Rectangle 4"/>
+          <p:cNvSpPr/>
+          <p:nvPr/>
+        </p:nvSpPr>
+        <p:spPr>
+          <a:xfrm>
+            <a:off x="365760" y="6419088"/>
+            <a:ext cx="8412480" cy="13716"/>
+          </a:xfrm>
+          <a:prstGeom prst="rect">
+            <a:avLst/>
+          </a:prstGeom>
+          <a:solidFill>
+            <a:srgbClr val="D2DCE6"/>
+          </a:solidFill>
+          <a:ln>
+            <a:noFill/>
+          </a:ln>
+        </p:spPr>
+        <p:style>
+          <a:lnRef idx="1">
+            <a:schemeClr val="accent1"/>
+          </a:lnRef>
+          <a:fillRef idx="3">
+            <a:schemeClr val="accent1"/>
+          </a:fillRef>
+          <a:effectRef idx="2">
+            <a:schemeClr val="accent1"/>
+          </a:effectRef>
+          <a:fontRef idx="minor">
+            <a:schemeClr val="lt1"/>
+          </a:fontRef>
+        </p:style>
+        <p:txBody>
+          <a:bodyPr rtlCol="0" anchor="ctr"/>
+          <a:lstStyle/>
+          <a:p>
+            <a:pPr algn="ctr"/>
+          </a:p>
+        </p:txBody>
+      </p:sp>
+      <p:sp>
+        <p:nvSpPr>
+          <p:cNvPr id="6" name="TextBox 5"/>
+          <p:cNvSpPr txBox="1"/>
+          <p:nvPr/>
+        </p:nvSpPr>
+        <p:spPr>
+          <a:xfrm>
+            <a:off x="411480" y="6473952"/>
+            <a:ext cx="4114800" cy="292608"/>
+          </a:xfrm>
+          <a:prstGeom prst="rect">
+            <a:avLst/>
+          </a:prstGeom>
+          <a:noFill/>
+        </p:spPr>
+        <p:txBody>
+          <a:bodyPr wrap="none">
+            <a:spAutoFit/>
+          </a:bodyPr>
+          <a:lstStyle/>
+          <a:p>
+            <a:pPr algn="r" a:rtl="1">
+              <a:defRPr sz="1000" b="0">
+                <a:solidFill>
+                  <a:srgbClr val="8C8C8C"/>
+                </a:solidFill>
+                <a:latin typeface="Vazir"/>
+              </a:defRPr>
+            </a:pPr>
+            <a:r>
+              <a:t>پایگاه داده پیشرفته | سید علی زین الدینی</a:t>
+            </a:r>
+          </a:p>
+        </p:txBody>
+      </p:sp>
+      <p:sp>
+        <p:nvSpPr>
+          <p:cNvPr id="7" name="TextBox 6"/>
+          <p:cNvSpPr txBox="1"/>
+          <p:nvPr/>
+        </p:nvSpPr>
+        <p:spPr>
+          <a:xfrm>
+            <a:off x="3657600" y="6446520"/>
+            <a:ext cx="1828800" cy="320040"/>
+          </a:xfrm>
+          <a:prstGeom prst="rect">
+            <a:avLst/>
+          </a:prstGeom>
+          <a:noFill/>
+        </p:spPr>
+        <p:txBody>
+          <a:bodyPr wrap="none">
+            <a:spAutoFit/>
+          </a:bodyPr>
+          <a:lstStyle/>
+          <a:p>
+            <a:pPr algn="ctr" a:rtl="1">
+              <a:defRPr sz="1100" b="1">
+                <a:solidFill>
+                  <a:srgbClr val="6E6E6E"/>
+                </a:solidFill>
+                <a:latin typeface="Vazir"/>
+              </a:defRPr>
+            </a:pPr>
+            <a:r>
+              <a:t>صفحه 22 از 39</a:t>
+            </a:r>
+          </a:p>
+        </p:txBody>
+      </p:sp>
+      <p:sp>
+        <p:nvSpPr>
+          <p:cNvPr id="8" name="TextBox 7"/>
+          <p:cNvSpPr txBox="1"/>
+          <p:nvPr/>
+        </p:nvSpPr>
+        <p:spPr>
+          <a:xfrm>
+            <a:off x="7315200" y="6473952"/>
+            <a:ext cx="1371600" cy="292608"/>
+          </a:xfrm>
+          <a:prstGeom prst="rect">
+            <a:avLst/>
+          </a:prstGeom>
+          <a:noFill/>
+        </p:spPr>
+        <p:txBody>
+          <a:bodyPr wrap="none">
+            <a:spAutoFit/>
+          </a:bodyPr>
+          <a:lstStyle/>
+          <a:p>
+            <a:pPr algn="l" a:rtl="1">
+              <a:defRPr sz="1000" b="0">
+                <a:solidFill>
+                  <a:srgbClr val="8C8C8C"/>
+                </a:solidFill>
+                <a:latin typeface="Vazir"/>
+              </a:defRPr>
+            </a:pPr>
+            <a:r>
+              <a:t>22</a:t>
+            </a:r>
+          </a:p>
+        </p:txBody>
+      </p:sp>
     </p:spTree>
   </p:cSld>
   <p:clrMapOvr>
@@ -6578,6 +8915,12 @@
 <file path=ppt/slides/slide23.xml><?xml version="1.0" encoding="utf-8"?>
 <p:sld xmlns:a="http://schemas.openxmlformats.org/drawingml/2006/main" xmlns:p="http://schemas.openxmlformats.org/presentationml/2006/main" xmlns:r="http://schemas.openxmlformats.org/officeDocument/2006/relationships">
   <p:cSld>
+    <p:bg>
+      <p:bgPr>
+        <a:noFill/>
+        <a:effectLst/>
+      </p:bgPr>
+    </p:bg>
     <p:spTree>
       <p:nvGrpSpPr>
         <p:cNvPr id="1" name=""/>
@@ -6763,6 +9106,157 @@
             </a:pPr>
             <a:r>
               <a:t>• ETL حذف می‌شود → کاهش latency، ساده‌سازی landscape و هزینه عملیاتی.</a:t>
+            </a:r>
+          </a:p>
+        </p:txBody>
+      </p:sp>
+      <p:sp>
+        <p:nvSpPr>
+          <p:cNvPr id="5" name="Rectangle 4"/>
+          <p:cNvSpPr/>
+          <p:nvPr/>
+        </p:nvSpPr>
+        <p:spPr>
+          <a:xfrm>
+            <a:off x="365760" y="6419088"/>
+            <a:ext cx="8412480" cy="13716"/>
+          </a:xfrm>
+          <a:prstGeom prst="rect">
+            <a:avLst/>
+          </a:prstGeom>
+          <a:solidFill>
+            <a:srgbClr val="D2DCE6"/>
+          </a:solidFill>
+          <a:ln>
+            <a:noFill/>
+          </a:ln>
+        </p:spPr>
+        <p:style>
+          <a:lnRef idx="1">
+            <a:schemeClr val="accent1"/>
+          </a:lnRef>
+          <a:fillRef idx="3">
+            <a:schemeClr val="accent1"/>
+          </a:fillRef>
+          <a:effectRef idx="2">
+            <a:schemeClr val="accent1"/>
+          </a:effectRef>
+          <a:fontRef idx="minor">
+            <a:schemeClr val="lt1"/>
+          </a:fontRef>
+        </p:style>
+        <p:txBody>
+          <a:bodyPr rtlCol="0" anchor="ctr"/>
+          <a:lstStyle/>
+          <a:p>
+            <a:pPr algn="ctr"/>
+          </a:p>
+        </p:txBody>
+      </p:sp>
+      <p:sp>
+        <p:nvSpPr>
+          <p:cNvPr id="6" name="TextBox 5"/>
+          <p:cNvSpPr txBox="1"/>
+          <p:nvPr/>
+        </p:nvSpPr>
+        <p:spPr>
+          <a:xfrm>
+            <a:off x="411480" y="6473952"/>
+            <a:ext cx="4114800" cy="292608"/>
+          </a:xfrm>
+          <a:prstGeom prst="rect">
+            <a:avLst/>
+          </a:prstGeom>
+          <a:noFill/>
+        </p:spPr>
+        <p:txBody>
+          <a:bodyPr wrap="none">
+            <a:spAutoFit/>
+          </a:bodyPr>
+          <a:lstStyle/>
+          <a:p>
+            <a:pPr algn="r" a:rtl="1">
+              <a:defRPr sz="1000" b="0">
+                <a:solidFill>
+                  <a:srgbClr val="8C8C8C"/>
+                </a:solidFill>
+                <a:latin typeface="Vazir"/>
+              </a:defRPr>
+            </a:pPr>
+            <a:r>
+              <a:t>پایگاه داده پیشرفته | سید علی زین الدینی</a:t>
+            </a:r>
+          </a:p>
+        </p:txBody>
+      </p:sp>
+      <p:sp>
+        <p:nvSpPr>
+          <p:cNvPr id="7" name="TextBox 6"/>
+          <p:cNvSpPr txBox="1"/>
+          <p:nvPr/>
+        </p:nvSpPr>
+        <p:spPr>
+          <a:xfrm>
+            <a:off x="3657600" y="6446520"/>
+            <a:ext cx="1828800" cy="320040"/>
+          </a:xfrm>
+          <a:prstGeom prst="rect">
+            <a:avLst/>
+          </a:prstGeom>
+          <a:noFill/>
+        </p:spPr>
+        <p:txBody>
+          <a:bodyPr wrap="none">
+            <a:spAutoFit/>
+          </a:bodyPr>
+          <a:lstStyle/>
+          <a:p>
+            <a:pPr algn="ctr" a:rtl="1">
+              <a:defRPr sz="1100" b="1">
+                <a:solidFill>
+                  <a:srgbClr val="6E6E6E"/>
+                </a:solidFill>
+                <a:latin typeface="Vazir"/>
+              </a:defRPr>
+            </a:pPr>
+            <a:r>
+              <a:t>صفحه 23 از 39</a:t>
+            </a:r>
+          </a:p>
+        </p:txBody>
+      </p:sp>
+      <p:sp>
+        <p:nvSpPr>
+          <p:cNvPr id="8" name="TextBox 7"/>
+          <p:cNvSpPr txBox="1"/>
+          <p:nvPr/>
+        </p:nvSpPr>
+        <p:spPr>
+          <a:xfrm>
+            <a:off x="7315200" y="6473952"/>
+            <a:ext cx="1371600" cy="292608"/>
+          </a:xfrm>
+          <a:prstGeom prst="rect">
+            <a:avLst/>
+          </a:prstGeom>
+          <a:noFill/>
+        </p:spPr>
+        <p:txBody>
+          <a:bodyPr wrap="none">
+            <a:spAutoFit/>
+          </a:bodyPr>
+          <a:lstStyle/>
+          <a:p>
+            <a:pPr algn="l" a:rtl="1">
+              <a:defRPr sz="1000" b="0">
+                <a:solidFill>
+                  <a:srgbClr val="8C8C8C"/>
+                </a:solidFill>
+                <a:latin typeface="Vazir"/>
+              </a:defRPr>
+            </a:pPr>
+            <a:r>
+              <a:t>23</a:t>
             </a:r>
           </a:p>
         </p:txBody>
@@ -6829,6 +9323,157 @@
           </a:p>
         </p:txBody>
       </p:sp>
+      <p:sp>
+        <p:nvSpPr>
+          <p:cNvPr id="3" name="Rectangle 2"/>
+          <p:cNvSpPr/>
+          <p:nvPr/>
+        </p:nvSpPr>
+        <p:spPr>
+          <a:xfrm>
+            <a:off x="365760" y="6419088"/>
+            <a:ext cx="8412480" cy="13716"/>
+          </a:xfrm>
+          <a:prstGeom prst="rect">
+            <a:avLst/>
+          </a:prstGeom>
+          <a:solidFill>
+            <a:srgbClr val="FFFFFF"/>
+          </a:solidFill>
+          <a:ln>
+            <a:noFill/>
+          </a:ln>
+        </p:spPr>
+        <p:style>
+          <a:lnRef idx="1">
+            <a:schemeClr val="accent1"/>
+          </a:lnRef>
+          <a:fillRef idx="3">
+            <a:schemeClr val="accent1"/>
+          </a:fillRef>
+          <a:effectRef idx="2">
+            <a:schemeClr val="accent1"/>
+          </a:effectRef>
+          <a:fontRef idx="minor">
+            <a:schemeClr val="lt1"/>
+          </a:fontRef>
+        </p:style>
+        <p:txBody>
+          <a:bodyPr rtlCol="0" anchor="ctr"/>
+          <a:lstStyle/>
+          <a:p>
+            <a:pPr algn="ctr"/>
+          </a:p>
+        </p:txBody>
+      </p:sp>
+      <p:sp>
+        <p:nvSpPr>
+          <p:cNvPr id="4" name="TextBox 3"/>
+          <p:cNvSpPr txBox="1"/>
+          <p:nvPr/>
+        </p:nvSpPr>
+        <p:spPr>
+          <a:xfrm>
+            <a:off x="411480" y="6473952"/>
+            <a:ext cx="4114800" cy="292608"/>
+          </a:xfrm>
+          <a:prstGeom prst="rect">
+            <a:avLst/>
+          </a:prstGeom>
+          <a:noFill/>
+        </p:spPr>
+        <p:txBody>
+          <a:bodyPr wrap="none">
+            <a:spAutoFit/>
+          </a:bodyPr>
+          <a:lstStyle/>
+          <a:p>
+            <a:pPr algn="r" a:rtl="1">
+              <a:defRPr sz="1000" b="0">
+                <a:solidFill>
+                  <a:srgbClr val="DCDCDC"/>
+                </a:solidFill>
+                <a:latin typeface="Vazir"/>
+              </a:defRPr>
+            </a:pPr>
+            <a:r>
+              <a:t>پایگاه داده پیشرفته | سید علی زین الدینی</a:t>
+            </a:r>
+          </a:p>
+        </p:txBody>
+      </p:sp>
+      <p:sp>
+        <p:nvSpPr>
+          <p:cNvPr id="5" name="TextBox 4"/>
+          <p:cNvSpPr txBox="1"/>
+          <p:nvPr/>
+        </p:nvSpPr>
+        <p:spPr>
+          <a:xfrm>
+            <a:off x="3657600" y="6446520"/>
+            <a:ext cx="1828800" cy="320040"/>
+          </a:xfrm>
+          <a:prstGeom prst="rect">
+            <a:avLst/>
+          </a:prstGeom>
+          <a:noFill/>
+        </p:spPr>
+        <p:txBody>
+          <a:bodyPr wrap="none">
+            <a:spAutoFit/>
+          </a:bodyPr>
+          <a:lstStyle/>
+          <a:p>
+            <a:pPr algn="ctr" a:rtl="1">
+              <a:defRPr sz="1100" b="1">
+                <a:solidFill>
+                  <a:srgbClr val="FFFFFF"/>
+                </a:solidFill>
+                <a:latin typeface="Vazir"/>
+              </a:defRPr>
+            </a:pPr>
+            <a:r>
+              <a:t>صفحه 24 از 39</a:t>
+            </a:r>
+          </a:p>
+        </p:txBody>
+      </p:sp>
+      <p:sp>
+        <p:nvSpPr>
+          <p:cNvPr id="6" name="TextBox 5"/>
+          <p:cNvSpPr txBox="1"/>
+          <p:nvPr/>
+        </p:nvSpPr>
+        <p:spPr>
+          <a:xfrm>
+            <a:off x="7315200" y="6473952"/>
+            <a:ext cx="1371600" cy="292608"/>
+          </a:xfrm>
+          <a:prstGeom prst="rect">
+            <a:avLst/>
+          </a:prstGeom>
+          <a:noFill/>
+        </p:spPr>
+        <p:txBody>
+          <a:bodyPr wrap="none">
+            <a:spAutoFit/>
+          </a:bodyPr>
+          <a:lstStyle/>
+          <a:p>
+            <a:pPr algn="l" a:rtl="1">
+              <a:defRPr sz="1000" b="0">
+                <a:solidFill>
+                  <a:srgbClr val="DCDCDC"/>
+                </a:solidFill>
+                <a:latin typeface="Vazir"/>
+              </a:defRPr>
+            </a:pPr>
+            <a:r>
+              <a:t>24</a:t>
+            </a:r>
+          </a:p>
+        </p:txBody>
+      </p:sp>
     </p:spTree>
   </p:cSld>
   <p:clrMapOvr>
@@ -6840,6 +9485,12 @@
 <file path=ppt/slides/slide25.xml><?xml version="1.0" encoding="utf-8"?>
 <p:sld xmlns:a="http://schemas.openxmlformats.org/drawingml/2006/main" xmlns:p="http://schemas.openxmlformats.org/presentationml/2006/main" xmlns:r="http://schemas.openxmlformats.org/officeDocument/2006/relationships">
   <p:cSld>
+    <p:bg>
+      <p:bgPr>
+        <a:noFill/>
+        <a:effectLst/>
+      </p:bgPr>
+    </p:bg>
     <p:spTree>
       <p:nvGrpSpPr>
         <p:cNvPr id="1" name=""/>
@@ -6982,6 +9633,157 @@
             </a:pPr>
             <a:r>
               <a:t>شکل ۶: جریان داده در روش سنتی در برابر Push-Down</a:t>
+            </a:r>
+          </a:p>
+        </p:txBody>
+      </p:sp>
+      <p:sp>
+        <p:nvSpPr>
+          <p:cNvPr id="6" name="Rectangle 5"/>
+          <p:cNvSpPr/>
+          <p:nvPr/>
+        </p:nvSpPr>
+        <p:spPr>
+          <a:xfrm>
+            <a:off x="365760" y="6419088"/>
+            <a:ext cx="8412480" cy="13716"/>
+          </a:xfrm>
+          <a:prstGeom prst="rect">
+            <a:avLst/>
+          </a:prstGeom>
+          <a:solidFill>
+            <a:srgbClr val="D2DCE6"/>
+          </a:solidFill>
+          <a:ln>
+            <a:noFill/>
+          </a:ln>
+        </p:spPr>
+        <p:style>
+          <a:lnRef idx="1">
+            <a:schemeClr val="accent1"/>
+          </a:lnRef>
+          <a:fillRef idx="3">
+            <a:schemeClr val="accent1"/>
+          </a:fillRef>
+          <a:effectRef idx="2">
+            <a:schemeClr val="accent1"/>
+          </a:effectRef>
+          <a:fontRef idx="minor">
+            <a:schemeClr val="lt1"/>
+          </a:fontRef>
+        </p:style>
+        <p:txBody>
+          <a:bodyPr rtlCol="0" anchor="ctr"/>
+          <a:lstStyle/>
+          <a:p>
+            <a:pPr algn="ctr"/>
+          </a:p>
+        </p:txBody>
+      </p:sp>
+      <p:sp>
+        <p:nvSpPr>
+          <p:cNvPr id="7" name="TextBox 6"/>
+          <p:cNvSpPr txBox="1"/>
+          <p:nvPr/>
+        </p:nvSpPr>
+        <p:spPr>
+          <a:xfrm>
+            <a:off x="411480" y="6473952"/>
+            <a:ext cx="4114800" cy="292608"/>
+          </a:xfrm>
+          <a:prstGeom prst="rect">
+            <a:avLst/>
+          </a:prstGeom>
+          <a:noFill/>
+        </p:spPr>
+        <p:txBody>
+          <a:bodyPr wrap="none">
+            <a:spAutoFit/>
+          </a:bodyPr>
+          <a:lstStyle/>
+          <a:p>
+            <a:pPr algn="r" a:rtl="1">
+              <a:defRPr sz="1000" b="0">
+                <a:solidFill>
+                  <a:srgbClr val="8C8C8C"/>
+                </a:solidFill>
+                <a:latin typeface="Vazir"/>
+              </a:defRPr>
+            </a:pPr>
+            <a:r>
+              <a:t>پایگاه داده پیشرفته | سید علی زین الدینی</a:t>
+            </a:r>
+          </a:p>
+        </p:txBody>
+      </p:sp>
+      <p:sp>
+        <p:nvSpPr>
+          <p:cNvPr id="8" name="TextBox 7"/>
+          <p:cNvSpPr txBox="1"/>
+          <p:nvPr/>
+        </p:nvSpPr>
+        <p:spPr>
+          <a:xfrm>
+            <a:off x="3657600" y="6446520"/>
+            <a:ext cx="1828800" cy="320040"/>
+          </a:xfrm>
+          <a:prstGeom prst="rect">
+            <a:avLst/>
+          </a:prstGeom>
+          <a:noFill/>
+        </p:spPr>
+        <p:txBody>
+          <a:bodyPr wrap="none">
+            <a:spAutoFit/>
+          </a:bodyPr>
+          <a:lstStyle/>
+          <a:p>
+            <a:pPr algn="ctr" a:rtl="1">
+              <a:defRPr sz="1100" b="1">
+                <a:solidFill>
+                  <a:srgbClr val="6E6E6E"/>
+                </a:solidFill>
+                <a:latin typeface="Vazir"/>
+              </a:defRPr>
+            </a:pPr>
+            <a:r>
+              <a:t>صفحه 25 از 39</a:t>
+            </a:r>
+          </a:p>
+        </p:txBody>
+      </p:sp>
+      <p:sp>
+        <p:nvSpPr>
+          <p:cNvPr id="9" name="TextBox 8"/>
+          <p:cNvSpPr txBox="1"/>
+          <p:nvPr/>
+        </p:nvSpPr>
+        <p:spPr>
+          <a:xfrm>
+            <a:off x="7315200" y="6473952"/>
+            <a:ext cx="1371600" cy="292608"/>
+          </a:xfrm>
+          <a:prstGeom prst="rect">
+            <a:avLst/>
+          </a:prstGeom>
+          <a:noFill/>
+        </p:spPr>
+        <p:txBody>
+          <a:bodyPr wrap="none">
+            <a:spAutoFit/>
+          </a:bodyPr>
+          <a:lstStyle/>
+          <a:p>
+            <a:pPr algn="l" a:rtl="1">
+              <a:defRPr sz="1000" b="0">
+                <a:solidFill>
+                  <a:srgbClr val="8C8C8C"/>
+                </a:solidFill>
+                <a:latin typeface="Vazir"/>
+              </a:defRPr>
+            </a:pPr>
+            <a:r>
+              <a:t>25</a:t>
             </a:r>
           </a:p>
         </p:txBody>
@@ -6997,6 +9799,12 @@
 <file path=ppt/slides/slide26.xml><?xml version="1.0" encoding="utf-8"?>
 <p:sld xmlns:a="http://schemas.openxmlformats.org/drawingml/2006/main" xmlns:p="http://schemas.openxmlformats.org/presentationml/2006/main" xmlns:r="http://schemas.openxmlformats.org/officeDocument/2006/relationships">
   <p:cSld>
+    <p:bg>
+      <p:bgPr>
+        <a:noFill/>
+        <a:effectLst/>
+      </p:bgPr>
+    </p:bg>
     <p:spTree>
       <p:nvGrpSpPr>
         <p:cNvPr id="1" name=""/>
@@ -7198,6 +10006,157 @@
             </a:pPr>
             <a:r>
               <a:t>• HANA به‌عنوان columnar + parallel engine، محاسبات را بسیار سریع‌تر از ABAP loop انجام می‌دهد.</a:t>
+            </a:r>
+          </a:p>
+        </p:txBody>
+      </p:sp>
+      <p:sp>
+        <p:nvSpPr>
+          <p:cNvPr id="5" name="Rectangle 4"/>
+          <p:cNvSpPr/>
+          <p:nvPr/>
+        </p:nvSpPr>
+        <p:spPr>
+          <a:xfrm>
+            <a:off x="365760" y="6419088"/>
+            <a:ext cx="8412480" cy="13716"/>
+          </a:xfrm>
+          <a:prstGeom prst="rect">
+            <a:avLst/>
+          </a:prstGeom>
+          <a:solidFill>
+            <a:srgbClr val="D2DCE6"/>
+          </a:solidFill>
+          <a:ln>
+            <a:noFill/>
+          </a:ln>
+        </p:spPr>
+        <p:style>
+          <a:lnRef idx="1">
+            <a:schemeClr val="accent1"/>
+          </a:lnRef>
+          <a:fillRef idx="3">
+            <a:schemeClr val="accent1"/>
+          </a:fillRef>
+          <a:effectRef idx="2">
+            <a:schemeClr val="accent1"/>
+          </a:effectRef>
+          <a:fontRef idx="minor">
+            <a:schemeClr val="lt1"/>
+          </a:fontRef>
+        </p:style>
+        <p:txBody>
+          <a:bodyPr rtlCol="0" anchor="ctr"/>
+          <a:lstStyle/>
+          <a:p>
+            <a:pPr algn="ctr"/>
+          </a:p>
+        </p:txBody>
+      </p:sp>
+      <p:sp>
+        <p:nvSpPr>
+          <p:cNvPr id="6" name="TextBox 5"/>
+          <p:cNvSpPr txBox="1"/>
+          <p:nvPr/>
+        </p:nvSpPr>
+        <p:spPr>
+          <a:xfrm>
+            <a:off x="411480" y="6473952"/>
+            <a:ext cx="4114800" cy="292608"/>
+          </a:xfrm>
+          <a:prstGeom prst="rect">
+            <a:avLst/>
+          </a:prstGeom>
+          <a:noFill/>
+        </p:spPr>
+        <p:txBody>
+          <a:bodyPr wrap="none">
+            <a:spAutoFit/>
+          </a:bodyPr>
+          <a:lstStyle/>
+          <a:p>
+            <a:pPr algn="r" a:rtl="1">
+              <a:defRPr sz="1000" b="0">
+                <a:solidFill>
+                  <a:srgbClr val="8C8C8C"/>
+                </a:solidFill>
+                <a:latin typeface="Vazir"/>
+              </a:defRPr>
+            </a:pPr>
+            <a:r>
+              <a:t>پایگاه داده پیشرفته | سید علی زین الدینی</a:t>
+            </a:r>
+          </a:p>
+        </p:txBody>
+      </p:sp>
+      <p:sp>
+        <p:nvSpPr>
+          <p:cNvPr id="7" name="TextBox 6"/>
+          <p:cNvSpPr txBox="1"/>
+          <p:nvPr/>
+        </p:nvSpPr>
+        <p:spPr>
+          <a:xfrm>
+            <a:off x="3657600" y="6446520"/>
+            <a:ext cx="1828800" cy="320040"/>
+          </a:xfrm>
+          <a:prstGeom prst="rect">
+            <a:avLst/>
+          </a:prstGeom>
+          <a:noFill/>
+        </p:spPr>
+        <p:txBody>
+          <a:bodyPr wrap="none">
+            <a:spAutoFit/>
+          </a:bodyPr>
+          <a:lstStyle/>
+          <a:p>
+            <a:pPr algn="ctr" a:rtl="1">
+              <a:defRPr sz="1100" b="1">
+                <a:solidFill>
+                  <a:srgbClr val="6E6E6E"/>
+                </a:solidFill>
+                <a:latin typeface="Vazir"/>
+              </a:defRPr>
+            </a:pPr>
+            <a:r>
+              <a:t>صفحه 26 از 39</a:t>
+            </a:r>
+          </a:p>
+        </p:txBody>
+      </p:sp>
+      <p:sp>
+        <p:nvSpPr>
+          <p:cNvPr id="8" name="TextBox 7"/>
+          <p:cNvSpPr txBox="1"/>
+          <p:nvPr/>
+        </p:nvSpPr>
+        <p:spPr>
+          <a:xfrm>
+            <a:off x="7315200" y="6473952"/>
+            <a:ext cx="1371600" cy="292608"/>
+          </a:xfrm>
+          <a:prstGeom prst="rect">
+            <a:avLst/>
+          </a:prstGeom>
+          <a:noFill/>
+        </p:spPr>
+        <p:txBody>
+          <a:bodyPr wrap="none">
+            <a:spAutoFit/>
+          </a:bodyPr>
+          <a:lstStyle/>
+          <a:p>
+            <a:pPr algn="l" a:rtl="1">
+              <a:defRPr sz="1000" b="0">
+                <a:solidFill>
+                  <a:srgbClr val="8C8C8C"/>
+                </a:solidFill>
+                <a:latin typeface="Vazir"/>
+              </a:defRPr>
+            </a:pPr>
+            <a:r>
+              <a:t>26</a:t>
             </a:r>
           </a:p>
         </p:txBody>
@@ -7213,6 +10172,12 @@
 <file path=ppt/slides/slide27.xml><?xml version="1.0" encoding="utf-8"?>
 <p:sld xmlns:a="http://schemas.openxmlformats.org/drawingml/2006/main" xmlns:p="http://schemas.openxmlformats.org/presentationml/2006/main" xmlns:r="http://schemas.openxmlformats.org/officeDocument/2006/relationships">
   <p:cSld>
+    <p:bg>
+      <p:bgPr>
+        <a:noFill/>
+        <a:effectLst/>
+      </p:bgPr>
+    </p:bg>
     <p:spTree>
       <p:nvGrpSpPr>
         <p:cNvPr id="1" name=""/>
@@ -7414,6 +10379,157 @@
             </a:pPr>
             <a:r>
               <a:t>• Clean Core: namespace Z/Y، Extension Views، Adapt before Build — سازگاری با upgrade.</a:t>
+            </a:r>
+          </a:p>
+        </p:txBody>
+      </p:sp>
+      <p:sp>
+        <p:nvSpPr>
+          <p:cNvPr id="5" name="Rectangle 4"/>
+          <p:cNvSpPr/>
+          <p:nvPr/>
+        </p:nvSpPr>
+        <p:spPr>
+          <a:xfrm>
+            <a:off x="365760" y="6419088"/>
+            <a:ext cx="8412480" cy="13716"/>
+          </a:xfrm>
+          <a:prstGeom prst="rect">
+            <a:avLst/>
+          </a:prstGeom>
+          <a:solidFill>
+            <a:srgbClr val="D2DCE6"/>
+          </a:solidFill>
+          <a:ln>
+            <a:noFill/>
+          </a:ln>
+        </p:spPr>
+        <p:style>
+          <a:lnRef idx="1">
+            <a:schemeClr val="accent1"/>
+          </a:lnRef>
+          <a:fillRef idx="3">
+            <a:schemeClr val="accent1"/>
+          </a:fillRef>
+          <a:effectRef idx="2">
+            <a:schemeClr val="accent1"/>
+          </a:effectRef>
+          <a:fontRef idx="minor">
+            <a:schemeClr val="lt1"/>
+          </a:fontRef>
+        </p:style>
+        <p:txBody>
+          <a:bodyPr rtlCol="0" anchor="ctr"/>
+          <a:lstStyle/>
+          <a:p>
+            <a:pPr algn="ctr"/>
+          </a:p>
+        </p:txBody>
+      </p:sp>
+      <p:sp>
+        <p:nvSpPr>
+          <p:cNvPr id="6" name="TextBox 5"/>
+          <p:cNvSpPr txBox="1"/>
+          <p:nvPr/>
+        </p:nvSpPr>
+        <p:spPr>
+          <a:xfrm>
+            <a:off x="411480" y="6473952"/>
+            <a:ext cx="4114800" cy="292608"/>
+          </a:xfrm>
+          <a:prstGeom prst="rect">
+            <a:avLst/>
+          </a:prstGeom>
+          <a:noFill/>
+        </p:spPr>
+        <p:txBody>
+          <a:bodyPr wrap="none">
+            <a:spAutoFit/>
+          </a:bodyPr>
+          <a:lstStyle/>
+          <a:p>
+            <a:pPr algn="r" a:rtl="1">
+              <a:defRPr sz="1000" b="0">
+                <a:solidFill>
+                  <a:srgbClr val="8C8C8C"/>
+                </a:solidFill>
+                <a:latin typeface="Vazir"/>
+              </a:defRPr>
+            </a:pPr>
+            <a:r>
+              <a:t>پایگاه داده پیشرفته | سید علی زین الدینی</a:t>
+            </a:r>
+          </a:p>
+        </p:txBody>
+      </p:sp>
+      <p:sp>
+        <p:nvSpPr>
+          <p:cNvPr id="7" name="TextBox 6"/>
+          <p:cNvSpPr txBox="1"/>
+          <p:nvPr/>
+        </p:nvSpPr>
+        <p:spPr>
+          <a:xfrm>
+            <a:off x="3657600" y="6446520"/>
+            <a:ext cx="1828800" cy="320040"/>
+          </a:xfrm>
+          <a:prstGeom prst="rect">
+            <a:avLst/>
+          </a:prstGeom>
+          <a:noFill/>
+        </p:spPr>
+        <p:txBody>
+          <a:bodyPr wrap="none">
+            <a:spAutoFit/>
+          </a:bodyPr>
+          <a:lstStyle/>
+          <a:p>
+            <a:pPr algn="ctr" a:rtl="1">
+              <a:defRPr sz="1100" b="1">
+                <a:solidFill>
+                  <a:srgbClr val="6E6E6E"/>
+                </a:solidFill>
+                <a:latin typeface="Vazir"/>
+              </a:defRPr>
+            </a:pPr>
+            <a:r>
+              <a:t>صفحه 27 از 39</a:t>
+            </a:r>
+          </a:p>
+        </p:txBody>
+      </p:sp>
+      <p:sp>
+        <p:nvSpPr>
+          <p:cNvPr id="8" name="TextBox 7"/>
+          <p:cNvSpPr txBox="1"/>
+          <p:nvPr/>
+        </p:nvSpPr>
+        <p:spPr>
+          <a:xfrm>
+            <a:off x="7315200" y="6473952"/>
+            <a:ext cx="1371600" cy="292608"/>
+          </a:xfrm>
+          <a:prstGeom prst="rect">
+            <a:avLst/>
+          </a:prstGeom>
+          <a:noFill/>
+        </p:spPr>
+        <p:txBody>
+          <a:bodyPr wrap="none">
+            <a:spAutoFit/>
+          </a:bodyPr>
+          <a:lstStyle/>
+          <a:p>
+            <a:pPr algn="l" a:rtl="1">
+              <a:defRPr sz="1000" b="0">
+                <a:solidFill>
+                  <a:srgbClr val="8C8C8C"/>
+                </a:solidFill>
+                <a:latin typeface="Vazir"/>
+              </a:defRPr>
+            </a:pPr>
+            <a:r>
+              <a:t>27</a:t>
             </a:r>
           </a:p>
         </p:txBody>
@@ -7429,6 +10545,12 @@
 <file path=ppt/slides/slide28.xml><?xml version="1.0" encoding="utf-8"?>
 <p:sld xmlns:a="http://schemas.openxmlformats.org/drawingml/2006/main" xmlns:p="http://schemas.openxmlformats.org/presentationml/2006/main" xmlns:r="http://schemas.openxmlformats.org/officeDocument/2006/relationships">
   <p:cSld>
+    <p:bg>
+      <p:bgPr>
+        <a:noFill/>
+        <a:effectLst/>
+      </p:bgPr>
+    </p:bg>
     <p:spTree>
       <p:nvGrpSpPr>
         <p:cNvPr id="1" name=""/>
@@ -7571,6 +10693,157 @@
             </a:pPr>
             <a:r>
               <a:t>شکل ۷: بهبود سرعت با Push-Down در HANA</a:t>
+            </a:r>
+          </a:p>
+        </p:txBody>
+      </p:sp>
+      <p:sp>
+        <p:nvSpPr>
+          <p:cNvPr id="6" name="Rectangle 5"/>
+          <p:cNvSpPr/>
+          <p:nvPr/>
+        </p:nvSpPr>
+        <p:spPr>
+          <a:xfrm>
+            <a:off x="365760" y="6419088"/>
+            <a:ext cx="8412480" cy="13716"/>
+          </a:xfrm>
+          <a:prstGeom prst="rect">
+            <a:avLst/>
+          </a:prstGeom>
+          <a:solidFill>
+            <a:srgbClr val="D2DCE6"/>
+          </a:solidFill>
+          <a:ln>
+            <a:noFill/>
+          </a:ln>
+        </p:spPr>
+        <p:style>
+          <a:lnRef idx="1">
+            <a:schemeClr val="accent1"/>
+          </a:lnRef>
+          <a:fillRef idx="3">
+            <a:schemeClr val="accent1"/>
+          </a:fillRef>
+          <a:effectRef idx="2">
+            <a:schemeClr val="accent1"/>
+          </a:effectRef>
+          <a:fontRef idx="minor">
+            <a:schemeClr val="lt1"/>
+          </a:fontRef>
+        </p:style>
+        <p:txBody>
+          <a:bodyPr rtlCol="0" anchor="ctr"/>
+          <a:lstStyle/>
+          <a:p>
+            <a:pPr algn="ctr"/>
+          </a:p>
+        </p:txBody>
+      </p:sp>
+      <p:sp>
+        <p:nvSpPr>
+          <p:cNvPr id="7" name="TextBox 6"/>
+          <p:cNvSpPr txBox="1"/>
+          <p:nvPr/>
+        </p:nvSpPr>
+        <p:spPr>
+          <a:xfrm>
+            <a:off x="411480" y="6473952"/>
+            <a:ext cx="4114800" cy="292608"/>
+          </a:xfrm>
+          <a:prstGeom prst="rect">
+            <a:avLst/>
+          </a:prstGeom>
+          <a:noFill/>
+        </p:spPr>
+        <p:txBody>
+          <a:bodyPr wrap="none">
+            <a:spAutoFit/>
+          </a:bodyPr>
+          <a:lstStyle/>
+          <a:p>
+            <a:pPr algn="r" a:rtl="1">
+              <a:defRPr sz="1000" b="0">
+                <a:solidFill>
+                  <a:srgbClr val="8C8C8C"/>
+                </a:solidFill>
+                <a:latin typeface="Vazir"/>
+              </a:defRPr>
+            </a:pPr>
+            <a:r>
+              <a:t>پایگاه داده پیشرفته | سید علی زین الدینی</a:t>
+            </a:r>
+          </a:p>
+        </p:txBody>
+      </p:sp>
+      <p:sp>
+        <p:nvSpPr>
+          <p:cNvPr id="8" name="TextBox 7"/>
+          <p:cNvSpPr txBox="1"/>
+          <p:nvPr/>
+        </p:nvSpPr>
+        <p:spPr>
+          <a:xfrm>
+            <a:off x="3657600" y="6446520"/>
+            <a:ext cx="1828800" cy="320040"/>
+          </a:xfrm>
+          <a:prstGeom prst="rect">
+            <a:avLst/>
+          </a:prstGeom>
+          <a:noFill/>
+        </p:spPr>
+        <p:txBody>
+          <a:bodyPr wrap="none">
+            <a:spAutoFit/>
+          </a:bodyPr>
+          <a:lstStyle/>
+          <a:p>
+            <a:pPr algn="ctr" a:rtl="1">
+              <a:defRPr sz="1100" b="1">
+                <a:solidFill>
+                  <a:srgbClr val="6E6E6E"/>
+                </a:solidFill>
+                <a:latin typeface="Vazir"/>
+              </a:defRPr>
+            </a:pPr>
+            <a:r>
+              <a:t>صفحه 28 از 39</a:t>
+            </a:r>
+          </a:p>
+        </p:txBody>
+      </p:sp>
+      <p:sp>
+        <p:nvSpPr>
+          <p:cNvPr id="9" name="TextBox 8"/>
+          <p:cNvSpPr txBox="1"/>
+          <p:nvPr/>
+        </p:nvSpPr>
+        <p:spPr>
+          <a:xfrm>
+            <a:off x="7315200" y="6473952"/>
+            <a:ext cx="1371600" cy="292608"/>
+          </a:xfrm>
+          <a:prstGeom prst="rect">
+            <a:avLst/>
+          </a:prstGeom>
+          <a:noFill/>
+        </p:spPr>
+        <p:txBody>
+          <a:bodyPr wrap="none">
+            <a:spAutoFit/>
+          </a:bodyPr>
+          <a:lstStyle/>
+          <a:p>
+            <a:pPr algn="l" a:rtl="1">
+              <a:defRPr sz="1000" b="0">
+                <a:solidFill>
+                  <a:srgbClr val="8C8C8C"/>
+                </a:solidFill>
+                <a:latin typeface="Vazir"/>
+              </a:defRPr>
+            </a:pPr>
+            <a:r>
+              <a:t>28</a:t>
             </a:r>
           </a:p>
         </p:txBody>
@@ -7586,6 +10859,12 @@
 <file path=ppt/slides/slide29.xml><?xml version="1.0" encoding="utf-8"?>
 <p:sld xmlns:a="http://schemas.openxmlformats.org/drawingml/2006/main" xmlns:p="http://schemas.openxmlformats.org/presentationml/2006/main" xmlns:r="http://schemas.openxmlformats.org/officeDocument/2006/relationships">
   <p:cSld>
+    <p:bg>
+      <p:bgPr>
+        <a:noFill/>
+        <a:effectLst/>
+      </p:bgPr>
+    </p:bg>
     <p:spTree>
       <p:nvGrpSpPr>
         <p:cNvPr id="1" name=""/>
@@ -7624,7 +10903,7 @@
               </a:defRPr>
             </a:pPr>
             <a:r>
-              <a:t>جدول بهینه‌سازی کوئری</a:t>
+              <a:t>جدول ۳: بهینه‌سازی کوئری</a:t>
             </a:r>
           </a:p>
         </p:txBody>
@@ -8240,6 +11519,157 @@
           </a:graphicData>
         </a:graphic>
       </p:graphicFrame>
+      <p:sp>
+        <p:nvSpPr>
+          <p:cNvPr id="5" name="Rectangle 4"/>
+          <p:cNvSpPr/>
+          <p:nvPr/>
+        </p:nvSpPr>
+        <p:spPr>
+          <a:xfrm>
+            <a:off x="365760" y="6419088"/>
+            <a:ext cx="8412480" cy="13716"/>
+          </a:xfrm>
+          <a:prstGeom prst="rect">
+            <a:avLst/>
+          </a:prstGeom>
+          <a:solidFill>
+            <a:srgbClr val="D2DCE6"/>
+          </a:solidFill>
+          <a:ln>
+            <a:noFill/>
+          </a:ln>
+        </p:spPr>
+        <p:style>
+          <a:lnRef idx="1">
+            <a:schemeClr val="accent1"/>
+          </a:lnRef>
+          <a:fillRef idx="3">
+            <a:schemeClr val="accent1"/>
+          </a:fillRef>
+          <a:effectRef idx="2">
+            <a:schemeClr val="accent1"/>
+          </a:effectRef>
+          <a:fontRef idx="minor">
+            <a:schemeClr val="lt1"/>
+          </a:fontRef>
+        </p:style>
+        <p:txBody>
+          <a:bodyPr rtlCol="0" anchor="ctr"/>
+          <a:lstStyle/>
+          <a:p>
+            <a:pPr algn="ctr"/>
+          </a:p>
+        </p:txBody>
+      </p:sp>
+      <p:sp>
+        <p:nvSpPr>
+          <p:cNvPr id="6" name="TextBox 5"/>
+          <p:cNvSpPr txBox="1"/>
+          <p:nvPr/>
+        </p:nvSpPr>
+        <p:spPr>
+          <a:xfrm>
+            <a:off x="411480" y="6473952"/>
+            <a:ext cx="4114800" cy="292608"/>
+          </a:xfrm>
+          <a:prstGeom prst="rect">
+            <a:avLst/>
+          </a:prstGeom>
+          <a:noFill/>
+        </p:spPr>
+        <p:txBody>
+          <a:bodyPr wrap="none">
+            <a:spAutoFit/>
+          </a:bodyPr>
+          <a:lstStyle/>
+          <a:p>
+            <a:pPr algn="r" a:rtl="1">
+              <a:defRPr sz="1000" b="0">
+                <a:solidFill>
+                  <a:srgbClr val="8C8C8C"/>
+                </a:solidFill>
+                <a:latin typeface="Vazir"/>
+              </a:defRPr>
+            </a:pPr>
+            <a:r>
+              <a:t>پایگاه داده پیشرفته | سید علی زین الدینی</a:t>
+            </a:r>
+          </a:p>
+        </p:txBody>
+      </p:sp>
+      <p:sp>
+        <p:nvSpPr>
+          <p:cNvPr id="7" name="TextBox 6"/>
+          <p:cNvSpPr txBox="1"/>
+          <p:nvPr/>
+        </p:nvSpPr>
+        <p:spPr>
+          <a:xfrm>
+            <a:off x="3657600" y="6446520"/>
+            <a:ext cx="1828800" cy="320040"/>
+          </a:xfrm>
+          <a:prstGeom prst="rect">
+            <a:avLst/>
+          </a:prstGeom>
+          <a:noFill/>
+        </p:spPr>
+        <p:txBody>
+          <a:bodyPr wrap="none">
+            <a:spAutoFit/>
+          </a:bodyPr>
+          <a:lstStyle/>
+          <a:p>
+            <a:pPr algn="ctr" a:rtl="1">
+              <a:defRPr sz="1100" b="1">
+                <a:solidFill>
+                  <a:srgbClr val="6E6E6E"/>
+                </a:solidFill>
+                <a:latin typeface="Vazir"/>
+              </a:defRPr>
+            </a:pPr>
+            <a:r>
+              <a:t>صفحه 29 از 39</a:t>
+            </a:r>
+          </a:p>
+        </p:txBody>
+      </p:sp>
+      <p:sp>
+        <p:nvSpPr>
+          <p:cNvPr id="8" name="TextBox 7"/>
+          <p:cNvSpPr txBox="1"/>
+          <p:nvPr/>
+        </p:nvSpPr>
+        <p:spPr>
+          <a:xfrm>
+            <a:off x="7315200" y="6473952"/>
+            <a:ext cx="1371600" cy="292608"/>
+          </a:xfrm>
+          <a:prstGeom prst="rect">
+            <a:avLst/>
+          </a:prstGeom>
+          <a:noFill/>
+        </p:spPr>
+        <p:txBody>
+          <a:bodyPr wrap="none">
+            <a:spAutoFit/>
+          </a:bodyPr>
+          <a:lstStyle/>
+          <a:p>
+            <a:pPr algn="l" a:rtl="1">
+              <a:defRPr sz="1000" b="0">
+                <a:solidFill>
+                  <a:srgbClr val="8C8C8C"/>
+                </a:solidFill>
+                <a:latin typeface="Vazir"/>
+              </a:defRPr>
+            </a:pPr>
+            <a:r>
+              <a:t>29</a:t>
+            </a:r>
+          </a:p>
+        </p:txBody>
+      </p:sp>
     </p:spTree>
   </p:cSld>
   <p:clrMapOvr>
@@ -8251,6 +11681,12 @@
 <file path=ppt/slides/slide3.xml><?xml version="1.0" encoding="utf-8"?>
 <p:sld xmlns:a="http://schemas.openxmlformats.org/drawingml/2006/main" xmlns:p="http://schemas.openxmlformats.org/presentationml/2006/main" xmlns:r="http://schemas.openxmlformats.org/officeDocument/2006/relationships">
   <p:cSld>
+    <p:bg>
+      <p:bgPr>
+        <a:noFill/>
+        <a:effectLst/>
+      </p:bgPr>
+    </p:bg>
     <p:spTree>
       <p:nvGrpSpPr>
         <p:cNvPr id="1" name=""/>
@@ -8468,6 +11904,157 @@
             </a:pPr>
             <a:r>
               <a:t>• Parallel Processing &amp; Table Partitioning — پردازش و توزیع موازی داده</a:t>
+            </a:r>
+          </a:p>
+        </p:txBody>
+      </p:sp>
+      <p:sp>
+        <p:nvSpPr>
+          <p:cNvPr id="5" name="Rectangle 4"/>
+          <p:cNvSpPr/>
+          <p:nvPr/>
+        </p:nvSpPr>
+        <p:spPr>
+          <a:xfrm>
+            <a:off x="365760" y="6419088"/>
+            <a:ext cx="8412480" cy="13716"/>
+          </a:xfrm>
+          <a:prstGeom prst="rect">
+            <a:avLst/>
+          </a:prstGeom>
+          <a:solidFill>
+            <a:srgbClr val="D2DCE6"/>
+          </a:solidFill>
+          <a:ln>
+            <a:noFill/>
+          </a:ln>
+        </p:spPr>
+        <p:style>
+          <a:lnRef idx="1">
+            <a:schemeClr val="accent1"/>
+          </a:lnRef>
+          <a:fillRef idx="3">
+            <a:schemeClr val="accent1"/>
+          </a:fillRef>
+          <a:effectRef idx="2">
+            <a:schemeClr val="accent1"/>
+          </a:effectRef>
+          <a:fontRef idx="minor">
+            <a:schemeClr val="lt1"/>
+          </a:fontRef>
+        </p:style>
+        <p:txBody>
+          <a:bodyPr rtlCol="0" anchor="ctr"/>
+          <a:lstStyle/>
+          <a:p>
+            <a:pPr algn="ctr"/>
+          </a:p>
+        </p:txBody>
+      </p:sp>
+      <p:sp>
+        <p:nvSpPr>
+          <p:cNvPr id="6" name="TextBox 5"/>
+          <p:cNvSpPr txBox="1"/>
+          <p:nvPr/>
+        </p:nvSpPr>
+        <p:spPr>
+          <a:xfrm>
+            <a:off x="411480" y="6473952"/>
+            <a:ext cx="4114800" cy="292608"/>
+          </a:xfrm>
+          <a:prstGeom prst="rect">
+            <a:avLst/>
+          </a:prstGeom>
+          <a:noFill/>
+        </p:spPr>
+        <p:txBody>
+          <a:bodyPr wrap="none">
+            <a:spAutoFit/>
+          </a:bodyPr>
+          <a:lstStyle/>
+          <a:p>
+            <a:pPr algn="r" a:rtl="1">
+              <a:defRPr sz="1000" b="0">
+                <a:solidFill>
+                  <a:srgbClr val="8C8C8C"/>
+                </a:solidFill>
+                <a:latin typeface="Vazir"/>
+              </a:defRPr>
+            </a:pPr>
+            <a:r>
+              <a:t>پایگاه داده پیشرفته | سید علی زین الدینی</a:t>
+            </a:r>
+          </a:p>
+        </p:txBody>
+      </p:sp>
+      <p:sp>
+        <p:nvSpPr>
+          <p:cNvPr id="7" name="TextBox 6"/>
+          <p:cNvSpPr txBox="1"/>
+          <p:nvPr/>
+        </p:nvSpPr>
+        <p:spPr>
+          <a:xfrm>
+            <a:off x="3657600" y="6446520"/>
+            <a:ext cx="1828800" cy="320040"/>
+          </a:xfrm>
+          <a:prstGeom prst="rect">
+            <a:avLst/>
+          </a:prstGeom>
+          <a:noFill/>
+        </p:spPr>
+        <p:txBody>
+          <a:bodyPr wrap="none">
+            <a:spAutoFit/>
+          </a:bodyPr>
+          <a:lstStyle/>
+          <a:p>
+            <a:pPr algn="ctr" a:rtl="1">
+              <a:defRPr sz="1100" b="1">
+                <a:solidFill>
+                  <a:srgbClr val="6E6E6E"/>
+                </a:solidFill>
+                <a:latin typeface="Vazir"/>
+              </a:defRPr>
+            </a:pPr>
+            <a:r>
+              <a:t>صفحه 3 از 39</a:t>
+            </a:r>
+          </a:p>
+        </p:txBody>
+      </p:sp>
+      <p:sp>
+        <p:nvSpPr>
+          <p:cNvPr id="8" name="TextBox 7"/>
+          <p:cNvSpPr txBox="1"/>
+          <p:nvPr/>
+        </p:nvSpPr>
+        <p:spPr>
+          <a:xfrm>
+            <a:off x="7315200" y="6473952"/>
+            <a:ext cx="1371600" cy="292608"/>
+          </a:xfrm>
+          <a:prstGeom prst="rect">
+            <a:avLst/>
+          </a:prstGeom>
+          <a:noFill/>
+        </p:spPr>
+        <p:txBody>
+          <a:bodyPr wrap="none">
+            <a:spAutoFit/>
+          </a:bodyPr>
+          <a:lstStyle/>
+          <a:p>
+            <a:pPr algn="l" a:rtl="1">
+              <a:defRPr sz="1000" b="0">
+                <a:solidFill>
+                  <a:srgbClr val="8C8C8C"/>
+                </a:solidFill>
+                <a:latin typeface="Vazir"/>
+              </a:defRPr>
+            </a:pPr>
+            <a:r>
+              <a:t>3</a:t>
             </a:r>
           </a:p>
         </p:txBody>
@@ -8483,6 +12070,12 @@
 <file path=ppt/slides/slide30.xml><?xml version="1.0" encoding="utf-8"?>
 <p:sld xmlns:a="http://schemas.openxmlformats.org/drawingml/2006/main" xmlns:p="http://schemas.openxmlformats.org/presentationml/2006/main" xmlns:r="http://schemas.openxmlformats.org/officeDocument/2006/relationships">
   <p:cSld>
+    <p:bg>
+      <p:bgPr>
+        <a:noFill/>
+        <a:effectLst/>
+      </p:bgPr>
+    </p:bg>
     <p:spTree>
       <p:nvGrpSpPr>
         <p:cNvPr id="1" name=""/>
@@ -8700,6 +12293,157 @@
             </a:pPr>
             <a:r>
               <a:t>• Inverted Individual: DML سریع‌تر — read کمی کندتر (۱۰–۲۰٪).</a:t>
+            </a:r>
+          </a:p>
+        </p:txBody>
+      </p:sp>
+      <p:sp>
+        <p:nvSpPr>
+          <p:cNvPr id="5" name="Rectangle 4"/>
+          <p:cNvSpPr/>
+          <p:nvPr/>
+        </p:nvSpPr>
+        <p:spPr>
+          <a:xfrm>
+            <a:off x="365760" y="6419088"/>
+            <a:ext cx="8412480" cy="13716"/>
+          </a:xfrm>
+          <a:prstGeom prst="rect">
+            <a:avLst/>
+          </a:prstGeom>
+          <a:solidFill>
+            <a:srgbClr val="D2DCE6"/>
+          </a:solidFill>
+          <a:ln>
+            <a:noFill/>
+          </a:ln>
+        </p:spPr>
+        <p:style>
+          <a:lnRef idx="1">
+            <a:schemeClr val="accent1"/>
+          </a:lnRef>
+          <a:fillRef idx="3">
+            <a:schemeClr val="accent1"/>
+          </a:fillRef>
+          <a:effectRef idx="2">
+            <a:schemeClr val="accent1"/>
+          </a:effectRef>
+          <a:fontRef idx="minor">
+            <a:schemeClr val="lt1"/>
+          </a:fontRef>
+        </p:style>
+        <p:txBody>
+          <a:bodyPr rtlCol="0" anchor="ctr"/>
+          <a:lstStyle/>
+          <a:p>
+            <a:pPr algn="ctr"/>
+          </a:p>
+        </p:txBody>
+      </p:sp>
+      <p:sp>
+        <p:nvSpPr>
+          <p:cNvPr id="6" name="TextBox 5"/>
+          <p:cNvSpPr txBox="1"/>
+          <p:nvPr/>
+        </p:nvSpPr>
+        <p:spPr>
+          <a:xfrm>
+            <a:off x="411480" y="6473952"/>
+            <a:ext cx="4114800" cy="292608"/>
+          </a:xfrm>
+          <a:prstGeom prst="rect">
+            <a:avLst/>
+          </a:prstGeom>
+          <a:noFill/>
+        </p:spPr>
+        <p:txBody>
+          <a:bodyPr wrap="none">
+            <a:spAutoFit/>
+          </a:bodyPr>
+          <a:lstStyle/>
+          <a:p>
+            <a:pPr algn="r" a:rtl="1">
+              <a:defRPr sz="1000" b="0">
+                <a:solidFill>
+                  <a:srgbClr val="8C8C8C"/>
+                </a:solidFill>
+                <a:latin typeface="Vazir"/>
+              </a:defRPr>
+            </a:pPr>
+            <a:r>
+              <a:t>پایگاه داده پیشرفته | سید علی زین الدینی</a:t>
+            </a:r>
+          </a:p>
+        </p:txBody>
+      </p:sp>
+      <p:sp>
+        <p:nvSpPr>
+          <p:cNvPr id="7" name="TextBox 6"/>
+          <p:cNvSpPr txBox="1"/>
+          <p:nvPr/>
+        </p:nvSpPr>
+        <p:spPr>
+          <a:xfrm>
+            <a:off x="3657600" y="6446520"/>
+            <a:ext cx="1828800" cy="320040"/>
+          </a:xfrm>
+          <a:prstGeom prst="rect">
+            <a:avLst/>
+          </a:prstGeom>
+          <a:noFill/>
+        </p:spPr>
+        <p:txBody>
+          <a:bodyPr wrap="none">
+            <a:spAutoFit/>
+          </a:bodyPr>
+          <a:lstStyle/>
+          <a:p>
+            <a:pPr algn="ctr" a:rtl="1">
+              <a:defRPr sz="1100" b="1">
+                <a:solidFill>
+                  <a:srgbClr val="6E6E6E"/>
+                </a:solidFill>
+                <a:latin typeface="Vazir"/>
+              </a:defRPr>
+            </a:pPr>
+            <a:r>
+              <a:t>صفحه 30 از 39</a:t>
+            </a:r>
+          </a:p>
+        </p:txBody>
+      </p:sp>
+      <p:sp>
+        <p:nvSpPr>
+          <p:cNvPr id="8" name="TextBox 7"/>
+          <p:cNvSpPr txBox="1"/>
+          <p:nvPr/>
+        </p:nvSpPr>
+        <p:spPr>
+          <a:xfrm>
+            <a:off x="7315200" y="6473952"/>
+            <a:ext cx="1371600" cy="292608"/>
+          </a:xfrm>
+          <a:prstGeom prst="rect">
+            <a:avLst/>
+          </a:prstGeom>
+          <a:noFill/>
+        </p:spPr>
+        <p:txBody>
+          <a:bodyPr wrap="none">
+            <a:spAutoFit/>
+          </a:bodyPr>
+          <a:lstStyle/>
+          <a:p>
+            <a:pPr algn="l" a:rtl="1">
+              <a:defRPr sz="1000" b="0">
+                <a:solidFill>
+                  <a:srgbClr val="8C8C8C"/>
+                </a:solidFill>
+                <a:latin typeface="Vazir"/>
+              </a:defRPr>
+            </a:pPr>
+            <a:r>
+              <a:t>30</a:t>
             </a:r>
           </a:p>
         </p:txBody>
@@ -8715,6 +12459,12 @@
 <file path=ppt/slides/slide31.xml><?xml version="1.0" encoding="utf-8"?>
 <p:sld xmlns:a="http://schemas.openxmlformats.org/drawingml/2006/main" xmlns:p="http://schemas.openxmlformats.org/presentationml/2006/main" xmlns:r="http://schemas.openxmlformats.org/officeDocument/2006/relationships">
   <p:cSld>
+    <p:bg>
+      <p:bgPr>
+        <a:noFill/>
+        <a:effectLst/>
+      </p:bgPr>
+    </p:bg>
     <p:spTree>
       <p:nvGrpSpPr>
         <p:cNvPr id="1" name=""/>
@@ -8916,6 +12666,157 @@
             </a:pPr>
             <a:r>
               <a:t>• Expensive Statement Trace → PlanViz → ST05: فقط indexهای واقعاً لازم بسازید.</a:t>
+            </a:r>
+          </a:p>
+        </p:txBody>
+      </p:sp>
+      <p:sp>
+        <p:nvSpPr>
+          <p:cNvPr id="5" name="Rectangle 4"/>
+          <p:cNvSpPr/>
+          <p:nvPr/>
+        </p:nvSpPr>
+        <p:spPr>
+          <a:xfrm>
+            <a:off x="365760" y="6419088"/>
+            <a:ext cx="8412480" cy="13716"/>
+          </a:xfrm>
+          <a:prstGeom prst="rect">
+            <a:avLst/>
+          </a:prstGeom>
+          <a:solidFill>
+            <a:srgbClr val="D2DCE6"/>
+          </a:solidFill>
+          <a:ln>
+            <a:noFill/>
+          </a:ln>
+        </p:spPr>
+        <p:style>
+          <a:lnRef idx="1">
+            <a:schemeClr val="accent1"/>
+          </a:lnRef>
+          <a:fillRef idx="3">
+            <a:schemeClr val="accent1"/>
+          </a:fillRef>
+          <a:effectRef idx="2">
+            <a:schemeClr val="accent1"/>
+          </a:effectRef>
+          <a:fontRef idx="minor">
+            <a:schemeClr val="lt1"/>
+          </a:fontRef>
+        </p:style>
+        <p:txBody>
+          <a:bodyPr rtlCol="0" anchor="ctr"/>
+          <a:lstStyle/>
+          <a:p>
+            <a:pPr algn="ctr"/>
+          </a:p>
+        </p:txBody>
+      </p:sp>
+      <p:sp>
+        <p:nvSpPr>
+          <p:cNvPr id="6" name="TextBox 5"/>
+          <p:cNvSpPr txBox="1"/>
+          <p:nvPr/>
+        </p:nvSpPr>
+        <p:spPr>
+          <a:xfrm>
+            <a:off x="411480" y="6473952"/>
+            <a:ext cx="4114800" cy="292608"/>
+          </a:xfrm>
+          <a:prstGeom prst="rect">
+            <a:avLst/>
+          </a:prstGeom>
+          <a:noFill/>
+        </p:spPr>
+        <p:txBody>
+          <a:bodyPr wrap="none">
+            <a:spAutoFit/>
+          </a:bodyPr>
+          <a:lstStyle/>
+          <a:p>
+            <a:pPr algn="r" a:rtl="1">
+              <a:defRPr sz="1000" b="0">
+                <a:solidFill>
+                  <a:srgbClr val="8C8C8C"/>
+                </a:solidFill>
+                <a:latin typeface="Vazir"/>
+              </a:defRPr>
+            </a:pPr>
+            <a:r>
+              <a:t>پایگاه داده پیشرفته | سید علی زین الدینی</a:t>
+            </a:r>
+          </a:p>
+        </p:txBody>
+      </p:sp>
+      <p:sp>
+        <p:nvSpPr>
+          <p:cNvPr id="7" name="TextBox 6"/>
+          <p:cNvSpPr txBox="1"/>
+          <p:nvPr/>
+        </p:nvSpPr>
+        <p:spPr>
+          <a:xfrm>
+            <a:off x="3657600" y="6446520"/>
+            <a:ext cx="1828800" cy="320040"/>
+          </a:xfrm>
+          <a:prstGeom prst="rect">
+            <a:avLst/>
+          </a:prstGeom>
+          <a:noFill/>
+        </p:spPr>
+        <p:txBody>
+          <a:bodyPr wrap="none">
+            <a:spAutoFit/>
+          </a:bodyPr>
+          <a:lstStyle/>
+          <a:p>
+            <a:pPr algn="ctr" a:rtl="1">
+              <a:defRPr sz="1100" b="1">
+                <a:solidFill>
+                  <a:srgbClr val="6E6E6E"/>
+                </a:solidFill>
+                <a:latin typeface="Vazir"/>
+              </a:defRPr>
+            </a:pPr>
+            <a:r>
+              <a:t>صفحه 31 از 39</a:t>
+            </a:r>
+          </a:p>
+        </p:txBody>
+      </p:sp>
+      <p:sp>
+        <p:nvSpPr>
+          <p:cNvPr id="8" name="TextBox 7"/>
+          <p:cNvSpPr txBox="1"/>
+          <p:nvPr/>
+        </p:nvSpPr>
+        <p:spPr>
+          <a:xfrm>
+            <a:off x="7315200" y="6473952"/>
+            <a:ext cx="1371600" cy="292608"/>
+          </a:xfrm>
+          <a:prstGeom prst="rect">
+            <a:avLst/>
+          </a:prstGeom>
+          <a:noFill/>
+        </p:spPr>
+        <p:txBody>
+          <a:bodyPr wrap="none">
+            <a:spAutoFit/>
+          </a:bodyPr>
+          <a:lstStyle/>
+          <a:p>
+            <a:pPr algn="l" a:rtl="1">
+              <a:defRPr sz="1000" b="0">
+                <a:solidFill>
+                  <a:srgbClr val="8C8C8C"/>
+                </a:solidFill>
+                <a:latin typeface="Vazir"/>
+              </a:defRPr>
+            </a:pPr>
+            <a:r>
+              <a:t>31</a:t>
             </a:r>
           </a:p>
         </p:txBody>
@@ -8931,6 +12832,12 @@
 <file path=ppt/slides/slide32.xml><?xml version="1.0" encoding="utf-8"?>
 <p:sld xmlns:a="http://schemas.openxmlformats.org/drawingml/2006/main" xmlns:p="http://schemas.openxmlformats.org/presentationml/2006/main" xmlns:r="http://schemas.openxmlformats.org/officeDocument/2006/relationships">
   <p:cSld>
+    <p:bg>
+      <p:bgPr>
+        <a:noFill/>
+        <a:effectLst/>
+      </p:bgPr>
+    </p:bg>
     <p:spTree>
       <p:nvGrpSpPr>
         <p:cNvPr id="1" name=""/>
@@ -9073,6 +12980,157 @@
             </a:pPr>
             <a:r>
               <a:t>شکل ۸: Hash، Range و Round-Robin Partitioning</a:t>
+            </a:r>
+          </a:p>
+        </p:txBody>
+      </p:sp>
+      <p:sp>
+        <p:nvSpPr>
+          <p:cNvPr id="6" name="Rectangle 5"/>
+          <p:cNvSpPr/>
+          <p:nvPr/>
+        </p:nvSpPr>
+        <p:spPr>
+          <a:xfrm>
+            <a:off x="365760" y="6419088"/>
+            <a:ext cx="8412480" cy="13716"/>
+          </a:xfrm>
+          <a:prstGeom prst="rect">
+            <a:avLst/>
+          </a:prstGeom>
+          <a:solidFill>
+            <a:srgbClr val="D2DCE6"/>
+          </a:solidFill>
+          <a:ln>
+            <a:noFill/>
+          </a:ln>
+        </p:spPr>
+        <p:style>
+          <a:lnRef idx="1">
+            <a:schemeClr val="accent1"/>
+          </a:lnRef>
+          <a:fillRef idx="3">
+            <a:schemeClr val="accent1"/>
+          </a:fillRef>
+          <a:effectRef idx="2">
+            <a:schemeClr val="accent1"/>
+          </a:effectRef>
+          <a:fontRef idx="minor">
+            <a:schemeClr val="lt1"/>
+          </a:fontRef>
+        </p:style>
+        <p:txBody>
+          <a:bodyPr rtlCol="0" anchor="ctr"/>
+          <a:lstStyle/>
+          <a:p>
+            <a:pPr algn="ctr"/>
+          </a:p>
+        </p:txBody>
+      </p:sp>
+      <p:sp>
+        <p:nvSpPr>
+          <p:cNvPr id="7" name="TextBox 6"/>
+          <p:cNvSpPr txBox="1"/>
+          <p:nvPr/>
+        </p:nvSpPr>
+        <p:spPr>
+          <a:xfrm>
+            <a:off x="411480" y="6473952"/>
+            <a:ext cx="4114800" cy="292608"/>
+          </a:xfrm>
+          <a:prstGeom prst="rect">
+            <a:avLst/>
+          </a:prstGeom>
+          <a:noFill/>
+        </p:spPr>
+        <p:txBody>
+          <a:bodyPr wrap="none">
+            <a:spAutoFit/>
+          </a:bodyPr>
+          <a:lstStyle/>
+          <a:p>
+            <a:pPr algn="r" a:rtl="1">
+              <a:defRPr sz="1000" b="0">
+                <a:solidFill>
+                  <a:srgbClr val="8C8C8C"/>
+                </a:solidFill>
+                <a:latin typeface="Vazir"/>
+              </a:defRPr>
+            </a:pPr>
+            <a:r>
+              <a:t>پایگاه داده پیشرفته | سید علی زین الدینی</a:t>
+            </a:r>
+          </a:p>
+        </p:txBody>
+      </p:sp>
+      <p:sp>
+        <p:nvSpPr>
+          <p:cNvPr id="8" name="TextBox 7"/>
+          <p:cNvSpPr txBox="1"/>
+          <p:nvPr/>
+        </p:nvSpPr>
+        <p:spPr>
+          <a:xfrm>
+            <a:off x="3657600" y="6446520"/>
+            <a:ext cx="1828800" cy="320040"/>
+          </a:xfrm>
+          <a:prstGeom prst="rect">
+            <a:avLst/>
+          </a:prstGeom>
+          <a:noFill/>
+        </p:spPr>
+        <p:txBody>
+          <a:bodyPr wrap="none">
+            <a:spAutoFit/>
+          </a:bodyPr>
+          <a:lstStyle/>
+          <a:p>
+            <a:pPr algn="ctr" a:rtl="1">
+              <a:defRPr sz="1100" b="1">
+                <a:solidFill>
+                  <a:srgbClr val="6E6E6E"/>
+                </a:solidFill>
+                <a:latin typeface="Vazir"/>
+              </a:defRPr>
+            </a:pPr>
+            <a:r>
+              <a:t>صفحه 32 از 39</a:t>
+            </a:r>
+          </a:p>
+        </p:txBody>
+      </p:sp>
+      <p:sp>
+        <p:nvSpPr>
+          <p:cNvPr id="9" name="TextBox 8"/>
+          <p:cNvSpPr txBox="1"/>
+          <p:nvPr/>
+        </p:nvSpPr>
+        <p:spPr>
+          <a:xfrm>
+            <a:off x="7315200" y="6473952"/>
+            <a:ext cx="1371600" cy="292608"/>
+          </a:xfrm>
+          <a:prstGeom prst="rect">
+            <a:avLst/>
+          </a:prstGeom>
+          <a:noFill/>
+        </p:spPr>
+        <p:txBody>
+          <a:bodyPr wrap="none">
+            <a:spAutoFit/>
+          </a:bodyPr>
+          <a:lstStyle/>
+          <a:p>
+            <a:pPr algn="l" a:rtl="1">
+              <a:defRPr sz="1000" b="0">
+                <a:solidFill>
+                  <a:srgbClr val="8C8C8C"/>
+                </a:solidFill>
+                <a:latin typeface="Vazir"/>
+              </a:defRPr>
+            </a:pPr>
+            <a:r>
+              <a:t>32</a:t>
             </a:r>
           </a:p>
         </p:txBody>
@@ -9088,6 +13146,12 @@
 <file path=ppt/slides/slide33.xml><?xml version="1.0" encoding="utf-8"?>
 <p:sld xmlns:a="http://schemas.openxmlformats.org/drawingml/2006/main" xmlns:p="http://schemas.openxmlformats.org/presentationml/2006/main" xmlns:r="http://schemas.openxmlformats.org/officeDocument/2006/relationships">
   <p:cSld>
+    <p:bg>
+      <p:bgPr>
+        <a:noFill/>
+        <a:effectLst/>
+      </p:bgPr>
+    </p:bg>
     <p:spTree>
       <p:nvGrpSpPr>
         <p:cNvPr id="1" name=""/>
@@ -9273,6 +13337,157 @@
             </a:pPr>
             <a:r>
               <a:t>• مزایا: تا ۹۵٪ کمتر data scanned، ۵–۲۵× parallel scan، ۳–۱۵× join/aggregate.</a:t>
+            </a:r>
+          </a:p>
+        </p:txBody>
+      </p:sp>
+      <p:sp>
+        <p:nvSpPr>
+          <p:cNvPr id="5" name="Rectangle 4"/>
+          <p:cNvSpPr/>
+          <p:nvPr/>
+        </p:nvSpPr>
+        <p:spPr>
+          <a:xfrm>
+            <a:off x="365760" y="6419088"/>
+            <a:ext cx="8412480" cy="13716"/>
+          </a:xfrm>
+          <a:prstGeom prst="rect">
+            <a:avLst/>
+          </a:prstGeom>
+          <a:solidFill>
+            <a:srgbClr val="D2DCE6"/>
+          </a:solidFill>
+          <a:ln>
+            <a:noFill/>
+          </a:ln>
+        </p:spPr>
+        <p:style>
+          <a:lnRef idx="1">
+            <a:schemeClr val="accent1"/>
+          </a:lnRef>
+          <a:fillRef idx="3">
+            <a:schemeClr val="accent1"/>
+          </a:fillRef>
+          <a:effectRef idx="2">
+            <a:schemeClr val="accent1"/>
+          </a:effectRef>
+          <a:fontRef idx="minor">
+            <a:schemeClr val="lt1"/>
+          </a:fontRef>
+        </p:style>
+        <p:txBody>
+          <a:bodyPr rtlCol="0" anchor="ctr"/>
+          <a:lstStyle/>
+          <a:p>
+            <a:pPr algn="ctr"/>
+          </a:p>
+        </p:txBody>
+      </p:sp>
+      <p:sp>
+        <p:nvSpPr>
+          <p:cNvPr id="6" name="TextBox 5"/>
+          <p:cNvSpPr txBox="1"/>
+          <p:nvPr/>
+        </p:nvSpPr>
+        <p:spPr>
+          <a:xfrm>
+            <a:off x="411480" y="6473952"/>
+            <a:ext cx="4114800" cy="292608"/>
+          </a:xfrm>
+          <a:prstGeom prst="rect">
+            <a:avLst/>
+          </a:prstGeom>
+          <a:noFill/>
+        </p:spPr>
+        <p:txBody>
+          <a:bodyPr wrap="none">
+            <a:spAutoFit/>
+          </a:bodyPr>
+          <a:lstStyle/>
+          <a:p>
+            <a:pPr algn="r" a:rtl="1">
+              <a:defRPr sz="1000" b="0">
+                <a:solidFill>
+                  <a:srgbClr val="8C8C8C"/>
+                </a:solidFill>
+                <a:latin typeface="Vazir"/>
+              </a:defRPr>
+            </a:pPr>
+            <a:r>
+              <a:t>پایگاه داده پیشرفته | سید علی زین الدینی</a:t>
+            </a:r>
+          </a:p>
+        </p:txBody>
+      </p:sp>
+      <p:sp>
+        <p:nvSpPr>
+          <p:cNvPr id="7" name="TextBox 6"/>
+          <p:cNvSpPr txBox="1"/>
+          <p:nvPr/>
+        </p:nvSpPr>
+        <p:spPr>
+          <a:xfrm>
+            <a:off x="3657600" y="6446520"/>
+            <a:ext cx="1828800" cy="320040"/>
+          </a:xfrm>
+          <a:prstGeom prst="rect">
+            <a:avLst/>
+          </a:prstGeom>
+          <a:noFill/>
+        </p:spPr>
+        <p:txBody>
+          <a:bodyPr wrap="none">
+            <a:spAutoFit/>
+          </a:bodyPr>
+          <a:lstStyle/>
+          <a:p>
+            <a:pPr algn="ctr" a:rtl="1">
+              <a:defRPr sz="1100" b="1">
+                <a:solidFill>
+                  <a:srgbClr val="6E6E6E"/>
+                </a:solidFill>
+                <a:latin typeface="Vazir"/>
+              </a:defRPr>
+            </a:pPr>
+            <a:r>
+              <a:t>صفحه 33 از 39</a:t>
+            </a:r>
+          </a:p>
+        </p:txBody>
+      </p:sp>
+      <p:sp>
+        <p:nvSpPr>
+          <p:cNvPr id="8" name="TextBox 7"/>
+          <p:cNvSpPr txBox="1"/>
+          <p:nvPr/>
+        </p:nvSpPr>
+        <p:spPr>
+          <a:xfrm>
+            <a:off x="7315200" y="6473952"/>
+            <a:ext cx="1371600" cy="292608"/>
+          </a:xfrm>
+          <a:prstGeom prst="rect">
+            <a:avLst/>
+          </a:prstGeom>
+          <a:noFill/>
+        </p:spPr>
+        <p:txBody>
+          <a:bodyPr wrap="none">
+            <a:spAutoFit/>
+          </a:bodyPr>
+          <a:lstStyle/>
+          <a:p>
+            <a:pPr algn="l" a:rtl="1">
+              <a:defRPr sz="1000" b="0">
+                <a:solidFill>
+                  <a:srgbClr val="8C8C8C"/>
+                </a:solidFill>
+                <a:latin typeface="Vazir"/>
+              </a:defRPr>
+            </a:pPr>
+            <a:r>
+              <a:t>33</a:t>
             </a:r>
           </a:p>
         </p:txBody>
@@ -9288,6 +13503,12 @@
 <file path=ppt/slides/slide34.xml><?xml version="1.0" encoding="utf-8"?>
 <p:sld xmlns:a="http://schemas.openxmlformats.org/drawingml/2006/main" xmlns:p="http://schemas.openxmlformats.org/presentationml/2006/main" xmlns:r="http://schemas.openxmlformats.org/officeDocument/2006/relationships">
   <p:cSld>
+    <p:bg>
+      <p:bgPr>
+        <a:noFill/>
+        <a:effectLst/>
+      </p:bgPr>
+    </p:bg>
     <p:spTree>
       <p:nvGrpSpPr>
         <p:cNvPr id="1" name=""/>
@@ -9326,7 +13547,7 @@
               </a:defRPr>
             </a:pPr>
             <a:r>
-              <a:t>جدول مزایای پارتیشن‌بندی</a:t>
+              <a:t>جدول ۴: مزایای پارتیشن‌بندی</a:t>
             </a:r>
           </a:p>
         </p:txBody>
@@ -9762,6 +13983,157 @@
           </a:graphicData>
         </a:graphic>
       </p:graphicFrame>
+      <p:sp>
+        <p:nvSpPr>
+          <p:cNvPr id="5" name="Rectangle 4"/>
+          <p:cNvSpPr/>
+          <p:nvPr/>
+        </p:nvSpPr>
+        <p:spPr>
+          <a:xfrm>
+            <a:off x="365760" y="6419088"/>
+            <a:ext cx="8412480" cy="13716"/>
+          </a:xfrm>
+          <a:prstGeom prst="rect">
+            <a:avLst/>
+          </a:prstGeom>
+          <a:solidFill>
+            <a:srgbClr val="D2DCE6"/>
+          </a:solidFill>
+          <a:ln>
+            <a:noFill/>
+          </a:ln>
+        </p:spPr>
+        <p:style>
+          <a:lnRef idx="1">
+            <a:schemeClr val="accent1"/>
+          </a:lnRef>
+          <a:fillRef idx="3">
+            <a:schemeClr val="accent1"/>
+          </a:fillRef>
+          <a:effectRef idx="2">
+            <a:schemeClr val="accent1"/>
+          </a:effectRef>
+          <a:fontRef idx="minor">
+            <a:schemeClr val="lt1"/>
+          </a:fontRef>
+        </p:style>
+        <p:txBody>
+          <a:bodyPr rtlCol="0" anchor="ctr"/>
+          <a:lstStyle/>
+          <a:p>
+            <a:pPr algn="ctr"/>
+          </a:p>
+        </p:txBody>
+      </p:sp>
+      <p:sp>
+        <p:nvSpPr>
+          <p:cNvPr id="6" name="TextBox 5"/>
+          <p:cNvSpPr txBox="1"/>
+          <p:nvPr/>
+        </p:nvSpPr>
+        <p:spPr>
+          <a:xfrm>
+            <a:off x="411480" y="6473952"/>
+            <a:ext cx="4114800" cy="292608"/>
+          </a:xfrm>
+          <a:prstGeom prst="rect">
+            <a:avLst/>
+          </a:prstGeom>
+          <a:noFill/>
+        </p:spPr>
+        <p:txBody>
+          <a:bodyPr wrap="none">
+            <a:spAutoFit/>
+          </a:bodyPr>
+          <a:lstStyle/>
+          <a:p>
+            <a:pPr algn="r" a:rtl="1">
+              <a:defRPr sz="1000" b="0">
+                <a:solidFill>
+                  <a:srgbClr val="8C8C8C"/>
+                </a:solidFill>
+                <a:latin typeface="Vazir"/>
+              </a:defRPr>
+            </a:pPr>
+            <a:r>
+              <a:t>پایگاه داده پیشرفته | سید علی زین الدینی</a:t>
+            </a:r>
+          </a:p>
+        </p:txBody>
+      </p:sp>
+      <p:sp>
+        <p:nvSpPr>
+          <p:cNvPr id="7" name="TextBox 6"/>
+          <p:cNvSpPr txBox="1"/>
+          <p:nvPr/>
+        </p:nvSpPr>
+        <p:spPr>
+          <a:xfrm>
+            <a:off x="3657600" y="6446520"/>
+            <a:ext cx="1828800" cy="320040"/>
+          </a:xfrm>
+          <a:prstGeom prst="rect">
+            <a:avLst/>
+          </a:prstGeom>
+          <a:noFill/>
+        </p:spPr>
+        <p:txBody>
+          <a:bodyPr wrap="none">
+            <a:spAutoFit/>
+          </a:bodyPr>
+          <a:lstStyle/>
+          <a:p>
+            <a:pPr algn="ctr" a:rtl="1">
+              <a:defRPr sz="1100" b="1">
+                <a:solidFill>
+                  <a:srgbClr val="6E6E6E"/>
+                </a:solidFill>
+                <a:latin typeface="Vazir"/>
+              </a:defRPr>
+            </a:pPr>
+            <a:r>
+              <a:t>صفحه 34 از 39</a:t>
+            </a:r>
+          </a:p>
+        </p:txBody>
+      </p:sp>
+      <p:sp>
+        <p:nvSpPr>
+          <p:cNvPr id="8" name="TextBox 7"/>
+          <p:cNvSpPr txBox="1"/>
+          <p:nvPr/>
+        </p:nvSpPr>
+        <p:spPr>
+          <a:xfrm>
+            <a:off x="7315200" y="6473952"/>
+            <a:ext cx="1371600" cy="292608"/>
+          </a:xfrm>
+          <a:prstGeom prst="rect">
+            <a:avLst/>
+          </a:prstGeom>
+          <a:noFill/>
+        </p:spPr>
+        <p:txBody>
+          <a:bodyPr wrap="none">
+            <a:spAutoFit/>
+          </a:bodyPr>
+          <a:lstStyle/>
+          <a:p>
+            <a:pPr algn="l" a:rtl="1">
+              <a:defRPr sz="1000" b="0">
+                <a:solidFill>
+                  <a:srgbClr val="8C8C8C"/>
+                </a:solidFill>
+                <a:latin typeface="Vazir"/>
+              </a:defRPr>
+            </a:pPr>
+            <a:r>
+              <a:t>34</a:t>
+            </a:r>
+          </a:p>
+        </p:txBody>
+      </p:sp>
     </p:spTree>
   </p:cSld>
   <p:clrMapOvr>
@@ -9824,6 +14196,157 @@
           </a:p>
         </p:txBody>
       </p:sp>
+      <p:sp>
+        <p:nvSpPr>
+          <p:cNvPr id="3" name="Rectangle 2"/>
+          <p:cNvSpPr/>
+          <p:nvPr/>
+        </p:nvSpPr>
+        <p:spPr>
+          <a:xfrm>
+            <a:off x="365760" y="6419088"/>
+            <a:ext cx="8412480" cy="13716"/>
+          </a:xfrm>
+          <a:prstGeom prst="rect">
+            <a:avLst/>
+          </a:prstGeom>
+          <a:solidFill>
+            <a:srgbClr val="FFFFFF"/>
+          </a:solidFill>
+          <a:ln>
+            <a:noFill/>
+          </a:ln>
+        </p:spPr>
+        <p:style>
+          <a:lnRef idx="1">
+            <a:schemeClr val="accent1"/>
+          </a:lnRef>
+          <a:fillRef idx="3">
+            <a:schemeClr val="accent1"/>
+          </a:fillRef>
+          <a:effectRef idx="2">
+            <a:schemeClr val="accent1"/>
+          </a:effectRef>
+          <a:fontRef idx="minor">
+            <a:schemeClr val="lt1"/>
+          </a:fontRef>
+        </p:style>
+        <p:txBody>
+          <a:bodyPr rtlCol="0" anchor="ctr"/>
+          <a:lstStyle/>
+          <a:p>
+            <a:pPr algn="ctr"/>
+          </a:p>
+        </p:txBody>
+      </p:sp>
+      <p:sp>
+        <p:nvSpPr>
+          <p:cNvPr id="4" name="TextBox 3"/>
+          <p:cNvSpPr txBox="1"/>
+          <p:nvPr/>
+        </p:nvSpPr>
+        <p:spPr>
+          <a:xfrm>
+            <a:off x="411480" y="6473952"/>
+            <a:ext cx="4114800" cy="292608"/>
+          </a:xfrm>
+          <a:prstGeom prst="rect">
+            <a:avLst/>
+          </a:prstGeom>
+          <a:noFill/>
+        </p:spPr>
+        <p:txBody>
+          <a:bodyPr wrap="none">
+            <a:spAutoFit/>
+          </a:bodyPr>
+          <a:lstStyle/>
+          <a:p>
+            <a:pPr algn="r" a:rtl="1">
+              <a:defRPr sz="1000" b="0">
+                <a:solidFill>
+                  <a:srgbClr val="DCDCDC"/>
+                </a:solidFill>
+                <a:latin typeface="Vazir"/>
+              </a:defRPr>
+            </a:pPr>
+            <a:r>
+              <a:t>پایگاه داده پیشرفته | سید علی زین الدینی</a:t>
+            </a:r>
+          </a:p>
+        </p:txBody>
+      </p:sp>
+      <p:sp>
+        <p:nvSpPr>
+          <p:cNvPr id="5" name="TextBox 4"/>
+          <p:cNvSpPr txBox="1"/>
+          <p:nvPr/>
+        </p:nvSpPr>
+        <p:spPr>
+          <a:xfrm>
+            <a:off x="3657600" y="6446520"/>
+            <a:ext cx="1828800" cy="320040"/>
+          </a:xfrm>
+          <a:prstGeom prst="rect">
+            <a:avLst/>
+          </a:prstGeom>
+          <a:noFill/>
+        </p:spPr>
+        <p:txBody>
+          <a:bodyPr wrap="none">
+            <a:spAutoFit/>
+          </a:bodyPr>
+          <a:lstStyle/>
+          <a:p>
+            <a:pPr algn="ctr" a:rtl="1">
+              <a:defRPr sz="1100" b="1">
+                <a:solidFill>
+                  <a:srgbClr val="FFFFFF"/>
+                </a:solidFill>
+                <a:latin typeface="Vazir"/>
+              </a:defRPr>
+            </a:pPr>
+            <a:r>
+              <a:t>صفحه 35 از 39</a:t>
+            </a:r>
+          </a:p>
+        </p:txBody>
+      </p:sp>
+      <p:sp>
+        <p:nvSpPr>
+          <p:cNvPr id="6" name="TextBox 5"/>
+          <p:cNvSpPr txBox="1"/>
+          <p:nvPr/>
+        </p:nvSpPr>
+        <p:spPr>
+          <a:xfrm>
+            <a:off x="7315200" y="6473952"/>
+            <a:ext cx="1371600" cy="292608"/>
+          </a:xfrm>
+          <a:prstGeom prst="rect">
+            <a:avLst/>
+          </a:prstGeom>
+          <a:noFill/>
+        </p:spPr>
+        <p:txBody>
+          <a:bodyPr wrap="none">
+            <a:spAutoFit/>
+          </a:bodyPr>
+          <a:lstStyle/>
+          <a:p>
+            <a:pPr algn="l" a:rtl="1">
+              <a:defRPr sz="1000" b="0">
+                <a:solidFill>
+                  <a:srgbClr val="DCDCDC"/>
+                </a:solidFill>
+                <a:latin typeface="Vazir"/>
+              </a:defRPr>
+            </a:pPr>
+            <a:r>
+              <a:t>35</a:t>
+            </a:r>
+          </a:p>
+        </p:txBody>
+      </p:sp>
     </p:spTree>
   </p:cSld>
   <p:clrMapOvr>
@@ -9835,6 +14358,12 @@
 <file path=ppt/slides/slide36.xml><?xml version="1.0" encoding="utf-8"?>
 <p:sld xmlns:a="http://schemas.openxmlformats.org/drawingml/2006/main" xmlns:p="http://schemas.openxmlformats.org/presentationml/2006/main" xmlns:r="http://schemas.openxmlformats.org/officeDocument/2006/relationships">
   <p:cSld>
+    <p:bg>
+      <p:bgPr>
+        <a:noFill/>
+        <a:effectLst/>
+      </p:bgPr>
+    </p:bg>
     <p:spTree>
       <p:nvGrpSpPr>
         <p:cNvPr id="1" name=""/>
@@ -10036,6 +14565,157 @@
             </a:pPr>
             <a:r>
               <a:t>• پژوهش آینده: سناریوهای صنعتی، multi-tenant cloud و AI workloads.</a:t>
+            </a:r>
+          </a:p>
+        </p:txBody>
+      </p:sp>
+      <p:sp>
+        <p:nvSpPr>
+          <p:cNvPr id="5" name="Rectangle 4"/>
+          <p:cNvSpPr/>
+          <p:nvPr/>
+        </p:nvSpPr>
+        <p:spPr>
+          <a:xfrm>
+            <a:off x="365760" y="6419088"/>
+            <a:ext cx="8412480" cy="13716"/>
+          </a:xfrm>
+          <a:prstGeom prst="rect">
+            <a:avLst/>
+          </a:prstGeom>
+          <a:solidFill>
+            <a:srgbClr val="D2DCE6"/>
+          </a:solidFill>
+          <a:ln>
+            <a:noFill/>
+          </a:ln>
+        </p:spPr>
+        <p:style>
+          <a:lnRef idx="1">
+            <a:schemeClr val="accent1"/>
+          </a:lnRef>
+          <a:fillRef idx="3">
+            <a:schemeClr val="accent1"/>
+          </a:fillRef>
+          <a:effectRef idx="2">
+            <a:schemeClr val="accent1"/>
+          </a:effectRef>
+          <a:fontRef idx="minor">
+            <a:schemeClr val="lt1"/>
+          </a:fontRef>
+        </p:style>
+        <p:txBody>
+          <a:bodyPr rtlCol="0" anchor="ctr"/>
+          <a:lstStyle/>
+          <a:p>
+            <a:pPr algn="ctr"/>
+          </a:p>
+        </p:txBody>
+      </p:sp>
+      <p:sp>
+        <p:nvSpPr>
+          <p:cNvPr id="6" name="TextBox 5"/>
+          <p:cNvSpPr txBox="1"/>
+          <p:nvPr/>
+        </p:nvSpPr>
+        <p:spPr>
+          <a:xfrm>
+            <a:off x="411480" y="6473952"/>
+            <a:ext cx="4114800" cy="292608"/>
+          </a:xfrm>
+          <a:prstGeom prst="rect">
+            <a:avLst/>
+          </a:prstGeom>
+          <a:noFill/>
+        </p:spPr>
+        <p:txBody>
+          <a:bodyPr wrap="none">
+            <a:spAutoFit/>
+          </a:bodyPr>
+          <a:lstStyle/>
+          <a:p>
+            <a:pPr algn="r" a:rtl="1">
+              <a:defRPr sz="1000" b="0">
+                <a:solidFill>
+                  <a:srgbClr val="8C8C8C"/>
+                </a:solidFill>
+                <a:latin typeface="Vazir"/>
+              </a:defRPr>
+            </a:pPr>
+            <a:r>
+              <a:t>پایگاه داده پیشرفته | سید علی زین الدینی</a:t>
+            </a:r>
+          </a:p>
+        </p:txBody>
+      </p:sp>
+      <p:sp>
+        <p:nvSpPr>
+          <p:cNvPr id="7" name="TextBox 6"/>
+          <p:cNvSpPr txBox="1"/>
+          <p:nvPr/>
+        </p:nvSpPr>
+        <p:spPr>
+          <a:xfrm>
+            <a:off x="3657600" y="6446520"/>
+            <a:ext cx="1828800" cy="320040"/>
+          </a:xfrm>
+          <a:prstGeom prst="rect">
+            <a:avLst/>
+          </a:prstGeom>
+          <a:noFill/>
+        </p:spPr>
+        <p:txBody>
+          <a:bodyPr wrap="none">
+            <a:spAutoFit/>
+          </a:bodyPr>
+          <a:lstStyle/>
+          <a:p>
+            <a:pPr algn="ctr" a:rtl="1">
+              <a:defRPr sz="1100" b="1">
+                <a:solidFill>
+                  <a:srgbClr val="6E6E6E"/>
+                </a:solidFill>
+                <a:latin typeface="Vazir"/>
+              </a:defRPr>
+            </a:pPr>
+            <a:r>
+              <a:t>صفحه 36 از 39</a:t>
+            </a:r>
+          </a:p>
+        </p:txBody>
+      </p:sp>
+      <p:sp>
+        <p:nvSpPr>
+          <p:cNvPr id="8" name="TextBox 7"/>
+          <p:cNvSpPr txBox="1"/>
+          <p:nvPr/>
+        </p:nvSpPr>
+        <p:spPr>
+          <a:xfrm>
+            <a:off x="7315200" y="6473952"/>
+            <a:ext cx="1371600" cy="292608"/>
+          </a:xfrm>
+          <a:prstGeom prst="rect">
+            <a:avLst/>
+          </a:prstGeom>
+          <a:noFill/>
+        </p:spPr>
+        <p:txBody>
+          <a:bodyPr wrap="none">
+            <a:spAutoFit/>
+          </a:bodyPr>
+          <a:lstStyle/>
+          <a:p>
+            <a:pPr algn="l" a:rtl="1">
+              <a:defRPr sz="1000" b="0">
+                <a:solidFill>
+                  <a:srgbClr val="8C8C8C"/>
+                </a:solidFill>
+                <a:latin typeface="Vazir"/>
+              </a:defRPr>
+            </a:pPr>
+            <a:r>
+              <a:t>36</a:t>
             </a:r>
           </a:p>
         </p:txBody>
@@ -10051,6 +14731,12 @@
 <file path=ppt/slides/slide37.xml><?xml version="1.0" encoding="utf-8"?>
 <p:sld xmlns:a="http://schemas.openxmlformats.org/drawingml/2006/main" xmlns:p="http://schemas.openxmlformats.org/presentationml/2006/main" xmlns:r="http://schemas.openxmlformats.org/officeDocument/2006/relationships">
   <p:cSld>
+    <p:bg>
+      <p:bgPr>
+        <a:noFill/>
+        <a:effectLst/>
+      </p:bgPr>
+    </p:bg>
     <p:spTree>
       <p:nvGrpSpPr>
         <p:cNvPr id="1" name=""/>
@@ -10252,6 +14938,157 @@
             </a:pPr>
             <a:r>
               <a:t>• Expensive Statement Trace و PlanViz را برای شناسایی bottleneckها به‌کار ببرید.</a:t>
+            </a:r>
+          </a:p>
+        </p:txBody>
+      </p:sp>
+      <p:sp>
+        <p:nvSpPr>
+          <p:cNvPr id="5" name="Rectangle 4"/>
+          <p:cNvSpPr/>
+          <p:nvPr/>
+        </p:nvSpPr>
+        <p:spPr>
+          <a:xfrm>
+            <a:off x="365760" y="6419088"/>
+            <a:ext cx="8412480" cy="13716"/>
+          </a:xfrm>
+          <a:prstGeom prst="rect">
+            <a:avLst/>
+          </a:prstGeom>
+          <a:solidFill>
+            <a:srgbClr val="D2DCE6"/>
+          </a:solidFill>
+          <a:ln>
+            <a:noFill/>
+          </a:ln>
+        </p:spPr>
+        <p:style>
+          <a:lnRef idx="1">
+            <a:schemeClr val="accent1"/>
+          </a:lnRef>
+          <a:fillRef idx="3">
+            <a:schemeClr val="accent1"/>
+          </a:fillRef>
+          <a:effectRef idx="2">
+            <a:schemeClr val="accent1"/>
+          </a:effectRef>
+          <a:fontRef idx="minor">
+            <a:schemeClr val="lt1"/>
+          </a:fontRef>
+        </p:style>
+        <p:txBody>
+          <a:bodyPr rtlCol="0" anchor="ctr"/>
+          <a:lstStyle/>
+          <a:p>
+            <a:pPr algn="ctr"/>
+          </a:p>
+        </p:txBody>
+      </p:sp>
+      <p:sp>
+        <p:nvSpPr>
+          <p:cNvPr id="6" name="TextBox 5"/>
+          <p:cNvSpPr txBox="1"/>
+          <p:nvPr/>
+        </p:nvSpPr>
+        <p:spPr>
+          <a:xfrm>
+            <a:off x="411480" y="6473952"/>
+            <a:ext cx="4114800" cy="292608"/>
+          </a:xfrm>
+          <a:prstGeom prst="rect">
+            <a:avLst/>
+          </a:prstGeom>
+          <a:noFill/>
+        </p:spPr>
+        <p:txBody>
+          <a:bodyPr wrap="none">
+            <a:spAutoFit/>
+          </a:bodyPr>
+          <a:lstStyle/>
+          <a:p>
+            <a:pPr algn="r" a:rtl="1">
+              <a:defRPr sz="1000" b="0">
+                <a:solidFill>
+                  <a:srgbClr val="8C8C8C"/>
+                </a:solidFill>
+                <a:latin typeface="Vazir"/>
+              </a:defRPr>
+            </a:pPr>
+            <a:r>
+              <a:t>پایگاه داده پیشرفته | سید علی زین الدینی</a:t>
+            </a:r>
+          </a:p>
+        </p:txBody>
+      </p:sp>
+      <p:sp>
+        <p:nvSpPr>
+          <p:cNvPr id="7" name="TextBox 6"/>
+          <p:cNvSpPr txBox="1"/>
+          <p:nvPr/>
+        </p:nvSpPr>
+        <p:spPr>
+          <a:xfrm>
+            <a:off x="3657600" y="6446520"/>
+            <a:ext cx="1828800" cy="320040"/>
+          </a:xfrm>
+          <a:prstGeom prst="rect">
+            <a:avLst/>
+          </a:prstGeom>
+          <a:noFill/>
+        </p:spPr>
+        <p:txBody>
+          <a:bodyPr wrap="none">
+            <a:spAutoFit/>
+          </a:bodyPr>
+          <a:lstStyle/>
+          <a:p>
+            <a:pPr algn="ctr" a:rtl="1">
+              <a:defRPr sz="1100" b="1">
+                <a:solidFill>
+                  <a:srgbClr val="6E6E6E"/>
+                </a:solidFill>
+                <a:latin typeface="Vazir"/>
+              </a:defRPr>
+            </a:pPr>
+            <a:r>
+              <a:t>صفحه 37 از 39</a:t>
+            </a:r>
+          </a:p>
+        </p:txBody>
+      </p:sp>
+      <p:sp>
+        <p:nvSpPr>
+          <p:cNvPr id="8" name="TextBox 7"/>
+          <p:cNvSpPr txBox="1"/>
+          <p:nvPr/>
+        </p:nvSpPr>
+        <p:spPr>
+          <a:xfrm>
+            <a:off x="7315200" y="6473952"/>
+            <a:ext cx="1371600" cy="292608"/>
+          </a:xfrm>
+          <a:prstGeom prst="rect">
+            <a:avLst/>
+          </a:prstGeom>
+          <a:noFill/>
+        </p:spPr>
+        <p:txBody>
+          <a:bodyPr wrap="none">
+            <a:spAutoFit/>
+          </a:bodyPr>
+          <a:lstStyle/>
+          <a:p>
+            <a:pPr algn="l" a:rtl="1">
+              <a:defRPr sz="1000" b="0">
+                <a:solidFill>
+                  <a:srgbClr val="8C8C8C"/>
+                </a:solidFill>
+                <a:latin typeface="Vazir"/>
+              </a:defRPr>
+            </a:pPr>
+            <a:r>
+              <a:t>37</a:t>
             </a:r>
           </a:p>
         </p:txBody>
@@ -10267,6 +15104,12 @@
 <file path=ppt/slides/slide38.xml><?xml version="1.0" encoding="utf-8"?>
 <p:sld xmlns:a="http://schemas.openxmlformats.org/drawingml/2006/main" xmlns:p="http://schemas.openxmlformats.org/presentationml/2006/main" xmlns:r="http://schemas.openxmlformats.org/officeDocument/2006/relationships">
   <p:cSld>
+    <p:bg>
+      <p:bgPr>
+        <a:noFill/>
+        <a:effectLst/>
+      </p:bgPr>
+    </p:bg>
     <p:spTree>
       <p:nvGrpSpPr>
         <p:cNvPr id="1" name=""/>
@@ -10468,6 +15311,157 @@
             </a:pPr>
             <a:r>
               <a:t>• DOI: https://doi.org/10.58425/ajt.v4i2.449</a:t>
+            </a:r>
+          </a:p>
+        </p:txBody>
+      </p:sp>
+      <p:sp>
+        <p:nvSpPr>
+          <p:cNvPr id="5" name="Rectangle 4"/>
+          <p:cNvSpPr/>
+          <p:nvPr/>
+        </p:nvSpPr>
+        <p:spPr>
+          <a:xfrm>
+            <a:off x="365760" y="6419088"/>
+            <a:ext cx="8412480" cy="13716"/>
+          </a:xfrm>
+          <a:prstGeom prst="rect">
+            <a:avLst/>
+          </a:prstGeom>
+          <a:solidFill>
+            <a:srgbClr val="D2DCE6"/>
+          </a:solidFill>
+          <a:ln>
+            <a:noFill/>
+          </a:ln>
+        </p:spPr>
+        <p:style>
+          <a:lnRef idx="1">
+            <a:schemeClr val="accent1"/>
+          </a:lnRef>
+          <a:fillRef idx="3">
+            <a:schemeClr val="accent1"/>
+          </a:fillRef>
+          <a:effectRef idx="2">
+            <a:schemeClr val="accent1"/>
+          </a:effectRef>
+          <a:fontRef idx="minor">
+            <a:schemeClr val="lt1"/>
+          </a:fontRef>
+        </p:style>
+        <p:txBody>
+          <a:bodyPr rtlCol="0" anchor="ctr"/>
+          <a:lstStyle/>
+          <a:p>
+            <a:pPr algn="ctr"/>
+          </a:p>
+        </p:txBody>
+      </p:sp>
+      <p:sp>
+        <p:nvSpPr>
+          <p:cNvPr id="6" name="TextBox 5"/>
+          <p:cNvSpPr txBox="1"/>
+          <p:nvPr/>
+        </p:nvSpPr>
+        <p:spPr>
+          <a:xfrm>
+            <a:off x="411480" y="6473952"/>
+            <a:ext cx="4114800" cy="292608"/>
+          </a:xfrm>
+          <a:prstGeom prst="rect">
+            <a:avLst/>
+          </a:prstGeom>
+          <a:noFill/>
+        </p:spPr>
+        <p:txBody>
+          <a:bodyPr wrap="none">
+            <a:spAutoFit/>
+          </a:bodyPr>
+          <a:lstStyle/>
+          <a:p>
+            <a:pPr algn="r" a:rtl="1">
+              <a:defRPr sz="1000" b="0">
+                <a:solidFill>
+                  <a:srgbClr val="8C8C8C"/>
+                </a:solidFill>
+                <a:latin typeface="Vazir"/>
+              </a:defRPr>
+            </a:pPr>
+            <a:r>
+              <a:t>پایگاه داده پیشرفته | سید علی زین الدینی</a:t>
+            </a:r>
+          </a:p>
+        </p:txBody>
+      </p:sp>
+      <p:sp>
+        <p:nvSpPr>
+          <p:cNvPr id="7" name="TextBox 6"/>
+          <p:cNvSpPr txBox="1"/>
+          <p:nvPr/>
+        </p:nvSpPr>
+        <p:spPr>
+          <a:xfrm>
+            <a:off x="3657600" y="6446520"/>
+            <a:ext cx="1828800" cy="320040"/>
+          </a:xfrm>
+          <a:prstGeom prst="rect">
+            <a:avLst/>
+          </a:prstGeom>
+          <a:noFill/>
+        </p:spPr>
+        <p:txBody>
+          <a:bodyPr wrap="none">
+            <a:spAutoFit/>
+          </a:bodyPr>
+          <a:lstStyle/>
+          <a:p>
+            <a:pPr algn="ctr" a:rtl="1">
+              <a:defRPr sz="1100" b="1">
+                <a:solidFill>
+                  <a:srgbClr val="6E6E6E"/>
+                </a:solidFill>
+                <a:latin typeface="Vazir"/>
+              </a:defRPr>
+            </a:pPr>
+            <a:r>
+              <a:t>صفحه 38 از 39</a:t>
+            </a:r>
+          </a:p>
+        </p:txBody>
+      </p:sp>
+      <p:sp>
+        <p:nvSpPr>
+          <p:cNvPr id="8" name="TextBox 7"/>
+          <p:cNvSpPr txBox="1"/>
+          <p:nvPr/>
+        </p:nvSpPr>
+        <p:spPr>
+          <a:xfrm>
+            <a:off x="7315200" y="6473952"/>
+            <a:ext cx="1371600" cy="292608"/>
+          </a:xfrm>
+          <a:prstGeom prst="rect">
+            <a:avLst/>
+          </a:prstGeom>
+          <a:noFill/>
+        </p:spPr>
+        <p:txBody>
+          <a:bodyPr wrap="none">
+            <a:spAutoFit/>
+          </a:bodyPr>
+          <a:lstStyle/>
+          <a:p>
+            <a:pPr algn="l" a:rtl="1">
+              <a:defRPr sz="1000" b="0">
+                <a:solidFill>
+                  <a:srgbClr val="8C8C8C"/>
+                </a:solidFill>
+                <a:latin typeface="Vazir"/>
+              </a:defRPr>
+            </a:pPr>
+            <a:r>
+              <a:t>38</a:t>
             </a:r>
           </a:p>
         </p:txBody>
@@ -10551,6 +15545,157 @@
           </a:p>
         </p:txBody>
       </p:sp>
+      <p:sp>
+        <p:nvSpPr>
+          <p:cNvPr id="3" name="Rectangle 2"/>
+          <p:cNvSpPr/>
+          <p:nvPr/>
+        </p:nvSpPr>
+        <p:spPr>
+          <a:xfrm>
+            <a:off x="365760" y="6419088"/>
+            <a:ext cx="8412480" cy="13716"/>
+          </a:xfrm>
+          <a:prstGeom prst="rect">
+            <a:avLst/>
+          </a:prstGeom>
+          <a:solidFill>
+            <a:srgbClr val="D2DCE6"/>
+          </a:solidFill>
+          <a:ln>
+            <a:noFill/>
+          </a:ln>
+        </p:spPr>
+        <p:style>
+          <a:lnRef idx="1">
+            <a:schemeClr val="accent1"/>
+          </a:lnRef>
+          <a:fillRef idx="3">
+            <a:schemeClr val="accent1"/>
+          </a:fillRef>
+          <a:effectRef idx="2">
+            <a:schemeClr val="accent1"/>
+          </a:effectRef>
+          <a:fontRef idx="minor">
+            <a:schemeClr val="lt1"/>
+          </a:fontRef>
+        </p:style>
+        <p:txBody>
+          <a:bodyPr rtlCol="0" anchor="ctr"/>
+          <a:lstStyle/>
+          <a:p>
+            <a:pPr algn="ctr"/>
+          </a:p>
+        </p:txBody>
+      </p:sp>
+      <p:sp>
+        <p:nvSpPr>
+          <p:cNvPr id="4" name="TextBox 3"/>
+          <p:cNvSpPr txBox="1"/>
+          <p:nvPr/>
+        </p:nvSpPr>
+        <p:spPr>
+          <a:xfrm>
+            <a:off x="411480" y="6473952"/>
+            <a:ext cx="4114800" cy="292608"/>
+          </a:xfrm>
+          <a:prstGeom prst="rect">
+            <a:avLst/>
+          </a:prstGeom>
+          <a:noFill/>
+        </p:spPr>
+        <p:txBody>
+          <a:bodyPr wrap="none">
+            <a:spAutoFit/>
+          </a:bodyPr>
+          <a:lstStyle/>
+          <a:p>
+            <a:pPr algn="r" a:rtl="1">
+              <a:defRPr sz="1000" b="0">
+                <a:solidFill>
+                  <a:srgbClr val="8C8C8C"/>
+                </a:solidFill>
+                <a:latin typeface="Vazir"/>
+              </a:defRPr>
+            </a:pPr>
+            <a:r>
+              <a:t>پایگاه داده پیشرفته | سید علی زین الدینی</a:t>
+            </a:r>
+          </a:p>
+        </p:txBody>
+      </p:sp>
+      <p:sp>
+        <p:nvSpPr>
+          <p:cNvPr id="5" name="TextBox 4"/>
+          <p:cNvSpPr txBox="1"/>
+          <p:nvPr/>
+        </p:nvSpPr>
+        <p:spPr>
+          <a:xfrm>
+            <a:off x="3657600" y="6446520"/>
+            <a:ext cx="1828800" cy="320040"/>
+          </a:xfrm>
+          <a:prstGeom prst="rect">
+            <a:avLst/>
+          </a:prstGeom>
+          <a:noFill/>
+        </p:spPr>
+        <p:txBody>
+          <a:bodyPr wrap="none">
+            <a:spAutoFit/>
+          </a:bodyPr>
+          <a:lstStyle/>
+          <a:p>
+            <a:pPr algn="ctr" a:rtl="1">
+              <a:defRPr sz="1100" b="1">
+                <a:solidFill>
+                  <a:srgbClr val="6E6E6E"/>
+                </a:solidFill>
+                <a:latin typeface="Vazir"/>
+              </a:defRPr>
+            </a:pPr>
+            <a:r>
+              <a:t>صفحه 39 از 39</a:t>
+            </a:r>
+          </a:p>
+        </p:txBody>
+      </p:sp>
+      <p:sp>
+        <p:nvSpPr>
+          <p:cNvPr id="6" name="TextBox 5"/>
+          <p:cNvSpPr txBox="1"/>
+          <p:nvPr/>
+        </p:nvSpPr>
+        <p:spPr>
+          <a:xfrm>
+            <a:off x="7315200" y="6473952"/>
+            <a:ext cx="1371600" cy="292608"/>
+          </a:xfrm>
+          <a:prstGeom prst="rect">
+            <a:avLst/>
+          </a:prstGeom>
+          <a:noFill/>
+        </p:spPr>
+        <p:txBody>
+          <a:bodyPr wrap="none">
+            <a:spAutoFit/>
+          </a:bodyPr>
+          <a:lstStyle/>
+          <a:p>
+            <a:pPr algn="l" a:rtl="1">
+              <a:defRPr sz="1000" b="0">
+                <a:solidFill>
+                  <a:srgbClr val="8C8C8C"/>
+                </a:solidFill>
+                <a:latin typeface="Vazir"/>
+              </a:defRPr>
+            </a:pPr>
+            <a:r>
+              <a:t>39</a:t>
+            </a:r>
+          </a:p>
+        </p:txBody>
+      </p:sp>
     </p:spTree>
   </p:cSld>
   <p:clrMapOvr>
@@ -10613,6 +15758,157 @@
           </a:p>
         </p:txBody>
       </p:sp>
+      <p:sp>
+        <p:nvSpPr>
+          <p:cNvPr id="3" name="Rectangle 2"/>
+          <p:cNvSpPr/>
+          <p:nvPr/>
+        </p:nvSpPr>
+        <p:spPr>
+          <a:xfrm>
+            <a:off x="365760" y="6419088"/>
+            <a:ext cx="8412480" cy="13716"/>
+          </a:xfrm>
+          <a:prstGeom prst="rect">
+            <a:avLst/>
+          </a:prstGeom>
+          <a:solidFill>
+            <a:srgbClr val="FFFFFF"/>
+          </a:solidFill>
+          <a:ln>
+            <a:noFill/>
+          </a:ln>
+        </p:spPr>
+        <p:style>
+          <a:lnRef idx="1">
+            <a:schemeClr val="accent1"/>
+          </a:lnRef>
+          <a:fillRef idx="3">
+            <a:schemeClr val="accent1"/>
+          </a:fillRef>
+          <a:effectRef idx="2">
+            <a:schemeClr val="accent1"/>
+          </a:effectRef>
+          <a:fontRef idx="minor">
+            <a:schemeClr val="lt1"/>
+          </a:fontRef>
+        </p:style>
+        <p:txBody>
+          <a:bodyPr rtlCol="0" anchor="ctr"/>
+          <a:lstStyle/>
+          <a:p>
+            <a:pPr algn="ctr"/>
+          </a:p>
+        </p:txBody>
+      </p:sp>
+      <p:sp>
+        <p:nvSpPr>
+          <p:cNvPr id="4" name="TextBox 3"/>
+          <p:cNvSpPr txBox="1"/>
+          <p:nvPr/>
+        </p:nvSpPr>
+        <p:spPr>
+          <a:xfrm>
+            <a:off x="411480" y="6473952"/>
+            <a:ext cx="4114800" cy="292608"/>
+          </a:xfrm>
+          <a:prstGeom prst="rect">
+            <a:avLst/>
+          </a:prstGeom>
+          <a:noFill/>
+        </p:spPr>
+        <p:txBody>
+          <a:bodyPr wrap="none">
+            <a:spAutoFit/>
+          </a:bodyPr>
+          <a:lstStyle/>
+          <a:p>
+            <a:pPr algn="r" a:rtl="1">
+              <a:defRPr sz="1000" b="0">
+                <a:solidFill>
+                  <a:srgbClr val="DCDCDC"/>
+                </a:solidFill>
+                <a:latin typeface="Vazir"/>
+              </a:defRPr>
+            </a:pPr>
+            <a:r>
+              <a:t>پایگاه داده پیشرفته | سید علی زین الدینی</a:t>
+            </a:r>
+          </a:p>
+        </p:txBody>
+      </p:sp>
+      <p:sp>
+        <p:nvSpPr>
+          <p:cNvPr id="5" name="TextBox 4"/>
+          <p:cNvSpPr txBox="1"/>
+          <p:nvPr/>
+        </p:nvSpPr>
+        <p:spPr>
+          <a:xfrm>
+            <a:off x="3657600" y="6446520"/>
+            <a:ext cx="1828800" cy="320040"/>
+          </a:xfrm>
+          <a:prstGeom prst="rect">
+            <a:avLst/>
+          </a:prstGeom>
+          <a:noFill/>
+        </p:spPr>
+        <p:txBody>
+          <a:bodyPr wrap="none">
+            <a:spAutoFit/>
+          </a:bodyPr>
+          <a:lstStyle/>
+          <a:p>
+            <a:pPr algn="ctr" a:rtl="1">
+              <a:defRPr sz="1100" b="1">
+                <a:solidFill>
+                  <a:srgbClr val="FFFFFF"/>
+                </a:solidFill>
+                <a:latin typeface="Vazir"/>
+              </a:defRPr>
+            </a:pPr>
+            <a:r>
+              <a:t>صفحه 4 از 39</a:t>
+            </a:r>
+          </a:p>
+        </p:txBody>
+      </p:sp>
+      <p:sp>
+        <p:nvSpPr>
+          <p:cNvPr id="6" name="TextBox 5"/>
+          <p:cNvSpPr txBox="1"/>
+          <p:nvPr/>
+        </p:nvSpPr>
+        <p:spPr>
+          <a:xfrm>
+            <a:off x="7315200" y="6473952"/>
+            <a:ext cx="1371600" cy="292608"/>
+          </a:xfrm>
+          <a:prstGeom prst="rect">
+            <a:avLst/>
+          </a:prstGeom>
+          <a:noFill/>
+        </p:spPr>
+        <p:txBody>
+          <a:bodyPr wrap="none">
+            <a:spAutoFit/>
+          </a:bodyPr>
+          <a:lstStyle/>
+          <a:p>
+            <a:pPr algn="l" a:rtl="1">
+              <a:defRPr sz="1000" b="0">
+                <a:solidFill>
+                  <a:srgbClr val="DCDCDC"/>
+                </a:solidFill>
+                <a:latin typeface="Vazir"/>
+              </a:defRPr>
+            </a:pPr>
+            <a:r>
+              <a:t>4</a:t>
+            </a:r>
+          </a:p>
+        </p:txBody>
+      </p:sp>
     </p:spTree>
   </p:cSld>
   <p:clrMapOvr>
@@ -10624,6 +15920,12 @@
 <file path=ppt/slides/slide5.xml><?xml version="1.0" encoding="utf-8"?>
 <p:sld xmlns:a="http://schemas.openxmlformats.org/drawingml/2006/main" xmlns:p="http://schemas.openxmlformats.org/presentationml/2006/main" xmlns:r="http://schemas.openxmlformats.org/officeDocument/2006/relationships">
   <p:cSld>
+    <p:bg>
+      <p:bgPr>
+        <a:noFill/>
+        <a:effectLst/>
+      </p:bgPr>
+    </p:bg>
     <p:spTree>
       <p:nvGrpSpPr>
         <p:cNvPr id="1" name=""/>
@@ -10837,6 +16139,157 @@
           </a:prstGeom>
         </p:spPr>
       </p:pic>
+      <p:sp>
+        <p:nvSpPr>
+          <p:cNvPr id="6" name="Rectangle 5"/>
+          <p:cNvSpPr/>
+          <p:nvPr/>
+        </p:nvSpPr>
+        <p:spPr>
+          <a:xfrm>
+            <a:off x="365760" y="6419088"/>
+            <a:ext cx="8412480" cy="13716"/>
+          </a:xfrm>
+          <a:prstGeom prst="rect">
+            <a:avLst/>
+          </a:prstGeom>
+          <a:solidFill>
+            <a:srgbClr val="D2DCE6"/>
+          </a:solidFill>
+          <a:ln>
+            <a:noFill/>
+          </a:ln>
+        </p:spPr>
+        <p:style>
+          <a:lnRef idx="1">
+            <a:schemeClr val="accent1"/>
+          </a:lnRef>
+          <a:fillRef idx="3">
+            <a:schemeClr val="accent1"/>
+          </a:fillRef>
+          <a:effectRef idx="2">
+            <a:schemeClr val="accent1"/>
+          </a:effectRef>
+          <a:fontRef idx="minor">
+            <a:schemeClr val="lt1"/>
+          </a:fontRef>
+        </p:style>
+        <p:txBody>
+          <a:bodyPr rtlCol="0" anchor="ctr"/>
+          <a:lstStyle/>
+          <a:p>
+            <a:pPr algn="ctr"/>
+          </a:p>
+        </p:txBody>
+      </p:sp>
+      <p:sp>
+        <p:nvSpPr>
+          <p:cNvPr id="7" name="TextBox 6"/>
+          <p:cNvSpPr txBox="1"/>
+          <p:nvPr/>
+        </p:nvSpPr>
+        <p:spPr>
+          <a:xfrm>
+            <a:off x="411480" y="6473952"/>
+            <a:ext cx="4114800" cy="292608"/>
+          </a:xfrm>
+          <a:prstGeom prst="rect">
+            <a:avLst/>
+          </a:prstGeom>
+          <a:noFill/>
+        </p:spPr>
+        <p:txBody>
+          <a:bodyPr wrap="none">
+            <a:spAutoFit/>
+          </a:bodyPr>
+          <a:lstStyle/>
+          <a:p>
+            <a:pPr algn="r" a:rtl="1">
+              <a:defRPr sz="1000" b="0">
+                <a:solidFill>
+                  <a:srgbClr val="8C8C8C"/>
+                </a:solidFill>
+                <a:latin typeface="Vazir"/>
+              </a:defRPr>
+            </a:pPr>
+            <a:r>
+              <a:t>پایگاه داده پیشرفته | سید علی زین الدینی</a:t>
+            </a:r>
+          </a:p>
+        </p:txBody>
+      </p:sp>
+      <p:sp>
+        <p:nvSpPr>
+          <p:cNvPr id="8" name="TextBox 7"/>
+          <p:cNvSpPr txBox="1"/>
+          <p:nvPr/>
+        </p:nvSpPr>
+        <p:spPr>
+          <a:xfrm>
+            <a:off x="3657600" y="6446520"/>
+            <a:ext cx="1828800" cy="320040"/>
+          </a:xfrm>
+          <a:prstGeom prst="rect">
+            <a:avLst/>
+          </a:prstGeom>
+          <a:noFill/>
+        </p:spPr>
+        <p:txBody>
+          <a:bodyPr wrap="none">
+            <a:spAutoFit/>
+          </a:bodyPr>
+          <a:lstStyle/>
+          <a:p>
+            <a:pPr algn="ctr" a:rtl="1">
+              <a:defRPr sz="1100" b="1">
+                <a:solidFill>
+                  <a:srgbClr val="6E6E6E"/>
+                </a:solidFill>
+                <a:latin typeface="Vazir"/>
+              </a:defRPr>
+            </a:pPr>
+            <a:r>
+              <a:t>صفحه 5 از 39</a:t>
+            </a:r>
+          </a:p>
+        </p:txBody>
+      </p:sp>
+      <p:sp>
+        <p:nvSpPr>
+          <p:cNvPr id="9" name="TextBox 8"/>
+          <p:cNvSpPr txBox="1"/>
+          <p:nvPr/>
+        </p:nvSpPr>
+        <p:spPr>
+          <a:xfrm>
+            <a:off x="7315200" y="6473952"/>
+            <a:ext cx="1371600" cy="292608"/>
+          </a:xfrm>
+          <a:prstGeom prst="rect">
+            <a:avLst/>
+          </a:prstGeom>
+          <a:noFill/>
+        </p:spPr>
+        <p:txBody>
+          <a:bodyPr wrap="none">
+            <a:spAutoFit/>
+          </a:bodyPr>
+          <a:lstStyle/>
+          <a:p>
+            <a:pPr algn="l" a:rtl="1">
+              <a:defRPr sz="1000" b="0">
+                <a:solidFill>
+                  <a:srgbClr val="8C8C8C"/>
+                </a:solidFill>
+                <a:latin typeface="Vazir"/>
+              </a:defRPr>
+            </a:pPr>
+            <a:r>
+              <a:t>5</a:t>
+            </a:r>
+          </a:p>
+        </p:txBody>
+      </p:sp>
     </p:spTree>
   </p:cSld>
   <p:clrMapOvr>
@@ -10848,6 +16301,12 @@
 <file path=ppt/slides/slide6.xml><?xml version="1.0" encoding="utf-8"?>
 <p:sld xmlns:a="http://schemas.openxmlformats.org/drawingml/2006/main" xmlns:p="http://schemas.openxmlformats.org/presentationml/2006/main" xmlns:r="http://schemas.openxmlformats.org/officeDocument/2006/relationships">
   <p:cSld>
+    <p:bg>
+      <p:bgPr>
+        <a:noFill/>
+        <a:effectLst/>
+      </p:bgPr>
+    </p:bg>
     <p:spTree>
       <p:nvGrpSpPr>
         <p:cNvPr id="1" name=""/>
@@ -10990,6 +16449,157 @@
             </a:pPr>
             <a:r>
               <a:t>شکل ۱: لایه‌های اصلی معماری In-Memory SAP S/4HANA</a:t>
+            </a:r>
+          </a:p>
+        </p:txBody>
+      </p:sp>
+      <p:sp>
+        <p:nvSpPr>
+          <p:cNvPr id="6" name="Rectangle 5"/>
+          <p:cNvSpPr/>
+          <p:nvPr/>
+        </p:nvSpPr>
+        <p:spPr>
+          <a:xfrm>
+            <a:off x="365760" y="6419088"/>
+            <a:ext cx="8412480" cy="13716"/>
+          </a:xfrm>
+          <a:prstGeom prst="rect">
+            <a:avLst/>
+          </a:prstGeom>
+          <a:solidFill>
+            <a:srgbClr val="D2DCE6"/>
+          </a:solidFill>
+          <a:ln>
+            <a:noFill/>
+          </a:ln>
+        </p:spPr>
+        <p:style>
+          <a:lnRef idx="1">
+            <a:schemeClr val="accent1"/>
+          </a:lnRef>
+          <a:fillRef idx="3">
+            <a:schemeClr val="accent1"/>
+          </a:fillRef>
+          <a:effectRef idx="2">
+            <a:schemeClr val="accent1"/>
+          </a:effectRef>
+          <a:fontRef idx="minor">
+            <a:schemeClr val="lt1"/>
+          </a:fontRef>
+        </p:style>
+        <p:txBody>
+          <a:bodyPr rtlCol="0" anchor="ctr"/>
+          <a:lstStyle/>
+          <a:p>
+            <a:pPr algn="ctr"/>
+          </a:p>
+        </p:txBody>
+      </p:sp>
+      <p:sp>
+        <p:nvSpPr>
+          <p:cNvPr id="7" name="TextBox 6"/>
+          <p:cNvSpPr txBox="1"/>
+          <p:nvPr/>
+        </p:nvSpPr>
+        <p:spPr>
+          <a:xfrm>
+            <a:off x="411480" y="6473952"/>
+            <a:ext cx="4114800" cy="292608"/>
+          </a:xfrm>
+          <a:prstGeom prst="rect">
+            <a:avLst/>
+          </a:prstGeom>
+          <a:noFill/>
+        </p:spPr>
+        <p:txBody>
+          <a:bodyPr wrap="none">
+            <a:spAutoFit/>
+          </a:bodyPr>
+          <a:lstStyle/>
+          <a:p>
+            <a:pPr algn="r" a:rtl="1">
+              <a:defRPr sz="1000" b="0">
+                <a:solidFill>
+                  <a:srgbClr val="8C8C8C"/>
+                </a:solidFill>
+                <a:latin typeface="Vazir"/>
+              </a:defRPr>
+            </a:pPr>
+            <a:r>
+              <a:t>پایگاه داده پیشرفته | سید علی زین الدینی</a:t>
+            </a:r>
+          </a:p>
+        </p:txBody>
+      </p:sp>
+      <p:sp>
+        <p:nvSpPr>
+          <p:cNvPr id="8" name="TextBox 7"/>
+          <p:cNvSpPr txBox="1"/>
+          <p:nvPr/>
+        </p:nvSpPr>
+        <p:spPr>
+          <a:xfrm>
+            <a:off x="3657600" y="6446520"/>
+            <a:ext cx="1828800" cy="320040"/>
+          </a:xfrm>
+          <a:prstGeom prst="rect">
+            <a:avLst/>
+          </a:prstGeom>
+          <a:noFill/>
+        </p:spPr>
+        <p:txBody>
+          <a:bodyPr wrap="none">
+            <a:spAutoFit/>
+          </a:bodyPr>
+          <a:lstStyle/>
+          <a:p>
+            <a:pPr algn="ctr" a:rtl="1">
+              <a:defRPr sz="1100" b="1">
+                <a:solidFill>
+                  <a:srgbClr val="6E6E6E"/>
+                </a:solidFill>
+                <a:latin typeface="Vazir"/>
+              </a:defRPr>
+            </a:pPr>
+            <a:r>
+              <a:t>صفحه 6 از 39</a:t>
+            </a:r>
+          </a:p>
+        </p:txBody>
+      </p:sp>
+      <p:sp>
+        <p:nvSpPr>
+          <p:cNvPr id="9" name="TextBox 8"/>
+          <p:cNvSpPr txBox="1"/>
+          <p:nvPr/>
+        </p:nvSpPr>
+        <p:spPr>
+          <a:xfrm>
+            <a:off x="7315200" y="6473952"/>
+            <a:ext cx="1371600" cy="292608"/>
+          </a:xfrm>
+          <a:prstGeom prst="rect">
+            <a:avLst/>
+          </a:prstGeom>
+          <a:noFill/>
+        </p:spPr>
+        <p:txBody>
+          <a:bodyPr wrap="none">
+            <a:spAutoFit/>
+          </a:bodyPr>
+          <a:lstStyle/>
+          <a:p>
+            <a:pPr algn="l" a:rtl="1">
+              <a:defRPr sz="1000" b="0">
+                <a:solidFill>
+                  <a:srgbClr val="8C8C8C"/>
+                </a:solidFill>
+                <a:latin typeface="Vazir"/>
+              </a:defRPr>
+            </a:pPr>
+            <a:r>
+              <a:t>6</a:t>
             </a:r>
           </a:p>
         </p:txBody>
@@ -11005,6 +16615,12 @@
 <file path=ppt/slides/slide7.xml><?xml version="1.0" encoding="utf-8"?>
 <p:sld xmlns:a="http://schemas.openxmlformats.org/drawingml/2006/main" xmlns:p="http://schemas.openxmlformats.org/presentationml/2006/main" xmlns:r="http://schemas.openxmlformats.org/officeDocument/2006/relationships">
   <p:cSld>
+    <p:bg>
+      <p:bgPr>
+        <a:noFill/>
+        <a:effectLst/>
+      </p:bgPr>
+    </p:bg>
     <p:spTree>
       <p:nvGrpSpPr>
         <p:cNvPr id="1" name=""/>
@@ -11222,6 +16838,157 @@
             </a:pPr>
             <a:r>
               <a:t>• Persistence Layer: logging، recovery و ذخیره‌سازی پایدار برای جلوگیری از از دست رفتن داده.</a:t>
+            </a:r>
+          </a:p>
+        </p:txBody>
+      </p:sp>
+      <p:sp>
+        <p:nvSpPr>
+          <p:cNvPr id="5" name="Rectangle 4"/>
+          <p:cNvSpPr/>
+          <p:nvPr/>
+        </p:nvSpPr>
+        <p:spPr>
+          <a:xfrm>
+            <a:off x="365760" y="6419088"/>
+            <a:ext cx="8412480" cy="13716"/>
+          </a:xfrm>
+          <a:prstGeom prst="rect">
+            <a:avLst/>
+          </a:prstGeom>
+          <a:solidFill>
+            <a:srgbClr val="D2DCE6"/>
+          </a:solidFill>
+          <a:ln>
+            <a:noFill/>
+          </a:ln>
+        </p:spPr>
+        <p:style>
+          <a:lnRef idx="1">
+            <a:schemeClr val="accent1"/>
+          </a:lnRef>
+          <a:fillRef idx="3">
+            <a:schemeClr val="accent1"/>
+          </a:fillRef>
+          <a:effectRef idx="2">
+            <a:schemeClr val="accent1"/>
+          </a:effectRef>
+          <a:fontRef idx="minor">
+            <a:schemeClr val="lt1"/>
+          </a:fontRef>
+        </p:style>
+        <p:txBody>
+          <a:bodyPr rtlCol="0" anchor="ctr"/>
+          <a:lstStyle/>
+          <a:p>
+            <a:pPr algn="ctr"/>
+          </a:p>
+        </p:txBody>
+      </p:sp>
+      <p:sp>
+        <p:nvSpPr>
+          <p:cNvPr id="6" name="TextBox 5"/>
+          <p:cNvSpPr txBox="1"/>
+          <p:nvPr/>
+        </p:nvSpPr>
+        <p:spPr>
+          <a:xfrm>
+            <a:off x="411480" y="6473952"/>
+            <a:ext cx="4114800" cy="292608"/>
+          </a:xfrm>
+          <a:prstGeom prst="rect">
+            <a:avLst/>
+          </a:prstGeom>
+          <a:noFill/>
+        </p:spPr>
+        <p:txBody>
+          <a:bodyPr wrap="none">
+            <a:spAutoFit/>
+          </a:bodyPr>
+          <a:lstStyle/>
+          <a:p>
+            <a:pPr algn="r" a:rtl="1">
+              <a:defRPr sz="1000" b="0">
+                <a:solidFill>
+                  <a:srgbClr val="8C8C8C"/>
+                </a:solidFill>
+                <a:latin typeface="Vazir"/>
+              </a:defRPr>
+            </a:pPr>
+            <a:r>
+              <a:t>پایگاه داده پیشرفته | سید علی زین الدینی</a:t>
+            </a:r>
+          </a:p>
+        </p:txBody>
+      </p:sp>
+      <p:sp>
+        <p:nvSpPr>
+          <p:cNvPr id="7" name="TextBox 6"/>
+          <p:cNvSpPr txBox="1"/>
+          <p:nvPr/>
+        </p:nvSpPr>
+        <p:spPr>
+          <a:xfrm>
+            <a:off x="3657600" y="6446520"/>
+            <a:ext cx="1828800" cy="320040"/>
+          </a:xfrm>
+          <a:prstGeom prst="rect">
+            <a:avLst/>
+          </a:prstGeom>
+          <a:noFill/>
+        </p:spPr>
+        <p:txBody>
+          <a:bodyPr wrap="none">
+            <a:spAutoFit/>
+          </a:bodyPr>
+          <a:lstStyle/>
+          <a:p>
+            <a:pPr algn="ctr" a:rtl="1">
+              <a:defRPr sz="1100" b="1">
+                <a:solidFill>
+                  <a:srgbClr val="6E6E6E"/>
+                </a:solidFill>
+                <a:latin typeface="Vazir"/>
+              </a:defRPr>
+            </a:pPr>
+            <a:r>
+              <a:t>صفحه 7 از 39</a:t>
+            </a:r>
+          </a:p>
+        </p:txBody>
+      </p:sp>
+      <p:sp>
+        <p:nvSpPr>
+          <p:cNvPr id="8" name="TextBox 7"/>
+          <p:cNvSpPr txBox="1"/>
+          <p:nvPr/>
+        </p:nvSpPr>
+        <p:spPr>
+          <a:xfrm>
+            <a:off x="7315200" y="6473952"/>
+            <a:ext cx="1371600" cy="292608"/>
+          </a:xfrm>
+          <a:prstGeom prst="rect">
+            <a:avLst/>
+          </a:prstGeom>
+          <a:noFill/>
+        </p:spPr>
+        <p:txBody>
+          <a:bodyPr wrap="none">
+            <a:spAutoFit/>
+          </a:bodyPr>
+          <a:lstStyle/>
+          <a:p>
+            <a:pPr algn="l" a:rtl="1">
+              <a:defRPr sz="1000" b="0">
+                <a:solidFill>
+                  <a:srgbClr val="8C8C8C"/>
+                </a:solidFill>
+                <a:latin typeface="Vazir"/>
+              </a:defRPr>
+            </a:pPr>
+            <a:r>
+              <a:t>7</a:t>
             </a:r>
           </a:p>
         </p:txBody>
@@ -11288,6 +17055,157 @@
           </a:p>
         </p:txBody>
       </p:sp>
+      <p:sp>
+        <p:nvSpPr>
+          <p:cNvPr id="3" name="Rectangle 2"/>
+          <p:cNvSpPr/>
+          <p:nvPr/>
+        </p:nvSpPr>
+        <p:spPr>
+          <a:xfrm>
+            <a:off x="365760" y="6419088"/>
+            <a:ext cx="8412480" cy="13716"/>
+          </a:xfrm>
+          <a:prstGeom prst="rect">
+            <a:avLst/>
+          </a:prstGeom>
+          <a:solidFill>
+            <a:srgbClr val="FFFFFF"/>
+          </a:solidFill>
+          <a:ln>
+            <a:noFill/>
+          </a:ln>
+        </p:spPr>
+        <p:style>
+          <a:lnRef idx="1">
+            <a:schemeClr val="accent1"/>
+          </a:lnRef>
+          <a:fillRef idx="3">
+            <a:schemeClr val="accent1"/>
+          </a:fillRef>
+          <a:effectRef idx="2">
+            <a:schemeClr val="accent1"/>
+          </a:effectRef>
+          <a:fontRef idx="minor">
+            <a:schemeClr val="lt1"/>
+          </a:fontRef>
+        </p:style>
+        <p:txBody>
+          <a:bodyPr rtlCol="0" anchor="ctr"/>
+          <a:lstStyle/>
+          <a:p>
+            <a:pPr algn="ctr"/>
+          </a:p>
+        </p:txBody>
+      </p:sp>
+      <p:sp>
+        <p:nvSpPr>
+          <p:cNvPr id="4" name="TextBox 3"/>
+          <p:cNvSpPr txBox="1"/>
+          <p:nvPr/>
+        </p:nvSpPr>
+        <p:spPr>
+          <a:xfrm>
+            <a:off x="411480" y="6473952"/>
+            <a:ext cx="4114800" cy="292608"/>
+          </a:xfrm>
+          <a:prstGeom prst="rect">
+            <a:avLst/>
+          </a:prstGeom>
+          <a:noFill/>
+        </p:spPr>
+        <p:txBody>
+          <a:bodyPr wrap="none">
+            <a:spAutoFit/>
+          </a:bodyPr>
+          <a:lstStyle/>
+          <a:p>
+            <a:pPr algn="r" a:rtl="1">
+              <a:defRPr sz="1000" b="0">
+                <a:solidFill>
+                  <a:srgbClr val="DCDCDC"/>
+                </a:solidFill>
+                <a:latin typeface="Vazir"/>
+              </a:defRPr>
+            </a:pPr>
+            <a:r>
+              <a:t>پایگاه داده پیشرفته | سید علی زین الدینی</a:t>
+            </a:r>
+          </a:p>
+        </p:txBody>
+      </p:sp>
+      <p:sp>
+        <p:nvSpPr>
+          <p:cNvPr id="5" name="TextBox 4"/>
+          <p:cNvSpPr txBox="1"/>
+          <p:nvPr/>
+        </p:nvSpPr>
+        <p:spPr>
+          <a:xfrm>
+            <a:off x="3657600" y="6446520"/>
+            <a:ext cx="1828800" cy="320040"/>
+          </a:xfrm>
+          <a:prstGeom prst="rect">
+            <a:avLst/>
+          </a:prstGeom>
+          <a:noFill/>
+        </p:spPr>
+        <p:txBody>
+          <a:bodyPr wrap="none">
+            <a:spAutoFit/>
+          </a:bodyPr>
+          <a:lstStyle/>
+          <a:p>
+            <a:pPr algn="ctr" a:rtl="1">
+              <a:defRPr sz="1100" b="1">
+                <a:solidFill>
+                  <a:srgbClr val="FFFFFF"/>
+                </a:solidFill>
+                <a:latin typeface="Vazir"/>
+              </a:defRPr>
+            </a:pPr>
+            <a:r>
+              <a:t>صفحه 8 از 39</a:t>
+            </a:r>
+          </a:p>
+        </p:txBody>
+      </p:sp>
+      <p:sp>
+        <p:nvSpPr>
+          <p:cNvPr id="6" name="TextBox 5"/>
+          <p:cNvSpPr txBox="1"/>
+          <p:nvPr/>
+        </p:nvSpPr>
+        <p:spPr>
+          <a:xfrm>
+            <a:off x="7315200" y="6473952"/>
+            <a:ext cx="1371600" cy="292608"/>
+          </a:xfrm>
+          <a:prstGeom prst="rect">
+            <a:avLst/>
+          </a:prstGeom>
+          <a:noFill/>
+        </p:spPr>
+        <p:txBody>
+          <a:bodyPr wrap="none">
+            <a:spAutoFit/>
+          </a:bodyPr>
+          <a:lstStyle/>
+          <a:p>
+            <a:pPr algn="l" a:rtl="1">
+              <a:defRPr sz="1000" b="0">
+                <a:solidFill>
+                  <a:srgbClr val="DCDCDC"/>
+                </a:solidFill>
+                <a:latin typeface="Vazir"/>
+              </a:defRPr>
+            </a:pPr>
+            <a:r>
+              <a:t>8</a:t>
+            </a:r>
+          </a:p>
+        </p:txBody>
+      </p:sp>
     </p:spTree>
   </p:cSld>
   <p:clrMapOvr>
@@ -11299,6 +17217,12 @@
 <file path=ppt/slides/slide9.xml><?xml version="1.0" encoding="utf-8"?>
 <p:sld xmlns:a="http://schemas.openxmlformats.org/drawingml/2006/main" xmlns:p="http://schemas.openxmlformats.org/presentationml/2006/main" xmlns:r="http://schemas.openxmlformats.org/officeDocument/2006/relationships">
   <p:cSld>
+    <p:bg>
+      <p:bgPr>
+        <a:noFill/>
+        <a:effectLst/>
+      </p:bgPr>
+    </p:bg>
     <p:spTree>
       <p:nvGrpSpPr>
         <p:cNvPr id="1" name=""/>
@@ -11484,6 +17408,157 @@
             </a:pPr>
             <a:r>
               <a:t>• Jain (n.d.): بهینه‌سازی indexing و partitioning برای workloadهای حجیم.</a:t>
+            </a:r>
+          </a:p>
+        </p:txBody>
+      </p:sp>
+      <p:sp>
+        <p:nvSpPr>
+          <p:cNvPr id="5" name="Rectangle 4"/>
+          <p:cNvSpPr/>
+          <p:nvPr/>
+        </p:nvSpPr>
+        <p:spPr>
+          <a:xfrm>
+            <a:off x="365760" y="6419088"/>
+            <a:ext cx="8412480" cy="13716"/>
+          </a:xfrm>
+          <a:prstGeom prst="rect">
+            <a:avLst/>
+          </a:prstGeom>
+          <a:solidFill>
+            <a:srgbClr val="D2DCE6"/>
+          </a:solidFill>
+          <a:ln>
+            <a:noFill/>
+          </a:ln>
+        </p:spPr>
+        <p:style>
+          <a:lnRef idx="1">
+            <a:schemeClr val="accent1"/>
+          </a:lnRef>
+          <a:fillRef idx="3">
+            <a:schemeClr val="accent1"/>
+          </a:fillRef>
+          <a:effectRef idx="2">
+            <a:schemeClr val="accent1"/>
+          </a:effectRef>
+          <a:fontRef idx="minor">
+            <a:schemeClr val="lt1"/>
+          </a:fontRef>
+        </p:style>
+        <p:txBody>
+          <a:bodyPr rtlCol="0" anchor="ctr"/>
+          <a:lstStyle/>
+          <a:p>
+            <a:pPr algn="ctr"/>
+          </a:p>
+        </p:txBody>
+      </p:sp>
+      <p:sp>
+        <p:nvSpPr>
+          <p:cNvPr id="6" name="TextBox 5"/>
+          <p:cNvSpPr txBox="1"/>
+          <p:nvPr/>
+        </p:nvSpPr>
+        <p:spPr>
+          <a:xfrm>
+            <a:off x="411480" y="6473952"/>
+            <a:ext cx="4114800" cy="292608"/>
+          </a:xfrm>
+          <a:prstGeom prst="rect">
+            <a:avLst/>
+          </a:prstGeom>
+          <a:noFill/>
+        </p:spPr>
+        <p:txBody>
+          <a:bodyPr wrap="none">
+            <a:spAutoFit/>
+          </a:bodyPr>
+          <a:lstStyle/>
+          <a:p>
+            <a:pPr algn="r" a:rtl="1">
+              <a:defRPr sz="1000" b="0">
+                <a:solidFill>
+                  <a:srgbClr val="8C8C8C"/>
+                </a:solidFill>
+                <a:latin typeface="Vazir"/>
+              </a:defRPr>
+            </a:pPr>
+            <a:r>
+              <a:t>پایگاه داده پیشرفته | سید علی زین الدینی</a:t>
+            </a:r>
+          </a:p>
+        </p:txBody>
+      </p:sp>
+      <p:sp>
+        <p:nvSpPr>
+          <p:cNvPr id="7" name="TextBox 6"/>
+          <p:cNvSpPr txBox="1"/>
+          <p:nvPr/>
+        </p:nvSpPr>
+        <p:spPr>
+          <a:xfrm>
+            <a:off x="3657600" y="6446520"/>
+            <a:ext cx="1828800" cy="320040"/>
+          </a:xfrm>
+          <a:prstGeom prst="rect">
+            <a:avLst/>
+          </a:prstGeom>
+          <a:noFill/>
+        </p:spPr>
+        <p:txBody>
+          <a:bodyPr wrap="none">
+            <a:spAutoFit/>
+          </a:bodyPr>
+          <a:lstStyle/>
+          <a:p>
+            <a:pPr algn="ctr" a:rtl="1">
+              <a:defRPr sz="1100" b="1">
+                <a:solidFill>
+                  <a:srgbClr val="6E6E6E"/>
+                </a:solidFill>
+                <a:latin typeface="Vazir"/>
+              </a:defRPr>
+            </a:pPr>
+            <a:r>
+              <a:t>صفحه 9 از 39</a:t>
+            </a:r>
+          </a:p>
+        </p:txBody>
+      </p:sp>
+      <p:sp>
+        <p:nvSpPr>
+          <p:cNvPr id="8" name="TextBox 7"/>
+          <p:cNvSpPr txBox="1"/>
+          <p:nvPr/>
+        </p:nvSpPr>
+        <p:spPr>
+          <a:xfrm>
+            <a:off x="7315200" y="6473952"/>
+            <a:ext cx="1371600" cy="292608"/>
+          </a:xfrm>
+          <a:prstGeom prst="rect">
+            <a:avLst/>
+          </a:prstGeom>
+          <a:noFill/>
+        </p:spPr>
+        <p:txBody>
+          <a:bodyPr wrap="none">
+            <a:spAutoFit/>
+          </a:bodyPr>
+          <a:lstStyle/>
+          <a:p>
+            <a:pPr algn="l" a:rtl="1">
+              <a:defRPr sz="1000" b="0">
+                <a:solidFill>
+                  <a:srgbClr val="8C8C8C"/>
+                </a:solidFill>
+                <a:latin typeface="Vazir"/>
+              </a:defRPr>
+            </a:pPr>
+            <a:r>
+              <a:t>9</a:t>
             </a:r>
           </a:p>
         </p:txBody>
